--- a/promo/dl/brochure/bookie-summary-1p-edit.pptx
+++ b/promo/dl/brochure/bookie-summary-1p-edit.pptx
@@ -2040,7 +2040,7 @@
                   <a:srgbClr val="101D42"/>
                 </a:solidFill>
                 <a:latin typeface="Noto Serif KR Black" pitchFamily="34" charset="0"/>
-                <a:ea typeface="Noto Serif KR Black" pitchFamily="34" charset="-122"/>
+                <a:ea typeface="Noto Serif KR Black" pitchFamily="34" charset="-127"/>
                 <a:cs typeface="Noto Serif KR Black" pitchFamily="34" charset="-120"/>
               </a:rPr>
               <a:t>AI 시대,</a:t>
@@ -2082,7 +2082,7 @@
                   <a:srgbClr val="101D42"/>
                 </a:solidFill>
                 <a:latin typeface="Noto Serif KR Black" pitchFamily="34" charset="0"/>
-                <a:ea typeface="Noto Serif KR Black" pitchFamily="34" charset="-122"/>
+                <a:ea typeface="Noto Serif KR Black" pitchFamily="34" charset="-127"/>
                 <a:cs typeface="Noto Serif KR Black" pitchFamily="34" charset="-120"/>
               </a:rPr>
               <a:t>독서는 모든 학습의</a:t>
@@ -2124,7 +2124,7 @@
                   <a:srgbClr val="15543C"/>
                 </a:solidFill>
                 <a:latin typeface="Noto Serif KR Black" pitchFamily="34" charset="0"/>
-                <a:ea typeface="Noto Serif KR Black" pitchFamily="34" charset="-122"/>
+                <a:ea typeface="Noto Serif KR Black" pitchFamily="34" charset="-127"/>
                 <a:cs typeface="Noto Serif KR Black" pitchFamily="34" charset="-120"/>
               </a:rPr>
               <a:t>기본</a:t>
@@ -2141,7 +2141,7 @@
                   <a:srgbClr val="101D42"/>
                 </a:solidFill>
                 <a:latin typeface="Noto Serif KR Black" pitchFamily="34" charset="0"/>
-                <a:ea typeface="Noto Serif KR Black" pitchFamily="34" charset="-122"/>
+                <a:ea typeface="Noto Serif KR Black" pitchFamily="34" charset="-127"/>
                 <a:cs typeface="Noto Serif KR Black" pitchFamily="34" charset="-120"/>
               </a:rPr>
               <a:t>입니다.</a:t>
@@ -2183,7 +2183,7 @@
                   <a:srgbClr val="101D42"/>
                 </a:solidFill>
                 <a:latin typeface="Noto Sans KR" pitchFamily="34" charset="0"/>
-                <a:ea typeface="Noto Sans KR" pitchFamily="34" charset="-122"/>
+                <a:ea typeface="Noto Sans KR" pitchFamily="34" charset="-127"/>
                 <a:cs typeface="Noto Sans KR" pitchFamily="34" charset="-120"/>
               </a:rPr>
               <a:t>AI가 답을 내놓아도,</a:t>
@@ -2206,7 +2206,7 @@
                   <a:srgbClr val="FFF0AD"/>
                 </a:highlight>
                 <a:latin typeface="Noto Sans KR" pitchFamily="34" charset="0"/>
-                <a:ea typeface="Noto Sans KR" pitchFamily="34" charset="-122"/>
+                <a:ea typeface="Noto Sans KR" pitchFamily="34" charset="-127"/>
                 <a:cs typeface="Noto Sans KR" pitchFamily="34" charset="-120"/>
               </a:rPr>
               <a:t>읽고 이해하고 판단하는 힘</a:t>
@@ -2223,7 +2223,7 @@
                   <a:srgbClr val="101D42"/>
                 </a:solidFill>
                 <a:latin typeface="Noto Sans KR" pitchFamily="34" charset="0"/>
-                <a:ea typeface="Noto Sans KR" pitchFamily="34" charset="-122"/>
+                <a:ea typeface="Noto Sans KR" pitchFamily="34" charset="-127"/>
                 <a:cs typeface="Noto Sans KR" pitchFamily="34" charset="-120"/>
               </a:rPr>
               <a:t>은 학생 안에 있어야 합니다.</a:t>
@@ -2265,7 +2265,7 @@
                   <a:srgbClr val="15543C"/>
                 </a:solidFill>
                 <a:latin typeface="Noto Serif KR Black" pitchFamily="34" charset="0"/>
-                <a:ea typeface="Noto Serif KR Black" pitchFamily="34" charset="-122"/>
+                <a:ea typeface="Noto Serif KR Black" pitchFamily="34" charset="-127"/>
                 <a:cs typeface="Noto Serif KR Black" pitchFamily="34" charset="-120"/>
               </a:rPr>
               <a:t>학습의 기본</a:t>
@@ -2307,7 +2307,7 @@
                   <a:srgbClr val="15543C"/>
                 </a:solidFill>
                 <a:latin typeface="Noto Serif KR Black" pitchFamily="34" charset="0"/>
-                <a:ea typeface="Noto Serif KR Black" pitchFamily="34" charset="-122"/>
+                <a:ea typeface="Noto Serif KR Black" pitchFamily="34" charset="-127"/>
                 <a:cs typeface="Noto Serif KR Black" pitchFamily="34" charset="-120"/>
               </a:rPr>
               <a:t>사고의 기본</a:t>
@@ -2349,7 +2349,7 @@
                   <a:srgbClr val="15543C"/>
                 </a:solidFill>
                 <a:latin typeface="Noto Serif KR Black" pitchFamily="34" charset="0"/>
-                <a:ea typeface="Noto Serif KR Black" pitchFamily="34" charset="-122"/>
+                <a:ea typeface="Noto Serif KR Black" pitchFamily="34" charset="-127"/>
                 <a:cs typeface="Noto Serif KR Black" pitchFamily="34" charset="-120"/>
               </a:rPr>
               <a:t>삶의 기본</a:t>
@@ -2391,7 +2391,7 @@
                   <a:srgbClr val="101D42"/>
                 </a:solidFill>
                 <a:latin typeface="Noto Sans KR" pitchFamily="34" charset="0"/>
-                <a:ea typeface="Noto Sans KR" pitchFamily="34" charset="-122"/>
+                <a:ea typeface="Noto Sans KR" pitchFamily="34" charset="-127"/>
                 <a:cs typeface="Noto Sans KR" pitchFamily="34" charset="-120"/>
               </a:rPr>
               <a:t>낱말과 문장의 뜻을 이해하고</a:t>
@@ -2414,7 +2414,7 @@
                   <a:srgbClr val="FFF0AD"/>
                 </a:highlight>
                 <a:latin typeface="Noto Sans KR" pitchFamily="34" charset="0"/>
-                <a:ea typeface="Noto Sans KR" pitchFamily="34" charset="-122"/>
+                <a:ea typeface="Noto Sans KR" pitchFamily="34" charset="-127"/>
                 <a:cs typeface="Noto Sans KR" pitchFamily="34" charset="-120"/>
               </a:rPr>
               <a:t>모든 교과의 학습</a:t>
@@ -2431,7 +2431,7 @@
                   <a:srgbClr val="101D42"/>
                 </a:solidFill>
                 <a:latin typeface="Noto Sans KR" pitchFamily="34" charset="0"/>
-                <a:ea typeface="Noto Sans KR" pitchFamily="34" charset="-122"/>
+                <a:ea typeface="Noto Sans KR" pitchFamily="34" charset="-127"/>
                 <a:cs typeface="Noto Sans KR" pitchFamily="34" charset="-120"/>
               </a:rPr>
               <a:t>을 이어 가는 힘</a:t>
@@ -2473,7 +2473,7 @@
                   <a:srgbClr val="101D42"/>
                 </a:solidFill>
                 <a:latin typeface="Noto Sans KR" pitchFamily="34" charset="0"/>
-                <a:ea typeface="Noto Sans KR" pitchFamily="34" charset="-122"/>
+                <a:ea typeface="Noto Sans KR" pitchFamily="34" charset="-127"/>
                 <a:cs typeface="Noto Sans KR" pitchFamily="34" charset="-120"/>
               </a:rPr>
               <a:t>근거를 찾고 질문하며</a:t>
@@ -2493,7 +2493,7 @@
                   <a:srgbClr val="101D42"/>
                 </a:solidFill>
                 <a:latin typeface="Noto Sans KR" pitchFamily="34" charset="0"/>
-                <a:ea typeface="Noto Sans KR" pitchFamily="34" charset="-122"/>
+                <a:ea typeface="Noto Sans KR" pitchFamily="34" charset="-127"/>
                 <a:cs typeface="Noto Sans KR" pitchFamily="34" charset="-120"/>
               </a:rPr>
               <a:t>자기 생각을 세우는 힘</a:t>
@@ -2535,7 +2535,7 @@
                   <a:srgbClr val="101D42"/>
                 </a:solidFill>
                 <a:latin typeface="Noto Sans KR" pitchFamily="34" charset="0"/>
-                <a:ea typeface="Noto Sans KR" pitchFamily="34" charset="-122"/>
+                <a:ea typeface="Noto Sans KR" pitchFamily="34" charset="-127"/>
                 <a:cs typeface="Noto Sans KR" pitchFamily="34" charset="-120"/>
               </a:rPr>
               <a:t>책 속의 다른 삶을 만나</a:t>
@@ -2555,7 +2555,7 @@
                   <a:srgbClr val="101D42"/>
                 </a:solidFill>
                 <a:latin typeface="Noto Sans KR" pitchFamily="34" charset="0"/>
-                <a:ea typeface="Noto Sans KR" pitchFamily="34" charset="-122"/>
+                <a:ea typeface="Noto Sans KR" pitchFamily="34" charset="-127"/>
                 <a:cs typeface="Noto Sans KR" pitchFamily="34" charset="-120"/>
               </a:rPr>
               <a:t>나와 타인을 이해하는 힘</a:t>
@@ -2597,7 +2597,7 @@
                   <a:srgbClr val="101D42"/>
                 </a:solidFill>
                 <a:latin typeface="Noto Sans KR" pitchFamily="34" charset="0"/>
-                <a:ea typeface="Noto Sans KR" pitchFamily="34" charset="-122"/>
+                <a:ea typeface="Noto Sans KR" pitchFamily="34" charset="-127"/>
                 <a:cs typeface="Noto Sans KR" pitchFamily="34" charset="-120"/>
               </a:rPr>
               <a:t>이야기 이해 과정에서는 전전두엽을 포함한 여러 뇌 영역이 함께 활동합니다.*</a:t>
@@ -2639,7 +2639,7 @@
                   <a:srgbClr val="101D42"/>
                 </a:solidFill>
                 <a:latin typeface="Noto Serif KR Black" pitchFamily="34" charset="0"/>
-                <a:ea typeface="Noto Serif KR Black" pitchFamily="34" charset="-122"/>
+                <a:ea typeface="Noto Serif KR Black" pitchFamily="34" charset="-127"/>
                 <a:cs typeface="Noto Serif KR Black" pitchFamily="34" charset="-120"/>
               </a:rPr>
               <a:t>기본이 쌓일 시간이 필요합니다</a:t>
@@ -2681,7 +2681,7 @@
                   <a:srgbClr val="101D42"/>
                 </a:solidFill>
                 <a:latin typeface="Noto Sans KR" pitchFamily="34" charset="0"/>
-                <a:ea typeface="Noto Sans KR" pitchFamily="34" charset="-122"/>
+                <a:ea typeface="Noto Sans KR" pitchFamily="34" charset="-127"/>
                 <a:cs typeface="Noto Sans KR" pitchFamily="34" charset="-120"/>
               </a:rPr>
               <a:t>학교에서 마주한 현실은, 아이들이 </a:t>
@@ -2701,7 +2701,7 @@
                   <a:srgbClr val="FFF0AD"/>
                 </a:highlight>
                 <a:latin typeface="Noto Sans KR" pitchFamily="34" charset="0"/>
-                <a:ea typeface="Noto Sans KR" pitchFamily="34" charset="-122"/>
+                <a:ea typeface="Noto Sans KR" pitchFamily="34" charset="-127"/>
                 <a:cs typeface="Noto Sans KR" pitchFamily="34" charset="-120"/>
               </a:rPr>
               <a:t>책을 충분히 읽지 않는다는</a:t>
@@ -2718,7 +2718,7 @@
                   <a:srgbClr val="101D42"/>
                 </a:solidFill>
                 <a:latin typeface="Noto Sans KR" pitchFamily="34" charset="0"/>
-                <a:ea typeface="Noto Sans KR" pitchFamily="34" charset="-122"/>
+                <a:ea typeface="Noto Sans KR" pitchFamily="34" charset="-127"/>
                 <a:cs typeface="Noto Sans KR" pitchFamily="34" charset="-120"/>
               </a:rPr>
               <a:t> 것이었습니다. </a:t>
@@ -2738,7 +2738,7 @@
                   <a:srgbClr val="FFF0AD"/>
                 </a:highlight>
                 <a:latin typeface="Noto Sans KR" pitchFamily="34" charset="0"/>
-                <a:ea typeface="Noto Sans KR" pitchFamily="34" charset="-122"/>
+                <a:ea typeface="Noto Sans KR" pitchFamily="34" charset="-127"/>
                 <a:cs typeface="Noto Sans KR" pitchFamily="34" charset="-120"/>
               </a:rPr>
               <a:t>낱말 · 언어의 장벽</a:t>
@@ -2755,7 +2755,7 @@
                   <a:srgbClr val="101D42"/>
                 </a:solidFill>
                 <a:latin typeface="Noto Sans KR" pitchFamily="34" charset="0"/>
-                <a:ea typeface="Noto Sans KR" pitchFamily="34" charset="-122"/>
+                <a:ea typeface="Noto Sans KR" pitchFamily="34" charset="-127"/>
                 <a:cs typeface="Noto Sans KR" pitchFamily="34" charset="-120"/>
               </a:rPr>
               <a:t>과 읽기</a:t>
@@ -2775,7 +2775,7 @@
                   <a:srgbClr val="101D42"/>
                 </a:solidFill>
                 <a:latin typeface="Noto Sans KR" pitchFamily="34" charset="0"/>
-                <a:ea typeface="Noto Sans KR" pitchFamily="34" charset="-122"/>
+                <a:ea typeface="Noto Sans KR" pitchFamily="34" charset="-127"/>
                 <a:cs typeface="Noto Sans KR" pitchFamily="34" charset="-120"/>
               </a:rPr>
               <a:t>수준 차이, </a:t>
@@ -2795,7 +2795,7 @@
                   <a:srgbClr val="FFF0AD"/>
                 </a:highlight>
                 <a:latin typeface="Noto Sans KR" pitchFamily="34" charset="0"/>
-                <a:ea typeface="Noto Sans KR" pitchFamily="34" charset="-122"/>
+                <a:ea typeface="Noto Sans KR" pitchFamily="34" charset="-127"/>
                 <a:cs typeface="Noto Sans KR" pitchFamily="34" charset="-120"/>
               </a:rPr>
               <a:t>개별 지도와 수업 준비</a:t>
@@ -2812,7 +2812,7 @@
                   <a:srgbClr val="101D42"/>
                 </a:solidFill>
                 <a:latin typeface="Noto Sans KR" pitchFamily="34" charset="0"/>
-                <a:ea typeface="Noto Sans KR" pitchFamily="34" charset="-122"/>
+                <a:ea typeface="Noto Sans KR" pitchFamily="34" charset="-127"/>
                 <a:cs typeface="Noto Sans KR" pitchFamily="34" charset="-120"/>
               </a:rPr>
               <a:t>의 부담이 있습니다.</a:t>
@@ -2854,7 +2854,7 @@
                   <a:srgbClr val="D59B32"/>
                 </a:solidFill>
                 <a:latin typeface="Noto Sans KR" pitchFamily="34" charset="0"/>
-                <a:ea typeface="Noto Sans KR" pitchFamily="34" charset="-122"/>
+                <a:ea typeface="Noto Sans KR" pitchFamily="34" charset="-127"/>
                 <a:cs typeface="Noto Sans KR" pitchFamily="34" charset="-120"/>
               </a:rPr>
               <a:t>→</a:t>
@@ -2896,7 +2896,7 @@
                   <a:srgbClr val="D59B32"/>
                 </a:solidFill>
                 <a:latin typeface="Noto Sans KR" pitchFamily="34" charset="0"/>
-                <a:ea typeface="Noto Sans KR" pitchFamily="34" charset="-122"/>
+                <a:ea typeface="Noto Sans KR" pitchFamily="34" charset="-127"/>
                 <a:cs typeface="Noto Sans KR" pitchFamily="34" charset="-120"/>
               </a:rPr>
               <a:t>→</a:t>
@@ -2938,7 +2938,7 @@
                   <a:srgbClr val="101D42"/>
                 </a:solidFill>
                 <a:latin typeface="Noto Sans KR" pitchFamily="34" charset="0"/>
-                <a:ea typeface="Noto Sans KR" pitchFamily="34" charset="-122"/>
+                <a:ea typeface="Noto Sans KR" pitchFamily="34" charset="-127"/>
                 <a:cs typeface="Noto Sans KR" pitchFamily="34" charset="-120"/>
               </a:rPr>
               <a:t>모르는 낱말</a:t>
@@ -2980,7 +2980,7 @@
                   <a:srgbClr val="101D42"/>
                 </a:solidFill>
                 <a:latin typeface="Noto Sans KR" pitchFamily="34" charset="0"/>
-                <a:ea typeface="Noto Sans KR" pitchFamily="34" charset="-122"/>
+                <a:ea typeface="Noto Sans KR" pitchFamily="34" charset="-127"/>
                 <a:cs typeface="Noto Sans KR" pitchFamily="34" charset="-120"/>
               </a:rPr>
               <a:t>이해의 중단</a:t>
@@ -3022,7 +3022,7 @@
                   <a:srgbClr val="101D42"/>
                 </a:solidFill>
                 <a:latin typeface="Noto Sans KR" pitchFamily="34" charset="0"/>
-                <a:ea typeface="Noto Sans KR" pitchFamily="34" charset="-122"/>
+                <a:ea typeface="Noto Sans KR" pitchFamily="34" charset="-127"/>
                 <a:cs typeface="Noto Sans KR" pitchFamily="34" charset="-120"/>
               </a:rPr>
               <a:t>읽기의 포기</a:t>
@@ -3064,7 +3064,7 @@
                   <a:srgbClr val="15543C"/>
                 </a:solidFill>
                 <a:latin typeface="Noto Serif KR Black" pitchFamily="34" charset="0"/>
-                <a:ea typeface="Noto Serif KR Black" pitchFamily="34" charset="-122"/>
+                <a:ea typeface="Noto Serif KR Black" pitchFamily="34" charset="-127"/>
                 <a:cs typeface="Noto Serif KR Black" pitchFamily="34" charset="-120"/>
               </a:rPr>
               <a:t>초등교사들이 뜻을 모아 만들었습니다</a:t>
@@ -3106,7 +3106,7 @@
                   <a:srgbClr val="101D42"/>
                 </a:solidFill>
                 <a:latin typeface="Noto Sans KR" pitchFamily="34" charset="0"/>
-                <a:ea typeface="Noto Sans KR" pitchFamily="34" charset="-122"/>
+                <a:ea typeface="Noto Sans KR" pitchFamily="34" charset="-127"/>
                 <a:cs typeface="Noto Sans KR" pitchFamily="34" charset="-120"/>
               </a:rPr>
               <a:t>부기는 </a:t>
@@ -3126,7 +3126,7 @@
                   <a:srgbClr val="FFF0AD"/>
                 </a:highlight>
                 <a:latin typeface="Noto Sans KR" pitchFamily="34" charset="0"/>
-                <a:ea typeface="Noto Sans KR" pitchFamily="34" charset="-122"/>
+                <a:ea typeface="Noto Sans KR" pitchFamily="34" charset="-127"/>
                 <a:cs typeface="Noto Sans KR" pitchFamily="34" charset="-120"/>
               </a:rPr>
               <a:t>정답 대신 질문</a:t>
@@ -3143,7 +3143,7 @@
                   <a:srgbClr val="101D42"/>
                 </a:solidFill>
                 <a:latin typeface="Noto Sans KR" pitchFamily="34" charset="0"/>
-                <a:ea typeface="Noto Sans KR" pitchFamily="34" charset="-122"/>
+                <a:ea typeface="Noto Sans KR" pitchFamily="34" charset="-127"/>
                 <a:cs typeface="Noto Sans KR" pitchFamily="34" charset="-120"/>
               </a:rPr>
               <a:t>을 건넵니다.</a:t>
@@ -3185,7 +3185,7 @@
                   <a:srgbClr val="101D42"/>
                 </a:solidFill>
                 <a:latin typeface="Noto Sans KR" pitchFamily="34" charset="0"/>
-                <a:ea typeface="Noto Sans KR" pitchFamily="34" charset="-122"/>
+                <a:ea typeface="Noto Sans KR" pitchFamily="34" charset="-127"/>
                 <a:cs typeface="Noto Sans KR" pitchFamily="34" charset="-120"/>
               </a:rPr>
               <a:t>학교에서 시범 사용을 통해 </a:t>
@@ -3205,7 +3205,7 @@
                   <a:srgbClr val="FFF0AD"/>
                 </a:highlight>
                 <a:latin typeface="Noto Sans KR" pitchFamily="34" charset="0"/>
-                <a:ea typeface="Noto Sans KR" pitchFamily="34" charset="-122"/>
+                <a:ea typeface="Noto Sans KR" pitchFamily="34" charset="-127"/>
                 <a:cs typeface="Noto Sans KR" pitchFamily="34" charset="-120"/>
               </a:rPr>
               <a:t>계속 개선하고 발전</a:t>
@@ -3222,7 +3222,7 @@
                   <a:srgbClr val="101D42"/>
                 </a:solidFill>
                 <a:latin typeface="Noto Sans KR" pitchFamily="34" charset="0"/>
-                <a:ea typeface="Noto Sans KR" pitchFamily="34" charset="-122"/>
+                <a:ea typeface="Noto Sans KR" pitchFamily="34" charset="-127"/>
                 <a:cs typeface="Noto Sans KR" pitchFamily="34" charset="-120"/>
               </a:rPr>
               <a:t>시켜 나가고 있습니다.</a:t>
@@ -3264,7 +3264,7 @@
                   <a:srgbClr val="15543C"/>
                 </a:solidFill>
                 <a:latin typeface="Noto Serif KR Black" pitchFamily="34" charset="0"/>
-                <a:ea typeface="Noto Serif KR Black" pitchFamily="34" charset="-122"/>
+                <a:ea typeface="Noto Serif KR Black" pitchFamily="34" charset="-127"/>
                 <a:cs typeface="Noto Serif KR Black" pitchFamily="34" charset="-120"/>
               </a:rPr>
               <a:t>읽기</a:t>
@@ -3306,7 +3306,7 @@
                   <a:srgbClr val="15543C"/>
                 </a:solidFill>
                 <a:latin typeface="Noto Serif KR Black" pitchFamily="34" charset="0"/>
-                <a:ea typeface="Noto Serif KR Black" pitchFamily="34" charset="-122"/>
+                <a:ea typeface="Noto Serif KR Black" pitchFamily="34" charset="-127"/>
                 <a:cs typeface="Noto Serif KR Black" pitchFamily="34" charset="-120"/>
               </a:rPr>
               <a:t>묻기</a:t>
@@ -3348,7 +3348,7 @@
                   <a:srgbClr val="15543C"/>
                 </a:solidFill>
                 <a:latin typeface="Noto Serif KR Black" pitchFamily="34" charset="0"/>
-                <a:ea typeface="Noto Serif KR Black" pitchFamily="34" charset="-122"/>
+                <a:ea typeface="Noto Serif KR Black" pitchFamily="34" charset="-127"/>
                 <a:cs typeface="Noto Serif KR Black" pitchFamily="34" charset="-120"/>
               </a:rPr>
               <a:t>표현하기</a:t>
@@ -3390,7 +3390,7 @@
                   <a:srgbClr val="15543C"/>
                 </a:solidFill>
                 <a:latin typeface="Noto Serif KR Black" pitchFamily="34" charset="0"/>
-                <a:ea typeface="Noto Serif KR Black" pitchFamily="34" charset="-122"/>
+                <a:ea typeface="Noto Serif KR Black" pitchFamily="34" charset="-127"/>
                 <a:cs typeface="Noto Serif KR Black" pitchFamily="34" charset="-120"/>
               </a:rPr>
               <a:t>모으기</a:t>
@@ -3432,7 +3432,7 @@
                   <a:srgbClr val="101D42"/>
                 </a:solidFill>
                 <a:latin typeface="Noto Sans KR" pitchFamily="34" charset="0"/>
-                <a:ea typeface="Noto Sans KR" pitchFamily="34" charset="-122"/>
+                <a:ea typeface="Noto Sans KR" pitchFamily="34" charset="-127"/>
                 <a:cs typeface="Noto Sans KR" pitchFamily="34" charset="-120"/>
               </a:rPr>
               <a:t>능동적 그림 읽기</a:t>
@@ -3452,7 +3452,7 @@
                   <a:srgbClr val="101D42"/>
                 </a:solidFill>
                 <a:latin typeface="Noto Sans KR" pitchFamily="34" charset="0"/>
-                <a:ea typeface="Noto Sans KR" pitchFamily="34" charset="-122"/>
+                <a:ea typeface="Noto Sans KR" pitchFamily="34" charset="-127"/>
                 <a:cs typeface="Noto Sans KR" pitchFamily="34" charset="-120"/>
               </a:rPr>
               <a:t>낱말 · 다국어 지원</a:t>
@@ -3494,7 +3494,7 @@
                   <a:srgbClr val="101D42"/>
                 </a:solidFill>
                 <a:latin typeface="Noto Sans KR" pitchFamily="34" charset="0"/>
-                <a:ea typeface="Noto Sans KR" pitchFamily="34" charset="-122"/>
+                <a:ea typeface="Noto Sans KR" pitchFamily="34" charset="-127"/>
                 <a:cs typeface="Noto Sans KR" pitchFamily="34" charset="-120"/>
               </a:rPr>
               <a:t>캐릭터와의 대화</a:t>
@@ -3514,7 +3514,7 @@
                   <a:srgbClr val="101D42"/>
                 </a:solidFill>
                 <a:latin typeface="Noto Sans KR" pitchFamily="34" charset="0"/>
-                <a:ea typeface="Noto Sans KR" pitchFamily="34" charset="-122"/>
+                <a:ea typeface="Noto Sans KR" pitchFamily="34" charset="-127"/>
                 <a:cs typeface="Noto Sans KR" pitchFamily="34" charset="-120"/>
               </a:rPr>
               <a:t>생각한 까닭을 묻는 질문</a:t>
@@ -3556,7 +3556,7 @@
                   <a:srgbClr val="101D42"/>
                 </a:solidFill>
                 <a:latin typeface="Noto Sans KR" pitchFamily="34" charset="0"/>
-                <a:ea typeface="Noto Sans KR" pitchFamily="34" charset="-122"/>
+                <a:ea typeface="Noto Sans KR" pitchFamily="34" charset="-127"/>
                 <a:cs typeface="Noto Sans KR" pitchFamily="34" charset="-120"/>
               </a:rPr>
               <a:t>다양한 독후활동</a:t>
@@ -3576,7 +3576,7 @@
                   <a:srgbClr val="101D42"/>
                 </a:solidFill>
                 <a:latin typeface="Noto Sans KR" pitchFamily="34" charset="0"/>
-                <a:ea typeface="Noto Sans KR" pitchFamily="34" charset="-122"/>
+                <a:ea typeface="Noto Sans KR" pitchFamily="34" charset="-127"/>
                 <a:cs typeface="Noto Sans KR" pitchFamily="34" charset="-120"/>
               </a:rPr>
               <a:t>글 · 그림 · 편지로 내 생각 표현</a:t>
@@ -3618,7 +3618,7 @@
                   <a:srgbClr val="101D42"/>
                 </a:solidFill>
                 <a:latin typeface="Noto Sans KR" pitchFamily="34" charset="0"/>
-                <a:ea typeface="Noto Sans KR" pitchFamily="34" charset="-122"/>
+                <a:ea typeface="Noto Sans KR" pitchFamily="34" charset="-127"/>
                 <a:cs typeface="Noto Sans KR" pitchFamily="34" charset="-120"/>
               </a:rPr>
               <a:t>독서 기록 자산</a:t>
@@ -3638,7 +3638,7 @@
                   <a:srgbClr val="101D42"/>
                 </a:solidFill>
                 <a:latin typeface="Noto Sans KR" pitchFamily="34" charset="0"/>
-                <a:ea typeface="Noto Sans KR" pitchFamily="34" charset="-122"/>
+                <a:ea typeface="Noto Sans KR" pitchFamily="34" charset="-127"/>
                 <a:cs typeface="Noto Sans KR" pitchFamily="34" charset="-120"/>
               </a:rPr>
               <a:t>무엇을 느끼고 달라졌는지 기록</a:t>
@@ -3680,7 +3680,7 @@
                   <a:srgbClr val="15543C"/>
                 </a:solidFill>
                 <a:latin typeface="Noto Sans KR" pitchFamily="34" charset="0"/>
-                <a:ea typeface="Noto Sans KR" pitchFamily="34" charset="-122"/>
+                <a:ea typeface="Noto Sans KR" pitchFamily="34" charset="-127"/>
                 <a:cs typeface="Noto Sans KR" pitchFamily="34" charset="-120"/>
               </a:rPr>
               <a:t>72학급</a:t>
@@ -3722,7 +3722,7 @@
                   <a:srgbClr val="15543C"/>
                 </a:solidFill>
                 <a:latin typeface="Noto Sans KR" pitchFamily="34" charset="0"/>
-                <a:ea typeface="Noto Sans KR" pitchFamily="34" charset="-122"/>
+                <a:ea typeface="Noto Sans KR" pitchFamily="34" charset="-127"/>
                 <a:cs typeface="Noto Sans KR" pitchFamily="34" charset="-120"/>
               </a:rPr>
               <a:t>1,196명</a:t>
@@ -3764,7 +3764,7 @@
                   <a:srgbClr val="15543C"/>
                 </a:solidFill>
                 <a:latin typeface="Noto Sans KR" pitchFamily="34" charset="0"/>
-                <a:ea typeface="Noto Sans KR" pitchFamily="34" charset="-122"/>
+                <a:ea typeface="Noto Sans KR" pitchFamily="34" charset="-127"/>
                 <a:cs typeface="Noto Sans KR" pitchFamily="34" charset="-120"/>
               </a:rPr>
               <a:t>26,924건</a:t>
@@ -3806,7 +3806,7 @@
                   <a:srgbClr val="15543C"/>
                 </a:solidFill>
                 <a:latin typeface="Noto Sans KR" pitchFamily="34" charset="0"/>
-                <a:ea typeface="Noto Sans KR" pitchFamily="34" charset="-122"/>
+                <a:ea typeface="Noto Sans KR" pitchFamily="34" charset="-127"/>
                 <a:cs typeface="Noto Sans KR" pitchFamily="34" charset="-120"/>
               </a:rPr>
               <a:t>1,816건</a:t>
@@ -3848,7 +3848,7 @@
                   <a:srgbClr val="101D42"/>
                 </a:solidFill>
                 <a:latin typeface="Noto Sans KR" pitchFamily="34" charset="0"/>
-                <a:ea typeface="Noto Sans KR" pitchFamily="34" charset="-122"/>
+                <a:ea typeface="Noto Sans KR" pitchFamily="34" charset="-127"/>
                 <a:cs typeface="Noto Sans KR" pitchFamily="34" charset="-120"/>
               </a:rPr>
               <a:t>운영 학급</a:t>
@@ -3890,7 +3890,7 @@
                   <a:srgbClr val="101D42"/>
                 </a:solidFill>
                 <a:latin typeface="Noto Sans KR" pitchFamily="34" charset="0"/>
-                <a:ea typeface="Noto Sans KR" pitchFamily="34" charset="-122"/>
+                <a:ea typeface="Noto Sans KR" pitchFamily="34" charset="-127"/>
                 <a:cs typeface="Noto Sans KR" pitchFamily="34" charset="-120"/>
               </a:rPr>
               <a:t>실제 사용 학생</a:t>
@@ -3932,7 +3932,7 @@
                   <a:srgbClr val="101D42"/>
                 </a:solidFill>
                 <a:latin typeface="Noto Sans KR" pitchFamily="34" charset="0"/>
-                <a:ea typeface="Noto Sans KR" pitchFamily="34" charset="-122"/>
+                <a:ea typeface="Noto Sans KR" pitchFamily="34" charset="-127"/>
                 <a:cs typeface="Noto Sans KR" pitchFamily="34" charset="-120"/>
               </a:rPr>
               <a:t>완독 기록</a:t>
@@ -3974,7 +3974,7 @@
                   <a:srgbClr val="101D42"/>
                 </a:solidFill>
                 <a:latin typeface="Noto Sans KR" pitchFamily="34" charset="0"/>
-                <a:ea typeface="Noto Sans KR" pitchFamily="34" charset="-122"/>
+                <a:ea typeface="Noto Sans KR" pitchFamily="34" charset="-127"/>
                 <a:cs typeface="Noto Sans KR" pitchFamily="34" charset="-120"/>
               </a:rPr>
               <a:t>독후활동 제출</a:t>
@@ -4016,7 +4016,7 @@
                   <a:srgbClr val="101D42"/>
                 </a:solidFill>
                 <a:latin typeface="Noto Sans KR" pitchFamily="34" charset="0"/>
-                <a:ea typeface="Noto Sans KR" pitchFamily="34" charset="-122"/>
+                <a:ea typeface="Noto Sans KR" pitchFamily="34" charset="-127"/>
                 <a:cs typeface="Noto Sans KR" pitchFamily="34" charset="-120"/>
               </a:rPr>
               <a:t>2026년 9월 20일부터 10월 21일까지 한 달 시범 사용 결과</a:t>
@@ -4058,7 +4058,7 @@
                   <a:srgbClr val="101D42"/>
                 </a:solidFill>
                 <a:latin typeface="Noto Serif KR Black" pitchFamily="34" charset="0"/>
-                <a:ea typeface="Noto Serif KR Black" pitchFamily="34" charset="-122"/>
+                <a:ea typeface="Noto Serif KR Black" pitchFamily="34" charset="-127"/>
                 <a:cs typeface="Noto Serif KR Black" pitchFamily="34" charset="-120"/>
               </a:rPr>
               <a:t>경남의 모든 학생이 읽고 생각하는 기본을 갖추도록,</a:t>
@@ -4078,7 +4078,7 @@
                   <a:srgbClr val="15543C"/>
                 </a:solidFill>
                 <a:latin typeface="Noto Serif KR Black" pitchFamily="34" charset="0"/>
-                <a:ea typeface="Noto Serif KR Black" pitchFamily="34" charset="-122"/>
+                <a:ea typeface="Noto Serif KR Black" pitchFamily="34" charset="-127"/>
                 <a:cs typeface="Noto Serif KR Black" pitchFamily="34" charset="-120"/>
               </a:rPr>
               <a:t>학교 독서교육의 지속적인 운영을 지원해 주십시오.</a:t>
@@ -4120,7 +4120,7 @@
                   <a:srgbClr val="43516A"/>
                 </a:solidFill>
                 <a:latin typeface="Noto Sans KR" pitchFamily="34" charset="0"/>
-                <a:ea typeface="Noto Sans KR" pitchFamily="34" charset="-122"/>
+                <a:ea typeface="Noto Sans KR" pitchFamily="34" charset="-127"/>
                 <a:cs typeface="Noto Sans KR" pitchFamily="34" charset="-120"/>
               </a:rPr>
               <a:t>* 출처: Yarkoni et al. (2008). NeuroImage, 41(4), 1408-1425.</a:t>

--- a/promo/dl/brochure/bookie-summary-1p-edit.pptx
+++ b/promo/dl/brochure/bookie-summary-1p-edit.pptx
@@ -1,110 +1,110 @@
 
 <file path=ppt/presentation.xml><?xml version="1.0" encoding="utf-8"?>
-<p:presentation xmlns:a="http://schemas.openxmlformats.org/drawingml/2006/main" xmlns:r="http://schemas.openxmlformats.org/officeDocument/2006/relationships" xmlns:p="http://schemas.openxmlformats.org/presentationml/2006/main" saveSubsetFonts="1" autoCompressPictures="0">
-  <p:sldMasterIdLst>
-    <p:sldMasterId id="2147483648" r:id="rId1"/>
-  </p:sldMasterIdLst>
-  <p:sldIdLst>
-    <p:sldId id="256" r:id="rId2"/>
-  </p:sldIdLst>
-  <p:notesMasterIdLst>
-    <p:notesMasterId r:id="rId3"/>
-  </p:notesMasterIdLst>
-  <p:sldSz cx="7560005" cy="10692003"/>
-  <p:notesSz cx="10692003" cy="7560005"/>
-  <p:defaultTextStyle>
-    <a:lvl1pPr marL="0" algn="l" defTabSz="914400" rtl="0" eaLnBrk="1" latinLnBrk="0" hangingPunct="1">
-      <a:defRPr sz="1800" kern="1200">
-        <a:solidFill>
-          <a:schemeClr val="tx1"/>
-        </a:solidFill>
-        <a:latin typeface="+mn-lt"/>
-        <a:ea typeface="+mn-ea"/>
-        <a:cs typeface="+mn-cs"/>
-      </a:defRPr>
-    </a:lvl1pPr>
-    <a:lvl2pPr marL="457200" algn="l" defTabSz="914400" rtl="0" eaLnBrk="1" latinLnBrk="0" hangingPunct="1">
-      <a:defRPr sz="1800" kern="1200">
-        <a:solidFill>
-          <a:schemeClr val="tx1"/>
-        </a:solidFill>
-        <a:latin typeface="+mn-lt"/>
-        <a:ea typeface="+mn-ea"/>
-        <a:cs typeface="+mn-cs"/>
-      </a:defRPr>
-    </a:lvl2pPr>
-    <a:lvl3pPr marL="914400" algn="l" defTabSz="914400" rtl="0" eaLnBrk="1" latinLnBrk="0" hangingPunct="1">
-      <a:defRPr sz="1800" kern="1200">
-        <a:solidFill>
-          <a:schemeClr val="tx1"/>
-        </a:solidFill>
-        <a:latin typeface="+mn-lt"/>
-        <a:ea typeface="+mn-ea"/>
-        <a:cs typeface="+mn-cs"/>
-      </a:defRPr>
-    </a:lvl3pPr>
-    <a:lvl4pPr marL="1371600" algn="l" defTabSz="914400" rtl="0" eaLnBrk="1" latinLnBrk="0" hangingPunct="1">
-      <a:defRPr sz="1800" kern="1200">
-        <a:solidFill>
-          <a:schemeClr val="tx1"/>
-        </a:solidFill>
-        <a:latin typeface="+mn-lt"/>
-        <a:ea typeface="+mn-ea"/>
-        <a:cs typeface="+mn-cs"/>
-      </a:defRPr>
-    </a:lvl4pPr>
-    <a:lvl5pPr marL="1828800" algn="l" defTabSz="914400" rtl="0" eaLnBrk="1" latinLnBrk="0" hangingPunct="1">
-      <a:defRPr sz="1800" kern="1200">
-        <a:solidFill>
-          <a:schemeClr val="tx1"/>
-        </a:solidFill>
-        <a:latin typeface="+mn-lt"/>
-        <a:ea typeface="+mn-ea"/>
-        <a:cs typeface="+mn-cs"/>
-      </a:defRPr>
-    </a:lvl5pPr>
-    <a:lvl6pPr marL="2286000" algn="l" defTabSz="914400" rtl="0" eaLnBrk="1" latinLnBrk="0" hangingPunct="1">
-      <a:defRPr sz="1800" kern="1200">
-        <a:solidFill>
-          <a:schemeClr val="tx1"/>
-        </a:solidFill>
-        <a:latin typeface="+mn-lt"/>
-        <a:ea typeface="+mn-ea"/>
-        <a:cs typeface="+mn-cs"/>
-      </a:defRPr>
-    </a:lvl6pPr>
-    <a:lvl7pPr marL="2743200" algn="l" defTabSz="914400" rtl="0" eaLnBrk="1" latinLnBrk="0" hangingPunct="1">
-      <a:defRPr sz="1800" kern="1200">
-        <a:solidFill>
-          <a:schemeClr val="tx1"/>
-        </a:solidFill>
-        <a:latin typeface="+mn-lt"/>
-        <a:ea typeface="+mn-ea"/>
-        <a:cs typeface="+mn-cs"/>
-      </a:defRPr>
-    </a:lvl7pPr>
-    <a:lvl8pPr marL="3200400" algn="l" defTabSz="914400" rtl="0" eaLnBrk="1" latinLnBrk="0" hangingPunct="1">
-      <a:defRPr sz="1800" kern="1200">
-        <a:solidFill>
-          <a:schemeClr val="tx1"/>
-        </a:solidFill>
-        <a:latin typeface="+mn-lt"/>
-        <a:ea typeface="+mn-ea"/>
-        <a:cs typeface="+mn-cs"/>
-      </a:defRPr>
-    </a:lvl8pPr>
-    <a:lvl9pPr marL="3657600" algn="l" defTabSz="914400" rtl="0" eaLnBrk="1" latinLnBrk="0" hangingPunct="1">
-      <a:defRPr sz="1800" kern="1200">
-        <a:solidFill>
-          <a:schemeClr val="tx1"/>
-        </a:solidFill>
-        <a:latin typeface="+mn-lt"/>
-        <a:ea typeface="+mn-ea"/>
-        <a:cs typeface="+mn-cs"/>
-      </a:defRPr>
-    </a:lvl9pPr>
-  </p:defaultTextStyle>
-</p:presentation>
+<ns0:presentation xmlns:ns0="http://schemas.openxmlformats.org/presentationml/2006/main" xmlns:ns1="http://schemas.openxmlformats.org/officeDocument/2006/relationships" xmlns:ns2="http://schemas.openxmlformats.org/drawingml/2006/main" saveSubsetFonts="1" autoCompressPictures="0">
+  <ns0:sldMasterIdLst>
+    <ns0:sldMasterId id="2147483648" ns1:id="rId1"/>
+  </ns0:sldMasterIdLst>
+  <ns0:sldIdLst>
+    <ns0:sldId id="256" ns1:id="rId2"/>
+  </ns0:sldIdLst>
+  <ns0:notesMasterIdLst>
+    <ns0:notesMasterId ns1:id="rId7"/>
+  </ns0:notesMasterIdLst>
+  <ns0:sldSz cx="7560005" cy="10692003"/>
+  <ns0:notesSz cx="10692003" cy="7560005"/>
+  <ns0:defaultTextStyle>
+    <ns2:lvl1pPr marL="0" algn="l" defTabSz="914400" rtl="0" eaLnBrk="1" latinLnBrk="0" hangingPunct="1">
+      <ns2:defRPr sz="1800" kern="1200">
+        <ns2:solidFill>
+          <ns2:schemeClr val="tx1"/>
+        </ns2:solidFill>
+        <ns2:latin typeface="+mn-lt"/>
+        <ns2:ea typeface="+mn-ea"/>
+        <ns2:cs typeface="+mn-cs"/>
+      </ns2:defRPr>
+    </ns2:lvl1pPr>
+    <ns2:lvl2pPr marL="457200" algn="l" defTabSz="914400" rtl="0" eaLnBrk="1" latinLnBrk="0" hangingPunct="1">
+      <ns2:defRPr sz="1800" kern="1200">
+        <ns2:solidFill>
+          <ns2:schemeClr val="tx1"/>
+        </ns2:solidFill>
+        <ns2:latin typeface="+mn-lt"/>
+        <ns2:ea typeface="+mn-ea"/>
+        <ns2:cs typeface="+mn-cs"/>
+      </ns2:defRPr>
+    </ns2:lvl2pPr>
+    <ns2:lvl3pPr marL="914400" algn="l" defTabSz="914400" rtl="0" eaLnBrk="1" latinLnBrk="0" hangingPunct="1">
+      <ns2:defRPr sz="1800" kern="1200">
+        <ns2:solidFill>
+          <ns2:schemeClr val="tx1"/>
+        </ns2:solidFill>
+        <ns2:latin typeface="+mn-lt"/>
+        <ns2:ea typeface="+mn-ea"/>
+        <ns2:cs typeface="+mn-cs"/>
+      </ns2:defRPr>
+    </ns2:lvl3pPr>
+    <ns2:lvl4pPr marL="1371600" algn="l" defTabSz="914400" rtl="0" eaLnBrk="1" latinLnBrk="0" hangingPunct="1">
+      <ns2:defRPr sz="1800" kern="1200">
+        <ns2:solidFill>
+          <ns2:schemeClr val="tx1"/>
+        </ns2:solidFill>
+        <ns2:latin typeface="+mn-lt"/>
+        <ns2:ea typeface="+mn-ea"/>
+        <ns2:cs typeface="+mn-cs"/>
+      </ns2:defRPr>
+    </ns2:lvl4pPr>
+    <ns2:lvl5pPr marL="1828800" algn="l" defTabSz="914400" rtl="0" eaLnBrk="1" latinLnBrk="0" hangingPunct="1">
+      <ns2:defRPr sz="1800" kern="1200">
+        <ns2:solidFill>
+          <ns2:schemeClr val="tx1"/>
+        </ns2:solidFill>
+        <ns2:latin typeface="+mn-lt"/>
+        <ns2:ea typeface="+mn-ea"/>
+        <ns2:cs typeface="+mn-cs"/>
+      </ns2:defRPr>
+    </ns2:lvl5pPr>
+    <ns2:lvl6pPr marL="2286000" algn="l" defTabSz="914400" rtl="0" eaLnBrk="1" latinLnBrk="0" hangingPunct="1">
+      <ns2:defRPr sz="1800" kern="1200">
+        <ns2:solidFill>
+          <ns2:schemeClr val="tx1"/>
+        </ns2:solidFill>
+        <ns2:latin typeface="+mn-lt"/>
+        <ns2:ea typeface="+mn-ea"/>
+        <ns2:cs typeface="+mn-cs"/>
+      </ns2:defRPr>
+    </ns2:lvl6pPr>
+    <ns2:lvl7pPr marL="2743200" algn="l" defTabSz="914400" rtl="0" eaLnBrk="1" latinLnBrk="0" hangingPunct="1">
+      <ns2:defRPr sz="1800" kern="1200">
+        <ns2:solidFill>
+          <ns2:schemeClr val="tx1"/>
+        </ns2:solidFill>
+        <ns2:latin typeface="+mn-lt"/>
+        <ns2:ea typeface="+mn-ea"/>
+        <ns2:cs typeface="+mn-cs"/>
+      </ns2:defRPr>
+    </ns2:lvl7pPr>
+    <ns2:lvl8pPr marL="3200400" algn="l" defTabSz="914400" rtl="0" eaLnBrk="1" latinLnBrk="0" hangingPunct="1">
+      <ns2:defRPr sz="1800" kern="1200">
+        <ns2:solidFill>
+          <ns2:schemeClr val="tx1"/>
+        </ns2:solidFill>
+        <ns2:latin typeface="+mn-lt"/>
+        <ns2:ea typeface="+mn-ea"/>
+        <ns2:cs typeface="+mn-cs"/>
+      </ns2:defRPr>
+    </ns2:lvl8pPr>
+    <ns2:lvl9pPr marL="3657600" algn="l" defTabSz="914400" rtl="0" eaLnBrk="1" latinLnBrk="0" hangingPunct="1">
+      <ns2:defRPr sz="1800" kern="1200">
+        <ns2:solidFill>
+          <ns2:schemeClr val="tx1"/>
+        </ns2:solidFill>
+        <ns2:latin typeface="+mn-lt"/>
+        <ns2:ea typeface="+mn-ea"/>
+        <ns2:cs typeface="+mn-cs"/>
+      </ns2:defRPr>
+    </ns2:lvl9pPr>
+  </ns0:defaultTextStyle>
+</ns0:presentation>
 </file>
 
 <file path=ppt/notesMasters/notesMaster1.xml><?xml version="1.0" encoding="utf-8"?>
@@ -526,6 +526,358 @@
             <a:fld id="{F7021451-1387-4CA6-816F-3879F97B5CBC}" type="slidenum">
               <a:rPr lang="en-US"/>
               <a:t>1</a:t>
+            </a:fld>
+            <a:endParaRPr lang="en-US"/>
+          </a:p>
+        </p:txBody>
+      </p:sp>
+    </p:spTree>
+    <p:extLst>
+      <p:ext uri="{BB962C8B-B14F-4D97-AF65-F5344CB8AC3E}">
+        <p14:creationId xmlns:p14="http://schemas.microsoft.com/office/powerpoint/2010/main" val="1024086991"/>
+      </p:ext>
+    </p:extLst>
+  </p:cSld>
+  <p:clrMapOvr>
+    <a:masterClrMapping/>
+  </p:clrMapOvr>
+</p:notes>
+</file>
+
+<file path=ppt/notesSlides/notesSlide2.xml><?xml version="1.0" encoding="utf-8"?>
+<p:notes xmlns:a="http://schemas.openxmlformats.org/drawingml/2006/main" xmlns:r="http://schemas.openxmlformats.org/officeDocument/2006/relationships" xmlns:p="http://schemas.openxmlformats.org/presentationml/2006/main">
+  <p:cSld>
+    <p:spTree>
+      <p:nvGrpSpPr>
+        <p:cNvPr id="1" name=""/>
+        <p:cNvGrpSpPr/>
+        <p:nvPr/>
+      </p:nvGrpSpPr>
+      <p:grpSpPr>
+        <a:xfrm>
+          <a:off x="0" y="0"/>
+          <a:ext cx="0" cy="0"/>
+          <a:chOff x="0" y="0"/>
+          <a:chExt cx="0" cy="0"/>
+        </a:xfrm>
+      </p:grpSpPr>
+      <p:sp>
+        <p:nvSpPr>
+          <p:cNvPr id="2" name="Slide Image Placeholder 1"/>
+          <p:cNvSpPr>
+            <a:spLocks noGrp="1" noRot="1" noChangeAspect="1"/>
+          </p:cNvSpPr>
+          <p:nvPr>
+            <p:ph type="sldImg"/>
+          </p:nvPr>
+        </p:nvSpPr>
+        <p:spPr/>
+      </p:sp>
+      <p:sp>
+        <p:nvSpPr>
+          <p:cNvPr id="3" name="Notes Placeholder 2"/>
+          <p:cNvSpPr>
+            <a:spLocks noGrp="1"/>
+          </p:cNvSpPr>
+          <p:nvPr>
+            <p:ph type="body" idx="1"/>
+          </p:nvPr>
+        </p:nvSpPr>
+        <p:spPr/>
+        <p:txBody>
+          <a:bodyPr/>
+          <a:lstStyle/>
+          <a:p>
+            <a:r>
+              <a:rPr lang="en-US" dirty="0"/>
+              <a:t/>
+            </a:r>
+            <a:endParaRPr lang="en-US" dirty="0"/>
+          </a:p>
+        </p:txBody>
+      </p:sp>
+      <p:sp>
+        <p:nvSpPr>
+          <p:cNvPr id="4" name="Slide Number Placeholder 3"/>
+          <p:cNvSpPr>
+            <a:spLocks noGrp="1"/>
+          </p:cNvSpPr>
+          <p:nvPr>
+            <p:ph type="sldNum" sz="quarter" idx="10"/>
+          </p:nvPr>
+        </p:nvSpPr>
+        <p:spPr/>
+        <p:txBody>
+          <a:bodyPr/>
+          <a:lstStyle/>
+          <a:p>
+            <a:fld id="{F7021451-1387-4CA6-816F-3879F97B5CBC}" type="slidenum">
+              <a:rPr lang="en-US"/>
+              <a:t>2</a:t>
+            </a:fld>
+            <a:endParaRPr lang="en-US"/>
+          </a:p>
+        </p:txBody>
+      </p:sp>
+    </p:spTree>
+    <p:extLst>
+      <p:ext uri="{BB962C8B-B14F-4D97-AF65-F5344CB8AC3E}">
+        <p14:creationId xmlns:p14="http://schemas.microsoft.com/office/powerpoint/2010/main" val="1024086991"/>
+      </p:ext>
+    </p:extLst>
+  </p:cSld>
+  <p:clrMapOvr>
+    <a:masterClrMapping/>
+  </p:clrMapOvr>
+</p:notes>
+</file>
+
+<file path=ppt/notesSlides/notesSlide3.xml><?xml version="1.0" encoding="utf-8"?>
+<p:notes xmlns:a="http://schemas.openxmlformats.org/drawingml/2006/main" xmlns:r="http://schemas.openxmlformats.org/officeDocument/2006/relationships" xmlns:p="http://schemas.openxmlformats.org/presentationml/2006/main">
+  <p:cSld>
+    <p:spTree>
+      <p:nvGrpSpPr>
+        <p:cNvPr id="1" name=""/>
+        <p:cNvGrpSpPr/>
+        <p:nvPr/>
+      </p:nvGrpSpPr>
+      <p:grpSpPr>
+        <a:xfrm>
+          <a:off x="0" y="0"/>
+          <a:ext cx="0" cy="0"/>
+          <a:chOff x="0" y="0"/>
+          <a:chExt cx="0" cy="0"/>
+        </a:xfrm>
+      </p:grpSpPr>
+      <p:sp>
+        <p:nvSpPr>
+          <p:cNvPr id="2" name="Slide Image Placeholder 1"/>
+          <p:cNvSpPr>
+            <a:spLocks noGrp="1" noRot="1" noChangeAspect="1"/>
+          </p:cNvSpPr>
+          <p:nvPr>
+            <p:ph type="sldImg"/>
+          </p:nvPr>
+        </p:nvSpPr>
+        <p:spPr/>
+      </p:sp>
+      <p:sp>
+        <p:nvSpPr>
+          <p:cNvPr id="3" name="Notes Placeholder 2"/>
+          <p:cNvSpPr>
+            <a:spLocks noGrp="1"/>
+          </p:cNvSpPr>
+          <p:nvPr>
+            <p:ph type="body" idx="1"/>
+          </p:nvPr>
+        </p:nvSpPr>
+        <p:spPr/>
+        <p:txBody>
+          <a:bodyPr/>
+          <a:lstStyle/>
+          <a:p>
+            <a:r>
+              <a:rPr lang="en-US" dirty="0"/>
+              <a:t/>
+            </a:r>
+            <a:endParaRPr lang="en-US" dirty="0"/>
+          </a:p>
+        </p:txBody>
+      </p:sp>
+      <p:sp>
+        <p:nvSpPr>
+          <p:cNvPr id="4" name="Slide Number Placeholder 3"/>
+          <p:cNvSpPr>
+            <a:spLocks noGrp="1"/>
+          </p:cNvSpPr>
+          <p:nvPr>
+            <p:ph type="sldNum" sz="quarter" idx="10"/>
+          </p:nvPr>
+        </p:nvSpPr>
+        <p:spPr/>
+        <p:txBody>
+          <a:bodyPr/>
+          <a:lstStyle/>
+          <a:p>
+            <a:fld id="{F7021451-1387-4CA6-816F-3879F97B5CBC}" type="slidenum">
+              <a:rPr lang="en-US"/>
+              <a:t>3</a:t>
+            </a:fld>
+            <a:endParaRPr lang="en-US"/>
+          </a:p>
+        </p:txBody>
+      </p:sp>
+    </p:spTree>
+    <p:extLst>
+      <p:ext uri="{BB962C8B-B14F-4D97-AF65-F5344CB8AC3E}">
+        <p14:creationId xmlns:p14="http://schemas.microsoft.com/office/powerpoint/2010/main" val="1024086991"/>
+      </p:ext>
+    </p:extLst>
+  </p:cSld>
+  <p:clrMapOvr>
+    <a:masterClrMapping/>
+  </p:clrMapOvr>
+</p:notes>
+</file>
+
+<file path=ppt/notesSlides/notesSlide4.xml><?xml version="1.0" encoding="utf-8"?>
+<p:notes xmlns:a="http://schemas.openxmlformats.org/drawingml/2006/main" xmlns:r="http://schemas.openxmlformats.org/officeDocument/2006/relationships" xmlns:p="http://schemas.openxmlformats.org/presentationml/2006/main">
+  <p:cSld>
+    <p:spTree>
+      <p:nvGrpSpPr>
+        <p:cNvPr id="1" name=""/>
+        <p:cNvGrpSpPr/>
+        <p:nvPr/>
+      </p:nvGrpSpPr>
+      <p:grpSpPr>
+        <a:xfrm>
+          <a:off x="0" y="0"/>
+          <a:ext cx="0" cy="0"/>
+          <a:chOff x="0" y="0"/>
+          <a:chExt cx="0" cy="0"/>
+        </a:xfrm>
+      </p:grpSpPr>
+      <p:sp>
+        <p:nvSpPr>
+          <p:cNvPr id="2" name="Slide Image Placeholder 1"/>
+          <p:cNvSpPr>
+            <a:spLocks noGrp="1" noRot="1" noChangeAspect="1"/>
+          </p:cNvSpPr>
+          <p:nvPr>
+            <p:ph type="sldImg"/>
+          </p:nvPr>
+        </p:nvSpPr>
+        <p:spPr/>
+      </p:sp>
+      <p:sp>
+        <p:nvSpPr>
+          <p:cNvPr id="3" name="Notes Placeholder 2"/>
+          <p:cNvSpPr>
+            <a:spLocks noGrp="1"/>
+          </p:cNvSpPr>
+          <p:nvPr>
+            <p:ph type="body" idx="1"/>
+          </p:nvPr>
+        </p:nvSpPr>
+        <p:spPr/>
+        <p:txBody>
+          <a:bodyPr/>
+          <a:lstStyle/>
+          <a:p>
+            <a:r>
+              <a:rPr lang="en-US" dirty="0"/>
+              <a:t/>
+            </a:r>
+            <a:endParaRPr lang="en-US" dirty="0"/>
+          </a:p>
+        </p:txBody>
+      </p:sp>
+      <p:sp>
+        <p:nvSpPr>
+          <p:cNvPr id="4" name="Slide Number Placeholder 3"/>
+          <p:cNvSpPr>
+            <a:spLocks noGrp="1"/>
+          </p:cNvSpPr>
+          <p:nvPr>
+            <p:ph type="sldNum" sz="quarter" idx="10"/>
+          </p:nvPr>
+        </p:nvSpPr>
+        <p:spPr/>
+        <p:txBody>
+          <a:bodyPr/>
+          <a:lstStyle/>
+          <a:p>
+            <a:fld id="{F7021451-1387-4CA6-816F-3879F97B5CBC}" type="slidenum">
+              <a:rPr lang="en-US"/>
+              <a:t>4</a:t>
+            </a:fld>
+            <a:endParaRPr lang="en-US"/>
+          </a:p>
+        </p:txBody>
+      </p:sp>
+    </p:spTree>
+    <p:extLst>
+      <p:ext uri="{BB962C8B-B14F-4D97-AF65-F5344CB8AC3E}">
+        <p14:creationId xmlns:p14="http://schemas.microsoft.com/office/powerpoint/2010/main" val="1024086991"/>
+      </p:ext>
+    </p:extLst>
+  </p:cSld>
+  <p:clrMapOvr>
+    <a:masterClrMapping/>
+  </p:clrMapOvr>
+</p:notes>
+</file>
+
+<file path=ppt/notesSlides/notesSlide5.xml><?xml version="1.0" encoding="utf-8"?>
+<p:notes xmlns:a="http://schemas.openxmlformats.org/drawingml/2006/main" xmlns:r="http://schemas.openxmlformats.org/officeDocument/2006/relationships" xmlns:p="http://schemas.openxmlformats.org/presentationml/2006/main">
+  <p:cSld>
+    <p:spTree>
+      <p:nvGrpSpPr>
+        <p:cNvPr id="1" name=""/>
+        <p:cNvGrpSpPr/>
+        <p:nvPr/>
+      </p:nvGrpSpPr>
+      <p:grpSpPr>
+        <a:xfrm>
+          <a:off x="0" y="0"/>
+          <a:ext cx="0" cy="0"/>
+          <a:chOff x="0" y="0"/>
+          <a:chExt cx="0" cy="0"/>
+        </a:xfrm>
+      </p:grpSpPr>
+      <p:sp>
+        <p:nvSpPr>
+          <p:cNvPr id="2" name="Slide Image Placeholder 1"/>
+          <p:cNvSpPr>
+            <a:spLocks noGrp="1" noRot="1" noChangeAspect="1"/>
+          </p:cNvSpPr>
+          <p:nvPr>
+            <p:ph type="sldImg"/>
+          </p:nvPr>
+        </p:nvSpPr>
+        <p:spPr/>
+      </p:sp>
+      <p:sp>
+        <p:nvSpPr>
+          <p:cNvPr id="3" name="Notes Placeholder 2"/>
+          <p:cNvSpPr>
+            <a:spLocks noGrp="1"/>
+          </p:cNvSpPr>
+          <p:nvPr>
+            <p:ph type="body" idx="1"/>
+          </p:nvPr>
+        </p:nvSpPr>
+        <p:spPr/>
+        <p:txBody>
+          <a:bodyPr/>
+          <a:lstStyle/>
+          <a:p>
+            <a:r>
+              <a:rPr lang="en-US" dirty="0"/>
+              <a:t/>
+            </a:r>
+            <a:endParaRPr lang="en-US" dirty="0"/>
+          </a:p>
+        </p:txBody>
+      </p:sp>
+      <p:sp>
+        <p:nvSpPr>
+          <p:cNvPr id="4" name="Slide Number Placeholder 3"/>
+          <p:cNvSpPr>
+            <a:spLocks noGrp="1"/>
+          </p:cNvSpPr>
+          <p:nvPr>
+            <p:ph type="sldNum" sz="quarter" idx="10"/>
+          </p:nvPr>
+        </p:nvSpPr>
+        <p:spPr/>
+        <p:txBody>
+          <a:bodyPr/>
+          <a:lstStyle/>
+          <a:p>
+            <a:fld id="{F7021451-1387-4CA6-816F-3879F97B5CBC}" type="slidenum">
+              <a:rPr lang="en-US"/>
+              <a:t>5</a:t>
             </a:fld>
             <a:endParaRPr lang="en-US"/>
           </a:p>
@@ -2040,7 +2392,7 @@
                   <a:srgbClr val="101D42"/>
                 </a:solidFill>
                 <a:latin typeface="Noto Serif KR Black" pitchFamily="34" charset="0"/>
-                <a:ea typeface="Noto Serif KR Black" pitchFamily="34" charset="-127"/>
+                <a:ea typeface="Noto Serif KR Black" pitchFamily="34" charset="-122"/>
                 <a:cs typeface="Noto Serif KR Black" pitchFamily="34" charset="-120"/>
               </a:rPr>
               <a:t>AI 시대,</a:t>
@@ -2082,7 +2434,7 @@
                   <a:srgbClr val="101D42"/>
                 </a:solidFill>
                 <a:latin typeface="Noto Serif KR Black" pitchFamily="34" charset="0"/>
-                <a:ea typeface="Noto Serif KR Black" pitchFamily="34" charset="-127"/>
+                <a:ea typeface="Noto Serif KR Black" pitchFamily="34" charset="-122"/>
                 <a:cs typeface="Noto Serif KR Black" pitchFamily="34" charset="-120"/>
               </a:rPr>
               <a:t>독서는 모든 학습의</a:t>
@@ -2124,7 +2476,7 @@
                   <a:srgbClr val="15543C"/>
                 </a:solidFill>
                 <a:latin typeface="Noto Serif KR Black" pitchFamily="34" charset="0"/>
-                <a:ea typeface="Noto Serif KR Black" pitchFamily="34" charset="-127"/>
+                <a:ea typeface="Noto Serif KR Black" pitchFamily="34" charset="-122"/>
                 <a:cs typeface="Noto Serif KR Black" pitchFamily="34" charset="-120"/>
               </a:rPr>
               <a:t>기본</a:t>
@@ -2141,7 +2493,7 @@
                   <a:srgbClr val="101D42"/>
                 </a:solidFill>
                 <a:latin typeface="Noto Serif KR Black" pitchFamily="34" charset="0"/>
-                <a:ea typeface="Noto Serif KR Black" pitchFamily="34" charset="-127"/>
+                <a:ea typeface="Noto Serif KR Black" pitchFamily="34" charset="-122"/>
                 <a:cs typeface="Noto Serif KR Black" pitchFamily="34" charset="-120"/>
               </a:rPr>
               <a:t>입니다.</a:t>
@@ -2183,7 +2535,7 @@
                   <a:srgbClr val="101D42"/>
                 </a:solidFill>
                 <a:latin typeface="Noto Sans KR" pitchFamily="34" charset="0"/>
-                <a:ea typeface="Noto Sans KR" pitchFamily="34" charset="-127"/>
+                <a:ea typeface="Noto Sans KR" pitchFamily="34" charset="-122"/>
                 <a:cs typeface="Noto Sans KR" pitchFamily="34" charset="-120"/>
               </a:rPr>
               <a:t>AI가 답을 내놓아도,</a:t>
@@ -2206,7 +2558,7 @@
                   <a:srgbClr val="FFF0AD"/>
                 </a:highlight>
                 <a:latin typeface="Noto Sans KR" pitchFamily="34" charset="0"/>
-                <a:ea typeface="Noto Sans KR" pitchFamily="34" charset="-127"/>
+                <a:ea typeface="Noto Sans KR" pitchFamily="34" charset="-122"/>
                 <a:cs typeface="Noto Sans KR" pitchFamily="34" charset="-120"/>
               </a:rPr>
               <a:t>읽고 이해하고 판단하는 힘</a:t>
@@ -2223,7 +2575,7 @@
                   <a:srgbClr val="101D42"/>
                 </a:solidFill>
                 <a:latin typeface="Noto Sans KR" pitchFamily="34" charset="0"/>
-                <a:ea typeface="Noto Sans KR" pitchFamily="34" charset="-127"/>
+                <a:ea typeface="Noto Sans KR" pitchFamily="34" charset="-122"/>
                 <a:cs typeface="Noto Sans KR" pitchFamily="34" charset="-120"/>
               </a:rPr>
               <a:t>은 학생 안에 있어야 합니다.</a:t>
@@ -2265,7 +2617,7 @@
                   <a:srgbClr val="15543C"/>
                 </a:solidFill>
                 <a:latin typeface="Noto Serif KR Black" pitchFamily="34" charset="0"/>
-                <a:ea typeface="Noto Serif KR Black" pitchFamily="34" charset="-127"/>
+                <a:ea typeface="Noto Serif KR Black" pitchFamily="34" charset="-122"/>
                 <a:cs typeface="Noto Serif KR Black" pitchFamily="34" charset="-120"/>
               </a:rPr>
               <a:t>학습의 기본</a:t>
@@ -2307,7 +2659,7 @@
                   <a:srgbClr val="15543C"/>
                 </a:solidFill>
                 <a:latin typeface="Noto Serif KR Black" pitchFamily="34" charset="0"/>
-                <a:ea typeface="Noto Serif KR Black" pitchFamily="34" charset="-127"/>
+                <a:ea typeface="Noto Serif KR Black" pitchFamily="34" charset="-122"/>
                 <a:cs typeface="Noto Serif KR Black" pitchFamily="34" charset="-120"/>
               </a:rPr>
               <a:t>사고의 기본</a:t>
@@ -2349,7 +2701,7 @@
                   <a:srgbClr val="15543C"/>
                 </a:solidFill>
                 <a:latin typeface="Noto Serif KR Black" pitchFamily="34" charset="0"/>
-                <a:ea typeface="Noto Serif KR Black" pitchFamily="34" charset="-127"/>
+                <a:ea typeface="Noto Serif KR Black" pitchFamily="34" charset="-122"/>
                 <a:cs typeface="Noto Serif KR Black" pitchFamily="34" charset="-120"/>
               </a:rPr>
               <a:t>삶의 기본</a:t>
@@ -2391,7 +2743,7 @@
                   <a:srgbClr val="101D42"/>
                 </a:solidFill>
                 <a:latin typeface="Noto Sans KR" pitchFamily="34" charset="0"/>
-                <a:ea typeface="Noto Sans KR" pitchFamily="34" charset="-127"/>
+                <a:ea typeface="Noto Sans KR" pitchFamily="34" charset="-122"/>
                 <a:cs typeface="Noto Sans KR" pitchFamily="34" charset="-120"/>
               </a:rPr>
               <a:t>낱말과 문장의 뜻을 이해하고</a:t>
@@ -2414,7 +2766,7 @@
                   <a:srgbClr val="FFF0AD"/>
                 </a:highlight>
                 <a:latin typeface="Noto Sans KR" pitchFamily="34" charset="0"/>
-                <a:ea typeface="Noto Sans KR" pitchFamily="34" charset="-127"/>
+                <a:ea typeface="Noto Sans KR" pitchFamily="34" charset="-122"/>
                 <a:cs typeface="Noto Sans KR" pitchFamily="34" charset="-120"/>
               </a:rPr>
               <a:t>모든 교과의 학습</a:t>
@@ -2431,7 +2783,7 @@
                   <a:srgbClr val="101D42"/>
                 </a:solidFill>
                 <a:latin typeface="Noto Sans KR" pitchFamily="34" charset="0"/>
-                <a:ea typeface="Noto Sans KR" pitchFamily="34" charset="-127"/>
+                <a:ea typeface="Noto Sans KR" pitchFamily="34" charset="-122"/>
                 <a:cs typeface="Noto Sans KR" pitchFamily="34" charset="-120"/>
               </a:rPr>
               <a:t>을 이어 가는 힘</a:t>
@@ -2473,7 +2825,7 @@
                   <a:srgbClr val="101D42"/>
                 </a:solidFill>
                 <a:latin typeface="Noto Sans KR" pitchFamily="34" charset="0"/>
-                <a:ea typeface="Noto Sans KR" pitchFamily="34" charset="-127"/>
+                <a:ea typeface="Noto Sans KR" pitchFamily="34" charset="-122"/>
                 <a:cs typeface="Noto Sans KR" pitchFamily="34" charset="-120"/>
               </a:rPr>
               <a:t>근거를 찾고 질문하며</a:t>
@@ -2493,7 +2845,7 @@
                   <a:srgbClr val="101D42"/>
                 </a:solidFill>
                 <a:latin typeface="Noto Sans KR" pitchFamily="34" charset="0"/>
-                <a:ea typeface="Noto Sans KR" pitchFamily="34" charset="-127"/>
+                <a:ea typeface="Noto Sans KR" pitchFamily="34" charset="-122"/>
                 <a:cs typeface="Noto Sans KR" pitchFamily="34" charset="-120"/>
               </a:rPr>
               <a:t>자기 생각을 세우는 힘</a:t>
@@ -2535,7 +2887,7 @@
                   <a:srgbClr val="101D42"/>
                 </a:solidFill>
                 <a:latin typeface="Noto Sans KR" pitchFamily="34" charset="0"/>
-                <a:ea typeface="Noto Sans KR" pitchFamily="34" charset="-127"/>
+                <a:ea typeface="Noto Sans KR" pitchFamily="34" charset="-122"/>
                 <a:cs typeface="Noto Sans KR" pitchFamily="34" charset="-120"/>
               </a:rPr>
               <a:t>책 속의 다른 삶을 만나</a:t>
@@ -2555,7 +2907,7 @@
                   <a:srgbClr val="101D42"/>
                 </a:solidFill>
                 <a:latin typeface="Noto Sans KR" pitchFamily="34" charset="0"/>
-                <a:ea typeface="Noto Sans KR" pitchFamily="34" charset="-127"/>
+                <a:ea typeface="Noto Sans KR" pitchFamily="34" charset="-122"/>
                 <a:cs typeface="Noto Sans KR" pitchFamily="34" charset="-120"/>
               </a:rPr>
               <a:t>나와 타인을 이해하는 힘</a:t>
@@ -2597,10 +2949,10 @@
                   <a:srgbClr val="101D42"/>
                 </a:solidFill>
                 <a:latin typeface="Noto Sans KR" pitchFamily="34" charset="0"/>
-                <a:ea typeface="Noto Sans KR" pitchFamily="34" charset="-127"/>
-                <a:cs typeface="Noto Sans KR" pitchFamily="34" charset="-120"/>
-              </a:rPr>
-              <a:t>이야기 이해 과정에서는 전전두엽을 포함한 여러 뇌 영역이 함께 활동합니다.*</a:t>
+                <a:ea typeface="Noto Sans KR" pitchFamily="34" charset="-122"/>
+                <a:cs typeface="Noto Sans KR" pitchFamily="34" charset="-120"/>
+              </a:rPr>
+              <a:t>직접 읽고 근거를 찾는 연습이 AI의 답을 판단할 바탕이 됩니다.*</a:t>
             </a:r>
             <a:endParaRPr lang="en-US" sz="1000" dirty="0"/>
           </a:p>
@@ -2639,7 +2991,7 @@
                   <a:srgbClr val="101D42"/>
                 </a:solidFill>
                 <a:latin typeface="Noto Serif KR Black" pitchFamily="34" charset="0"/>
-                <a:ea typeface="Noto Serif KR Black" pitchFamily="34" charset="-127"/>
+                <a:ea typeface="Noto Serif KR Black" pitchFamily="34" charset="-122"/>
                 <a:cs typeface="Noto Serif KR Black" pitchFamily="34" charset="-120"/>
               </a:rPr>
               <a:t>기본이 쌓일 시간이 필요합니다</a:t>
@@ -2681,11 +3033,14 @@
                   <a:srgbClr val="101D42"/>
                 </a:solidFill>
                 <a:latin typeface="Noto Sans KR" pitchFamily="34" charset="0"/>
-                <a:ea typeface="Noto Sans KR" pitchFamily="34" charset="-127"/>
-                <a:cs typeface="Noto Sans KR" pitchFamily="34" charset="-120"/>
-              </a:rPr>
-              <a:t>학교에서 마주한 현실은, 아이들이 </a:t>
-            </a:r>
+                <a:ea typeface="Noto Sans KR" pitchFamily="34" charset="-122"/>
+                <a:cs typeface="Noto Sans KR" pitchFamily="34" charset="-120"/>
+              </a:rPr>
+              <a:t>전자도서관과 책이 있어도 낯선 어휘에서 막히면 이해와 재미가 끊깁니다.</a:t>
+            </a:r>
+            <a:endParaRPr lang="en-US" sz="1210" dirty="0"/>
+          </a:p>
+          <a:p>
             <a:pPr algn="l" indent="0" marL="0">
               <a:lnSpc>
                 <a:spcPts val="1850"/>
@@ -2693,7 +3048,318 @@
               <a:buNone/>
             </a:pPr>
             <a:r>
-              <a:rPr lang="ko-KR" altLang="en-US" sz="1210" b="1" dirty="0">
+              <a:rPr lang="ko-KR" altLang="en-US" sz="1210" dirty="0">
+                <a:solidFill>
+                  <a:srgbClr val="101D42"/>
+                </a:solidFill>
+                <a:latin typeface="Noto Sans KR" pitchFamily="34" charset="0"/>
+                <a:ea typeface="Noto Sans KR" pitchFamily="34" charset="-122"/>
+                <a:cs typeface="Noto Sans KR" pitchFamily="34" charset="-120"/>
+              </a:rPr>
+              <a:t>읽는 중의 도움과 교사의 질문을 연결해 한 권 읽는 경험을 돕습니다.</a:t>
+            </a:r>
+            <a:endParaRPr lang="en-US" sz="1210" dirty="0"/>
+          </a:p>
+        </p:txBody>
+      </p:sp>
+      <p:sp>
+        <p:nvSpPr>
+          <p:cNvPr id="53" name="txt-1-13"/>
+          <p:cNvSpPr txBox="1"/>
+          <p:nvPr/>
+        </p:nvSpPr>
+        <p:spPr>
+          <a:xfrm>
+            <a:off x="2679319" y="5862955"/>
+            <a:ext cx="334010" cy="279019"/>
+          </a:xfrm>
+          <a:prstGeom prst="rect">
+            <a:avLst/>
+          </a:prstGeom>
+          <a:noFill/>
+          <a:ln/>
+        </p:spPr>
+        <p:txBody>
+          <a:bodyPr wrap="square" lIns="0" tIns="0" rIns="0" bIns="0" rtlCol="0" anchor="t"/>
+          <a:lstStyle/>
+          <a:p>
+            <a:pPr algn="l" indent="0" marL="0">
+              <a:lnSpc>
+                <a:spcPts val="1690"/>
+              </a:lnSpc>
+              <a:buNone/>
+            </a:pPr>
+            <a:r>
+              <a:rPr lang="ko-KR" altLang="en-US" sz="1300" dirty="0">
+                <a:solidFill>
+                  <a:srgbClr val="D59B32"/>
+                </a:solidFill>
+                <a:latin typeface="Noto Sans KR" pitchFamily="34" charset="0"/>
+                <a:ea typeface="Noto Sans KR" pitchFamily="34" charset="-122"/>
+                <a:cs typeface="Noto Sans KR" pitchFamily="34" charset="-120"/>
+              </a:rPr>
+              <a:t>→</a:t>
+            </a:r>
+            <a:endParaRPr lang="en-US" sz="1300" dirty="0"/>
+          </a:p>
+        </p:txBody>
+      </p:sp>
+      <p:sp>
+        <p:nvSpPr>
+          <p:cNvPr id="54" name="txt-1-14"/>
+          <p:cNvSpPr txBox="1"/>
+          <p:nvPr/>
+        </p:nvSpPr>
+        <p:spPr>
+          <a:xfrm>
+            <a:off x="4749038" y="5862955"/>
+            <a:ext cx="334010" cy="279019"/>
+          </a:xfrm>
+          <a:prstGeom prst="rect">
+            <a:avLst/>
+          </a:prstGeom>
+          <a:noFill/>
+          <a:ln/>
+        </p:spPr>
+        <p:txBody>
+          <a:bodyPr wrap="square" lIns="0" tIns="0" rIns="0" bIns="0" rtlCol="0" anchor="t"/>
+          <a:lstStyle/>
+          <a:p>
+            <a:pPr algn="l" indent="0" marL="0">
+              <a:lnSpc>
+                <a:spcPts val="1690"/>
+              </a:lnSpc>
+              <a:buNone/>
+            </a:pPr>
+            <a:r>
+              <a:rPr lang="ko-KR" altLang="en-US" sz="1300" dirty="0">
+                <a:solidFill>
+                  <a:srgbClr val="D59B32"/>
+                </a:solidFill>
+                <a:latin typeface="Noto Sans KR" pitchFamily="34" charset="0"/>
+                <a:ea typeface="Noto Sans KR" pitchFamily="34" charset="-122"/>
+                <a:cs typeface="Noto Sans KR" pitchFamily="34" charset="-120"/>
+              </a:rPr>
+              <a:t>→</a:t>
+            </a:r>
+            <a:endParaRPr lang="en-US" sz="1300" dirty="0"/>
+          </a:p>
+        </p:txBody>
+      </p:sp>
+      <p:sp>
+        <p:nvSpPr>
+          <p:cNvPr id="55" name="txt-1-15"/>
+          <p:cNvSpPr txBox="1"/>
+          <p:nvPr/>
+        </p:nvSpPr>
+        <p:spPr>
+          <a:xfrm>
+            <a:off x="1261364" y="5897499"/>
+            <a:ext cx="907161" cy="236093"/>
+          </a:xfrm>
+          <a:prstGeom prst="rect">
+            <a:avLst/>
+          </a:prstGeom>
+          <a:noFill/>
+          <a:ln/>
+        </p:spPr>
+        <p:txBody>
+          <a:bodyPr wrap="square" lIns="0" tIns="0" rIns="0" bIns="0" rtlCol="0" anchor="t"/>
+          <a:lstStyle/>
+          <a:p>
+            <a:pPr algn="ctr" indent="0" marL="0">
+              <a:lnSpc>
+                <a:spcPts val="1430"/>
+              </a:lnSpc>
+              <a:buNone/>
+            </a:pPr>
+            <a:r>
+              <a:rPr lang="ko-KR" altLang="en-US" sz="1100" dirty="0">
+                <a:solidFill>
+                  <a:srgbClr val="101D42"/>
+                </a:solidFill>
+                <a:latin typeface="Noto Sans KR" pitchFamily="34" charset="0"/>
+                <a:ea typeface="Noto Sans KR" pitchFamily="34" charset="-122"/>
+                <a:cs typeface="Noto Sans KR" pitchFamily="34" charset="-120"/>
+              </a:rPr>
+              <a:t>모르는 낱말</a:t>
+            </a:r>
+            <a:endParaRPr lang="en-US" sz="1100" dirty="0"/>
+          </a:p>
+        </p:txBody>
+      </p:sp>
+      <p:sp>
+        <p:nvSpPr>
+          <p:cNvPr id="56" name="txt-1-16"/>
+          <p:cNvSpPr txBox="1"/>
+          <p:nvPr/>
+        </p:nvSpPr>
+        <p:spPr>
+          <a:xfrm>
+            <a:off x="3331083" y="5897499"/>
+            <a:ext cx="907161" cy="236093"/>
+          </a:xfrm>
+          <a:prstGeom prst="rect">
+            <a:avLst/>
+          </a:prstGeom>
+          <a:noFill/>
+          <a:ln/>
+        </p:spPr>
+        <p:txBody>
+          <a:bodyPr wrap="square" lIns="0" tIns="0" rIns="0" bIns="0" rtlCol="0" anchor="t"/>
+          <a:lstStyle/>
+          <a:p>
+            <a:pPr algn="ctr" indent="0" marL="0">
+              <a:lnSpc>
+                <a:spcPts val="1430"/>
+              </a:lnSpc>
+              <a:buNone/>
+            </a:pPr>
+            <a:r>
+              <a:rPr lang="ko-KR" altLang="en-US" sz="1100" dirty="0">
+                <a:solidFill>
+                  <a:srgbClr val="101D42"/>
+                </a:solidFill>
+                <a:latin typeface="Noto Sans KR" pitchFamily="34" charset="0"/>
+                <a:ea typeface="Noto Sans KR" pitchFamily="34" charset="-122"/>
+                <a:cs typeface="Noto Sans KR" pitchFamily="34" charset="-120"/>
+              </a:rPr>
+              <a:t>이해의 중단</a:t>
+            </a:r>
+            <a:endParaRPr lang="en-US" sz="1100" dirty="0"/>
+          </a:p>
+        </p:txBody>
+      </p:sp>
+      <p:sp>
+        <p:nvSpPr>
+          <p:cNvPr id="57" name="txt-1-17"/>
+          <p:cNvSpPr txBox="1"/>
+          <p:nvPr/>
+        </p:nvSpPr>
+        <p:spPr>
+          <a:xfrm>
+            <a:off x="5400802" y="5897499"/>
+            <a:ext cx="907161" cy="236093"/>
+          </a:xfrm>
+          <a:prstGeom prst="rect">
+            <a:avLst/>
+          </a:prstGeom>
+          <a:noFill/>
+          <a:ln/>
+        </p:spPr>
+        <p:txBody>
+          <a:bodyPr wrap="square" lIns="0" tIns="0" rIns="0" bIns="0" rtlCol="0" anchor="t"/>
+          <a:lstStyle/>
+          <a:p>
+            <a:pPr algn="ctr" indent="0" marL="0">
+              <a:lnSpc>
+                <a:spcPts val="1430"/>
+              </a:lnSpc>
+              <a:buNone/>
+            </a:pPr>
+            <a:r>
+              <a:rPr lang="ko-KR" altLang="en-US" sz="1100" dirty="0">
+                <a:solidFill>
+                  <a:srgbClr val="101D42"/>
+                </a:solidFill>
+                <a:latin typeface="Noto Sans KR" pitchFamily="34" charset="0"/>
+                <a:ea typeface="Noto Sans KR" pitchFamily="34" charset="-122"/>
+                <a:cs typeface="Noto Sans KR" pitchFamily="34" charset="-120"/>
+              </a:rPr>
+              <a:t>읽기의 포기</a:t>
+            </a:r>
+            <a:endParaRPr lang="en-US" sz="1100" dirty="0"/>
+          </a:p>
+        </p:txBody>
+      </p:sp>
+      <p:sp>
+        <p:nvSpPr>
+          <p:cNvPr id="58" name="txt-1-18"/>
+          <p:cNvSpPr txBox="1"/>
+          <p:nvPr/>
+        </p:nvSpPr>
+        <p:spPr>
+          <a:xfrm>
+            <a:off x="381000" y="6415151"/>
+            <a:ext cx="4904105" cy="450723"/>
+          </a:xfrm>
+          <a:prstGeom prst="rect">
+            <a:avLst/>
+          </a:prstGeom>
+          <a:noFill/>
+          <a:ln/>
+        </p:spPr>
+        <p:txBody>
+          <a:bodyPr wrap="square" lIns="0" tIns="0" rIns="0" bIns="0" rtlCol="0" anchor="t"/>
+          <a:lstStyle/>
+          <a:p>
+            <a:pPr algn="l" indent="0" marL="0">
+              <a:lnSpc>
+                <a:spcPts val="2730"/>
+              </a:lnSpc>
+              <a:buNone/>
+            </a:pPr>
+            <a:r>
+              <a:rPr lang="ko-KR" altLang="en-US" sz="2100" dirty="0">
+                <a:solidFill>
+                  <a:srgbClr val="15543C"/>
+                </a:solidFill>
+                <a:latin typeface="Noto Serif KR Black" pitchFamily="34" charset="0"/>
+                <a:ea typeface="Noto Serif KR Black" pitchFamily="34" charset="-122"/>
+                <a:cs typeface="Noto Serif KR Black" pitchFamily="34" charset="-120"/>
+              </a:rPr>
+              <a:t>초등교사들이 뜻을 모아 만들었습니다</a:t>
+            </a:r>
+            <a:endParaRPr lang="en-US" sz="2100" dirty="0"/>
+          </a:p>
+        </p:txBody>
+      </p:sp>
+      <p:sp>
+        <p:nvSpPr>
+          <p:cNvPr id="59" name="txt-1-19"/>
+          <p:cNvSpPr txBox="1"/>
+          <p:nvPr/>
+        </p:nvSpPr>
+        <p:spPr>
+          <a:xfrm>
+            <a:off x="381000" y="6811899"/>
+            <a:ext cx="4670044" cy="493649"/>
+          </a:xfrm>
+          <a:prstGeom prst="rect">
+            <a:avLst/>
+          </a:prstGeom>
+          <a:noFill/>
+          <a:ln/>
+        </p:spPr>
+        <p:txBody>
+          <a:bodyPr wrap="square" lIns="0" tIns="0" rIns="0" bIns="0" rtlCol="0" anchor="t"/>
+          <a:lstStyle/>
+          <a:p>
+            <a:pPr algn="l" indent="0" marL="0">
+              <a:lnSpc>
+                <a:spcPts val="2990"/>
+              </a:lnSpc>
+              <a:buNone/>
+            </a:pPr>
+            <a:r>
+              <a:rPr lang="ko-KR" altLang="en-US" sz="2300" dirty="0">
+                <a:solidFill>
+                  <a:srgbClr val="101D42"/>
+                </a:solidFill>
+                <a:latin typeface="Noto Sans KR" pitchFamily="34" charset="0"/>
+                <a:ea typeface="Noto Sans KR" pitchFamily="34" charset="-122"/>
+                <a:cs typeface="Noto Sans KR" pitchFamily="34" charset="-120"/>
+              </a:rPr>
+              <a:t>부기는 </a:t>
+            </a:r>
+            <a:pPr algn="l" indent="0" marL="0">
+              <a:lnSpc>
+                <a:spcPts val="2990"/>
+              </a:lnSpc>
+              <a:buNone/>
+            </a:pPr>
+            <a:r>
+              <a:rPr lang="ko-KR" altLang="en-US" sz="2300" b="1" dirty="0">
                 <a:solidFill>
                   <a:srgbClr val="101D42"/>
                 </a:solidFill>
@@ -2701,36 +3367,1947 @@
                   <a:srgbClr val="FFF0AD"/>
                 </a:highlight>
                 <a:latin typeface="Noto Sans KR" pitchFamily="34" charset="0"/>
-                <a:ea typeface="Noto Sans KR" pitchFamily="34" charset="-127"/>
-                <a:cs typeface="Noto Sans KR" pitchFamily="34" charset="-120"/>
-              </a:rPr>
-              <a:t>책을 충분히 읽지 않는다는</a:t>
-            </a:r>
-            <a:pPr algn="l" indent="0" marL="0">
-              <a:lnSpc>
-                <a:spcPts val="1850"/>
-              </a:lnSpc>
-              <a:buNone/>
-            </a:pPr>
-            <a:r>
-              <a:rPr lang="ko-KR" altLang="en-US" sz="1210" dirty="0">
-                <a:solidFill>
-                  <a:srgbClr val="101D42"/>
-                </a:solidFill>
-                <a:latin typeface="Noto Sans KR" pitchFamily="34" charset="0"/>
-                <a:ea typeface="Noto Sans KR" pitchFamily="34" charset="-127"/>
-                <a:cs typeface="Noto Sans KR" pitchFamily="34" charset="-120"/>
-              </a:rPr>
-              <a:t> 것이었습니다. </a:t>
-            </a:r>
-            <a:pPr algn="l" indent="0" marL="0">
-              <a:lnSpc>
-                <a:spcPts val="1850"/>
-              </a:lnSpc>
-              <a:buNone/>
-            </a:pPr>
-            <a:r>
-              <a:rPr lang="ko-KR" altLang="en-US" sz="1210" b="1" dirty="0">
+                <a:ea typeface="Noto Sans KR" pitchFamily="34" charset="-122"/>
+                <a:cs typeface="Noto Sans KR" pitchFamily="34" charset="-120"/>
+              </a:rPr>
+              <a:t>정답 대신 질문</a:t>
+            </a:r>
+            <a:pPr algn="l" indent="0" marL="0">
+              <a:lnSpc>
+                <a:spcPts val="2990"/>
+              </a:lnSpc>
+              <a:buNone/>
+            </a:pPr>
+            <a:r>
+              <a:rPr lang="ko-KR" altLang="en-US" sz="2300" dirty="0">
+                <a:solidFill>
+                  <a:srgbClr val="101D42"/>
+                </a:solidFill>
+                <a:latin typeface="Noto Sans KR" pitchFamily="34" charset="0"/>
+                <a:ea typeface="Noto Sans KR" pitchFamily="34" charset="-122"/>
+                <a:cs typeface="Noto Sans KR" pitchFamily="34" charset="-120"/>
+              </a:rPr>
+              <a:t>을 건넵니다.</a:t>
+            </a:r>
+            <a:endParaRPr lang="en-US" sz="2300" dirty="0"/>
+          </a:p>
+        </p:txBody>
+      </p:sp>
+      <p:sp>
+        <p:nvSpPr>
+          <p:cNvPr id="60" name="txt-1-20"/>
+          <p:cNvSpPr txBox="1"/>
+          <p:nvPr/>
+        </p:nvSpPr>
+        <p:spPr>
+          <a:xfrm>
+            <a:off x="381000" y="7313422"/>
+            <a:ext cx="4235577" cy="225425"/>
+          </a:xfrm>
+          <a:prstGeom prst="rect">
+            <a:avLst/>
+          </a:prstGeom>
+          <a:noFill/>
+          <a:ln/>
+        </p:spPr>
+        <p:txBody>
+          <a:bodyPr wrap="square" lIns="0" tIns="0" rIns="0" bIns="0" rtlCol="0" anchor="t"/>
+          <a:lstStyle/>
+          <a:p>
+            <a:pPr algn="l" indent="0" marL="0">
+              <a:lnSpc>
+                <a:spcPts val="1365"/>
+              </a:lnSpc>
+              <a:buNone/>
+            </a:pPr>
+            <a:r>
+              <a:rPr lang="ko-KR" altLang="en-US" sz="1050" dirty="0">
+                <a:solidFill>
+                  <a:srgbClr val="101D42"/>
+                </a:solidFill>
+                <a:latin typeface="Noto Sans KR" pitchFamily="34" charset="0"/>
+                <a:ea typeface="Noto Sans KR" pitchFamily="34" charset="-122"/>
+                <a:cs typeface="Noto Sans KR" pitchFamily="34" charset="-120"/>
+              </a:rPr>
+              <a:t>온라인과 인쇄 활동지로 같은 책과 질문을 함께 읽습니다.</a:t>
+            </a:r>
+            <a:endParaRPr lang="en-US" sz="1050" dirty="0"/>
+          </a:p>
+        </p:txBody>
+      </p:sp>
+      <p:sp>
+        <p:nvSpPr>
+          <p:cNvPr id="61" name="txt-1-21"/>
+          <p:cNvSpPr txBox="1"/>
+          <p:nvPr/>
+        </p:nvSpPr>
+        <p:spPr>
+          <a:xfrm>
+            <a:off x="825246" y="7737856"/>
+            <a:ext cx="584200" cy="343408"/>
+          </a:xfrm>
+          <a:prstGeom prst="rect">
+            <a:avLst/>
+          </a:prstGeom>
+          <a:noFill/>
+          <a:ln/>
+        </p:spPr>
+        <p:txBody>
+          <a:bodyPr wrap="square" lIns="0" tIns="0" rIns="0" bIns="0" rtlCol="0" anchor="t"/>
+          <a:lstStyle/>
+          <a:p>
+            <a:pPr algn="l" indent="0" marL="0">
+              <a:lnSpc>
+                <a:spcPts val="2080"/>
+              </a:lnSpc>
+              <a:buNone/>
+            </a:pPr>
+            <a:r>
+              <a:rPr lang="ko-KR" altLang="en-US" sz="1600" dirty="0">
+                <a:solidFill>
+                  <a:srgbClr val="15543C"/>
+                </a:solidFill>
+                <a:latin typeface="Noto Serif KR Black" pitchFamily="34" charset="0"/>
+                <a:ea typeface="Noto Serif KR Black" pitchFamily="34" charset="-122"/>
+                <a:cs typeface="Noto Serif KR Black" pitchFamily="34" charset="-120"/>
+              </a:rPr>
+              <a:t>읽기</a:t>
+            </a:r>
+            <a:endParaRPr lang="en-US" sz="1600" dirty="0"/>
+          </a:p>
+        </p:txBody>
+      </p:sp>
+      <p:sp>
+        <p:nvSpPr>
+          <p:cNvPr id="62" name="txt-1-22"/>
+          <p:cNvSpPr txBox="1"/>
+          <p:nvPr/>
+        </p:nvSpPr>
+        <p:spPr>
+          <a:xfrm>
+            <a:off x="2571242" y="7737856"/>
+            <a:ext cx="584200" cy="343408"/>
+          </a:xfrm>
+          <a:prstGeom prst="rect">
+            <a:avLst/>
+          </a:prstGeom>
+          <a:noFill/>
+          <a:ln/>
+        </p:spPr>
+        <p:txBody>
+          <a:bodyPr wrap="square" lIns="0" tIns="0" rIns="0" bIns="0" rtlCol="0" anchor="t"/>
+          <a:lstStyle/>
+          <a:p>
+            <a:pPr algn="l" indent="0" marL="0">
+              <a:lnSpc>
+                <a:spcPts val="2080"/>
+              </a:lnSpc>
+              <a:buNone/>
+            </a:pPr>
+            <a:r>
+              <a:rPr lang="ko-KR" altLang="en-US" sz="1600" dirty="0">
+                <a:solidFill>
+                  <a:srgbClr val="15543C"/>
+                </a:solidFill>
+                <a:latin typeface="Noto Serif KR Black" pitchFamily="34" charset="0"/>
+                <a:ea typeface="Noto Serif KR Black" pitchFamily="34" charset="-122"/>
+                <a:cs typeface="Noto Serif KR Black" pitchFamily="34" charset="-120"/>
+              </a:rPr>
+              <a:t>묻기</a:t>
+            </a:r>
+            <a:endParaRPr lang="en-US" sz="1600" dirty="0"/>
+          </a:p>
+        </p:txBody>
+      </p:sp>
+      <p:sp>
+        <p:nvSpPr>
+          <p:cNvPr id="63" name="txt-1-23"/>
+          <p:cNvSpPr txBox="1"/>
+          <p:nvPr/>
+        </p:nvSpPr>
+        <p:spPr>
+          <a:xfrm>
+            <a:off x="4317238" y="7737856"/>
+            <a:ext cx="1016127" cy="343408"/>
+          </a:xfrm>
+          <a:prstGeom prst="rect">
+            <a:avLst/>
+          </a:prstGeom>
+          <a:noFill/>
+          <a:ln/>
+        </p:spPr>
+        <p:txBody>
+          <a:bodyPr wrap="square" lIns="0" tIns="0" rIns="0" bIns="0" rtlCol="0" anchor="t"/>
+          <a:lstStyle/>
+          <a:p>
+            <a:pPr algn="l" indent="0" marL="0">
+              <a:lnSpc>
+                <a:spcPts val="2080"/>
+              </a:lnSpc>
+              <a:buNone/>
+            </a:pPr>
+            <a:r>
+              <a:rPr lang="ko-KR" altLang="en-US" sz="1600" dirty="0">
+                <a:solidFill>
+                  <a:srgbClr val="15543C"/>
+                </a:solidFill>
+                <a:latin typeface="Noto Serif KR Black" pitchFamily="34" charset="0"/>
+                <a:ea typeface="Noto Serif KR Black" pitchFamily="34" charset="-122"/>
+                <a:cs typeface="Noto Serif KR Black" pitchFamily="34" charset="-120"/>
+              </a:rPr>
+              <a:t>표현하기</a:t>
+            </a:r>
+            <a:endParaRPr lang="en-US" sz="1600" dirty="0"/>
+          </a:p>
+        </p:txBody>
+      </p:sp>
+      <p:sp>
+        <p:nvSpPr>
+          <p:cNvPr id="64" name="txt-1-24"/>
+          <p:cNvSpPr txBox="1"/>
+          <p:nvPr/>
+        </p:nvSpPr>
+        <p:spPr>
+          <a:xfrm>
+            <a:off x="5951220" y="7737856"/>
+            <a:ext cx="811911" cy="343408"/>
+          </a:xfrm>
+          <a:prstGeom prst="rect">
+            <a:avLst/>
+          </a:prstGeom>
+          <a:noFill/>
+          <a:ln/>
+        </p:spPr>
+        <p:txBody>
+          <a:bodyPr wrap="square" lIns="0" tIns="0" rIns="0" bIns="0" rtlCol="0" anchor="t"/>
+          <a:lstStyle/>
+          <a:p>
+            <a:pPr algn="ctr" indent="0" marL="0">
+              <a:lnSpc>
+                <a:spcPts val="2080"/>
+              </a:lnSpc>
+              <a:buNone/>
+            </a:pPr>
+            <a:r>
+              <a:rPr lang="ko-KR" altLang="en-US" sz="1600" dirty="0">
+                <a:solidFill>
+                  <a:srgbClr val="15543C"/>
+                </a:solidFill>
+                <a:latin typeface="Noto Serif KR Black" pitchFamily="34" charset="0"/>
+                <a:ea typeface="Noto Serif KR Black" pitchFamily="34" charset="-122"/>
+                <a:cs typeface="Noto Serif KR Black" pitchFamily="34" charset="-120"/>
+              </a:rPr>
+              <a:t>모으기</a:t>
+            </a:r>
+            <a:endParaRPr lang="en-US" sz="1600" dirty="0"/>
+          </a:p>
+        </p:txBody>
+      </p:sp>
+      <p:sp>
+        <p:nvSpPr>
+          <p:cNvPr id="65" name="txt-1-25"/>
+          <p:cNvSpPr txBox="1"/>
+          <p:nvPr/>
+        </p:nvSpPr>
+        <p:spPr>
+          <a:xfrm>
+            <a:off x="616077" y="8082280"/>
+            <a:ext cx="1080135" cy="350520"/>
+          </a:xfrm>
+          <a:prstGeom prst="rect">
+            <a:avLst/>
+          </a:prstGeom>
+          <a:noFill/>
+          <a:ln/>
+        </p:spPr>
+        <p:txBody>
+          <a:bodyPr wrap="square" lIns="0" tIns="0" rIns="0" bIns="0" rtlCol="0" anchor="t"/>
+          <a:lstStyle/>
+          <a:p>
+            <a:pPr algn="ctr" indent="0" marL="0">
+              <a:lnSpc>
+                <a:spcPts val="1200"/>
+              </a:lnSpc>
+              <a:buNone/>
+            </a:pPr>
+            <a:r>
+              <a:rPr lang="ko-KR" altLang="en-US" sz="850" dirty="0">
+                <a:solidFill>
+                  <a:srgbClr val="101D42"/>
+                </a:solidFill>
+                <a:latin typeface="Noto Sans KR" pitchFamily="34" charset="0"/>
+                <a:ea typeface="Noto Sans KR" pitchFamily="34" charset="-122"/>
+                <a:cs typeface="Noto Sans KR" pitchFamily="34" charset="-120"/>
+              </a:rPr>
+              <a:t>능동적 그림 읽기</a:t>
+            </a:r>
+            <a:endParaRPr lang="en-US" sz="850" dirty="0"/>
+          </a:p>
+          <a:p>
+            <a:pPr algn="ctr" indent="0" marL="0">
+              <a:lnSpc>
+                <a:spcPts val="1200"/>
+              </a:lnSpc>
+              <a:buNone/>
+            </a:pPr>
+            <a:r>
+              <a:rPr lang="ko-KR" altLang="en-US" sz="850" dirty="0">
+                <a:solidFill>
+                  <a:srgbClr val="101D42"/>
+                </a:solidFill>
+                <a:latin typeface="Noto Sans KR" pitchFamily="34" charset="0"/>
+                <a:ea typeface="Noto Sans KR" pitchFamily="34" charset="-122"/>
+                <a:cs typeface="Noto Sans KR" pitchFamily="34" charset="-120"/>
+              </a:rPr>
+              <a:t>낱말 · 다국어 지원</a:t>
+            </a:r>
+            <a:endParaRPr lang="en-US" sz="850" dirty="0"/>
+          </a:p>
+        </p:txBody>
+      </p:sp>
+      <p:sp>
+        <p:nvSpPr>
+          <p:cNvPr id="66" name="txt-1-26"/>
+          <p:cNvSpPr txBox="1"/>
+          <p:nvPr/>
+        </p:nvSpPr>
+        <p:spPr>
+          <a:xfrm>
+            <a:off x="2228342" y="8082280"/>
+            <a:ext cx="1345946" cy="350520"/>
+          </a:xfrm>
+          <a:prstGeom prst="rect">
+            <a:avLst/>
+          </a:prstGeom>
+          <a:noFill/>
+          <a:ln/>
+        </p:spPr>
+        <p:txBody>
+          <a:bodyPr wrap="square" lIns="0" tIns="0" rIns="0" bIns="0" rtlCol="0" anchor="t"/>
+          <a:lstStyle/>
+          <a:p>
+            <a:pPr algn="ctr" indent="0" marL="0">
+              <a:lnSpc>
+                <a:spcPts val="1200"/>
+              </a:lnSpc>
+              <a:buNone/>
+            </a:pPr>
+            <a:r>
+              <a:rPr lang="ko-KR" altLang="en-US" sz="850" dirty="0">
+                <a:solidFill>
+                  <a:srgbClr val="101D42"/>
+                </a:solidFill>
+                <a:latin typeface="Noto Sans KR" pitchFamily="34" charset="0"/>
+                <a:ea typeface="Noto Sans KR" pitchFamily="34" charset="-122"/>
+                <a:cs typeface="Noto Sans KR" pitchFamily="34" charset="-120"/>
+              </a:rPr>
+              <a:t>캐릭터와의 대화</a:t>
+            </a:r>
+            <a:endParaRPr lang="en-US" sz="850" dirty="0"/>
+          </a:p>
+          <a:p>
+            <a:pPr algn="ctr" indent="0" marL="0">
+              <a:lnSpc>
+                <a:spcPts val="1200"/>
+              </a:lnSpc>
+              <a:buNone/>
+            </a:pPr>
+            <a:r>
+              <a:rPr lang="ko-KR" altLang="en-US" sz="850" dirty="0">
+                <a:solidFill>
+                  <a:srgbClr val="101D42"/>
+                </a:solidFill>
+                <a:latin typeface="Noto Sans KR" pitchFamily="34" charset="0"/>
+                <a:ea typeface="Noto Sans KR" pitchFamily="34" charset="-122"/>
+                <a:cs typeface="Noto Sans KR" pitchFamily="34" charset="-120"/>
+              </a:rPr>
+              <a:t>생각한 까닭을 묻는 질문</a:t>
+            </a:r>
+            <a:endParaRPr lang="en-US" sz="850" dirty="0"/>
+          </a:p>
+        </p:txBody>
+      </p:sp>
+      <p:sp>
+        <p:nvSpPr>
+          <p:cNvPr id="67" name="txt-1-27"/>
+          <p:cNvSpPr txBox="1"/>
+          <p:nvPr/>
+        </p:nvSpPr>
+        <p:spPr>
+          <a:xfrm>
+            <a:off x="3796030" y="8082280"/>
+            <a:ext cx="1701165" cy="350520"/>
+          </a:xfrm>
+          <a:prstGeom prst="rect">
+            <a:avLst/>
+          </a:prstGeom>
+          <a:noFill/>
+          <a:ln/>
+        </p:spPr>
+        <p:txBody>
+          <a:bodyPr wrap="square" lIns="0" tIns="0" rIns="0" bIns="0" rtlCol="0" anchor="t"/>
+          <a:lstStyle/>
+          <a:p>
+            <a:pPr algn="ctr" indent="0" marL="0">
+              <a:lnSpc>
+                <a:spcPts val="1200"/>
+              </a:lnSpc>
+              <a:buNone/>
+            </a:pPr>
+            <a:r>
+              <a:rPr lang="ko-KR" altLang="en-US" sz="850" dirty="0">
+                <a:solidFill>
+                  <a:srgbClr val="101D42"/>
+                </a:solidFill>
+                <a:latin typeface="Noto Sans KR" pitchFamily="34" charset="0"/>
+                <a:ea typeface="Noto Sans KR" pitchFamily="34" charset="-122"/>
+                <a:cs typeface="Noto Sans KR" pitchFamily="34" charset="-120"/>
+              </a:rPr>
+              <a:t>글, 그림, 편지 쓰기</a:t>
+            </a:r>
+            <a:endParaRPr lang="en-US" sz="850" dirty="0"/>
+          </a:p>
+          <a:p>
+            <a:pPr algn="ctr" indent="0" marL="0">
+              <a:lnSpc>
+                <a:spcPts val="1200"/>
+              </a:lnSpc>
+              <a:buNone/>
+            </a:pPr>
+            <a:r>
+              <a:rPr lang="ko-KR" altLang="en-US" sz="850" dirty="0">
+                <a:solidFill>
+                  <a:srgbClr val="101D42"/>
+                </a:solidFill>
+                <a:latin typeface="Noto Sans KR" pitchFamily="34" charset="0"/>
+                <a:ea typeface="Noto Sans KR" pitchFamily="34" charset="-122"/>
+                <a:cs typeface="Noto Sans KR" pitchFamily="34" charset="-120"/>
+              </a:rPr>
+              <a:t>화면과 인쇄 활동지로 참여</a:t>
+            </a:r>
+            <a:endParaRPr lang="en-US" sz="850" dirty="0"/>
+          </a:p>
+        </p:txBody>
+      </p:sp>
+      <p:sp>
+        <p:nvSpPr>
+          <p:cNvPr id="68" name="txt-1-28"/>
+          <p:cNvSpPr txBox="1"/>
+          <p:nvPr/>
+        </p:nvSpPr>
+        <p:spPr>
+          <a:xfrm>
+            <a:off x="5553202" y="8082280"/>
+            <a:ext cx="1679702" cy="350520"/>
+          </a:xfrm>
+          <a:prstGeom prst="rect">
+            <a:avLst/>
+          </a:prstGeom>
+          <a:noFill/>
+          <a:ln/>
+        </p:spPr>
+        <p:txBody>
+          <a:bodyPr wrap="square" lIns="0" tIns="0" rIns="0" bIns="0" rtlCol="0" anchor="t"/>
+          <a:lstStyle/>
+          <a:p>
+            <a:pPr algn="ctr" indent="0" marL="0">
+              <a:lnSpc>
+                <a:spcPts val="1200"/>
+              </a:lnSpc>
+              <a:buNone/>
+            </a:pPr>
+            <a:r>
+              <a:rPr lang="ko-KR" altLang="en-US" sz="850" dirty="0">
+                <a:solidFill>
+                  <a:srgbClr val="101D42"/>
+                </a:solidFill>
+                <a:latin typeface="Noto Sans KR" pitchFamily="34" charset="0"/>
+                <a:ea typeface="Noto Sans KR" pitchFamily="34" charset="-122"/>
+                <a:cs typeface="Noto Sans KR" pitchFamily="34" charset="-120"/>
+              </a:rPr>
+              <a:t>독서 기록 자산</a:t>
+            </a:r>
+            <a:endParaRPr lang="en-US" sz="850" dirty="0"/>
+          </a:p>
+          <a:p>
+            <a:pPr algn="ctr" indent="0" marL="0">
+              <a:lnSpc>
+                <a:spcPts val="1200"/>
+              </a:lnSpc>
+              <a:buNone/>
+            </a:pPr>
+            <a:r>
+              <a:rPr lang="ko-KR" altLang="en-US" sz="850" dirty="0">
+                <a:solidFill>
+                  <a:srgbClr val="101D42"/>
+                </a:solidFill>
+                <a:latin typeface="Noto Sans KR" pitchFamily="34" charset="0"/>
+                <a:ea typeface="Noto Sans KR" pitchFamily="34" charset="-122"/>
+                <a:cs typeface="Noto Sans KR" pitchFamily="34" charset="-120"/>
+              </a:rPr>
+              <a:t>무엇을 느끼고 달라졌는지 기록</a:t>
+            </a:r>
+            <a:endParaRPr lang="en-US" sz="850" dirty="0"/>
+          </a:p>
+        </p:txBody>
+      </p:sp>
+      <p:sp>
+        <p:nvSpPr>
+          <p:cNvPr id="69" name="txt-1-29"/>
+          <p:cNvSpPr txBox="1"/>
+          <p:nvPr/>
+        </p:nvSpPr>
+        <p:spPr>
+          <a:xfrm>
+            <a:off x="756666" y="8758047"/>
+            <a:ext cx="1141476" cy="515112"/>
+          </a:xfrm>
+          <a:prstGeom prst="rect">
+            <a:avLst/>
+          </a:prstGeom>
+          <a:noFill/>
+          <a:ln/>
+        </p:spPr>
+        <p:txBody>
+          <a:bodyPr wrap="square" lIns="0" tIns="0" rIns="0" bIns="0" rtlCol="0" anchor="t"/>
+          <a:lstStyle/>
+          <a:p>
+            <a:pPr algn="l" indent="0" marL="0">
+              <a:lnSpc>
+                <a:spcPts val="3120"/>
+              </a:lnSpc>
+              <a:buNone/>
+            </a:pPr>
+            <a:r>
+              <a:rPr lang="ko-KR" altLang="en-US" sz="2400" dirty="0">
+                <a:solidFill>
+                  <a:srgbClr val="15543C"/>
+                </a:solidFill>
+                <a:latin typeface="Noto Sans KR" pitchFamily="34" charset="0"/>
+                <a:ea typeface="Noto Sans KR" pitchFamily="34" charset="-122"/>
+                <a:cs typeface="Noto Sans KR" pitchFamily="34" charset="-120"/>
+              </a:rPr>
+              <a:t>72학급</a:t>
+            </a:r>
+            <a:endParaRPr lang="en-US" sz="2400" dirty="0"/>
+          </a:p>
+        </p:txBody>
+      </p:sp>
+      <p:sp>
+        <p:nvSpPr>
+          <p:cNvPr id="70" name="txt-1-30"/>
+          <p:cNvSpPr txBox="1"/>
+          <p:nvPr/>
+        </p:nvSpPr>
+        <p:spPr>
+          <a:xfrm>
+            <a:off x="2399538" y="8758047"/>
+            <a:ext cx="1298448" cy="515112"/>
+          </a:xfrm>
+          <a:prstGeom prst="rect">
+            <a:avLst/>
+          </a:prstGeom>
+          <a:noFill/>
+          <a:ln/>
+        </p:spPr>
+        <p:txBody>
+          <a:bodyPr wrap="square" lIns="0" tIns="0" rIns="0" bIns="0" rtlCol="0" anchor="t"/>
+          <a:lstStyle/>
+          <a:p>
+            <a:pPr algn="l" indent="0" marL="0">
+              <a:lnSpc>
+                <a:spcPts val="3120"/>
+              </a:lnSpc>
+              <a:buNone/>
+            </a:pPr>
+            <a:r>
+              <a:rPr lang="ko-KR" altLang="en-US" sz="2400" dirty="0">
+                <a:solidFill>
+                  <a:srgbClr val="15543C"/>
+                </a:solidFill>
+                <a:latin typeface="Noto Sans KR" pitchFamily="34" charset="0"/>
+                <a:ea typeface="Noto Sans KR" pitchFamily="34" charset="-122"/>
+                <a:cs typeface="Noto Sans KR" pitchFamily="34" charset="-120"/>
+              </a:rPr>
+              <a:t>1,196명</a:t>
+            </a:r>
+            <a:endParaRPr lang="en-US" sz="2400" dirty="0"/>
+          </a:p>
+        </p:txBody>
+      </p:sp>
+      <p:sp>
+        <p:nvSpPr>
+          <p:cNvPr id="71" name="txt-1-31"/>
+          <p:cNvSpPr txBox="1"/>
+          <p:nvPr/>
+        </p:nvSpPr>
+        <p:spPr>
+          <a:xfrm>
+            <a:off x="4029202" y="8758047"/>
+            <a:ext cx="1484503" cy="515112"/>
+          </a:xfrm>
+          <a:prstGeom prst="rect">
+            <a:avLst/>
+          </a:prstGeom>
+          <a:noFill/>
+          <a:ln/>
+        </p:spPr>
+        <p:txBody>
+          <a:bodyPr wrap="square" lIns="0" tIns="0" rIns="0" bIns="0" rtlCol="0" anchor="t"/>
+          <a:lstStyle/>
+          <a:p>
+            <a:pPr algn="l" indent="0" marL="0">
+              <a:lnSpc>
+                <a:spcPts val="3120"/>
+              </a:lnSpc>
+              <a:buNone/>
+            </a:pPr>
+            <a:r>
+              <a:rPr lang="ko-KR" altLang="en-US" sz="2400" dirty="0">
+                <a:solidFill>
+                  <a:srgbClr val="15543C"/>
+                </a:solidFill>
+                <a:latin typeface="Noto Sans KR" pitchFamily="34" charset="0"/>
+                <a:ea typeface="Noto Sans KR" pitchFamily="34" charset="-122"/>
+                <a:cs typeface="Noto Sans KR" pitchFamily="34" charset="-120"/>
+              </a:rPr>
+              <a:t>26,924건</a:t>
+            </a:r>
+            <a:endParaRPr lang="en-US" sz="2400" dirty="0"/>
+          </a:p>
+        </p:txBody>
+      </p:sp>
+      <p:sp>
+        <p:nvSpPr>
+          <p:cNvPr id="72" name="txt-1-32"/>
+          <p:cNvSpPr txBox="1"/>
+          <p:nvPr/>
+        </p:nvSpPr>
+        <p:spPr>
+          <a:xfrm>
+            <a:off x="5827903" y="8758047"/>
+            <a:ext cx="1298448" cy="515112"/>
+          </a:xfrm>
+          <a:prstGeom prst="rect">
+            <a:avLst/>
+          </a:prstGeom>
+          <a:noFill/>
+          <a:ln/>
+        </p:spPr>
+        <p:txBody>
+          <a:bodyPr wrap="square" lIns="0" tIns="0" rIns="0" bIns="0" rtlCol="0" anchor="t"/>
+          <a:lstStyle/>
+          <a:p>
+            <a:pPr algn="l" indent="0" marL="0">
+              <a:lnSpc>
+                <a:spcPts val="3120"/>
+              </a:lnSpc>
+              <a:buNone/>
+            </a:pPr>
+            <a:r>
+              <a:rPr lang="ko-KR" altLang="en-US" sz="2400" dirty="0">
+                <a:solidFill>
+                  <a:srgbClr val="15543C"/>
+                </a:solidFill>
+                <a:latin typeface="Noto Sans KR" pitchFamily="34" charset="0"/>
+                <a:ea typeface="Noto Sans KR" pitchFamily="34" charset="-122"/>
+                <a:cs typeface="Noto Sans KR" pitchFamily="34" charset="-120"/>
+              </a:rPr>
+              <a:t>1,816건</a:t>
+            </a:r>
+            <a:endParaRPr lang="en-US" sz="2400" dirty="0"/>
+          </a:p>
+        </p:txBody>
+      </p:sp>
+      <p:sp>
+        <p:nvSpPr>
+          <p:cNvPr id="73" name="txt-1-33"/>
+          <p:cNvSpPr txBox="1"/>
+          <p:nvPr/>
+        </p:nvSpPr>
+        <p:spPr>
+          <a:xfrm>
+            <a:off x="945896" y="9116314"/>
+            <a:ext cx="725043" cy="225425"/>
+          </a:xfrm>
+          <a:prstGeom prst="rect">
+            <a:avLst/>
+          </a:prstGeom>
+          <a:noFill/>
+          <a:ln/>
+        </p:spPr>
+        <p:txBody>
+          <a:bodyPr wrap="square" lIns="0" tIns="0" rIns="0" bIns="0" rtlCol="0" anchor="t"/>
+          <a:lstStyle/>
+          <a:p>
+            <a:pPr algn="l" indent="0" marL="0">
+              <a:lnSpc>
+                <a:spcPts val="1365"/>
+              </a:lnSpc>
+              <a:buNone/>
+            </a:pPr>
+            <a:r>
+              <a:rPr lang="ko-KR" altLang="en-US" sz="1050" dirty="0">
+                <a:solidFill>
+                  <a:srgbClr val="101D42"/>
+                </a:solidFill>
+                <a:latin typeface="Noto Sans KR" pitchFamily="34" charset="0"/>
+                <a:ea typeface="Noto Sans KR" pitchFamily="34" charset="-122"/>
+                <a:cs typeface="Noto Sans KR" pitchFamily="34" charset="-120"/>
+              </a:rPr>
+              <a:t>운영 학급</a:t>
+            </a:r>
+            <a:endParaRPr lang="en-US" sz="1050" dirty="0"/>
+          </a:p>
+        </p:txBody>
+      </p:sp>
+      <p:sp>
+        <p:nvSpPr>
+          <p:cNvPr id="74" name="txt-1-34"/>
+          <p:cNvSpPr txBox="1"/>
+          <p:nvPr/>
+        </p:nvSpPr>
+        <p:spPr>
+          <a:xfrm>
+            <a:off x="2522474" y="9116314"/>
+            <a:ext cx="1027811" cy="225425"/>
+          </a:xfrm>
+          <a:prstGeom prst="rect">
+            <a:avLst/>
+          </a:prstGeom>
+          <a:noFill/>
+          <a:ln/>
+        </p:spPr>
+        <p:txBody>
+          <a:bodyPr wrap="square" lIns="0" tIns="0" rIns="0" bIns="0" rtlCol="0" anchor="t"/>
+          <a:lstStyle/>
+          <a:p>
+            <a:pPr algn="l" indent="0" marL="0">
+              <a:lnSpc>
+                <a:spcPts val="1365"/>
+              </a:lnSpc>
+              <a:buNone/>
+            </a:pPr>
+            <a:r>
+              <a:rPr lang="ko-KR" altLang="en-US" sz="1050" dirty="0">
+                <a:solidFill>
+                  <a:srgbClr val="101D42"/>
+                </a:solidFill>
+                <a:latin typeface="Noto Sans KR" pitchFamily="34" charset="0"/>
+                <a:ea typeface="Noto Sans KR" pitchFamily="34" charset="-122"/>
+                <a:cs typeface="Noto Sans KR" pitchFamily="34" charset="-120"/>
+              </a:rPr>
+              <a:t>실제 사용 학생</a:t>
+            </a:r>
+            <a:endParaRPr lang="en-US" sz="1050" dirty="0"/>
+          </a:p>
+        </p:txBody>
+      </p:sp>
+      <p:sp>
+        <p:nvSpPr>
+          <p:cNvPr id="75" name="txt-1-35"/>
+          <p:cNvSpPr txBox="1"/>
+          <p:nvPr/>
+        </p:nvSpPr>
+        <p:spPr>
+          <a:xfrm>
+            <a:off x="4374261" y="9116314"/>
+            <a:ext cx="725043" cy="225425"/>
+          </a:xfrm>
+          <a:prstGeom prst="rect">
+            <a:avLst/>
+          </a:prstGeom>
+          <a:noFill/>
+          <a:ln/>
+        </p:spPr>
+        <p:txBody>
+          <a:bodyPr wrap="square" lIns="0" tIns="0" rIns="0" bIns="0" rtlCol="0" anchor="t"/>
+          <a:lstStyle/>
+          <a:p>
+            <a:pPr algn="l" indent="0" marL="0">
+              <a:lnSpc>
+                <a:spcPts val="1365"/>
+              </a:lnSpc>
+              <a:buNone/>
+            </a:pPr>
+            <a:r>
+              <a:rPr lang="ko-KR" altLang="en-US" sz="1050" dirty="0">
+                <a:solidFill>
+                  <a:srgbClr val="101D42"/>
+                </a:solidFill>
+                <a:latin typeface="Noto Sans KR" pitchFamily="34" charset="0"/>
+                <a:ea typeface="Noto Sans KR" pitchFamily="34" charset="-122"/>
+                <a:cs typeface="Noto Sans KR" pitchFamily="34" charset="-120"/>
+              </a:rPr>
+              <a:t>완독 기록</a:t>
+            </a:r>
+            <a:endParaRPr lang="en-US" sz="1050" dirty="0"/>
+          </a:p>
+        </p:txBody>
+      </p:sp>
+      <p:sp>
+        <p:nvSpPr>
+          <p:cNvPr id="76" name="txt-1-36"/>
+          <p:cNvSpPr txBox="1"/>
+          <p:nvPr/>
+        </p:nvSpPr>
+        <p:spPr>
+          <a:xfrm>
+            <a:off x="5965952" y="9116314"/>
+            <a:ext cx="994918" cy="225425"/>
+          </a:xfrm>
+          <a:prstGeom prst="rect">
+            <a:avLst/>
+          </a:prstGeom>
+          <a:noFill/>
+          <a:ln/>
+        </p:spPr>
+        <p:txBody>
+          <a:bodyPr wrap="square" lIns="0" tIns="0" rIns="0" bIns="0" rtlCol="0" anchor="t"/>
+          <a:lstStyle/>
+          <a:p>
+            <a:pPr algn="l" indent="0" marL="0">
+              <a:lnSpc>
+                <a:spcPts val="1365"/>
+              </a:lnSpc>
+              <a:buNone/>
+            </a:pPr>
+            <a:r>
+              <a:rPr lang="ko-KR" altLang="en-US" sz="1050" dirty="0">
+                <a:solidFill>
+                  <a:srgbClr val="101D42"/>
+                </a:solidFill>
+                <a:latin typeface="Noto Sans KR" pitchFamily="34" charset="0"/>
+                <a:ea typeface="Noto Sans KR" pitchFamily="34" charset="-122"/>
+                <a:cs typeface="Noto Sans KR" pitchFamily="34" charset="-120"/>
+              </a:rPr>
+              <a:t>독후활동 제출</a:t>
+            </a:r>
+            <a:endParaRPr lang="en-US" sz="1050" dirty="0"/>
+          </a:p>
+        </p:txBody>
+      </p:sp>
+      <p:sp>
+        <p:nvSpPr>
+          <p:cNvPr id="77" name="txt-1-37"/>
+          <p:cNvSpPr txBox="1"/>
+          <p:nvPr/>
+        </p:nvSpPr>
+        <p:spPr>
+          <a:xfrm>
+            <a:off x="2012823" y="9514586"/>
+            <a:ext cx="3532124" cy="214630"/>
+          </a:xfrm>
+          <a:prstGeom prst="rect">
+            <a:avLst/>
+          </a:prstGeom>
+          <a:noFill/>
+          <a:ln/>
+        </p:spPr>
+        <p:txBody>
+          <a:bodyPr wrap="square" lIns="0" tIns="0" rIns="0" bIns="0" rtlCol="0" anchor="t"/>
+          <a:lstStyle/>
+          <a:p>
+            <a:pPr algn="ctr" indent="0" marL="0">
+              <a:lnSpc>
+                <a:spcPts val="1300"/>
+              </a:lnSpc>
+              <a:buNone/>
+            </a:pPr>
+            <a:r>
+              <a:rPr lang="ko-KR" altLang="en-US" sz="1000" dirty="0">
+                <a:solidFill>
+                  <a:srgbClr val="101D42"/>
+                </a:solidFill>
+                <a:latin typeface="Noto Sans KR" pitchFamily="34" charset="0"/>
+                <a:ea typeface="Noto Sans KR" pitchFamily="34" charset="-122"/>
+                <a:cs typeface="Noto Sans KR" pitchFamily="34" charset="-120"/>
+              </a:rPr>
+              <a:t>2026. 9. 20.~10. 21. 선도교사단 온오프라인 운영 종합</a:t>
+            </a:r>
+            <a:endParaRPr lang="en-US" sz="1000" dirty="0"/>
+          </a:p>
+        </p:txBody>
+      </p:sp>
+      <p:sp>
+        <p:nvSpPr>
+          <p:cNvPr id="78" name="txt-1-38"/>
+          <p:cNvSpPr txBox="1"/>
+          <p:nvPr/>
+        </p:nvSpPr>
+        <p:spPr>
+          <a:xfrm>
+            <a:off x="1502410" y="9843897"/>
+            <a:ext cx="4554855" cy="572516"/>
+          </a:xfrm>
+          <a:prstGeom prst="rect">
+            <a:avLst/>
+          </a:prstGeom>
+          <a:noFill/>
+          <a:ln/>
+        </p:spPr>
+        <p:txBody>
+          <a:bodyPr wrap="square" lIns="0" tIns="0" rIns="0" bIns="0" rtlCol="0" anchor="t"/>
+          <a:lstStyle/>
+          <a:p>
+            <a:pPr algn="ctr" indent="0" marL="0">
+              <a:lnSpc>
+                <a:spcPts val="1960"/>
+              </a:lnSpc>
+              <a:buNone/>
+            </a:pPr>
+            <a:r>
+              <a:rPr lang="ko-KR" altLang="en-US" sz="1400" dirty="0">
+                <a:solidFill>
+                  <a:srgbClr val="101D42"/>
+                </a:solidFill>
+                <a:latin typeface="Noto Serif KR Black" pitchFamily="34" charset="0"/>
+                <a:ea typeface="Noto Serif KR Black" pitchFamily="34" charset="-122"/>
+                <a:cs typeface="Noto Serif KR Black" pitchFamily="34" charset="-120"/>
+              </a:rPr>
+              <a:t>경남의 모든 학생이 읽고 생각하는 기본을 갖추도록,</a:t>
+            </a:r>
+            <a:endParaRPr lang="en-US" sz="1400" dirty="0"/>
+          </a:p>
+          <a:p>
+            <a:pPr algn="ctr" indent="0" marL="0">
+              <a:lnSpc>
+                <a:spcPts val="1960"/>
+              </a:lnSpc>
+              <a:buNone/>
+            </a:pPr>
+            <a:r>
+              <a:rPr lang="ko-KR" altLang="en-US" sz="1400" dirty="0">
+                <a:solidFill>
+                  <a:srgbClr val="15543C"/>
+                </a:solidFill>
+                <a:latin typeface="Noto Serif KR Black" pitchFamily="34" charset="0"/>
+                <a:ea typeface="Noto Serif KR Black" pitchFamily="34" charset="-122"/>
+                <a:cs typeface="Noto Serif KR Black" pitchFamily="34" charset="-120"/>
+              </a:rPr>
+              <a:t>학교 독서교육의 지속적인 운영을 지원해 주십시오.</a:t>
+            </a:r>
+            <a:endParaRPr lang="en-US" sz="1400" dirty="0"/>
+          </a:p>
+        </p:txBody>
+      </p:sp>
+      <p:sp>
+        <p:nvSpPr>
+          <p:cNvPr id="79" name="txt-1-39"/>
+          <p:cNvSpPr txBox="1"/>
+          <p:nvPr/>
+        </p:nvSpPr>
+        <p:spPr>
+          <a:xfrm>
+            <a:off x="304800" y="10510393"/>
+            <a:ext cx="6350000" cy="139446"/>
+          </a:xfrm>
+          <a:prstGeom prst="rect">
+            <a:avLst/>
+          </a:prstGeom>
+          <a:noFill/>
+          <a:ln/>
+        </p:spPr>
+        <p:txBody>
+          <a:bodyPr wrap="square" lIns="0" tIns="0" rIns="0" bIns="0" rtlCol="0" anchor="t"/>
+          <a:lstStyle/>
+          <a:p>
+            <a:pPr algn="l" indent="0" marL="0">
+              <a:lnSpc>
+                <a:spcPts val="845"/>
+              </a:lnSpc>
+              <a:buNone/>
+            </a:pPr>
+            <a:r>
+              <a:rPr lang="ko-KR" altLang="en-US" sz="650" dirty="0">
+                <a:solidFill>
+                  <a:srgbClr val="43516A"/>
+                </a:solidFill>
+                <a:latin typeface="Noto Sans KR" pitchFamily="34" charset="0"/>
+                <a:ea typeface="Noto Sans KR" pitchFamily="34" charset="-122"/>
+                <a:cs typeface="Noto Sans KR" pitchFamily="34" charset="-120"/>
+              </a:rPr>
+              <a:t>* Kreijkes 외(2026), Computers &amp; Education 243, 105514. 중등학생 연구.</a:t>
+            </a:r>
+            <a:endParaRPr lang="en-US" sz="650" dirty="0"/>
+          </a:p>
+        </p:txBody>
+      </p:sp>
+    </p:spTree>
+  </p:cSld>
+  <p:clrMapOvr>
+    <a:masterClrMapping/>
+  </p:clrMapOvr>
+</p:sld>
+</file>
+
+<file path=ppt/slides/slide2.xml><?xml version="1.0" encoding="utf-8"?>
+<p:sld xmlns:a="http://schemas.openxmlformats.org/drawingml/2006/main" xmlns:r="http://schemas.openxmlformats.org/officeDocument/2006/relationships" xmlns:p="http://schemas.openxmlformats.org/presentationml/2006/main">
+  <p:cSld name="Slide 2">
+    <p:bg>
+      <p:bgPr>
+        <a:solidFill>
+          <a:srgbClr val="FFFFFF"/>
+        </a:solidFill>
+      </p:bgPr>
+    </p:bg>
+    <p:spTree>
+      <p:nvGrpSpPr>
+        <p:cNvPr id="1" name=""/>
+        <p:cNvGrpSpPr/>
+        <p:nvPr/>
+      </p:nvGrpSpPr>
+      <p:grpSpPr>
+        <a:xfrm>
+          <a:off x="0" y="0"/>
+          <a:ext cx="0" cy="0"/>
+          <a:chOff x="0" y="0"/>
+          <a:chExt cx="0" cy="0"/>
+        </a:xfrm>
+      </p:grpSpPr>
+      <p:sp>
+        <p:nvSpPr>
+          <p:cNvPr id="2" name="Shape 0"/>
+          <p:cNvSpPr/>
+          <p:nvPr/>
+        </p:nvSpPr>
+        <p:spPr>
+          <a:xfrm>
+            <a:off x="3196082" y="495300"/>
+            <a:ext cx="3982974" cy="0"/>
+          </a:xfrm>
+          <a:prstGeom prst="line">
+            <a:avLst/>
+          </a:prstGeom>
+          <a:noFill/>
+          <a:ln w="7620">
+            <a:solidFill>
+              <a:srgbClr val="D59B32"/>
+            </a:solidFill>
+            <a:prstDash val="solid"/>
+          </a:ln>
+        </p:spPr>
+      </p:sp>
+      <p:sp>
+        <p:nvSpPr>
+          <p:cNvPr id="3" name="Shape 1"/>
+          <p:cNvSpPr/>
+          <p:nvPr/>
+        </p:nvSpPr>
+        <p:spPr>
+          <a:xfrm>
+            <a:off x="407416" y="2578100"/>
+            <a:ext cx="277876" cy="304292"/>
+          </a:xfrm>
+          <a:custGeom>
+            <a:avLst/>
+            <a:gdLst/>
+            <a:ahLst/>
+            <a:cxnLst/>
+            <a:rect l="l" t="t" r="r" b="b"/>
+            <a:pathLst>
+              <a:path w="277876" h="304292">
+                <a:moveTo>
+                  <a:pt x="132296" y="304267"/>
+                </a:moveTo>
+                <a:lnTo>
+                  <a:pt x="132296" y="145517"/>
+                </a:lnTo>
+                <a:cubicBezTo>
+                  <a:pt x="66142" y="171983"/>
+                  <a:pt x="0" y="145517"/>
+                  <a:pt x="0" y="39688"/>
+                </a:cubicBezTo>
+                <a:cubicBezTo>
+                  <a:pt x="105829" y="26454"/>
+                  <a:pt x="132296" y="79375"/>
+                  <a:pt x="132296" y="145517"/>
+                </a:cubicBezTo>
+                <a:cubicBezTo>
+                  <a:pt x="132296" y="39688"/>
+                  <a:pt x="211671" y="0"/>
+                  <a:pt x="277813" y="13233"/>
+                </a:cubicBezTo>
+                <a:cubicBezTo>
+                  <a:pt x="277813" y="105829"/>
+                  <a:pt x="211671" y="158750"/>
+                  <a:pt x="132296" y="145517"/>
+                </a:cubicBezTo>
+              </a:path>
+            </a:pathLst>
+          </a:custGeom>
+          <a:solidFill>
+            <a:srgbClr val="D59B32"/>
+          </a:solidFill>
+          <a:ln/>
+        </p:spPr>
+      </p:sp>
+      <p:sp>
+        <p:nvSpPr>
+          <p:cNvPr id="4" name="Shape 2"/>
+          <p:cNvSpPr/>
+          <p:nvPr/>
+        </p:nvSpPr>
+        <p:spPr>
+          <a:xfrm>
+            <a:off x="3266059" y="2755900"/>
+            <a:ext cx="3912997" cy="0"/>
+          </a:xfrm>
+          <a:prstGeom prst="line">
+            <a:avLst/>
+          </a:prstGeom>
+          <a:noFill/>
+          <a:ln w="7620">
+            <a:solidFill>
+              <a:srgbClr val="D59B32"/>
+            </a:solidFill>
+            <a:prstDash val="solid"/>
+          </a:ln>
+        </p:spPr>
+      </p:sp>
+      <p:sp>
+        <p:nvSpPr>
+          <p:cNvPr id="5" name="Shape 3"/>
+          <p:cNvSpPr/>
+          <p:nvPr/>
+        </p:nvSpPr>
+        <p:spPr>
+          <a:xfrm>
+            <a:off x="433959" y="4470908"/>
+            <a:ext cx="211709" cy="211709"/>
+          </a:xfrm>
+          <a:custGeom>
+            <a:avLst/>
+            <a:gdLst/>
+            <a:ahLst/>
+            <a:cxnLst/>
+            <a:rect l="l" t="t" r="r" b="b"/>
+            <a:pathLst>
+              <a:path w="211709" h="211709">
+                <a:moveTo>
+                  <a:pt x="211671" y="105829"/>
+                </a:moveTo>
+                <a:cubicBezTo>
+                  <a:pt x="211671" y="47384"/>
+                  <a:pt x="164287" y="0"/>
+                  <a:pt x="105829" y="0"/>
+                </a:cubicBezTo>
+                <a:cubicBezTo>
+                  <a:pt x="47384" y="0"/>
+                  <a:pt x="0" y="47384"/>
+                  <a:pt x="0" y="105829"/>
+                </a:cubicBezTo>
+                <a:cubicBezTo>
+                  <a:pt x="0" y="164287"/>
+                  <a:pt x="47384" y="211671"/>
+                  <a:pt x="105829" y="211671"/>
+                </a:cubicBezTo>
+                <a:cubicBezTo>
+                  <a:pt x="164287" y="211671"/>
+                  <a:pt x="211671" y="164287"/>
+                  <a:pt x="211671" y="105829"/>
+                </a:cubicBezTo>
+              </a:path>
+            </a:pathLst>
+          </a:custGeom>
+          <a:ln w="21209">
+            <a:solidFill>
+              <a:srgbClr val="D59B32"/>
+            </a:solidFill>
+            <a:prstDash val="solid"/>
+          </a:ln>
+        </p:spPr>
+      </p:sp>
+      <p:sp>
+        <p:nvSpPr>
+          <p:cNvPr id="6" name="Shape 4"/>
+          <p:cNvSpPr/>
+          <p:nvPr/>
+        </p:nvSpPr>
+        <p:spPr>
+          <a:xfrm>
+            <a:off x="486791" y="4669409"/>
+            <a:ext cx="0" cy="52832"/>
+          </a:xfrm>
+          <a:prstGeom prst="line">
+            <a:avLst/>
+          </a:prstGeom>
+          <a:noFill/>
+          <a:ln w="21209">
+            <a:solidFill>
+              <a:srgbClr val="D59B32"/>
+            </a:solidFill>
+            <a:prstDash val="solid"/>
+          </a:ln>
+        </p:spPr>
+      </p:sp>
+      <p:sp>
+        <p:nvSpPr>
+          <p:cNvPr id="7" name="Shape 5"/>
+          <p:cNvSpPr/>
+          <p:nvPr/>
+        </p:nvSpPr>
+        <p:spPr>
+          <a:xfrm>
+            <a:off x="592709" y="4669409"/>
+            <a:ext cx="0" cy="52832"/>
+          </a:xfrm>
+          <a:prstGeom prst="line">
+            <a:avLst/>
+          </a:prstGeom>
+          <a:noFill/>
+          <a:ln w="21209">
+            <a:solidFill>
+              <a:srgbClr val="D59B32"/>
+            </a:solidFill>
+            <a:prstDash val="solid"/>
+          </a:ln>
+        </p:spPr>
+      </p:sp>
+      <p:sp>
+        <p:nvSpPr>
+          <p:cNvPr id="8" name="Shape 6"/>
+          <p:cNvSpPr/>
+          <p:nvPr/>
+        </p:nvSpPr>
+        <p:spPr>
+          <a:xfrm>
+            <a:off x="486791" y="4722241"/>
+            <a:ext cx="105918" cy="0"/>
+          </a:xfrm>
+          <a:prstGeom prst="line">
+            <a:avLst/>
+          </a:prstGeom>
+          <a:noFill/>
+          <a:ln w="21209">
+            <a:solidFill>
+              <a:srgbClr val="D59B32"/>
+            </a:solidFill>
+            <a:prstDash val="solid"/>
+          </a:ln>
+        </p:spPr>
+      </p:sp>
+      <p:sp>
+        <p:nvSpPr>
+          <p:cNvPr id="9" name="Shape 7"/>
+          <p:cNvSpPr/>
+          <p:nvPr/>
+        </p:nvSpPr>
+        <p:spPr>
+          <a:xfrm>
+            <a:off x="500126" y="4761992"/>
+            <a:ext cx="79375" cy="0"/>
+          </a:xfrm>
+          <a:prstGeom prst="line">
+            <a:avLst/>
+          </a:prstGeom>
+          <a:noFill/>
+          <a:ln w="21209">
+            <a:solidFill>
+              <a:srgbClr val="D59B32"/>
+            </a:solidFill>
+            <a:prstDash val="solid"/>
+          </a:ln>
+        </p:spPr>
+      </p:sp>
+      <p:sp>
+        <p:nvSpPr>
+          <p:cNvPr id="10" name="Shape 8"/>
+          <p:cNvSpPr/>
+          <p:nvPr/>
+        </p:nvSpPr>
+        <p:spPr>
+          <a:xfrm>
+            <a:off x="539750" y="4576699"/>
+            <a:ext cx="0" cy="132334"/>
+          </a:xfrm>
+          <a:prstGeom prst="line">
+            <a:avLst/>
+          </a:prstGeom>
+          <a:noFill/>
+          <a:ln w="21209">
+            <a:solidFill>
+              <a:srgbClr val="D59B32"/>
+            </a:solidFill>
+            <a:prstDash val="solid"/>
+          </a:ln>
+        </p:spPr>
+      </p:sp>
+      <p:sp>
+        <p:nvSpPr>
+          <p:cNvPr id="11" name="Shape 9"/>
+          <p:cNvSpPr/>
+          <p:nvPr/>
+        </p:nvSpPr>
+        <p:spPr>
+          <a:xfrm>
+            <a:off x="500126" y="4537075"/>
+            <a:ext cx="39624" cy="39624"/>
+          </a:xfrm>
+          <a:prstGeom prst="line">
+            <a:avLst/>
+          </a:prstGeom>
+          <a:noFill/>
+          <a:ln w="21209">
+            <a:solidFill>
+              <a:srgbClr val="D59B32"/>
+            </a:solidFill>
+            <a:prstDash val="solid"/>
+          </a:ln>
+        </p:spPr>
+      </p:sp>
+      <p:sp>
+        <p:nvSpPr>
+          <p:cNvPr id="12" name="Shape 10"/>
+          <p:cNvSpPr/>
+          <p:nvPr/>
+        </p:nvSpPr>
+        <p:spPr>
+          <a:xfrm>
+            <a:off x="539750" y="4537075"/>
+            <a:ext cx="39751" cy="39624"/>
+          </a:xfrm>
+          <a:prstGeom prst="line">
+            <a:avLst/>
+          </a:prstGeom>
+          <a:noFill/>
+          <a:ln w="21209">
+            <a:solidFill>
+              <a:srgbClr val="D59B32"/>
+            </a:solidFill>
+            <a:prstDash val="solid"/>
+          </a:ln>
+        </p:spPr>
+      </p:sp>
+      <p:sp>
+        <p:nvSpPr>
+          <p:cNvPr id="13" name="Shape 11"/>
+          <p:cNvSpPr/>
+          <p:nvPr/>
+        </p:nvSpPr>
+        <p:spPr>
+          <a:xfrm>
+            <a:off x="6465697" y="4635500"/>
+            <a:ext cx="713359" cy="0"/>
+          </a:xfrm>
+          <a:prstGeom prst="line">
+            <a:avLst/>
+          </a:prstGeom>
+          <a:noFill/>
+          <a:ln w="7620">
+            <a:solidFill>
+              <a:srgbClr val="D59B32"/>
+            </a:solidFill>
+            <a:prstDash val="solid"/>
+          </a:ln>
+        </p:spPr>
+      </p:sp>
+      <p:sp>
+        <p:nvSpPr>
+          <p:cNvPr id="14" name="Shape 12"/>
+          <p:cNvSpPr/>
+          <p:nvPr/>
+        </p:nvSpPr>
+        <p:spPr>
+          <a:xfrm>
+            <a:off x="394208" y="6362192"/>
+            <a:ext cx="291084" cy="304292"/>
+          </a:xfrm>
+          <a:custGeom>
+            <a:avLst/>
+            <a:gdLst/>
+            <a:ahLst/>
+            <a:cxnLst/>
+            <a:rect l="l" t="t" r="r" b="b"/>
+            <a:pathLst>
+              <a:path w="291084" h="304292">
+                <a:moveTo>
+                  <a:pt x="145517" y="304267"/>
+                </a:moveTo>
+                <a:cubicBezTo>
+                  <a:pt x="105829" y="251358"/>
+                  <a:pt x="0" y="198438"/>
+                  <a:pt x="0" y="105829"/>
+                </a:cubicBezTo>
+                <a:cubicBezTo>
+                  <a:pt x="0" y="0"/>
+                  <a:pt x="119063" y="0"/>
+                  <a:pt x="145517" y="79375"/>
+                </a:cubicBezTo>
+                <a:cubicBezTo>
+                  <a:pt x="171983" y="0"/>
+                  <a:pt x="291046" y="0"/>
+                  <a:pt x="291046" y="105829"/>
+                </a:cubicBezTo>
+                <a:cubicBezTo>
+                  <a:pt x="291046" y="198438"/>
+                  <a:pt x="185204" y="251358"/>
+                  <a:pt x="145517" y="304267"/>
+                </a:cubicBezTo>
+              </a:path>
+            </a:pathLst>
+          </a:custGeom>
+          <a:solidFill>
+            <a:srgbClr val="D59B32"/>
+          </a:solidFill>
+          <a:ln/>
+        </p:spPr>
+      </p:sp>
+      <p:sp>
+        <p:nvSpPr>
+          <p:cNvPr id="15" name="Shape 13"/>
+          <p:cNvSpPr/>
+          <p:nvPr/>
+        </p:nvSpPr>
+        <p:spPr>
+          <a:xfrm>
+            <a:off x="4106037" y="6553200"/>
+            <a:ext cx="3073019" cy="0"/>
+          </a:xfrm>
+          <a:prstGeom prst="line">
+            <a:avLst/>
+          </a:prstGeom>
+          <a:noFill/>
+          <a:ln w="7620">
+            <a:solidFill>
+              <a:srgbClr val="D59B32"/>
+            </a:solidFill>
+            <a:prstDash val="solid"/>
+          </a:ln>
+        </p:spPr>
+      </p:sp>
+      <p:sp>
+        <p:nvSpPr>
+          <p:cNvPr id="16" name="Shape 14"/>
+          <p:cNvSpPr/>
+          <p:nvPr/>
+        </p:nvSpPr>
+        <p:spPr>
+          <a:xfrm>
+            <a:off x="317500" y="9232900"/>
+            <a:ext cx="6925056" cy="889000"/>
+          </a:xfrm>
+          <a:prstGeom prst="roundRect">
+            <a:avLst>
+              <a:gd name="adj" fmla="val 11429"/>
+            </a:avLst>
+          </a:prstGeom>
+          <a:solidFill>
+            <a:srgbClr val="F0F5EF"/>
+          </a:solidFill>
+          <a:ln/>
+        </p:spPr>
+      </p:sp>
+      <p:sp>
+        <p:nvSpPr>
+          <p:cNvPr id="17" name="Shape 15"/>
+          <p:cNvSpPr/>
+          <p:nvPr/>
+        </p:nvSpPr>
+        <p:spPr>
+          <a:xfrm>
+            <a:off x="381000" y="10414000"/>
+            <a:ext cx="2755900" cy="0"/>
+          </a:xfrm>
+          <a:prstGeom prst="line">
+            <a:avLst/>
+          </a:prstGeom>
+          <a:noFill/>
+          <a:ln w="7620">
+            <a:solidFill>
+              <a:srgbClr val="D59B32"/>
+            </a:solidFill>
+            <a:prstDash val="solid"/>
+          </a:ln>
+        </p:spPr>
+      </p:sp>
+      <p:sp>
+        <p:nvSpPr>
+          <p:cNvPr id="18" name="Shape 16"/>
+          <p:cNvSpPr/>
+          <p:nvPr/>
+        </p:nvSpPr>
+        <p:spPr>
+          <a:xfrm>
+            <a:off x="4394200" y="10414000"/>
+            <a:ext cx="2784856" cy="0"/>
+          </a:xfrm>
+          <a:prstGeom prst="line">
+            <a:avLst/>
+          </a:prstGeom>
+          <a:noFill/>
+          <a:ln w="7620">
+            <a:solidFill>
+              <a:srgbClr val="D59B32"/>
+            </a:solidFill>
+            <a:prstDash val="solid"/>
+          </a:ln>
+        </p:spPr>
+      </p:sp>
+      <p:pic>
+        <p:nvPicPr>
+          <p:cNvPr id="19" name="Image 0" descr="부기 책을 함께 읽는 두 아이">    </p:cNvPr>
+          <p:cNvPicPr>
+            <a:picLocks noChangeAspect="1"/>
+          </p:cNvPicPr>
+          <p:nvPr/>
+        </p:nvPicPr>
+        <p:blipFill>
+          <a:blip r:embed="rId1"/>
+          <a:stretch>
+            <a:fillRect/>
+          </a:stretch>
+        </p:blipFill>
+        <p:spPr>
+          <a:xfrm>
+            <a:off x="5334000" y="1003300"/>
+            <a:ext cx="1841500" cy="1264920"/>
+          </a:xfrm>
+          <a:prstGeom prst="rect">
+            <a:avLst/>
+          </a:prstGeom>
+        </p:spPr>
+      </p:pic>
+      <p:sp>
+        <p:nvSpPr>
+          <p:cNvPr id="20" name="txt-2-0"/>
+          <p:cNvSpPr txBox="1"/>
+          <p:nvPr/>
+        </p:nvSpPr>
+        <p:spPr>
+          <a:xfrm>
+            <a:off x="381000" y="296926"/>
+            <a:ext cx="3081401" cy="364871"/>
+          </a:xfrm>
+          <a:prstGeom prst="rect">
+            <a:avLst/>
+          </a:prstGeom>
+          <a:noFill/>
+          <a:ln/>
+        </p:spPr>
+        <p:txBody>
+          <a:bodyPr wrap="square" lIns="0" tIns="0" rIns="0" bIns="0" rtlCol="0" anchor="t"/>
+          <a:lstStyle/>
+          <a:p>
+            <a:pPr algn="l" indent="0" marL="0">
+              <a:lnSpc>
+                <a:spcPts val="2210"/>
+              </a:lnSpc>
+              <a:buNone/>
+            </a:pPr>
+            <a:r>
+              <a:rPr lang="ko-KR" altLang="en-US" sz="1700" dirty="0">
+                <a:solidFill>
+                  <a:srgbClr val="101D42"/>
+                </a:solidFill>
+                <a:latin typeface="Noto Serif KR Black" pitchFamily="34" charset="0"/>
+                <a:ea typeface="Noto Serif KR Black" pitchFamily="34" charset="-122"/>
+                <a:cs typeface="Noto Serif KR Black" pitchFamily="34" charset="-120"/>
+              </a:rPr>
+              <a:t>현장 초등교사가 드리는 제안</a:t>
+            </a:r>
+            <a:endParaRPr lang="en-US" sz="1700" dirty="0"/>
+          </a:p>
+        </p:txBody>
+      </p:sp>
+      <p:sp>
+        <p:nvSpPr>
+          <p:cNvPr id="21" name="txt-2-1"/>
+          <p:cNvSpPr txBox="1"/>
+          <p:nvPr/>
+        </p:nvSpPr>
+        <p:spPr>
+          <a:xfrm>
+            <a:off x="381000" y="730758"/>
+            <a:ext cx="4901565" cy="1518920"/>
+          </a:xfrm>
+          <a:prstGeom prst="rect">
+            <a:avLst/>
+          </a:prstGeom>
+          <a:noFill/>
+          <a:ln/>
+        </p:spPr>
+        <p:txBody>
+          <a:bodyPr wrap="square" lIns="0" tIns="0" rIns="0" bIns="0" rtlCol="0" anchor="t"/>
+          <a:lstStyle/>
+          <a:p>
+            <a:pPr algn="l" indent="0" marL="0">
+              <a:lnSpc>
+                <a:spcPts val="5200"/>
+              </a:lnSpc>
+              <a:buNone/>
+            </a:pPr>
+            <a:r>
+              <a:rPr lang="ko-KR" altLang="en-US" sz="3700" dirty="0">
+                <a:solidFill>
+                  <a:srgbClr val="101D42"/>
+                </a:solidFill>
+                <a:latin typeface="Noto Serif KR Black" pitchFamily="34" charset="0"/>
+                <a:ea typeface="Noto Serif KR Black" pitchFamily="34" charset="-122"/>
+                <a:cs typeface="Noto Serif KR Black" pitchFamily="34" charset="-120"/>
+              </a:rPr>
+              <a:t>스스로 생각할 기회를</a:t>
+            </a:r>
+            <a:endParaRPr lang="en-US" sz="3700" dirty="0"/>
+          </a:p>
+          <a:p>
+            <a:pPr algn="l" indent="0" marL="0">
+              <a:lnSpc>
+                <a:spcPts val="5200"/>
+              </a:lnSpc>
+              <a:buNone/>
+            </a:pPr>
+            <a:r>
+              <a:rPr lang="ko-KR" altLang="en-US" sz="3700" dirty="0">
+                <a:solidFill>
+                  <a:srgbClr val="15543C"/>
+                </a:solidFill>
+                <a:latin typeface="Noto Serif KR Black" pitchFamily="34" charset="0"/>
+                <a:ea typeface="Noto Serif KR Black" pitchFamily="34" charset="-122"/>
+                <a:cs typeface="Noto Serif KR Black" pitchFamily="34" charset="-120"/>
+              </a:rPr>
+              <a:t>잃을까 두렵습니다.</a:t>
+            </a:r>
+            <a:endParaRPr lang="en-US" sz="3700" dirty="0"/>
+          </a:p>
+        </p:txBody>
+      </p:sp>
+      <p:sp>
+        <p:nvSpPr>
+          <p:cNvPr id="22" name="txt-2-2"/>
+          <p:cNvSpPr txBox="1"/>
+          <p:nvPr/>
+        </p:nvSpPr>
+        <p:spPr>
+          <a:xfrm>
+            <a:off x="863346" y="2545207"/>
+            <a:ext cx="2655316" cy="418465"/>
+          </a:xfrm>
+          <a:prstGeom prst="rect">
+            <a:avLst/>
+          </a:prstGeom>
+          <a:noFill/>
+          <a:ln/>
+        </p:spPr>
+        <p:txBody>
+          <a:bodyPr wrap="square" lIns="0" tIns="0" rIns="0" bIns="0" rtlCol="0" anchor="t"/>
+          <a:lstStyle/>
+          <a:p>
+            <a:pPr algn="l" indent="0" marL="0">
+              <a:lnSpc>
+                <a:spcPts val="2535"/>
+              </a:lnSpc>
+              <a:buNone/>
+            </a:pPr>
+            <a:r>
+              <a:rPr lang="ko-KR" altLang="en-US" sz="1950" dirty="0">
+                <a:solidFill>
+                  <a:srgbClr val="15543C"/>
+                </a:solidFill>
+                <a:latin typeface="Noto Serif KR Black" pitchFamily="34" charset="0"/>
+                <a:ea typeface="Noto Serif KR Black" pitchFamily="34" charset="-122"/>
+                <a:cs typeface="Noto Serif KR Black" pitchFamily="34" charset="-120"/>
+              </a:rPr>
+              <a:t>교실에서 마주한 걱정</a:t>
+            </a:r>
+            <a:endParaRPr lang="en-US" sz="1950" dirty="0"/>
+          </a:p>
+        </p:txBody>
+      </p:sp>
+      <p:sp>
+        <p:nvSpPr>
+          <p:cNvPr id="23" name="txt-2-3"/>
+          <p:cNvSpPr txBox="1"/>
+          <p:nvPr/>
+        </p:nvSpPr>
+        <p:spPr>
+          <a:xfrm>
+            <a:off x="381000" y="3027680"/>
+            <a:ext cx="7140956" cy="1089660"/>
+          </a:xfrm>
+          <a:prstGeom prst="rect">
+            <a:avLst/>
+          </a:prstGeom>
+          <a:noFill/>
+          <a:ln/>
+        </p:spPr>
+        <p:txBody>
+          <a:bodyPr wrap="square" lIns="0" tIns="0" rIns="0" bIns="0" rtlCol="0" anchor="t"/>
+          <a:lstStyle/>
+          <a:p>
+            <a:pPr algn="l" indent="0" marL="0">
+              <a:lnSpc>
+                <a:spcPts val="2600"/>
+              </a:lnSpc>
+              <a:buNone/>
+            </a:pPr>
+            <a:r>
+              <a:rPr lang="ko-KR" altLang="en-US" sz="1800" dirty="0">
+                <a:solidFill>
+                  <a:srgbClr val="101D42"/>
+                </a:solidFill>
+                <a:latin typeface="Noto Sans KR" pitchFamily="34" charset="0"/>
+                <a:ea typeface="Noto Sans KR" pitchFamily="34" charset="-122"/>
+                <a:cs typeface="Noto Sans KR" pitchFamily="34" charset="-120"/>
+              </a:rPr>
+              <a:t>GPT가 요약과 답안을 대신 만드는 동안 학생은 무엇을 직접 읽고 생각할까요.</a:t>
+            </a:r>
+            <a:endParaRPr lang="en-US" sz="1800" dirty="0"/>
+          </a:p>
+          <a:p>
+            <a:pPr algn="l" indent="0" marL="0">
+              <a:lnSpc>
+                <a:spcPts val="2600"/>
+              </a:lnSpc>
+              <a:buNone/>
+            </a:pPr>
+            <a:r>
+              <a:rPr lang="ko-KR" altLang="en-US" sz="1800" dirty="0">
+                <a:solidFill>
+                  <a:srgbClr val="101D42"/>
+                </a:solidFill>
+                <a:latin typeface="Noto Sans KR" pitchFamily="34" charset="0"/>
+                <a:ea typeface="Noto Sans KR" pitchFamily="34" charset="-122"/>
+                <a:cs typeface="Noto Sans KR" pitchFamily="34" charset="-120"/>
+              </a:rPr>
+              <a:t>글을 따라 읽고, 근거를 찾고, 자기 말로 정리하는 시간을</a:t>
+            </a:r>
+            <a:endParaRPr lang="en-US" sz="1800" dirty="0"/>
+          </a:p>
+          <a:p>
+            <a:pPr algn="l" indent="0" marL="0">
+              <a:lnSpc>
+                <a:spcPts val="2600"/>
+              </a:lnSpc>
+              <a:buNone/>
+            </a:pPr>
+            <a:r>
+              <a:rPr lang="ko-KR" altLang="en-US" sz="1800" dirty="0">
+                <a:solidFill>
+                  <a:srgbClr val="101D42"/>
+                </a:solidFill>
+                <a:latin typeface="Noto Sans KR" pitchFamily="34" charset="0"/>
+                <a:ea typeface="Noto Sans KR" pitchFamily="34" charset="-122"/>
+                <a:cs typeface="Noto Sans KR" pitchFamily="34" charset="-120"/>
+              </a:rPr>
+              <a:t>교실에서 지키려는 고민으로 부기를 만들었습니다.</a:t>
+            </a:r>
+            <a:endParaRPr lang="en-US" sz="1800" dirty="0"/>
+          </a:p>
+        </p:txBody>
+      </p:sp>
+      <p:sp>
+        <p:nvSpPr>
+          <p:cNvPr id="24" name="txt-2-4"/>
+          <p:cNvSpPr txBox="1"/>
+          <p:nvPr/>
+        </p:nvSpPr>
+        <p:spPr>
+          <a:xfrm>
+            <a:off x="863346" y="4424426"/>
+            <a:ext cx="6174994" cy="418465"/>
+          </a:xfrm>
+          <a:prstGeom prst="rect">
+            <a:avLst/>
+          </a:prstGeom>
+          <a:noFill/>
+          <a:ln/>
+        </p:spPr>
+        <p:txBody>
+          <a:bodyPr wrap="square" lIns="0" tIns="0" rIns="0" bIns="0" rtlCol="0" anchor="t"/>
+          <a:lstStyle/>
+          <a:p>
+            <a:pPr algn="l" indent="0" marL="0">
+              <a:lnSpc>
+                <a:spcPts val="2535"/>
+              </a:lnSpc>
+              <a:buNone/>
+            </a:pPr>
+            <a:r>
+              <a:rPr lang="ko-KR" altLang="en-US" sz="1950" dirty="0">
+                <a:solidFill>
+                  <a:srgbClr val="15543C"/>
+                </a:solidFill>
+                <a:latin typeface="Noto Serif KR Black" pitchFamily="34" charset="0"/>
+                <a:ea typeface="Noto Serif KR Black" pitchFamily="34" charset="-122"/>
+                <a:cs typeface="Noto Serif KR Black" pitchFamily="34" charset="-120"/>
+              </a:rPr>
+              <a:t>정보가 많아도, 깊은 이해는 저절로 생기지 않습니다</a:t>
+            </a:r>
+            <a:endParaRPr lang="en-US" sz="1950" dirty="0"/>
+          </a:p>
+        </p:txBody>
+      </p:sp>
+      <p:sp>
+        <p:nvSpPr>
+          <p:cNvPr id="25" name="txt-2-5"/>
+          <p:cNvSpPr txBox="1"/>
+          <p:nvPr/>
+        </p:nvSpPr>
+        <p:spPr>
+          <a:xfrm>
+            <a:off x="381000" y="4945253"/>
+            <a:ext cx="7140956" cy="1089660"/>
+          </a:xfrm>
+          <a:prstGeom prst="rect">
+            <a:avLst/>
+          </a:prstGeom>
+          <a:noFill/>
+          <a:ln/>
+        </p:spPr>
+        <p:txBody>
+          <a:bodyPr wrap="square" lIns="0" tIns="0" rIns="0" bIns="0" rtlCol="0" anchor="t"/>
+          <a:lstStyle/>
+          <a:p>
+            <a:pPr algn="l" indent="0" marL="0">
+              <a:lnSpc>
+                <a:spcPts val="2600"/>
+              </a:lnSpc>
+              <a:buNone/>
+            </a:pPr>
+            <a:r>
+              <a:rPr lang="ko-KR" altLang="en-US" sz="1800" b="1" dirty="0">
+                <a:solidFill>
+                  <a:srgbClr val="101D42"/>
+                </a:solidFill>
+                <a:latin typeface="Noto Sans KR" pitchFamily="34" charset="0"/>
+                <a:ea typeface="Noto Sans KR" pitchFamily="34" charset="-122"/>
+                <a:cs typeface="Noto Sans KR" pitchFamily="34" charset="-120"/>
+              </a:rPr>
+              <a:t>생각할 일을 바깥 도구에 맡기는 현상을 인지 외주화라고 부릅니다.</a:t>
+            </a:r>
+            <a:endParaRPr lang="en-US" sz="1800" dirty="0"/>
+          </a:p>
+          <a:p>
+            <a:pPr algn="l" indent="0" marL="0">
+              <a:lnSpc>
+                <a:spcPts val="2600"/>
+              </a:lnSpc>
+              <a:buNone/>
+            </a:pPr>
+            <a:r>
+              <a:rPr lang="ko-KR" altLang="en-US" sz="1800" b="1" dirty="0">
+                <a:solidFill>
+                  <a:srgbClr val="101D42"/>
+                </a:solidFill>
+                <a:latin typeface="Noto Sans KR" pitchFamily="34" charset="0"/>
+                <a:ea typeface="Noto Sans KR" pitchFamily="34" charset="-122"/>
+                <a:cs typeface="Noto Sans KR" pitchFamily="34" charset="-120"/>
+              </a:rPr>
+              <a:t>AI의 답을 이해하고 검토하려면 학생 안에 낱말과 배경지식이</a:t>
+            </a:r>
+            <a:endParaRPr lang="en-US" sz="1800" dirty="0"/>
+          </a:p>
+          <a:p>
+            <a:pPr algn="l" indent="0" marL="0">
+              <a:lnSpc>
+                <a:spcPts val="2600"/>
+              </a:lnSpc>
+              <a:buNone/>
+            </a:pPr>
+            <a:r>
+              <a:rPr lang="ko-KR" altLang="en-US" sz="1800" b="1" dirty="0">
+                <a:solidFill>
+                  <a:srgbClr val="101D42"/>
+                </a:solidFill>
+                <a:latin typeface="Noto Sans KR" pitchFamily="34" charset="0"/>
+                <a:ea typeface="Noto Sans KR" pitchFamily="34" charset="-122"/>
+                <a:cs typeface="Noto Sans KR" pitchFamily="34" charset="-120"/>
+              </a:rPr>
+              <a:t>쌓여 있어야 합니다. 독서수업은 그 바탕을 마련하는 시간입니다.</a:t>
+            </a:r>
+            <a:endParaRPr lang="en-US" sz="1800" dirty="0"/>
+          </a:p>
+        </p:txBody>
+      </p:sp>
+      <p:sp>
+        <p:nvSpPr>
+          <p:cNvPr id="26" name="txt-2-6"/>
+          <p:cNvSpPr txBox="1"/>
+          <p:nvPr/>
+        </p:nvSpPr>
+        <p:spPr>
+          <a:xfrm>
+            <a:off x="863346" y="6341999"/>
+            <a:ext cx="3579368" cy="418465"/>
+          </a:xfrm>
+          <a:prstGeom prst="rect">
+            <a:avLst/>
+          </a:prstGeom>
+          <a:noFill/>
+          <a:ln/>
+        </p:spPr>
+        <p:txBody>
+          <a:bodyPr wrap="square" lIns="0" tIns="0" rIns="0" bIns="0" rtlCol="0" anchor="t"/>
+          <a:lstStyle/>
+          <a:p>
+            <a:pPr algn="l" indent="0" marL="0">
+              <a:lnSpc>
+                <a:spcPts val="2535"/>
+              </a:lnSpc>
+              <a:buNone/>
+            </a:pPr>
+            <a:r>
+              <a:rPr lang="ko-KR" altLang="en-US" sz="1950" dirty="0">
+                <a:solidFill>
+                  <a:srgbClr val="15543C"/>
+                </a:solidFill>
+                <a:latin typeface="Noto Serif KR Black" pitchFamily="34" charset="0"/>
+                <a:ea typeface="Noto Serif KR Black" pitchFamily="34" charset="-122"/>
+                <a:cs typeface="Noto Serif KR Black" pitchFamily="34" charset="-120"/>
+              </a:rPr>
+              <a:t>학교가 먼저 고민해야 할 질문</a:t>
+            </a:r>
+            <a:endParaRPr lang="en-US" sz="1950" dirty="0"/>
+          </a:p>
+        </p:txBody>
+      </p:sp>
+      <p:sp>
+        <p:nvSpPr>
+          <p:cNvPr id="27" name="txt-2-7"/>
+          <p:cNvSpPr txBox="1"/>
+          <p:nvPr/>
+        </p:nvSpPr>
+        <p:spPr>
+          <a:xfrm>
+            <a:off x="381000" y="6837045"/>
+            <a:ext cx="7140956" cy="759460"/>
+          </a:xfrm>
+          <a:prstGeom prst="rect">
+            <a:avLst/>
+          </a:prstGeom>
+          <a:noFill/>
+          <a:ln/>
+        </p:spPr>
+        <p:txBody>
+          <a:bodyPr wrap="square" lIns="0" tIns="0" rIns="0" bIns="0" rtlCol="0" anchor="t"/>
+          <a:lstStyle/>
+          <a:p>
+            <a:pPr algn="l" indent="0" marL="0">
+              <a:lnSpc>
+                <a:spcPts val="2600"/>
+              </a:lnSpc>
+              <a:buNone/>
+            </a:pPr>
+            <a:r>
+              <a:rPr lang="ko-KR" altLang="en-US" sz="1800" dirty="0">
+                <a:solidFill>
+                  <a:srgbClr val="101D42"/>
+                </a:solidFill>
+                <a:latin typeface="Noto Sans KR" pitchFamily="34" charset="0"/>
+                <a:ea typeface="Noto Sans KR" pitchFamily="34" charset="-122"/>
+                <a:cs typeface="Noto Sans KR" pitchFamily="34" charset="-120"/>
+              </a:rPr>
+              <a:t>학생은 </a:t>
+            </a:r>
+            <a:pPr algn="l" indent="0" marL="0">
+              <a:lnSpc>
+                <a:spcPts val="2600"/>
+              </a:lnSpc>
+              <a:buNone/>
+            </a:pPr>
+            <a:r>
+              <a:rPr lang="ko-KR" altLang="en-US" sz="1800" b="1" dirty="0">
                 <a:solidFill>
                   <a:srgbClr val="101D42"/>
                 </a:solidFill>
@@ -2738,56 +5315,36 @@
                   <a:srgbClr val="FFF0AD"/>
                 </a:highlight>
                 <a:latin typeface="Noto Sans KR" pitchFamily="34" charset="0"/>
-                <a:ea typeface="Noto Sans KR" pitchFamily="34" charset="-127"/>
-                <a:cs typeface="Noto Sans KR" pitchFamily="34" charset="-120"/>
-              </a:rPr>
-              <a:t>낱말 · 언어의 장벽</a:t>
-            </a:r>
-            <a:pPr algn="l" indent="0" marL="0">
-              <a:lnSpc>
-                <a:spcPts val="1850"/>
-              </a:lnSpc>
-              <a:buNone/>
-            </a:pPr>
-            <a:r>
-              <a:rPr lang="ko-KR" altLang="en-US" sz="1210" dirty="0">
-                <a:solidFill>
-                  <a:srgbClr val="101D42"/>
-                </a:solidFill>
-                <a:latin typeface="Noto Sans KR" pitchFamily="34" charset="0"/>
-                <a:ea typeface="Noto Sans KR" pitchFamily="34" charset="-127"/>
-                <a:cs typeface="Noto Sans KR" pitchFamily="34" charset="-120"/>
-              </a:rPr>
-              <a:t>과 읽기</a:t>
-            </a:r>
-            <a:endParaRPr lang="en-US" sz="1210" dirty="0"/>
-          </a:p>
-          <a:p>
-            <a:pPr algn="l" indent="0" marL="0">
-              <a:lnSpc>
-                <a:spcPts val="1850"/>
-              </a:lnSpc>
-              <a:buNone/>
-            </a:pPr>
-            <a:r>
-              <a:rPr lang="ko-KR" altLang="en-US" sz="1210" dirty="0">
-                <a:solidFill>
-                  <a:srgbClr val="101D42"/>
-                </a:solidFill>
-                <a:latin typeface="Noto Sans KR" pitchFamily="34" charset="0"/>
-                <a:ea typeface="Noto Sans KR" pitchFamily="34" charset="-127"/>
-                <a:cs typeface="Noto Sans KR" pitchFamily="34" charset="-120"/>
-              </a:rPr>
-              <a:t>수준 차이, </a:t>
-            </a:r>
-            <a:pPr algn="l" indent="0" marL="0">
-              <a:lnSpc>
-                <a:spcPts val="1850"/>
-              </a:lnSpc>
-              <a:buNone/>
-            </a:pPr>
-            <a:r>
-              <a:rPr lang="ko-KR" altLang="en-US" sz="1210" b="1" dirty="0">
+                <a:ea typeface="Noto Sans KR" pitchFamily="34" charset="-122"/>
+                <a:cs typeface="Noto Sans KR" pitchFamily="34" charset="-120"/>
+              </a:rPr>
+              <a:t>무엇을 알고</a:t>
+            </a:r>
+            <a:pPr algn="l" indent="0" marL="0">
+              <a:lnSpc>
+                <a:spcPts val="2600"/>
+              </a:lnSpc>
+              <a:buNone/>
+            </a:pPr>
+            <a:r>
+              <a:rPr lang="ko-KR" altLang="en-US" sz="1800" dirty="0">
+                <a:solidFill>
+                  <a:srgbClr val="101D42"/>
+                </a:solidFill>
+                <a:latin typeface="Noto Sans KR" pitchFamily="34" charset="0"/>
+                <a:ea typeface="Noto Sans KR" pitchFamily="34" charset="-122"/>
+                <a:cs typeface="Noto Sans KR" pitchFamily="34" charset="-120"/>
+              </a:rPr>
+              <a:t>, </a:t>
+            </a:r>
+            <a:pPr algn="l" indent="0" marL="0">
+              <a:lnSpc>
+                <a:spcPts val="2600"/>
+              </a:lnSpc>
+              <a:buNone/>
+            </a:pPr>
+            <a:r>
+              <a:rPr lang="ko-KR" altLang="en-US" sz="1800" b="1" dirty="0">
                 <a:solidFill>
                   <a:srgbClr val="101D42"/>
                 </a:solidFill>
@@ -2795,42 +5352,99 @@
                   <a:srgbClr val="FFF0AD"/>
                 </a:highlight>
                 <a:latin typeface="Noto Sans KR" pitchFamily="34" charset="0"/>
-                <a:ea typeface="Noto Sans KR" pitchFamily="34" charset="-127"/>
-                <a:cs typeface="Noto Sans KR" pitchFamily="34" charset="-120"/>
-              </a:rPr>
-              <a:t>개별 지도와 수업 준비</a:t>
-            </a:r>
-            <a:pPr algn="l" indent="0" marL="0">
-              <a:lnSpc>
-                <a:spcPts val="1850"/>
-              </a:lnSpc>
-              <a:buNone/>
-            </a:pPr>
-            <a:r>
-              <a:rPr lang="ko-KR" altLang="en-US" sz="1210" dirty="0">
-                <a:solidFill>
-                  <a:srgbClr val="101D42"/>
-                </a:solidFill>
-                <a:latin typeface="Noto Sans KR" pitchFamily="34" charset="0"/>
-                <a:ea typeface="Noto Sans KR" pitchFamily="34" charset="-127"/>
-                <a:cs typeface="Noto Sans KR" pitchFamily="34" charset="-120"/>
-              </a:rPr>
-              <a:t>의 부담이 있습니다.</a:t>
-            </a:r>
-            <a:endParaRPr lang="en-US" sz="1210" dirty="0"/>
+                <a:ea typeface="Noto Sans KR" pitchFamily="34" charset="-122"/>
+                <a:cs typeface="Noto Sans KR" pitchFamily="34" charset="-120"/>
+              </a:rPr>
+              <a:t>어떤 경험을 쌓고</a:t>
+            </a:r>
+            <a:pPr algn="l" indent="0" marL="0">
+              <a:lnSpc>
+                <a:spcPts val="2600"/>
+              </a:lnSpc>
+              <a:buNone/>
+            </a:pPr>
+            <a:r>
+              <a:rPr lang="ko-KR" altLang="en-US" sz="1800" dirty="0">
+                <a:solidFill>
+                  <a:srgbClr val="101D42"/>
+                </a:solidFill>
+                <a:latin typeface="Noto Sans KR" pitchFamily="34" charset="0"/>
+                <a:ea typeface="Noto Sans KR" pitchFamily="34" charset="-122"/>
+                <a:cs typeface="Noto Sans KR" pitchFamily="34" charset="-120"/>
+              </a:rPr>
+              <a:t>, </a:t>
+            </a:r>
+            <a:pPr algn="l" indent="0" marL="0">
+              <a:lnSpc>
+                <a:spcPts val="2600"/>
+              </a:lnSpc>
+              <a:buNone/>
+            </a:pPr>
+            <a:r>
+              <a:rPr lang="ko-KR" altLang="en-US" sz="1800" b="1" dirty="0">
+                <a:solidFill>
+                  <a:srgbClr val="101D42"/>
+                </a:solidFill>
+                <a:highlight>
+                  <a:srgbClr val="FFF0AD"/>
+                </a:highlight>
+                <a:latin typeface="Noto Sans KR" pitchFamily="34" charset="0"/>
+                <a:ea typeface="Noto Sans KR" pitchFamily="34" charset="-122"/>
+                <a:cs typeface="Noto Sans KR" pitchFamily="34" charset="-120"/>
+              </a:rPr>
+              <a:t>어떻게 생각하는 사람</a:t>
+            </a:r>
+            <a:pPr algn="l" indent="0" marL="0">
+              <a:lnSpc>
+                <a:spcPts val="2600"/>
+              </a:lnSpc>
+              <a:buNone/>
+            </a:pPr>
+            <a:r>
+              <a:rPr lang="ko-KR" altLang="en-US" sz="1800" dirty="0">
+                <a:solidFill>
+                  <a:srgbClr val="101D42"/>
+                </a:solidFill>
+                <a:latin typeface="Noto Sans KR" pitchFamily="34" charset="0"/>
+                <a:ea typeface="Noto Sans KR" pitchFamily="34" charset="-122"/>
+                <a:cs typeface="Noto Sans KR" pitchFamily="34" charset="-120"/>
+              </a:rPr>
+              <a:t>으로 자라야</a:t>
+            </a:r>
+            <a:endParaRPr lang="en-US" sz="1800" dirty="0"/>
+          </a:p>
+          <a:p>
+            <a:pPr algn="l" indent="0" marL="0">
+              <a:lnSpc>
+                <a:spcPts val="2600"/>
+              </a:lnSpc>
+              <a:buNone/>
+            </a:pPr>
+            <a:r>
+              <a:rPr lang="ko-KR" altLang="en-US" sz="1800" dirty="0">
+                <a:solidFill>
+                  <a:srgbClr val="101D42"/>
+                </a:solidFill>
+                <a:latin typeface="Noto Sans KR" pitchFamily="34" charset="0"/>
+                <a:ea typeface="Noto Sans KR" pitchFamily="34" charset="-122"/>
+                <a:cs typeface="Noto Sans KR" pitchFamily="34" charset="-120"/>
+              </a:rPr>
+              <a:t>할까요. 디지털 도구를 도입하는 일에도 이 질문이 먼저 놓여야 합니다.</a:t>
+            </a:r>
+            <a:endParaRPr lang="en-US" sz="1800" dirty="0"/>
           </a:p>
         </p:txBody>
       </p:sp>
       <p:sp>
         <p:nvSpPr>
-          <p:cNvPr id="53" name="txt-1-13"/>
+          <p:cNvPr id="28" name="txt-2-8"/>
           <p:cNvSpPr txBox="1"/>
           <p:nvPr/>
         </p:nvSpPr>
         <p:spPr>
           <a:xfrm>
-            <a:off x="2679319" y="5862955"/>
-            <a:ext cx="334010" cy="279019"/>
+            <a:off x="381000" y="7637145"/>
+            <a:ext cx="6979285" cy="759460"/>
           </a:xfrm>
           <a:prstGeom prst="rect">
             <a:avLst/>
@@ -2844,35 +5458,112 @@
           <a:p>
             <a:pPr algn="l" indent="0" marL="0">
               <a:lnSpc>
-                <a:spcPts val="1690"/>
-              </a:lnSpc>
-              <a:buNone/>
-            </a:pPr>
-            <a:r>
-              <a:rPr lang="ko-KR" altLang="en-US" sz="1300" dirty="0">
-                <a:solidFill>
-                  <a:srgbClr val="D59B32"/>
-                </a:solidFill>
-                <a:latin typeface="Noto Sans KR" pitchFamily="34" charset="0"/>
-                <a:ea typeface="Noto Sans KR" pitchFamily="34" charset="-127"/>
-                <a:cs typeface="Noto Sans KR" pitchFamily="34" charset="-120"/>
-              </a:rPr>
-              <a:t>→</a:t>
-            </a:r>
-            <a:endParaRPr lang="en-US" sz="1300" dirty="0"/>
+                <a:spcPts val="2600"/>
+              </a:lnSpc>
+              <a:buNone/>
+            </a:pPr>
+            <a:r>
+              <a:rPr lang="ko-KR" altLang="en-US" sz="1800" b="1" dirty="0">
+                <a:solidFill>
+                  <a:srgbClr val="101D42"/>
+                </a:solidFill>
+                <a:highlight>
+                  <a:srgbClr val="FFF0AD"/>
+                </a:highlight>
+                <a:latin typeface="Noto Sans KR" pitchFamily="34" charset="0"/>
+                <a:ea typeface="Noto Sans KR" pitchFamily="34" charset="-122"/>
+                <a:cs typeface="Noto Sans KR" pitchFamily="34" charset="-120"/>
+              </a:rPr>
+              <a:t>스스로 읽고 이해하며</a:t>
+            </a:r>
+            <a:pPr algn="l" indent="0" marL="0">
+              <a:lnSpc>
+                <a:spcPts val="2600"/>
+              </a:lnSpc>
+              <a:buNone/>
+            </a:pPr>
+            <a:r>
+              <a:rPr lang="ko-KR" altLang="en-US" sz="1800" dirty="0">
+                <a:solidFill>
+                  <a:srgbClr val="101D42"/>
+                </a:solidFill>
+                <a:latin typeface="Noto Sans KR" pitchFamily="34" charset="0"/>
+                <a:ea typeface="Noto Sans KR" pitchFamily="34" charset="-122"/>
+                <a:cs typeface="Noto Sans KR" pitchFamily="34" charset="-120"/>
+              </a:rPr>
+              <a:t>, </a:t>
+            </a:r>
+            <a:pPr algn="l" indent="0" marL="0">
+              <a:lnSpc>
+                <a:spcPts val="2600"/>
+              </a:lnSpc>
+              <a:buNone/>
+            </a:pPr>
+            <a:r>
+              <a:rPr lang="ko-KR" altLang="en-US" sz="1800" b="1" dirty="0">
+                <a:solidFill>
+                  <a:srgbClr val="101D42"/>
+                </a:solidFill>
+                <a:highlight>
+                  <a:srgbClr val="FFF0AD"/>
+                </a:highlight>
+                <a:latin typeface="Noto Sans KR" pitchFamily="34" charset="0"/>
+                <a:ea typeface="Noto Sans KR" pitchFamily="34" charset="-122"/>
+                <a:cs typeface="Noto Sans KR" pitchFamily="34" charset="-120"/>
+              </a:rPr>
+              <a:t>근거를 들어 말하는 힘</a:t>
+            </a:r>
+            <a:pPr algn="l" indent="0" marL="0">
+              <a:lnSpc>
+                <a:spcPts val="2600"/>
+              </a:lnSpc>
+              <a:buNone/>
+            </a:pPr>
+            <a:r>
+              <a:rPr lang="ko-KR" altLang="en-US" sz="1800" dirty="0">
+                <a:solidFill>
+                  <a:srgbClr val="101D42"/>
+                </a:solidFill>
+                <a:latin typeface="Noto Sans KR" pitchFamily="34" charset="0"/>
+                <a:ea typeface="Noto Sans KR" pitchFamily="34" charset="-122"/>
+                <a:cs typeface="Noto Sans KR" pitchFamily="34" charset="-120"/>
+              </a:rPr>
+              <a:t>을 꾸준히 길러 주어야</a:t>
+            </a:r>
+            <a:endParaRPr lang="en-US" sz="1800" dirty="0"/>
+          </a:p>
+          <a:p>
+            <a:pPr algn="l" indent="0" marL="0">
+              <a:lnSpc>
+                <a:spcPts val="2600"/>
+              </a:lnSpc>
+              <a:buNone/>
+            </a:pPr>
+            <a:r>
+              <a:rPr lang="ko-KR" altLang="en-US" sz="1800" dirty="0">
+                <a:solidFill>
+                  <a:srgbClr val="101D42"/>
+                </a:solidFill>
+                <a:latin typeface="Noto Sans KR" pitchFamily="34" charset="0"/>
+                <a:ea typeface="Noto Sans KR" pitchFamily="34" charset="-122"/>
+                <a:cs typeface="Noto Sans KR" pitchFamily="34" charset="-120"/>
+              </a:rPr>
+              <a:t>합니다. 이 절실함에서 부기가 시작됐습니다.</a:t>
+            </a:r>
+            <a:endParaRPr lang="en-US" sz="1800" dirty="0"/>
           </a:p>
         </p:txBody>
       </p:sp>
       <p:sp>
         <p:nvSpPr>
-          <p:cNvPr id="54" name="txt-1-14"/>
+          <p:cNvPr id="29" name="txt-2-9"/>
           <p:cNvSpPr txBox="1"/>
           <p:nvPr/>
         </p:nvSpPr>
         <p:spPr>
           <a:xfrm>
-            <a:off x="4749038" y="5862955"/>
-            <a:ext cx="334010" cy="279019"/>
+            <a:off x="963295" y="9322562"/>
+            <a:ext cx="5632323" cy="715645"/>
           </a:xfrm>
           <a:prstGeom prst="rect">
             <a:avLst/>
@@ -2884,37 +5575,57 @@
           <a:bodyPr wrap="square" lIns="0" tIns="0" rIns="0" bIns="0" rtlCol="0" anchor="t"/>
           <a:lstStyle/>
           <a:p>
-            <a:pPr algn="l" indent="0" marL="0">
-              <a:lnSpc>
-                <a:spcPts val="1690"/>
-              </a:lnSpc>
-              <a:buNone/>
-            </a:pPr>
-            <a:r>
-              <a:rPr lang="ko-KR" altLang="en-US" sz="1300" dirty="0">
-                <a:solidFill>
-                  <a:srgbClr val="D59B32"/>
-                </a:solidFill>
-                <a:latin typeface="Noto Sans KR" pitchFamily="34" charset="0"/>
-                <a:ea typeface="Noto Sans KR" pitchFamily="34" charset="-127"/>
-                <a:cs typeface="Noto Sans KR" pitchFamily="34" charset="-120"/>
-              </a:rPr>
-              <a:t>→</a:t>
-            </a:r>
-            <a:endParaRPr lang="en-US" sz="1300" dirty="0"/>
+            <a:pPr algn="ctr" indent="0" marL="0">
+              <a:lnSpc>
+                <a:spcPts val="2450"/>
+              </a:lnSpc>
+              <a:buNone/>
+            </a:pPr>
+            <a:r>
+              <a:rPr lang="ko-KR" altLang="en-US" sz="1750" dirty="0">
+                <a:solidFill>
+                  <a:srgbClr val="101D42"/>
+                </a:solidFill>
+                <a:latin typeface="Noto Serif KR Black" pitchFamily="34" charset="0"/>
+                <a:ea typeface="Noto Serif KR Black" pitchFamily="34" charset="-122"/>
+                <a:cs typeface="Noto Serif KR Black" pitchFamily="34" charset="-120"/>
+              </a:rPr>
+              <a:t>학생이 직접 읽고 묻고 정리한 생각은</a:t>
+            </a:r>
+            <a:endParaRPr lang="en-US" sz="1750" dirty="0"/>
+          </a:p>
+          <a:p>
+            <a:pPr algn="ctr" indent="0" marL="0">
+              <a:lnSpc>
+                <a:spcPts val="2450"/>
+              </a:lnSpc>
+              <a:buNone/>
+            </a:pPr>
+            <a:r>
+              <a:rPr lang="ko-KR" altLang="en-US" sz="1750" dirty="0">
+                <a:solidFill>
+                  <a:srgbClr val="101D42"/>
+                </a:solidFill>
+                <a:latin typeface="Noto Serif KR Black" pitchFamily="34" charset="0"/>
+                <a:ea typeface="Noto Serif KR Black" pitchFamily="34" charset="-122"/>
+                <a:cs typeface="Noto Serif KR Black" pitchFamily="34" charset="-120"/>
+              </a:rPr>
+              <a:t>다음 글을 이해하고 판단할 바탕이 됩니다.</a:t>
+            </a:r>
+            <a:endParaRPr lang="en-US" sz="1750" dirty="0"/>
           </a:p>
         </p:txBody>
       </p:sp>
       <p:sp>
         <p:nvSpPr>
-          <p:cNvPr id="55" name="txt-1-15"/>
+          <p:cNvPr id="30" name="txt-2-10"/>
           <p:cNvSpPr txBox="1"/>
           <p:nvPr/>
         </p:nvSpPr>
         <p:spPr>
           <a:xfrm>
-            <a:off x="1261364" y="5897499"/>
-            <a:ext cx="907161" cy="236093"/>
+            <a:off x="3504565" y="10362692"/>
+            <a:ext cx="424815" cy="214630"/>
           </a:xfrm>
           <a:prstGeom prst="rect">
             <a:avLst/>
@@ -2926,37 +5637,890 @@
           <a:bodyPr wrap="square" lIns="0" tIns="0" rIns="0" bIns="0" rtlCol="0" anchor="t"/>
           <a:lstStyle/>
           <a:p>
-            <a:pPr algn="ctr" indent="0" marL="0">
-              <a:lnSpc>
-                <a:spcPts val="1430"/>
-              </a:lnSpc>
-              <a:buNone/>
-            </a:pPr>
-            <a:r>
-              <a:rPr lang="ko-KR" altLang="en-US" sz="1100" dirty="0">
-                <a:solidFill>
-                  <a:srgbClr val="101D42"/>
-                </a:solidFill>
-                <a:latin typeface="Noto Sans KR" pitchFamily="34" charset="0"/>
-                <a:ea typeface="Noto Sans KR" pitchFamily="34" charset="-127"/>
-                <a:cs typeface="Noto Sans KR" pitchFamily="34" charset="-120"/>
-              </a:rPr>
-              <a:t>모르는 낱말</a:t>
-            </a:r>
-            <a:endParaRPr lang="en-US" sz="1100" dirty="0"/>
+            <a:pPr algn="l" indent="0" marL="0">
+              <a:lnSpc>
+                <a:spcPts val="1300"/>
+              </a:lnSpc>
+              <a:buNone/>
+            </a:pPr>
+            <a:r>
+              <a:rPr lang="ko-KR" altLang="en-US" sz="1000" dirty="0">
+                <a:solidFill>
+                  <a:srgbClr val="101D42"/>
+                </a:solidFill>
+                <a:latin typeface="Noto Sans KR" pitchFamily="34" charset="0"/>
+                <a:ea typeface="Noto Sans KR" pitchFamily="34" charset="-122"/>
+                <a:cs typeface="Noto Sans KR" pitchFamily="34" charset="-120"/>
+              </a:rPr>
+              <a:t>1 / 4</a:t>
+            </a:r>
+            <a:endParaRPr lang="en-US" sz="1000" dirty="0"/>
           </a:p>
         </p:txBody>
       </p:sp>
-      <p:sp>
-        <p:nvSpPr>
-          <p:cNvPr id="56" name="txt-1-16"/>
+    </p:spTree>
+  </p:cSld>
+  <p:clrMapOvr>
+    <a:masterClrMapping/>
+  </p:clrMapOvr>
+</p:sld>
+</file>
+
+<file path=ppt/slides/slide3.xml><?xml version="1.0" encoding="utf-8"?>
+<p:sld xmlns:a="http://schemas.openxmlformats.org/drawingml/2006/main" xmlns:r="http://schemas.openxmlformats.org/officeDocument/2006/relationships" xmlns:p="http://schemas.openxmlformats.org/presentationml/2006/main">
+  <p:cSld name="Slide 3">
+    <p:bg>
+      <p:bgPr>
+        <a:solidFill>
+          <a:srgbClr val="FFFFFF"/>
+        </a:solidFill>
+      </p:bgPr>
+    </p:bg>
+    <p:spTree>
+      <p:nvGrpSpPr>
+        <p:cNvPr id="1" name=""/>
+        <p:cNvGrpSpPr/>
+        <p:nvPr/>
+      </p:nvGrpSpPr>
+      <p:grpSpPr>
+        <a:xfrm>
+          <a:off x="0" y="0"/>
+          <a:ext cx="0" cy="0"/>
+          <a:chOff x="0" y="0"/>
+          <a:chExt cx="0" cy="0"/>
+        </a:xfrm>
+      </p:grpSpPr>
+      <p:sp>
+        <p:nvSpPr>
+          <p:cNvPr id="2" name="Shape 0"/>
+          <p:cNvSpPr/>
+          <p:nvPr/>
+        </p:nvSpPr>
+        <p:spPr>
+          <a:xfrm>
+            <a:off x="2987548" y="495300"/>
+            <a:ext cx="4191508" cy="0"/>
+          </a:xfrm>
+          <a:prstGeom prst="line">
+            <a:avLst/>
+          </a:prstGeom>
+          <a:noFill/>
+          <a:ln w="7620">
+            <a:solidFill>
+              <a:srgbClr val="D59B32"/>
+            </a:solidFill>
+            <a:prstDash val="solid"/>
+          </a:ln>
+        </p:spPr>
+      </p:sp>
+      <p:sp>
+        <p:nvSpPr>
+          <p:cNvPr id="3" name="Shape 1"/>
+          <p:cNvSpPr/>
+          <p:nvPr/>
+        </p:nvSpPr>
+        <p:spPr>
+          <a:xfrm>
+            <a:off x="407416" y="2578100"/>
+            <a:ext cx="277876" cy="304292"/>
+          </a:xfrm>
+          <a:custGeom>
+            <a:avLst/>
+            <a:gdLst/>
+            <a:ahLst/>
+            <a:cxnLst/>
+            <a:rect l="l" t="t" r="r" b="b"/>
+            <a:pathLst>
+              <a:path w="277876" h="304292">
+                <a:moveTo>
+                  <a:pt x="132296" y="304267"/>
+                </a:moveTo>
+                <a:lnTo>
+                  <a:pt x="132296" y="145517"/>
+                </a:lnTo>
+                <a:cubicBezTo>
+                  <a:pt x="66142" y="171983"/>
+                  <a:pt x="0" y="145517"/>
+                  <a:pt x="0" y="39688"/>
+                </a:cubicBezTo>
+                <a:cubicBezTo>
+                  <a:pt x="105829" y="26454"/>
+                  <a:pt x="132296" y="79375"/>
+                  <a:pt x="132296" y="145517"/>
+                </a:cubicBezTo>
+                <a:cubicBezTo>
+                  <a:pt x="132296" y="39688"/>
+                  <a:pt x="211671" y="0"/>
+                  <a:pt x="277813" y="13233"/>
+                </a:cubicBezTo>
+                <a:cubicBezTo>
+                  <a:pt x="277813" y="105829"/>
+                  <a:pt x="211671" y="158750"/>
+                  <a:pt x="132296" y="145517"/>
+                </a:cubicBezTo>
+              </a:path>
+            </a:pathLst>
+          </a:custGeom>
+          <a:solidFill>
+            <a:srgbClr val="D59B32"/>
+          </a:solidFill>
+          <a:ln/>
+        </p:spPr>
+      </p:sp>
+      <p:sp>
+        <p:nvSpPr>
+          <p:cNvPr id="4" name="Shape 2"/>
+          <p:cNvSpPr/>
+          <p:nvPr/>
+        </p:nvSpPr>
+        <p:spPr>
+          <a:xfrm>
+            <a:off x="5720842" y="2755900"/>
+            <a:ext cx="1458214" cy="0"/>
+          </a:xfrm>
+          <a:prstGeom prst="line">
+            <a:avLst/>
+          </a:prstGeom>
+          <a:noFill/>
+          <a:ln w="7620">
+            <a:solidFill>
+              <a:srgbClr val="D59B32"/>
+            </a:solidFill>
+            <a:prstDash val="solid"/>
+          </a:ln>
+        </p:spPr>
+      </p:sp>
+      <p:sp>
+        <p:nvSpPr>
+          <p:cNvPr id="5" name="Shape 3"/>
+          <p:cNvSpPr/>
+          <p:nvPr/>
+        </p:nvSpPr>
+        <p:spPr>
+          <a:xfrm>
+            <a:off x="433959" y="4470908"/>
+            <a:ext cx="211709" cy="211709"/>
+          </a:xfrm>
+          <a:custGeom>
+            <a:avLst/>
+            <a:gdLst/>
+            <a:ahLst/>
+            <a:cxnLst/>
+            <a:rect l="l" t="t" r="r" b="b"/>
+            <a:pathLst>
+              <a:path w="211709" h="211709">
+                <a:moveTo>
+                  <a:pt x="211671" y="105829"/>
+                </a:moveTo>
+                <a:cubicBezTo>
+                  <a:pt x="211671" y="47384"/>
+                  <a:pt x="164287" y="0"/>
+                  <a:pt x="105829" y="0"/>
+                </a:cubicBezTo>
+                <a:cubicBezTo>
+                  <a:pt x="47384" y="0"/>
+                  <a:pt x="0" y="47384"/>
+                  <a:pt x="0" y="105829"/>
+                </a:cubicBezTo>
+                <a:cubicBezTo>
+                  <a:pt x="0" y="164287"/>
+                  <a:pt x="47384" y="211671"/>
+                  <a:pt x="105829" y="211671"/>
+                </a:cubicBezTo>
+                <a:cubicBezTo>
+                  <a:pt x="164287" y="211671"/>
+                  <a:pt x="211671" y="164287"/>
+                  <a:pt x="211671" y="105829"/>
+                </a:cubicBezTo>
+              </a:path>
+            </a:pathLst>
+          </a:custGeom>
+          <a:ln w="21209">
+            <a:solidFill>
+              <a:srgbClr val="D59B32"/>
+            </a:solidFill>
+            <a:prstDash val="solid"/>
+          </a:ln>
+        </p:spPr>
+      </p:sp>
+      <p:sp>
+        <p:nvSpPr>
+          <p:cNvPr id="6" name="Shape 4"/>
+          <p:cNvSpPr/>
+          <p:nvPr/>
+        </p:nvSpPr>
+        <p:spPr>
+          <a:xfrm>
+            <a:off x="486791" y="4669409"/>
+            <a:ext cx="0" cy="52832"/>
+          </a:xfrm>
+          <a:prstGeom prst="line">
+            <a:avLst/>
+          </a:prstGeom>
+          <a:noFill/>
+          <a:ln w="21209">
+            <a:solidFill>
+              <a:srgbClr val="D59B32"/>
+            </a:solidFill>
+            <a:prstDash val="solid"/>
+          </a:ln>
+        </p:spPr>
+      </p:sp>
+      <p:sp>
+        <p:nvSpPr>
+          <p:cNvPr id="7" name="Shape 5"/>
+          <p:cNvSpPr/>
+          <p:nvPr/>
+        </p:nvSpPr>
+        <p:spPr>
+          <a:xfrm>
+            <a:off x="592709" y="4669409"/>
+            <a:ext cx="0" cy="52832"/>
+          </a:xfrm>
+          <a:prstGeom prst="line">
+            <a:avLst/>
+          </a:prstGeom>
+          <a:noFill/>
+          <a:ln w="21209">
+            <a:solidFill>
+              <a:srgbClr val="D59B32"/>
+            </a:solidFill>
+            <a:prstDash val="solid"/>
+          </a:ln>
+        </p:spPr>
+      </p:sp>
+      <p:sp>
+        <p:nvSpPr>
+          <p:cNvPr id="8" name="Shape 6"/>
+          <p:cNvSpPr/>
+          <p:nvPr/>
+        </p:nvSpPr>
+        <p:spPr>
+          <a:xfrm>
+            <a:off x="486791" y="4722241"/>
+            <a:ext cx="105918" cy="0"/>
+          </a:xfrm>
+          <a:prstGeom prst="line">
+            <a:avLst/>
+          </a:prstGeom>
+          <a:noFill/>
+          <a:ln w="21209">
+            <a:solidFill>
+              <a:srgbClr val="D59B32"/>
+            </a:solidFill>
+            <a:prstDash val="solid"/>
+          </a:ln>
+        </p:spPr>
+      </p:sp>
+      <p:sp>
+        <p:nvSpPr>
+          <p:cNvPr id="9" name="Shape 7"/>
+          <p:cNvSpPr/>
+          <p:nvPr/>
+        </p:nvSpPr>
+        <p:spPr>
+          <a:xfrm>
+            <a:off x="500126" y="4761992"/>
+            <a:ext cx="79375" cy="0"/>
+          </a:xfrm>
+          <a:prstGeom prst="line">
+            <a:avLst/>
+          </a:prstGeom>
+          <a:noFill/>
+          <a:ln w="21209">
+            <a:solidFill>
+              <a:srgbClr val="D59B32"/>
+            </a:solidFill>
+            <a:prstDash val="solid"/>
+          </a:ln>
+        </p:spPr>
+      </p:sp>
+      <p:sp>
+        <p:nvSpPr>
+          <p:cNvPr id="10" name="Shape 8"/>
+          <p:cNvSpPr/>
+          <p:nvPr/>
+        </p:nvSpPr>
+        <p:spPr>
+          <a:xfrm>
+            <a:off x="539750" y="4576699"/>
+            <a:ext cx="0" cy="132334"/>
+          </a:xfrm>
+          <a:prstGeom prst="line">
+            <a:avLst/>
+          </a:prstGeom>
+          <a:noFill/>
+          <a:ln w="21209">
+            <a:solidFill>
+              <a:srgbClr val="D59B32"/>
+            </a:solidFill>
+            <a:prstDash val="solid"/>
+          </a:ln>
+        </p:spPr>
+      </p:sp>
+      <p:sp>
+        <p:nvSpPr>
+          <p:cNvPr id="11" name="Shape 9"/>
+          <p:cNvSpPr/>
+          <p:nvPr/>
+        </p:nvSpPr>
+        <p:spPr>
+          <a:xfrm>
+            <a:off x="500126" y="4537075"/>
+            <a:ext cx="39624" cy="39624"/>
+          </a:xfrm>
+          <a:prstGeom prst="line">
+            <a:avLst/>
+          </a:prstGeom>
+          <a:noFill/>
+          <a:ln w="21209">
+            <a:solidFill>
+              <a:srgbClr val="D59B32"/>
+            </a:solidFill>
+            <a:prstDash val="solid"/>
+          </a:ln>
+        </p:spPr>
+      </p:sp>
+      <p:sp>
+        <p:nvSpPr>
+          <p:cNvPr id="12" name="Shape 10"/>
+          <p:cNvSpPr/>
+          <p:nvPr/>
+        </p:nvSpPr>
+        <p:spPr>
+          <a:xfrm>
+            <a:off x="539750" y="4537075"/>
+            <a:ext cx="39751" cy="39624"/>
+          </a:xfrm>
+          <a:prstGeom prst="line">
+            <a:avLst/>
+          </a:prstGeom>
+          <a:noFill/>
+          <a:ln w="21209">
+            <a:solidFill>
+              <a:srgbClr val="D59B32"/>
+            </a:solidFill>
+            <a:prstDash val="solid"/>
+          </a:ln>
+        </p:spPr>
+      </p:sp>
+      <p:sp>
+        <p:nvSpPr>
+          <p:cNvPr id="13" name="Shape 11"/>
+          <p:cNvSpPr/>
+          <p:nvPr/>
+        </p:nvSpPr>
+        <p:spPr>
+          <a:xfrm>
+            <a:off x="6286119" y="4635500"/>
+            <a:ext cx="892937" cy="0"/>
+          </a:xfrm>
+          <a:prstGeom prst="line">
+            <a:avLst/>
+          </a:prstGeom>
+          <a:noFill/>
+          <a:ln w="7620">
+            <a:solidFill>
+              <a:srgbClr val="D59B32"/>
+            </a:solidFill>
+            <a:prstDash val="solid"/>
+          </a:ln>
+        </p:spPr>
+      </p:sp>
+      <p:sp>
+        <p:nvSpPr>
+          <p:cNvPr id="14" name="Shape 12"/>
+          <p:cNvSpPr/>
+          <p:nvPr/>
+        </p:nvSpPr>
+        <p:spPr>
+          <a:xfrm>
+            <a:off x="317500" y="7988300"/>
+            <a:ext cx="6925056" cy="622300"/>
+          </a:xfrm>
+          <a:prstGeom prst="roundRect">
+            <a:avLst>
+              <a:gd name="adj" fmla="val 16327"/>
+            </a:avLst>
+          </a:prstGeom>
+          <a:solidFill>
+            <a:srgbClr val="F0F5EF"/>
+          </a:solidFill>
+          <a:ln/>
+        </p:spPr>
+      </p:sp>
+      <p:sp>
+        <p:nvSpPr>
+          <p:cNvPr id="15" name="Shape 13"/>
+          <p:cNvSpPr/>
+          <p:nvPr/>
+        </p:nvSpPr>
+        <p:spPr>
+          <a:xfrm>
+            <a:off x="494284" y="8165084"/>
+            <a:ext cx="256159" cy="244475"/>
+          </a:xfrm>
+          <a:custGeom>
+            <a:avLst/>
+            <a:gdLst/>
+            <a:ahLst/>
+            <a:cxnLst/>
+            <a:rect l="l" t="t" r="r" b="b"/>
+            <a:pathLst>
+              <a:path w="256159" h="244475">
+                <a:moveTo>
+                  <a:pt x="128054" y="244475"/>
+                </a:moveTo>
+                <a:lnTo>
+                  <a:pt x="128054" y="34925"/>
+                </a:lnTo>
+                <a:cubicBezTo>
+                  <a:pt x="81496" y="0"/>
+                  <a:pt x="34925" y="0"/>
+                  <a:pt x="0" y="23279"/>
+                </a:cubicBezTo>
+                <a:lnTo>
+                  <a:pt x="0" y="232829"/>
+                </a:lnTo>
+                <a:cubicBezTo>
+                  <a:pt x="34925" y="209550"/>
+                  <a:pt x="81496" y="209550"/>
+                  <a:pt x="128054" y="244475"/>
+                </a:cubicBezTo>
+                <a:cubicBezTo>
+                  <a:pt x="174625" y="209550"/>
+                  <a:pt x="221196" y="209550"/>
+                  <a:pt x="256121" y="232829"/>
+                </a:cubicBezTo>
+                <a:lnTo>
+                  <a:pt x="256121" y="23279"/>
+                </a:lnTo>
+                <a:cubicBezTo>
+                  <a:pt x="221196" y="0"/>
+                  <a:pt x="174625" y="0"/>
+                  <a:pt x="128054" y="34925"/>
+                </a:cubicBezTo>
+              </a:path>
+            </a:pathLst>
+          </a:custGeom>
+          <a:ln w="18669">
+            <a:solidFill>
+              <a:srgbClr val="D59B32"/>
+            </a:solidFill>
+            <a:prstDash val="solid"/>
+          </a:ln>
+        </p:spPr>
+      </p:sp>
+      <p:sp>
+        <p:nvSpPr>
+          <p:cNvPr id="16" name="Shape 14"/>
+          <p:cNvSpPr/>
+          <p:nvPr/>
+        </p:nvSpPr>
+        <p:spPr>
+          <a:xfrm>
+            <a:off x="2866009" y="8165084"/>
+            <a:ext cx="186309" cy="186309"/>
+          </a:xfrm>
+          <a:custGeom>
+            <a:avLst/>
+            <a:gdLst/>
+            <a:ahLst/>
+            <a:cxnLst/>
+            <a:rect l="l" t="t" r="r" b="b"/>
+            <a:pathLst>
+              <a:path w="186309" h="186309">
+                <a:moveTo>
+                  <a:pt x="186271" y="93129"/>
+                </a:moveTo>
+                <a:cubicBezTo>
+                  <a:pt x="186271" y="41694"/>
+                  <a:pt x="144564" y="0"/>
+                  <a:pt x="93129" y="0"/>
+                </a:cubicBezTo>
+                <a:cubicBezTo>
+                  <a:pt x="41694" y="0"/>
+                  <a:pt x="0" y="41694"/>
+                  <a:pt x="0" y="93129"/>
+                </a:cubicBezTo>
+                <a:cubicBezTo>
+                  <a:pt x="0" y="144564"/>
+                  <a:pt x="41694" y="186271"/>
+                  <a:pt x="93129" y="186271"/>
+                </a:cubicBezTo>
+                <a:cubicBezTo>
+                  <a:pt x="144564" y="186271"/>
+                  <a:pt x="186271" y="144564"/>
+                  <a:pt x="186271" y="93129"/>
+                </a:cubicBezTo>
+              </a:path>
+            </a:pathLst>
+          </a:custGeom>
+          <a:ln w="18669">
+            <a:solidFill>
+              <a:srgbClr val="D59B32"/>
+            </a:solidFill>
+            <a:prstDash val="solid"/>
+          </a:ln>
+        </p:spPr>
+      </p:sp>
+      <p:sp>
+        <p:nvSpPr>
+          <p:cNvPr id="17" name="Shape 15"/>
+          <p:cNvSpPr/>
+          <p:nvPr/>
+        </p:nvSpPr>
+        <p:spPr>
+          <a:xfrm>
+            <a:off x="2912491" y="8339709"/>
+            <a:ext cx="0" cy="46482"/>
+          </a:xfrm>
+          <a:prstGeom prst="line">
+            <a:avLst/>
+          </a:prstGeom>
+          <a:noFill/>
+          <a:ln w="18669">
+            <a:solidFill>
+              <a:srgbClr val="D59B32"/>
+            </a:solidFill>
+            <a:prstDash val="solid"/>
+          </a:ln>
+        </p:spPr>
+      </p:sp>
+      <p:sp>
+        <p:nvSpPr>
+          <p:cNvPr id="18" name="Shape 16"/>
+          <p:cNvSpPr/>
+          <p:nvPr/>
+        </p:nvSpPr>
+        <p:spPr>
+          <a:xfrm>
+            <a:off x="3005709" y="8339709"/>
+            <a:ext cx="0" cy="46482"/>
+          </a:xfrm>
+          <a:prstGeom prst="line">
+            <a:avLst/>
+          </a:prstGeom>
+          <a:noFill/>
+          <a:ln w="18669">
+            <a:solidFill>
+              <a:srgbClr val="D59B32"/>
+            </a:solidFill>
+            <a:prstDash val="solid"/>
+          </a:ln>
+        </p:spPr>
+      </p:sp>
+      <p:sp>
+        <p:nvSpPr>
+          <p:cNvPr id="19" name="Shape 17"/>
+          <p:cNvSpPr/>
+          <p:nvPr/>
+        </p:nvSpPr>
+        <p:spPr>
+          <a:xfrm>
+            <a:off x="2912491" y="8386191"/>
+            <a:ext cx="93218" cy="0"/>
+          </a:xfrm>
+          <a:prstGeom prst="line">
+            <a:avLst/>
+          </a:prstGeom>
+          <a:noFill/>
+          <a:ln w="18669">
+            <a:solidFill>
+              <a:srgbClr val="D59B32"/>
+            </a:solidFill>
+            <a:prstDash val="solid"/>
+          </a:ln>
+        </p:spPr>
+      </p:sp>
+      <p:sp>
+        <p:nvSpPr>
+          <p:cNvPr id="20" name="Shape 18"/>
+          <p:cNvSpPr/>
+          <p:nvPr/>
+        </p:nvSpPr>
+        <p:spPr>
+          <a:xfrm>
+            <a:off x="2924175" y="8421116"/>
+            <a:ext cx="69850" cy="0"/>
+          </a:xfrm>
+          <a:prstGeom prst="line">
+            <a:avLst/>
+          </a:prstGeom>
+          <a:noFill/>
+          <a:ln w="18669">
+            <a:solidFill>
+              <a:srgbClr val="D59B32"/>
+            </a:solidFill>
+            <a:prstDash val="solid"/>
+          </a:ln>
+        </p:spPr>
+      </p:sp>
+      <p:sp>
+        <p:nvSpPr>
+          <p:cNvPr id="21" name="Shape 19"/>
+          <p:cNvSpPr/>
+          <p:nvPr/>
+        </p:nvSpPr>
+        <p:spPr>
+          <a:xfrm>
+            <a:off x="2959100" y="8258175"/>
+            <a:ext cx="0" cy="116459"/>
+          </a:xfrm>
+          <a:prstGeom prst="line">
+            <a:avLst/>
+          </a:prstGeom>
+          <a:noFill/>
+          <a:ln w="18669">
+            <a:solidFill>
+              <a:srgbClr val="D59B32"/>
+            </a:solidFill>
+            <a:prstDash val="solid"/>
+          </a:ln>
+        </p:spPr>
+      </p:sp>
+      <p:sp>
+        <p:nvSpPr>
+          <p:cNvPr id="22" name="Shape 20"/>
+          <p:cNvSpPr/>
+          <p:nvPr/>
+        </p:nvSpPr>
+        <p:spPr>
+          <a:xfrm>
+            <a:off x="2924175" y="8223250"/>
+            <a:ext cx="34925" cy="34925"/>
+          </a:xfrm>
+          <a:prstGeom prst="line">
+            <a:avLst/>
+          </a:prstGeom>
+          <a:noFill/>
+          <a:ln w="18669">
+            <a:solidFill>
+              <a:srgbClr val="D59B32"/>
+            </a:solidFill>
+            <a:prstDash val="solid"/>
+          </a:ln>
+        </p:spPr>
+      </p:sp>
+      <p:sp>
+        <p:nvSpPr>
+          <p:cNvPr id="23" name="Shape 21"/>
+          <p:cNvSpPr/>
+          <p:nvPr/>
+        </p:nvSpPr>
+        <p:spPr>
+          <a:xfrm>
+            <a:off x="2959100" y="8223250"/>
+            <a:ext cx="34925" cy="34925"/>
+          </a:xfrm>
+          <a:prstGeom prst="line">
+            <a:avLst/>
+          </a:prstGeom>
+          <a:noFill/>
+          <a:ln w="18669">
+            <a:solidFill>
+              <a:srgbClr val="D59B32"/>
+            </a:solidFill>
+            <a:prstDash val="solid"/>
+          </a:ln>
+        </p:spPr>
+      </p:sp>
+      <p:sp>
+        <p:nvSpPr>
+          <p:cNvPr id="24" name="Shape 22"/>
+          <p:cNvSpPr/>
+          <p:nvPr/>
+        </p:nvSpPr>
+        <p:spPr>
+          <a:xfrm>
+            <a:off x="5191125" y="8176641"/>
+            <a:ext cx="232791" cy="232791"/>
+          </a:xfrm>
+          <a:custGeom>
+            <a:avLst/>
+            <a:gdLst/>
+            <a:ahLst/>
+            <a:cxnLst/>
+            <a:rect l="l" t="t" r="r" b="b"/>
+            <a:pathLst>
+              <a:path w="232791" h="232791">
+                <a:moveTo>
+                  <a:pt x="0" y="232829"/>
+                </a:moveTo>
+                <a:lnTo>
+                  <a:pt x="23279" y="151346"/>
+                </a:lnTo>
+                <a:lnTo>
+                  <a:pt x="174625" y="0"/>
+                </a:lnTo>
+                <a:lnTo>
+                  <a:pt x="232829" y="58204"/>
+                </a:lnTo>
+                <a:lnTo>
+                  <a:pt x="81496" y="209550"/>
+                </a:lnTo>
+                <a:lnTo>
+                  <a:pt x="0" y="232829"/>
+                </a:lnTo>
+              </a:path>
+            </a:pathLst>
+          </a:custGeom>
+          <a:ln w="18669">
+            <a:solidFill>
+              <a:srgbClr val="D59B32"/>
+            </a:solidFill>
+            <a:prstDash val="solid"/>
+          </a:ln>
+        </p:spPr>
+      </p:sp>
+      <p:sp>
+        <p:nvSpPr>
+          <p:cNvPr id="25" name="Shape 23"/>
+          <p:cNvSpPr/>
+          <p:nvPr/>
+        </p:nvSpPr>
+        <p:spPr>
+          <a:xfrm>
+            <a:off x="5214366" y="8328025"/>
+            <a:ext cx="58293" cy="58166"/>
+          </a:xfrm>
+          <a:prstGeom prst="line">
+            <a:avLst/>
+          </a:prstGeom>
+          <a:noFill/>
+          <a:ln w="18669">
+            <a:solidFill>
+              <a:srgbClr val="D59B32"/>
+            </a:solidFill>
+            <a:prstDash val="solid"/>
+          </a:ln>
+        </p:spPr>
+      </p:sp>
+      <p:sp>
+        <p:nvSpPr>
+          <p:cNvPr id="26" name="Shape 24"/>
+          <p:cNvSpPr/>
+          <p:nvPr/>
+        </p:nvSpPr>
+        <p:spPr>
+          <a:xfrm>
+            <a:off x="5330825" y="8211566"/>
+            <a:ext cx="58166" cy="58293"/>
+          </a:xfrm>
+          <a:prstGeom prst="line">
+            <a:avLst/>
+          </a:prstGeom>
+          <a:noFill/>
+          <a:ln w="18669">
+            <a:solidFill>
+              <a:srgbClr val="D59B32"/>
+            </a:solidFill>
+            <a:prstDash val="solid"/>
+          </a:ln>
+        </p:spPr>
+      </p:sp>
+      <p:sp>
+        <p:nvSpPr>
+          <p:cNvPr id="27" name="Shape 25"/>
+          <p:cNvSpPr/>
+          <p:nvPr/>
+        </p:nvSpPr>
+        <p:spPr>
+          <a:xfrm>
+            <a:off x="317500" y="8826500"/>
+            <a:ext cx="6925056" cy="825500"/>
+          </a:xfrm>
+          <a:prstGeom prst="roundRect">
+            <a:avLst>
+              <a:gd name="adj" fmla="val 12308"/>
+            </a:avLst>
+          </a:prstGeom>
+          <a:solidFill>
+            <a:srgbClr val="F0F5EF"/>
+          </a:solidFill>
+          <a:ln/>
+        </p:spPr>
+      </p:sp>
+      <p:sp>
+        <p:nvSpPr>
+          <p:cNvPr id="28" name="Shape 26"/>
+          <p:cNvSpPr/>
+          <p:nvPr/>
+        </p:nvSpPr>
+        <p:spPr>
+          <a:xfrm>
+            <a:off x="381000" y="10414000"/>
+            <a:ext cx="2755900" cy="0"/>
+          </a:xfrm>
+          <a:prstGeom prst="line">
+            <a:avLst/>
+          </a:prstGeom>
+          <a:noFill/>
+          <a:ln w="7620">
+            <a:solidFill>
+              <a:srgbClr val="D59B32"/>
+            </a:solidFill>
+            <a:prstDash val="solid"/>
+          </a:ln>
+        </p:spPr>
+      </p:sp>
+      <p:sp>
+        <p:nvSpPr>
+          <p:cNvPr id="29" name="Shape 27"/>
+          <p:cNvSpPr/>
+          <p:nvPr/>
+        </p:nvSpPr>
+        <p:spPr>
+          <a:xfrm>
+            <a:off x="4394200" y="10414000"/>
+            <a:ext cx="2784856" cy="0"/>
+          </a:xfrm>
+          <a:prstGeom prst="line">
+            <a:avLst/>
+          </a:prstGeom>
+          <a:noFill/>
+          <a:ln w="7620">
+            <a:solidFill>
+              <a:srgbClr val="D59B32"/>
+            </a:solidFill>
+            <a:prstDash val="solid"/>
+          </a:ln>
+        </p:spPr>
+      </p:sp>
+      <p:pic>
+        <p:nvPicPr>
+          <p:cNvPr id="30" name="Image 0" descr="부기 책을 함께 읽는 두 아이">    </p:cNvPr>
+          <p:cNvPicPr>
+            <a:picLocks noChangeAspect="1"/>
+          </p:cNvPicPr>
+          <p:nvPr/>
+        </p:nvPicPr>
+        <p:blipFill>
+          <a:blip r:embed="rId1"/>
+          <a:stretch>
+            <a:fillRect/>
+          </a:stretch>
+        </p:blipFill>
+        <p:spPr>
+          <a:xfrm>
+            <a:off x="5334000" y="1003300"/>
+            <a:ext cx="1841500" cy="1264920"/>
+          </a:xfrm>
+          <a:prstGeom prst="rect">
+            <a:avLst/>
+          </a:prstGeom>
+        </p:spPr>
+      </p:pic>
+      <p:sp>
+        <p:nvSpPr>
+          <p:cNvPr id="31" name="txt-3-0"/>
           <p:cNvSpPr txBox="1"/>
           <p:nvPr/>
         </p:nvSpPr>
         <p:spPr>
           <a:xfrm>
-            <a:off x="3331083" y="5897499"/>
-            <a:ext cx="907161" cy="236093"/>
+            <a:off x="381000" y="296926"/>
+            <a:ext cx="2851912" cy="364871"/>
           </a:xfrm>
           <a:prstGeom prst="rect">
             <a:avLst/>
@@ -2968,37 +6532,37 @@
           <a:bodyPr wrap="square" lIns="0" tIns="0" rIns="0" bIns="0" rtlCol="0" anchor="t"/>
           <a:lstStyle/>
           <a:p>
-            <a:pPr algn="ctr" indent="0" marL="0">
-              <a:lnSpc>
-                <a:spcPts val="1430"/>
-              </a:lnSpc>
-              <a:buNone/>
-            </a:pPr>
-            <a:r>
-              <a:rPr lang="ko-KR" altLang="en-US" sz="1100" dirty="0">
-                <a:solidFill>
-                  <a:srgbClr val="101D42"/>
-                </a:solidFill>
-                <a:latin typeface="Noto Sans KR" pitchFamily="34" charset="0"/>
-                <a:ea typeface="Noto Sans KR" pitchFamily="34" charset="-127"/>
-                <a:cs typeface="Noto Sans KR" pitchFamily="34" charset="-120"/>
-              </a:rPr>
-              <a:t>이해의 중단</a:t>
-            </a:r>
-            <a:endParaRPr lang="en-US" sz="1100" dirty="0"/>
+            <a:pPr algn="l" indent="0" marL="0">
+              <a:lnSpc>
+                <a:spcPts val="2210"/>
+              </a:lnSpc>
+              <a:buNone/>
+            </a:pPr>
+            <a:r>
+              <a:rPr lang="ko-KR" altLang="en-US" sz="1700" dirty="0">
+                <a:solidFill>
+                  <a:srgbClr val="101D42"/>
+                </a:solidFill>
+                <a:latin typeface="Noto Serif KR Black" pitchFamily="34" charset="0"/>
+                <a:ea typeface="Noto Serif KR Black" pitchFamily="34" charset="-122"/>
+                <a:cs typeface="Noto Serif KR Black" pitchFamily="34" charset="-120"/>
+              </a:rPr>
+              <a:t>독서가 만드는 이해의 바탕</a:t>
+            </a:r>
+            <a:endParaRPr lang="en-US" sz="1700" dirty="0"/>
           </a:p>
         </p:txBody>
       </p:sp>
       <p:sp>
         <p:nvSpPr>
-          <p:cNvPr id="57" name="txt-1-17"/>
+          <p:cNvPr id="32" name="txt-3-1"/>
           <p:cNvSpPr txBox="1"/>
           <p:nvPr/>
         </p:nvSpPr>
         <p:spPr>
           <a:xfrm>
-            <a:off x="5400802" y="5897499"/>
-            <a:ext cx="907161" cy="236093"/>
+            <a:off x="381000" y="730758"/>
+            <a:ext cx="5077333" cy="1518920"/>
           </a:xfrm>
           <a:prstGeom prst="rect">
             <a:avLst/>
@@ -3010,37 +6574,57 @@
           <a:bodyPr wrap="square" lIns="0" tIns="0" rIns="0" bIns="0" rtlCol="0" anchor="t"/>
           <a:lstStyle/>
           <a:p>
-            <a:pPr algn="ctr" indent="0" marL="0">
-              <a:lnSpc>
-                <a:spcPts val="1430"/>
-              </a:lnSpc>
-              <a:buNone/>
-            </a:pPr>
-            <a:r>
-              <a:rPr lang="ko-KR" altLang="en-US" sz="1100" dirty="0">
-                <a:solidFill>
-                  <a:srgbClr val="101D42"/>
-                </a:solidFill>
-                <a:latin typeface="Noto Sans KR" pitchFamily="34" charset="0"/>
-                <a:ea typeface="Noto Sans KR" pitchFamily="34" charset="-127"/>
-                <a:cs typeface="Noto Sans KR" pitchFamily="34" charset="-120"/>
-              </a:rPr>
-              <a:t>읽기의 포기</a:t>
-            </a:r>
-            <a:endParaRPr lang="en-US" sz="1100" dirty="0"/>
+            <a:pPr algn="l" indent="0" marL="0">
+              <a:lnSpc>
+                <a:spcPts val="5200"/>
+              </a:lnSpc>
+              <a:buNone/>
+            </a:pPr>
+            <a:r>
+              <a:rPr lang="ko-KR" altLang="en-US" sz="3700" dirty="0">
+                <a:solidFill>
+                  <a:srgbClr val="101D42"/>
+                </a:solidFill>
+                <a:latin typeface="Noto Serif KR Black" pitchFamily="34" charset="0"/>
+                <a:ea typeface="Noto Serif KR Black" pitchFamily="34" charset="-122"/>
+                <a:cs typeface="Noto Serif KR Black" pitchFamily="34" charset="-120"/>
+              </a:rPr>
+              <a:t>아는 것이 쌓여야,</a:t>
+            </a:r>
+            <a:endParaRPr lang="en-US" sz="3700" dirty="0"/>
+          </a:p>
+          <a:p>
+            <a:pPr algn="l" indent="0" marL="0">
+              <a:lnSpc>
+                <a:spcPts val="5200"/>
+              </a:lnSpc>
+              <a:buNone/>
+            </a:pPr>
+            <a:r>
+              <a:rPr lang="ko-KR" altLang="en-US" sz="3700" dirty="0">
+                <a:solidFill>
+                  <a:srgbClr val="15543C"/>
+                </a:solidFill>
+                <a:latin typeface="Noto Serif KR Black" pitchFamily="34" charset="0"/>
+                <a:ea typeface="Noto Serif KR Black" pitchFamily="34" charset="-122"/>
+                <a:cs typeface="Noto Serif KR Black" pitchFamily="34" charset="-120"/>
+              </a:rPr>
+              <a:t>새 지식이 연결됩니다.</a:t>
+            </a:r>
+            <a:endParaRPr lang="en-US" sz="3700" dirty="0"/>
           </a:p>
         </p:txBody>
       </p:sp>
       <p:sp>
         <p:nvSpPr>
-          <p:cNvPr id="58" name="txt-1-18"/>
+          <p:cNvPr id="33" name="txt-3-2"/>
           <p:cNvSpPr txBox="1"/>
           <p:nvPr/>
         </p:nvSpPr>
         <p:spPr>
           <a:xfrm>
-            <a:off x="381000" y="6415151"/>
-            <a:ext cx="4904105" cy="450723"/>
+            <a:off x="863346" y="2540000"/>
+            <a:ext cx="5355717" cy="429260"/>
           </a:xfrm>
           <a:prstGeom prst="rect">
             <a:avLst/>
@@ -3054,35 +6638,35 @@
           <a:p>
             <a:pPr algn="l" indent="0" marL="0">
               <a:lnSpc>
-                <a:spcPts val="2730"/>
-              </a:lnSpc>
-              <a:buNone/>
-            </a:pPr>
-            <a:r>
-              <a:rPr lang="ko-KR" altLang="en-US" sz="2100" dirty="0">
+                <a:spcPts val="2600"/>
+              </a:lnSpc>
+              <a:buNone/>
+            </a:pPr>
+            <a:r>
+              <a:rPr lang="ko-KR" altLang="en-US" sz="2000" dirty="0">
                 <a:solidFill>
                   <a:srgbClr val="15543C"/>
                 </a:solidFill>
                 <a:latin typeface="Noto Serif KR Black" pitchFamily="34" charset="0"/>
-                <a:ea typeface="Noto Serif KR Black" pitchFamily="34" charset="-127"/>
+                <a:ea typeface="Noto Serif KR Black" pitchFamily="34" charset="-122"/>
                 <a:cs typeface="Noto Serif KR Black" pitchFamily="34" charset="-120"/>
               </a:rPr>
-              <a:t>초등교사들이 뜻을 모아 만들었습니다</a:t>
-            </a:r>
-            <a:endParaRPr lang="en-US" sz="2100" dirty="0"/>
+              <a:t>어휘와 간접 경험이 이해의 바탕을 넓힙니다</a:t>
+            </a:r>
+            <a:endParaRPr lang="en-US" sz="2000" dirty="0"/>
           </a:p>
         </p:txBody>
       </p:sp>
       <p:sp>
         <p:nvSpPr>
-          <p:cNvPr id="59" name="txt-1-19"/>
+          <p:cNvPr id="34" name="txt-3-3"/>
           <p:cNvSpPr txBox="1"/>
           <p:nvPr/>
         </p:nvSpPr>
         <p:spPr>
           <a:xfrm>
-            <a:off x="381000" y="6811899"/>
-            <a:ext cx="4670044" cy="493649"/>
+            <a:off x="381000" y="3040253"/>
+            <a:ext cx="7140956" cy="1089660"/>
           </a:xfrm>
           <a:prstGeom prst="rect">
             <a:avLst/>
@@ -3096,29 +6680,29 @@
           <a:p>
             <a:pPr algn="l" indent="0" marL="0">
               <a:lnSpc>
-                <a:spcPts val="2990"/>
-              </a:lnSpc>
-              <a:buNone/>
-            </a:pPr>
-            <a:r>
-              <a:rPr lang="ko-KR" altLang="en-US" sz="2300" dirty="0">
-                <a:solidFill>
-                  <a:srgbClr val="101D42"/>
-                </a:solidFill>
-                <a:latin typeface="Noto Sans KR" pitchFamily="34" charset="0"/>
-                <a:ea typeface="Noto Sans KR" pitchFamily="34" charset="-127"/>
-                <a:cs typeface="Noto Sans KR" pitchFamily="34" charset="-120"/>
-              </a:rPr>
-              <a:t>부기는 </a:t>
-            </a:r>
-            <a:pPr algn="l" indent="0" marL="0">
-              <a:lnSpc>
-                <a:spcPts val="2990"/>
-              </a:lnSpc>
-              <a:buNone/>
-            </a:pPr>
-            <a:r>
-              <a:rPr lang="ko-KR" altLang="en-US" sz="2300" b="1" dirty="0">
+                <a:spcPts val="2600"/>
+              </a:lnSpc>
+              <a:buNone/>
+            </a:pPr>
+            <a:r>
+              <a:rPr lang="ko-KR" altLang="en-US" sz="1800" dirty="0">
+                <a:solidFill>
+                  <a:srgbClr val="101D42"/>
+                </a:solidFill>
+                <a:latin typeface="Noto Sans KR" pitchFamily="34" charset="0"/>
+                <a:ea typeface="Noto Sans KR" pitchFamily="34" charset="-122"/>
+                <a:cs typeface="Noto Sans KR" pitchFamily="34" charset="-120"/>
+              </a:rPr>
+              <a:t>이야기에서는 </a:t>
+            </a:r>
+            <a:pPr algn="l" indent="0" marL="0">
+              <a:lnSpc>
+                <a:spcPts val="2600"/>
+              </a:lnSpc>
+              <a:buNone/>
+            </a:pPr>
+            <a:r>
+              <a:rPr lang="ko-KR" altLang="en-US" sz="1800" b="1" dirty="0">
                 <a:solidFill>
                   <a:srgbClr val="101D42"/>
                 </a:solidFill>
@@ -3126,42 +6710,193 @@
                   <a:srgbClr val="FFF0AD"/>
                 </a:highlight>
                 <a:latin typeface="Noto Sans KR" pitchFamily="34" charset="0"/>
-                <a:ea typeface="Noto Sans KR" pitchFamily="34" charset="-127"/>
-                <a:cs typeface="Noto Sans KR" pitchFamily="34" charset="-120"/>
-              </a:rPr>
-              <a:t>정답 대신 질문</a:t>
-            </a:r>
-            <a:pPr algn="l" indent="0" marL="0">
-              <a:lnSpc>
-                <a:spcPts val="2990"/>
-              </a:lnSpc>
-              <a:buNone/>
-            </a:pPr>
-            <a:r>
-              <a:rPr lang="ko-KR" altLang="en-US" sz="2300" dirty="0">
-                <a:solidFill>
-                  <a:srgbClr val="101D42"/>
-                </a:solidFill>
-                <a:latin typeface="Noto Sans KR" pitchFamily="34" charset="0"/>
-                <a:ea typeface="Noto Sans KR" pitchFamily="34" charset="-127"/>
-                <a:cs typeface="Noto Sans KR" pitchFamily="34" charset="-120"/>
-              </a:rPr>
-              <a:t>을 건넵니다.</a:t>
-            </a:r>
-            <a:endParaRPr lang="en-US" sz="2300" dirty="0"/>
+                <a:ea typeface="Noto Sans KR" pitchFamily="34" charset="-122"/>
+                <a:cs typeface="Noto Sans KR" pitchFamily="34" charset="-120"/>
+              </a:rPr>
+              <a:t>다른 삶과 선택</a:t>
+            </a:r>
+            <a:pPr algn="l" indent="0" marL="0">
+              <a:lnSpc>
+                <a:spcPts val="2600"/>
+              </a:lnSpc>
+              <a:buNone/>
+            </a:pPr>
+            <a:r>
+              <a:rPr lang="ko-KR" altLang="en-US" sz="1800" dirty="0">
+                <a:solidFill>
+                  <a:srgbClr val="101D42"/>
+                </a:solidFill>
+                <a:latin typeface="Noto Sans KR" pitchFamily="34" charset="0"/>
+                <a:ea typeface="Noto Sans KR" pitchFamily="34" charset="-122"/>
+                <a:cs typeface="Noto Sans KR" pitchFamily="34" charset="-120"/>
+              </a:rPr>
+              <a:t>을, 설명하는 글에서는 세상의 원리를,</a:t>
+            </a:r>
+            <a:endParaRPr lang="en-US" sz="1800" dirty="0"/>
+          </a:p>
+          <a:p>
+            <a:pPr algn="l" indent="0" marL="0">
+              <a:lnSpc>
+                <a:spcPts val="2600"/>
+              </a:lnSpc>
+              <a:buNone/>
+            </a:pPr>
+            <a:r>
+              <a:rPr lang="ko-KR" altLang="en-US" sz="1800" dirty="0">
+                <a:solidFill>
+                  <a:srgbClr val="101D42"/>
+                </a:solidFill>
+                <a:latin typeface="Noto Sans KR" pitchFamily="34" charset="0"/>
+                <a:ea typeface="Noto Sans KR" pitchFamily="34" charset="-122"/>
+                <a:cs typeface="Noto Sans KR" pitchFamily="34" charset="-120"/>
+              </a:rPr>
+              <a:t>에세이에서는 </a:t>
+            </a:r>
+            <a:pPr algn="l" indent="0" marL="0">
+              <a:lnSpc>
+                <a:spcPts val="2600"/>
+              </a:lnSpc>
+              <a:buNone/>
+            </a:pPr>
+            <a:r>
+              <a:rPr lang="ko-KR" altLang="en-US" sz="1800" b="1" dirty="0">
+                <a:solidFill>
+                  <a:srgbClr val="101D42"/>
+                </a:solidFill>
+                <a:highlight>
+                  <a:srgbClr val="FFF0AD"/>
+                </a:highlight>
+                <a:latin typeface="Noto Sans KR" pitchFamily="34" charset="0"/>
+                <a:ea typeface="Noto Sans KR" pitchFamily="34" charset="-122"/>
+                <a:cs typeface="Noto Sans KR" pitchFamily="34" charset="-120"/>
+              </a:rPr>
+              <a:t>다른 사람의 생각</a:t>
+            </a:r>
+            <a:pPr algn="l" indent="0" marL="0">
+              <a:lnSpc>
+                <a:spcPts val="2600"/>
+              </a:lnSpc>
+              <a:buNone/>
+            </a:pPr>
+            <a:r>
+              <a:rPr lang="ko-KR" altLang="en-US" sz="1800" dirty="0">
+                <a:solidFill>
+                  <a:srgbClr val="101D42"/>
+                </a:solidFill>
+                <a:latin typeface="Noto Sans KR" pitchFamily="34" charset="0"/>
+                <a:ea typeface="Noto Sans KR" pitchFamily="34" charset="-122"/>
+                <a:cs typeface="Noto Sans KR" pitchFamily="34" charset="-120"/>
+              </a:rPr>
+              <a:t>을 만납니다. 문맥 속에서 </a:t>
+            </a:r>
+            <a:pPr algn="l" indent="0" marL="0">
+              <a:lnSpc>
+                <a:spcPts val="2600"/>
+              </a:lnSpc>
+              <a:buNone/>
+            </a:pPr>
+            <a:r>
+              <a:rPr lang="ko-KR" altLang="en-US" sz="1800" b="1" dirty="0">
+                <a:solidFill>
+                  <a:srgbClr val="101D42"/>
+                </a:solidFill>
+                <a:highlight>
+                  <a:srgbClr val="FFF0AD"/>
+                </a:highlight>
+                <a:latin typeface="Noto Sans KR" pitchFamily="34" charset="0"/>
+                <a:ea typeface="Noto Sans KR" pitchFamily="34" charset="-122"/>
+                <a:cs typeface="Noto Sans KR" pitchFamily="34" charset="-120"/>
+              </a:rPr>
+              <a:t>낱말</a:t>
+            </a:r>
+            <a:pPr algn="l" indent="0" marL="0">
+              <a:lnSpc>
+                <a:spcPts val="2600"/>
+              </a:lnSpc>
+              <a:buNone/>
+            </a:pPr>
+            <a:r>
+              <a:rPr lang="ko-KR" altLang="en-US" sz="1800" dirty="0">
+                <a:solidFill>
+                  <a:srgbClr val="101D42"/>
+                </a:solidFill>
+                <a:latin typeface="Noto Sans KR" pitchFamily="34" charset="0"/>
+                <a:ea typeface="Noto Sans KR" pitchFamily="34" charset="-122"/>
+                <a:cs typeface="Noto Sans KR" pitchFamily="34" charset="-120"/>
+              </a:rPr>
+              <a:t>을 익히고,</a:t>
+            </a:r>
+            <a:endParaRPr lang="en-US" sz="1800" dirty="0"/>
+          </a:p>
+          <a:p>
+            <a:pPr algn="l" indent="0" marL="0">
+              <a:lnSpc>
+                <a:spcPts val="2600"/>
+              </a:lnSpc>
+              <a:buNone/>
+            </a:pPr>
+            <a:r>
+              <a:rPr lang="ko-KR" altLang="en-US" sz="1800" dirty="0">
+                <a:solidFill>
+                  <a:srgbClr val="101D42"/>
+                </a:solidFill>
+                <a:latin typeface="Noto Sans KR" pitchFamily="34" charset="0"/>
+                <a:ea typeface="Noto Sans KR" pitchFamily="34" charset="-122"/>
+                <a:cs typeface="Noto Sans KR" pitchFamily="34" charset="-120"/>
+              </a:rPr>
+              <a:t>다른 생각을 따라 읽으며 </a:t>
+            </a:r>
+            <a:pPr algn="l" indent="0" marL="0">
+              <a:lnSpc>
+                <a:spcPts val="2600"/>
+              </a:lnSpc>
+              <a:buNone/>
+            </a:pPr>
+            <a:r>
+              <a:rPr lang="ko-KR" altLang="en-US" sz="1800" b="1" dirty="0">
+                <a:solidFill>
+                  <a:srgbClr val="101D42"/>
+                </a:solidFill>
+                <a:highlight>
+                  <a:srgbClr val="FFF0AD"/>
+                </a:highlight>
+                <a:latin typeface="Noto Sans KR" pitchFamily="34" charset="0"/>
+                <a:ea typeface="Noto Sans KR" pitchFamily="34" charset="-122"/>
+                <a:cs typeface="Noto Sans KR" pitchFamily="34" charset="-120"/>
+              </a:rPr>
+              <a:t>자기 경험</a:t>
+            </a:r>
+            <a:pPr algn="l" indent="0" marL="0">
+              <a:lnSpc>
+                <a:spcPts val="2600"/>
+              </a:lnSpc>
+              <a:buNone/>
+            </a:pPr>
+            <a:r>
+              <a:rPr lang="ko-KR" altLang="en-US" sz="1800" dirty="0">
+                <a:solidFill>
+                  <a:srgbClr val="101D42"/>
+                </a:solidFill>
+                <a:latin typeface="Noto Sans KR" pitchFamily="34" charset="0"/>
+                <a:ea typeface="Noto Sans KR" pitchFamily="34" charset="-122"/>
+                <a:cs typeface="Noto Sans KR" pitchFamily="34" charset="-120"/>
+              </a:rPr>
+              <a:t>과 비교합니다.</a:t>
+            </a:r>
+            <a:endParaRPr lang="en-US" sz="1800" dirty="0"/>
           </a:p>
         </p:txBody>
       </p:sp>
       <p:sp>
         <p:nvSpPr>
-          <p:cNvPr id="60" name="txt-1-20"/>
+          <p:cNvPr id="35" name="txt-3-4"/>
           <p:cNvSpPr txBox="1"/>
           <p:nvPr/>
         </p:nvSpPr>
         <p:spPr>
           <a:xfrm>
-            <a:off x="381000" y="7313422"/>
-            <a:ext cx="4235577" cy="225425"/>
+            <a:off x="863346" y="4417314"/>
+            <a:ext cx="5977382" cy="424942"/>
           </a:xfrm>
           <a:prstGeom prst="rect">
             <a:avLst/>
@@ -3175,29 +6910,71 @@
           <a:p>
             <a:pPr algn="l" indent="0" marL="0">
               <a:lnSpc>
-                <a:spcPts val="1365"/>
-              </a:lnSpc>
-              <a:buNone/>
-            </a:pPr>
-            <a:r>
-              <a:rPr lang="ko-KR" altLang="en-US" sz="1050" dirty="0">
-                <a:solidFill>
-                  <a:srgbClr val="101D42"/>
-                </a:solidFill>
-                <a:latin typeface="Noto Sans KR" pitchFamily="34" charset="0"/>
-                <a:ea typeface="Noto Sans KR" pitchFamily="34" charset="-127"/>
-                <a:cs typeface="Noto Sans KR" pitchFamily="34" charset="-120"/>
-              </a:rPr>
-              <a:t>학교에서 시범 사용을 통해 </a:t>
-            </a:r>
-            <a:pPr algn="l" indent="0" marL="0">
-              <a:lnSpc>
-                <a:spcPts val="1365"/>
-              </a:lnSpc>
-              <a:buNone/>
-            </a:pPr>
-            <a:r>
-              <a:rPr lang="ko-KR" altLang="en-US" sz="1050" b="1" dirty="0">
+                <a:spcPts val="2574"/>
+              </a:lnSpc>
+              <a:buNone/>
+            </a:pPr>
+            <a:r>
+              <a:rPr lang="ko-KR" altLang="en-US" sz="1980" dirty="0">
+                <a:solidFill>
+                  <a:srgbClr val="15543C"/>
+                </a:solidFill>
+                <a:latin typeface="Noto Serif KR Black" pitchFamily="34" charset="0"/>
+                <a:ea typeface="Noto Serif KR Black" pitchFamily="34" charset="-122"/>
+                <a:cs typeface="Noto Serif KR Black" pitchFamily="34" charset="-120"/>
+              </a:rPr>
+              <a:t>스키마는 경험과 지식이 조직된 ‘이해의 틀’입니다</a:t>
+            </a:r>
+            <a:endParaRPr lang="en-US" sz="1980" dirty="0"/>
+          </a:p>
+        </p:txBody>
+      </p:sp>
+      <p:sp>
+        <p:nvSpPr>
+          <p:cNvPr id="36" name="txt-3-5"/>
+          <p:cNvSpPr txBox="1"/>
+          <p:nvPr/>
+        </p:nvSpPr>
+        <p:spPr>
+          <a:xfrm>
+            <a:off x="381000" y="4932426"/>
+            <a:ext cx="7140956" cy="1089660"/>
+          </a:xfrm>
+          <a:prstGeom prst="rect">
+            <a:avLst/>
+          </a:prstGeom>
+          <a:noFill/>
+          <a:ln/>
+        </p:spPr>
+        <p:txBody>
+          <a:bodyPr wrap="square" lIns="0" tIns="0" rIns="0" bIns="0" rtlCol="0" anchor="t"/>
+          <a:lstStyle/>
+          <a:p>
+            <a:pPr algn="l" indent="0" marL="0">
+              <a:lnSpc>
+                <a:spcPts val="2600"/>
+              </a:lnSpc>
+              <a:buNone/>
+            </a:pPr>
+            <a:r>
+              <a:rPr lang="ko-KR" altLang="en-US" sz="1800" dirty="0">
+                <a:solidFill>
+                  <a:srgbClr val="101D42"/>
+                </a:solidFill>
+                <a:latin typeface="Noto Sans KR" pitchFamily="34" charset="0"/>
+                <a:ea typeface="Noto Sans KR" pitchFamily="34" charset="-122"/>
+                <a:cs typeface="Noto Sans KR" pitchFamily="34" charset="-120"/>
+              </a:rPr>
+              <a:t>새로운 내용은 </a:t>
+            </a:r>
+            <a:pPr algn="l" indent="0" marL="0">
+              <a:lnSpc>
+                <a:spcPts val="2600"/>
+              </a:lnSpc>
+              <a:buNone/>
+            </a:pPr>
+            <a:r>
+              <a:rPr lang="ko-KR" altLang="en-US" sz="1800" b="1" dirty="0">
                 <a:solidFill>
                   <a:srgbClr val="101D42"/>
                 </a:solidFill>
@@ -3205,42 +6982,156 @@
                   <a:srgbClr val="FFF0AD"/>
                 </a:highlight>
                 <a:latin typeface="Noto Sans KR" pitchFamily="34" charset="0"/>
-                <a:ea typeface="Noto Sans KR" pitchFamily="34" charset="-127"/>
-                <a:cs typeface="Noto Sans KR" pitchFamily="34" charset="-120"/>
-              </a:rPr>
-              <a:t>계속 개선하고 발전</a:t>
-            </a:r>
-            <a:pPr algn="l" indent="0" marL="0">
-              <a:lnSpc>
-                <a:spcPts val="1365"/>
-              </a:lnSpc>
-              <a:buNone/>
-            </a:pPr>
-            <a:r>
-              <a:rPr lang="ko-KR" altLang="en-US" sz="1050" dirty="0">
-                <a:solidFill>
-                  <a:srgbClr val="101D42"/>
-                </a:solidFill>
-                <a:latin typeface="Noto Sans KR" pitchFamily="34" charset="0"/>
-                <a:ea typeface="Noto Sans KR" pitchFamily="34" charset="-127"/>
-                <a:cs typeface="Noto Sans KR" pitchFamily="34" charset="-120"/>
-              </a:rPr>
-              <a:t>시켜 나가고 있습니다.</a:t>
-            </a:r>
-            <a:endParaRPr lang="en-US" sz="1050" dirty="0"/>
+                <a:ea typeface="Noto Sans KR" pitchFamily="34" charset="-122"/>
+                <a:cs typeface="Noto Sans KR" pitchFamily="34" charset="-120"/>
+              </a:rPr>
+              <a:t>이미 알고 있는 개념과 경험</a:t>
+            </a:r>
+            <a:pPr algn="l" indent="0" marL="0">
+              <a:lnSpc>
+                <a:spcPts val="2600"/>
+              </a:lnSpc>
+              <a:buNone/>
+            </a:pPr>
+            <a:r>
+              <a:rPr lang="ko-KR" altLang="en-US" sz="1800" dirty="0">
+                <a:solidFill>
+                  <a:srgbClr val="101D42"/>
+                </a:solidFill>
+                <a:latin typeface="Noto Sans KR" pitchFamily="34" charset="0"/>
+                <a:ea typeface="Noto Sans KR" pitchFamily="34" charset="-122"/>
+                <a:cs typeface="Noto Sans KR" pitchFamily="34" charset="-120"/>
+              </a:rPr>
+              <a:t>에 연결될 때 더 잘 이해할 수</a:t>
+            </a:r>
+            <a:endParaRPr lang="en-US" sz="1800" dirty="0"/>
+          </a:p>
+          <a:p>
+            <a:pPr algn="l" indent="0" marL="0">
+              <a:lnSpc>
+                <a:spcPts val="2600"/>
+              </a:lnSpc>
+              <a:buNone/>
+            </a:pPr>
+            <a:r>
+              <a:rPr lang="ko-KR" altLang="en-US" sz="1800" dirty="0">
+                <a:solidFill>
+                  <a:srgbClr val="101D42"/>
+                </a:solidFill>
+                <a:latin typeface="Noto Sans KR" pitchFamily="34" charset="0"/>
+                <a:ea typeface="Noto Sans KR" pitchFamily="34" charset="-122"/>
+                <a:cs typeface="Noto Sans KR" pitchFamily="34" charset="-120"/>
+              </a:rPr>
+              <a:t>있습니다. </a:t>
+            </a:r>
+            <a:pPr algn="l" indent="0" marL="0">
+              <a:lnSpc>
+                <a:spcPts val="2600"/>
+              </a:lnSpc>
+              <a:buNone/>
+            </a:pPr>
+            <a:r>
+              <a:rPr lang="ko-KR" altLang="en-US" sz="1800" b="1" dirty="0">
+                <a:solidFill>
+                  <a:srgbClr val="101D42"/>
+                </a:solidFill>
+                <a:highlight>
+                  <a:srgbClr val="FFF0AD"/>
+                </a:highlight>
+                <a:latin typeface="Noto Sans KR" pitchFamily="34" charset="0"/>
+                <a:ea typeface="Noto Sans KR" pitchFamily="34" charset="-122"/>
+                <a:cs typeface="Noto Sans KR" pitchFamily="34" charset="-120"/>
+              </a:rPr>
+              <a:t>관련 어휘와 배경지식</a:t>
+            </a:r>
+            <a:pPr algn="l" indent="0" marL="0">
+              <a:lnSpc>
+                <a:spcPts val="2600"/>
+              </a:lnSpc>
+              <a:buNone/>
+            </a:pPr>
+            <a:r>
+              <a:rPr lang="ko-KR" altLang="en-US" sz="1800" dirty="0">
+                <a:solidFill>
+                  <a:srgbClr val="101D42"/>
+                </a:solidFill>
+                <a:latin typeface="Noto Sans KR" pitchFamily="34" charset="0"/>
+                <a:ea typeface="Noto Sans KR" pitchFamily="34" charset="-122"/>
+                <a:cs typeface="Noto Sans KR" pitchFamily="34" charset="-120"/>
+              </a:rPr>
+              <a:t>이 부족하면 글자를 읽어도 </a:t>
+            </a:r>
+            <a:pPr algn="l" indent="0" marL="0">
+              <a:lnSpc>
+                <a:spcPts val="2600"/>
+              </a:lnSpc>
+              <a:buNone/>
+            </a:pPr>
+            <a:r>
+              <a:rPr lang="ko-KR" altLang="en-US" sz="1800" b="1" dirty="0">
+                <a:solidFill>
+                  <a:srgbClr val="101D42"/>
+                </a:solidFill>
+                <a:highlight>
+                  <a:srgbClr val="FFF0AD"/>
+                </a:highlight>
+                <a:latin typeface="Noto Sans KR" pitchFamily="34" charset="0"/>
+                <a:ea typeface="Noto Sans KR" pitchFamily="34" charset="-122"/>
+                <a:cs typeface="Noto Sans KR" pitchFamily="34" charset="-120"/>
+              </a:rPr>
+              <a:t>맥락과 의미</a:t>
+            </a:r>
+            <a:pPr algn="l" indent="0" marL="0">
+              <a:lnSpc>
+                <a:spcPts val="2600"/>
+              </a:lnSpc>
+              <a:buNone/>
+            </a:pPr>
+            <a:r>
+              <a:rPr lang="ko-KR" altLang="en-US" sz="1800" dirty="0">
+                <a:solidFill>
+                  <a:srgbClr val="101D42"/>
+                </a:solidFill>
+                <a:latin typeface="Noto Sans KR" pitchFamily="34" charset="0"/>
+                <a:ea typeface="Noto Sans KR" pitchFamily="34" charset="-122"/>
+                <a:cs typeface="Noto Sans KR" pitchFamily="34" charset="-120"/>
+              </a:rPr>
+              <a:t>를</a:t>
+            </a:r>
+            <a:endParaRPr lang="en-US" sz="1800" dirty="0"/>
+          </a:p>
+          <a:p>
+            <a:pPr algn="l" indent="0" marL="0">
+              <a:lnSpc>
+                <a:spcPts val="2600"/>
+              </a:lnSpc>
+              <a:buNone/>
+            </a:pPr>
+            <a:r>
+              <a:rPr lang="ko-KR" altLang="en-US" sz="1800" dirty="0">
+                <a:solidFill>
+                  <a:srgbClr val="101D42"/>
+                </a:solidFill>
+                <a:latin typeface="Noto Sans KR" pitchFamily="34" charset="0"/>
+                <a:ea typeface="Noto Sans KR" pitchFamily="34" charset="-122"/>
+                <a:cs typeface="Noto Sans KR" pitchFamily="34" charset="-120"/>
+              </a:rPr>
+              <a:t>연결하기 어렵습니다.</a:t>
+            </a:r>
+            <a:endParaRPr lang="en-US" sz="1800" dirty="0"/>
           </a:p>
         </p:txBody>
       </p:sp>
       <p:sp>
         <p:nvSpPr>
-          <p:cNvPr id="61" name="txt-1-21"/>
+          <p:cNvPr id="37" name="txt-3-6"/>
           <p:cNvSpPr txBox="1"/>
           <p:nvPr/>
         </p:nvSpPr>
         <p:spPr>
           <a:xfrm>
-            <a:off x="825246" y="7737856"/>
-            <a:ext cx="584200" cy="343408"/>
+            <a:off x="381000" y="6113526"/>
+            <a:ext cx="7140956" cy="759460"/>
           </a:xfrm>
           <a:prstGeom prst="rect">
             <a:avLst/>
@@ -3254,35 +7145,149 @@
           <a:p>
             <a:pPr algn="l" indent="0" marL="0">
               <a:lnSpc>
-                <a:spcPts val="2080"/>
-              </a:lnSpc>
-              <a:buNone/>
-            </a:pPr>
-            <a:r>
-              <a:rPr lang="ko-KR" altLang="en-US" sz="1600" dirty="0">
-                <a:solidFill>
-                  <a:srgbClr val="15543C"/>
-                </a:solidFill>
-                <a:latin typeface="Noto Serif KR Black" pitchFamily="34" charset="0"/>
-                <a:ea typeface="Noto Serif KR Black" pitchFamily="34" charset="-127"/>
-                <a:cs typeface="Noto Serif KR Black" pitchFamily="34" charset="-120"/>
-              </a:rPr>
-              <a:t>읽기</a:t>
-            </a:r>
-            <a:endParaRPr lang="en-US" sz="1600" dirty="0"/>
+                <a:spcPts val="2600"/>
+              </a:lnSpc>
+              <a:buNone/>
+            </a:pPr>
+            <a:r>
+              <a:rPr lang="ko-KR" altLang="en-US" sz="1800" dirty="0">
+                <a:solidFill>
+                  <a:srgbClr val="101D42"/>
+                </a:solidFill>
+                <a:latin typeface="Noto Sans KR" pitchFamily="34" charset="0"/>
+                <a:ea typeface="Noto Sans KR" pitchFamily="34" charset="-122"/>
+                <a:cs typeface="Noto Sans KR" pitchFamily="34" charset="-120"/>
+              </a:rPr>
+              <a:t>그래서 읽기 전 필요한 </a:t>
+            </a:r>
+            <a:pPr algn="l" indent="0" marL="0">
+              <a:lnSpc>
+                <a:spcPts val="2600"/>
+              </a:lnSpc>
+              <a:buNone/>
+            </a:pPr>
+            <a:r>
+              <a:rPr lang="ko-KR" altLang="en-US" sz="1800" b="1" dirty="0">
+                <a:solidFill>
+                  <a:srgbClr val="101D42"/>
+                </a:solidFill>
+                <a:highlight>
+                  <a:srgbClr val="FFF0AD"/>
+                </a:highlight>
+                <a:latin typeface="Noto Sans KR" pitchFamily="34" charset="0"/>
+                <a:ea typeface="Noto Sans KR" pitchFamily="34" charset="-122"/>
+                <a:cs typeface="Noto Sans KR" pitchFamily="34" charset="-120"/>
+              </a:rPr>
+              <a:t>배경을 짚고</a:t>
+            </a:r>
+            <a:pPr algn="l" indent="0" marL="0">
+              <a:lnSpc>
+                <a:spcPts val="2600"/>
+              </a:lnSpc>
+              <a:buNone/>
+            </a:pPr>
+            <a:r>
+              <a:rPr lang="ko-KR" altLang="en-US" sz="1800" dirty="0">
+                <a:solidFill>
+                  <a:srgbClr val="101D42"/>
+                </a:solidFill>
+                <a:latin typeface="Noto Sans KR" pitchFamily="34" charset="0"/>
+                <a:ea typeface="Noto Sans KR" pitchFamily="34" charset="-122"/>
+                <a:cs typeface="Noto Sans KR" pitchFamily="34" charset="-120"/>
+              </a:rPr>
+              <a:t>, 읽으며 </a:t>
+            </a:r>
+            <a:pPr algn="l" indent="0" marL="0">
+              <a:lnSpc>
+                <a:spcPts val="2600"/>
+              </a:lnSpc>
+              <a:buNone/>
+            </a:pPr>
+            <a:r>
+              <a:rPr lang="ko-KR" altLang="en-US" sz="1800" b="1" dirty="0">
+                <a:solidFill>
+                  <a:srgbClr val="101D42"/>
+                </a:solidFill>
+                <a:highlight>
+                  <a:srgbClr val="FFF0AD"/>
+                </a:highlight>
+                <a:latin typeface="Noto Sans KR" pitchFamily="34" charset="0"/>
+                <a:ea typeface="Noto Sans KR" pitchFamily="34" charset="-122"/>
+                <a:cs typeface="Noto Sans KR" pitchFamily="34" charset="-120"/>
+              </a:rPr>
+              <a:t>어휘를 익히고</a:t>
+            </a:r>
+            <a:pPr algn="l" indent="0" marL="0">
+              <a:lnSpc>
+                <a:spcPts val="2600"/>
+              </a:lnSpc>
+              <a:buNone/>
+            </a:pPr>
+            <a:r>
+              <a:rPr lang="ko-KR" altLang="en-US" sz="1800" dirty="0">
+                <a:solidFill>
+                  <a:srgbClr val="101D42"/>
+                </a:solidFill>
+                <a:latin typeface="Noto Sans KR" pitchFamily="34" charset="0"/>
+                <a:ea typeface="Noto Sans KR" pitchFamily="34" charset="-122"/>
+                <a:cs typeface="Noto Sans KR" pitchFamily="34" charset="-120"/>
+              </a:rPr>
+              <a:t>, 새 내용으로</a:t>
+            </a:r>
+            <a:endParaRPr lang="en-US" sz="1800" dirty="0"/>
+          </a:p>
+          <a:p>
+            <a:pPr algn="l" indent="0" marL="0">
+              <a:lnSpc>
+                <a:spcPts val="2600"/>
+              </a:lnSpc>
+              <a:buNone/>
+            </a:pPr>
+            <a:r>
+              <a:rPr lang="ko-KR" altLang="en-US" sz="1800" b="1" dirty="0">
+                <a:solidFill>
+                  <a:srgbClr val="101D42"/>
+                </a:solidFill>
+                <a:highlight>
+                  <a:srgbClr val="FFF0AD"/>
+                </a:highlight>
+                <a:latin typeface="Noto Sans KR" pitchFamily="34" charset="0"/>
+                <a:ea typeface="Noto Sans KR" pitchFamily="34" charset="-122"/>
+                <a:cs typeface="Noto Sans KR" pitchFamily="34" charset="-120"/>
+              </a:rPr>
+              <a:t>기존 생각을 넓히거나 고치는</a:t>
+            </a:r>
+            <a:pPr algn="l" indent="0" marL="0">
+              <a:lnSpc>
+                <a:spcPts val="2600"/>
+              </a:lnSpc>
+              <a:buNone/>
+            </a:pPr>
+            <a:r>
+              <a:rPr lang="ko-KR" altLang="en-US" sz="1800" dirty="0">
+                <a:solidFill>
+                  <a:srgbClr val="101D42"/>
+                </a:solidFill>
+                <a:latin typeface="Noto Sans KR" pitchFamily="34" charset="0"/>
+                <a:ea typeface="Noto Sans KR" pitchFamily="34" charset="-122"/>
+                <a:cs typeface="Noto Sans KR" pitchFamily="34" charset="-120"/>
+              </a:rPr>
+              <a:t> 과정이 필요합니다.</a:t>
+            </a:r>
+            <a:endParaRPr lang="en-US" sz="1800" dirty="0"/>
           </a:p>
         </p:txBody>
       </p:sp>
       <p:sp>
         <p:nvSpPr>
-          <p:cNvPr id="62" name="txt-1-22"/>
+          <p:cNvPr id="38" name="txt-3-7"/>
           <p:cNvSpPr txBox="1"/>
           <p:nvPr/>
         </p:nvSpPr>
         <p:spPr>
           <a:xfrm>
-            <a:off x="2571242" y="7737856"/>
-            <a:ext cx="584200" cy="343408"/>
+            <a:off x="863346" y="8180705"/>
+            <a:ext cx="1171321" cy="231775"/>
           </a:xfrm>
           <a:prstGeom prst="rect">
             <a:avLst/>
@@ -3296,35 +7301,35 @@
           <a:p>
             <a:pPr algn="l" indent="0" marL="0">
               <a:lnSpc>
-                <a:spcPts val="2080"/>
-              </a:lnSpc>
-              <a:buNone/>
-            </a:pPr>
-            <a:r>
-              <a:rPr lang="ko-KR" altLang="en-US" sz="1600" dirty="0">
+                <a:spcPts val="1404"/>
+              </a:lnSpc>
+              <a:buNone/>
+            </a:pPr>
+            <a:r>
+              <a:rPr lang="ko-KR" altLang="en-US" sz="1080" dirty="0">
                 <a:solidFill>
                   <a:srgbClr val="15543C"/>
                 </a:solidFill>
-                <a:latin typeface="Noto Serif KR Black" pitchFamily="34" charset="0"/>
-                <a:ea typeface="Noto Serif KR Black" pitchFamily="34" charset="-127"/>
-                <a:cs typeface="Noto Serif KR Black" pitchFamily="34" charset="-120"/>
-              </a:rPr>
-              <a:t>묻기</a:t>
-            </a:r>
-            <a:endParaRPr lang="en-US" sz="1600" dirty="0"/>
+                <a:latin typeface="Noto Sans KR" pitchFamily="34" charset="0"/>
+                <a:ea typeface="Noto Sans KR" pitchFamily="34" charset="-122"/>
+                <a:cs typeface="Noto Sans KR" pitchFamily="34" charset="-120"/>
+              </a:rPr>
+              <a:t>어휘 · 간접 경험</a:t>
+            </a:r>
+            <a:endParaRPr lang="en-US" sz="1080" dirty="0"/>
           </a:p>
         </p:txBody>
       </p:sp>
       <p:sp>
         <p:nvSpPr>
-          <p:cNvPr id="63" name="txt-1-23"/>
+          <p:cNvPr id="39" name="txt-3-8"/>
           <p:cNvSpPr txBox="1"/>
           <p:nvPr/>
         </p:nvSpPr>
         <p:spPr>
           <a:xfrm>
-            <a:off x="4317238" y="7737856"/>
-            <a:ext cx="1016127" cy="343408"/>
+            <a:off x="3199765" y="8180705"/>
+            <a:ext cx="1276223" cy="231775"/>
           </a:xfrm>
           <a:prstGeom prst="rect">
             <a:avLst/>
@@ -3338,35 +7343,35 @@
           <a:p>
             <a:pPr algn="l" indent="0" marL="0">
               <a:lnSpc>
-                <a:spcPts val="2080"/>
-              </a:lnSpc>
-              <a:buNone/>
-            </a:pPr>
-            <a:r>
-              <a:rPr lang="ko-KR" altLang="en-US" sz="1600" dirty="0">
+                <a:spcPts val="1404"/>
+              </a:lnSpc>
+              <a:buNone/>
+            </a:pPr>
+            <a:r>
+              <a:rPr lang="ko-KR" altLang="en-US" sz="1080" dirty="0">
                 <a:solidFill>
                   <a:srgbClr val="15543C"/>
                 </a:solidFill>
-                <a:latin typeface="Noto Serif KR Black" pitchFamily="34" charset="0"/>
-                <a:ea typeface="Noto Serif KR Black" pitchFamily="34" charset="-127"/>
-                <a:cs typeface="Noto Serif KR Black" pitchFamily="34" charset="-120"/>
-              </a:rPr>
-              <a:t>표현하기</a:t>
-            </a:r>
-            <a:endParaRPr lang="en-US" sz="1600" dirty="0"/>
+                <a:latin typeface="Noto Sans KR" pitchFamily="34" charset="0"/>
+                <a:ea typeface="Noto Sans KR" pitchFamily="34" charset="-122"/>
+                <a:cs typeface="Noto Sans KR" pitchFamily="34" charset="-120"/>
+              </a:rPr>
+              <a:t>배경지식 · 스키마</a:t>
+            </a:r>
+            <a:endParaRPr lang="en-US" sz="1080" dirty="0"/>
           </a:p>
         </p:txBody>
       </p:sp>
       <p:sp>
         <p:nvSpPr>
-          <p:cNvPr id="64" name="txt-1-24"/>
+          <p:cNvPr id="40" name="txt-3-9"/>
           <p:cNvSpPr txBox="1"/>
           <p:nvPr/>
         </p:nvSpPr>
         <p:spPr>
           <a:xfrm>
-            <a:off x="5951220" y="7737856"/>
-            <a:ext cx="811911" cy="343408"/>
+            <a:off x="5536184" y="8180705"/>
+            <a:ext cx="1289685" cy="231775"/>
           </a:xfrm>
           <a:prstGeom prst="rect">
             <a:avLst/>
@@ -3378,37 +7383,37 @@
           <a:bodyPr wrap="square" lIns="0" tIns="0" rIns="0" bIns="0" rtlCol="0" anchor="t"/>
           <a:lstStyle/>
           <a:p>
-            <a:pPr algn="ctr" indent="0" marL="0">
-              <a:lnSpc>
-                <a:spcPts val="2080"/>
-              </a:lnSpc>
-              <a:buNone/>
-            </a:pPr>
-            <a:r>
-              <a:rPr lang="ko-KR" altLang="en-US" sz="1600" dirty="0">
+            <a:pPr algn="l" indent="0" marL="0">
+              <a:lnSpc>
+                <a:spcPts val="1404"/>
+              </a:lnSpc>
+              <a:buNone/>
+            </a:pPr>
+            <a:r>
+              <a:rPr lang="ko-KR" altLang="en-US" sz="1080" dirty="0">
                 <a:solidFill>
                   <a:srgbClr val="15543C"/>
                 </a:solidFill>
-                <a:latin typeface="Noto Serif KR Black" pitchFamily="34" charset="0"/>
-                <a:ea typeface="Noto Serif KR Black" pitchFamily="34" charset="-127"/>
-                <a:cs typeface="Noto Serif KR Black" pitchFamily="34" charset="-120"/>
-              </a:rPr>
-              <a:t>모으기</a:t>
-            </a:r>
-            <a:endParaRPr lang="en-US" sz="1600" dirty="0"/>
+                <a:latin typeface="Noto Sans KR" pitchFamily="34" charset="0"/>
+                <a:ea typeface="Noto Sans KR" pitchFamily="34" charset="-122"/>
+                <a:cs typeface="Noto Sans KR" pitchFamily="34" charset="-120"/>
+              </a:rPr>
+              <a:t>이해 · 추론 · 연결</a:t>
+            </a:r>
+            <a:endParaRPr lang="en-US" sz="1080" dirty="0"/>
           </a:p>
         </p:txBody>
       </p:sp>
       <p:sp>
         <p:nvSpPr>
-          <p:cNvPr id="65" name="txt-1-25"/>
+          <p:cNvPr id="41" name="txt-3-10"/>
           <p:cNvSpPr txBox="1"/>
           <p:nvPr/>
         </p:nvSpPr>
         <p:spPr>
           <a:xfrm>
-            <a:off x="616077" y="8082280"/>
-            <a:ext cx="1080135" cy="350520"/>
+            <a:off x="2513965" y="8141970"/>
+            <a:ext cx="361950" cy="321945"/>
           </a:xfrm>
           <a:prstGeom prst="rect">
             <a:avLst/>
@@ -3420,57 +7425,37 @@
           <a:bodyPr wrap="square" lIns="0" tIns="0" rIns="0" bIns="0" rtlCol="0" anchor="t"/>
           <a:lstStyle/>
           <a:p>
-            <a:pPr algn="ctr" indent="0" marL="0">
-              <a:lnSpc>
-                <a:spcPts val="1200"/>
-              </a:lnSpc>
-              <a:buNone/>
-            </a:pPr>
-            <a:r>
-              <a:rPr lang="ko-KR" altLang="en-US" sz="850" dirty="0">
-                <a:solidFill>
-                  <a:srgbClr val="101D42"/>
-                </a:solidFill>
-                <a:latin typeface="Noto Sans KR" pitchFamily="34" charset="0"/>
-                <a:ea typeface="Noto Sans KR" pitchFamily="34" charset="-127"/>
-                <a:cs typeface="Noto Sans KR" pitchFamily="34" charset="-120"/>
-              </a:rPr>
-              <a:t>능동적 그림 읽기</a:t>
-            </a:r>
-            <a:endParaRPr lang="en-US" sz="850" dirty="0"/>
-          </a:p>
-          <a:p>
-            <a:pPr algn="ctr" indent="0" marL="0">
-              <a:lnSpc>
-                <a:spcPts val="1200"/>
-              </a:lnSpc>
-              <a:buNone/>
-            </a:pPr>
-            <a:r>
-              <a:rPr lang="ko-KR" altLang="en-US" sz="850" dirty="0">
-                <a:solidFill>
-                  <a:srgbClr val="101D42"/>
-                </a:solidFill>
-                <a:latin typeface="Noto Sans KR" pitchFamily="34" charset="0"/>
-                <a:ea typeface="Noto Sans KR" pitchFamily="34" charset="-127"/>
-                <a:cs typeface="Noto Sans KR" pitchFamily="34" charset="-120"/>
-              </a:rPr>
-              <a:t>낱말 · 다국어 지원</a:t>
-            </a:r>
-            <a:endParaRPr lang="en-US" sz="850" dirty="0"/>
+            <a:pPr algn="l" indent="0" marL="0">
+              <a:lnSpc>
+                <a:spcPts val="1950"/>
+              </a:lnSpc>
+              <a:buNone/>
+            </a:pPr>
+            <a:r>
+              <a:rPr lang="ko-KR" altLang="en-US" sz="1500" dirty="0">
+                <a:solidFill>
+                  <a:srgbClr val="D59B32"/>
+                </a:solidFill>
+                <a:latin typeface="Noto Sans KR" pitchFamily="34" charset="0"/>
+                <a:ea typeface="Noto Sans KR" pitchFamily="34" charset="-122"/>
+                <a:cs typeface="Noto Sans KR" pitchFamily="34" charset="-120"/>
+              </a:rPr>
+              <a:t>→</a:t>
+            </a:r>
+            <a:endParaRPr lang="en-US" sz="1500" dirty="0"/>
           </a:p>
         </p:txBody>
       </p:sp>
       <p:sp>
         <p:nvSpPr>
-          <p:cNvPr id="66" name="txt-1-26"/>
+          <p:cNvPr id="42" name="txt-3-11"/>
           <p:cNvSpPr txBox="1"/>
           <p:nvPr/>
         </p:nvSpPr>
         <p:spPr>
           <a:xfrm>
-            <a:off x="2228342" y="8082280"/>
-            <a:ext cx="1345946" cy="350520"/>
+            <a:off x="4850384" y="8141970"/>
+            <a:ext cx="361950" cy="321945"/>
           </a:xfrm>
           <a:prstGeom prst="rect">
             <a:avLst/>
@@ -3482,57 +7467,37 @@
           <a:bodyPr wrap="square" lIns="0" tIns="0" rIns="0" bIns="0" rtlCol="0" anchor="t"/>
           <a:lstStyle/>
           <a:p>
-            <a:pPr algn="ctr" indent="0" marL="0">
-              <a:lnSpc>
-                <a:spcPts val="1200"/>
-              </a:lnSpc>
-              <a:buNone/>
-            </a:pPr>
-            <a:r>
-              <a:rPr lang="ko-KR" altLang="en-US" sz="850" dirty="0">
-                <a:solidFill>
-                  <a:srgbClr val="101D42"/>
-                </a:solidFill>
-                <a:latin typeface="Noto Sans KR" pitchFamily="34" charset="0"/>
-                <a:ea typeface="Noto Sans KR" pitchFamily="34" charset="-127"/>
-                <a:cs typeface="Noto Sans KR" pitchFamily="34" charset="-120"/>
-              </a:rPr>
-              <a:t>캐릭터와의 대화</a:t>
-            </a:r>
-            <a:endParaRPr lang="en-US" sz="850" dirty="0"/>
-          </a:p>
-          <a:p>
-            <a:pPr algn="ctr" indent="0" marL="0">
-              <a:lnSpc>
-                <a:spcPts val="1200"/>
-              </a:lnSpc>
-              <a:buNone/>
-            </a:pPr>
-            <a:r>
-              <a:rPr lang="ko-KR" altLang="en-US" sz="850" dirty="0">
-                <a:solidFill>
-                  <a:srgbClr val="101D42"/>
-                </a:solidFill>
-                <a:latin typeface="Noto Sans KR" pitchFamily="34" charset="0"/>
-                <a:ea typeface="Noto Sans KR" pitchFamily="34" charset="-127"/>
-                <a:cs typeface="Noto Sans KR" pitchFamily="34" charset="-120"/>
-              </a:rPr>
-              <a:t>생각한 까닭을 묻는 질문</a:t>
-            </a:r>
-            <a:endParaRPr lang="en-US" sz="850" dirty="0"/>
+            <a:pPr algn="l" indent="0" marL="0">
+              <a:lnSpc>
+                <a:spcPts val="1950"/>
+              </a:lnSpc>
+              <a:buNone/>
+            </a:pPr>
+            <a:r>
+              <a:rPr lang="ko-KR" altLang="en-US" sz="1500" dirty="0">
+                <a:solidFill>
+                  <a:srgbClr val="D59B32"/>
+                </a:solidFill>
+                <a:latin typeface="Noto Sans KR" pitchFamily="34" charset="0"/>
+                <a:ea typeface="Noto Sans KR" pitchFamily="34" charset="-122"/>
+                <a:cs typeface="Noto Sans KR" pitchFamily="34" charset="-120"/>
+              </a:rPr>
+              <a:t>→</a:t>
+            </a:r>
+            <a:endParaRPr lang="en-US" sz="1500" dirty="0"/>
           </a:p>
         </p:txBody>
       </p:sp>
       <p:sp>
         <p:nvSpPr>
-          <p:cNvPr id="67" name="txt-1-27"/>
+          <p:cNvPr id="43" name="txt-3-12"/>
           <p:cNvSpPr txBox="1"/>
           <p:nvPr/>
         </p:nvSpPr>
         <p:spPr>
           <a:xfrm>
-            <a:off x="3796030" y="8082280"/>
-            <a:ext cx="1701165" cy="350520"/>
+            <a:off x="1554099" y="8881237"/>
+            <a:ext cx="4449699" cy="736092"/>
           </a:xfrm>
           <a:prstGeom prst="rect">
             <a:avLst/>
@@ -3546,55 +7511,55 @@
           <a:p>
             <a:pPr algn="ctr" indent="0" marL="0">
               <a:lnSpc>
-                <a:spcPts val="1200"/>
-              </a:lnSpc>
-              <a:buNone/>
-            </a:pPr>
-            <a:r>
-              <a:rPr lang="ko-KR" altLang="en-US" sz="850" dirty="0">
-                <a:solidFill>
-                  <a:srgbClr val="101D42"/>
-                </a:solidFill>
-                <a:latin typeface="Noto Sans KR" pitchFamily="34" charset="0"/>
-                <a:ea typeface="Noto Sans KR" pitchFamily="34" charset="-127"/>
-                <a:cs typeface="Noto Sans KR" pitchFamily="34" charset="-120"/>
-              </a:rPr>
-              <a:t>다양한 독후활동</a:t>
-            </a:r>
-            <a:endParaRPr lang="en-US" sz="850" dirty="0"/>
+                <a:spcPts val="2520"/>
+              </a:lnSpc>
+              <a:buNone/>
+            </a:pPr>
+            <a:r>
+              <a:rPr lang="ko-KR" altLang="en-US" sz="1800" dirty="0">
+                <a:solidFill>
+                  <a:srgbClr val="101D42"/>
+                </a:solidFill>
+                <a:latin typeface="Noto Serif KR Black" pitchFamily="34" charset="0"/>
+                <a:ea typeface="Noto Serif KR Black" pitchFamily="34" charset="-122"/>
+                <a:cs typeface="Noto Serif KR Black" pitchFamily="34" charset="-120"/>
+              </a:rPr>
+              <a:t>읽고 받아들이는 경험이 쌓여,</a:t>
+            </a:r>
+            <a:endParaRPr lang="en-US" sz="1800" dirty="0"/>
           </a:p>
           <a:p>
             <a:pPr algn="ctr" indent="0" marL="0">
               <a:lnSpc>
-                <a:spcPts val="1200"/>
-              </a:lnSpc>
-              <a:buNone/>
-            </a:pPr>
-            <a:r>
-              <a:rPr lang="ko-KR" altLang="en-US" sz="850" dirty="0">
-                <a:solidFill>
-                  <a:srgbClr val="101D42"/>
-                </a:solidFill>
-                <a:latin typeface="Noto Sans KR" pitchFamily="34" charset="0"/>
-                <a:ea typeface="Noto Sans KR" pitchFamily="34" charset="-127"/>
-                <a:cs typeface="Noto Sans KR" pitchFamily="34" charset="-120"/>
-              </a:rPr>
-              <a:t>글 · 그림 · 편지로 내 생각 표현</a:t>
-            </a:r>
-            <a:endParaRPr lang="en-US" sz="850" dirty="0"/>
+                <a:spcPts val="2520"/>
+              </a:lnSpc>
+              <a:buNone/>
+            </a:pPr>
+            <a:r>
+              <a:rPr lang="ko-KR" altLang="en-US" sz="1800" dirty="0">
+                <a:solidFill>
+                  <a:srgbClr val="15543C"/>
+                </a:solidFill>
+                <a:latin typeface="Noto Serif KR Black" pitchFamily="34" charset="0"/>
+                <a:ea typeface="Noto Serif KR Black" pitchFamily="34" charset="-122"/>
+                <a:cs typeface="Noto Serif KR Black" pitchFamily="34" charset="-120"/>
+              </a:rPr>
+              <a:t>세상을 이해하는 생각의 바탕이 됩니다.</a:t>
+            </a:r>
+            <a:endParaRPr lang="en-US" sz="1800" dirty="0"/>
           </a:p>
         </p:txBody>
       </p:sp>
       <p:sp>
         <p:nvSpPr>
-          <p:cNvPr id="68" name="txt-1-28"/>
+          <p:cNvPr id="44" name="txt-3-13"/>
           <p:cNvSpPr txBox="1"/>
           <p:nvPr/>
         </p:nvSpPr>
         <p:spPr>
           <a:xfrm>
-            <a:off x="5553202" y="8082280"/>
-            <a:ext cx="1679702" cy="350520"/>
+            <a:off x="393573" y="9801606"/>
+            <a:ext cx="3943985" cy="496570"/>
           </a:xfrm>
           <a:prstGeom prst="rect">
             <a:avLst/>
@@ -3606,57 +7571,57 @@
           <a:bodyPr wrap="square" lIns="0" tIns="0" rIns="0" bIns="0" rtlCol="0" anchor="t"/>
           <a:lstStyle/>
           <a:p>
-            <a:pPr algn="ctr" indent="0" marL="0">
-              <a:lnSpc>
-                <a:spcPts val="1200"/>
-              </a:lnSpc>
-              <a:buNone/>
-            </a:pPr>
-            <a:r>
-              <a:rPr lang="ko-KR" altLang="en-US" sz="850" dirty="0">
-                <a:solidFill>
-                  <a:srgbClr val="101D42"/>
-                </a:solidFill>
-                <a:latin typeface="Noto Sans KR" pitchFamily="34" charset="0"/>
-                <a:ea typeface="Noto Sans KR" pitchFamily="34" charset="-127"/>
-                <a:cs typeface="Noto Sans KR" pitchFamily="34" charset="-120"/>
-              </a:rPr>
-              <a:t>독서 기록 자산</a:t>
-            </a:r>
-            <a:endParaRPr lang="en-US" sz="850" dirty="0"/>
-          </a:p>
-          <a:p>
-            <a:pPr algn="ctr" indent="0" marL="0">
-              <a:lnSpc>
-                <a:spcPts val="1200"/>
-              </a:lnSpc>
-              <a:buNone/>
-            </a:pPr>
-            <a:r>
-              <a:rPr lang="ko-KR" altLang="en-US" sz="850" dirty="0">
-                <a:solidFill>
-                  <a:srgbClr val="101D42"/>
-                </a:solidFill>
-                <a:latin typeface="Noto Sans KR" pitchFamily="34" charset="0"/>
-                <a:ea typeface="Noto Sans KR" pitchFamily="34" charset="-127"/>
-                <a:cs typeface="Noto Sans KR" pitchFamily="34" charset="-120"/>
-              </a:rPr>
-              <a:t>무엇을 느끼고 달라졌는지 기록</a:t>
-            </a:r>
-            <a:endParaRPr lang="en-US" sz="850" dirty="0"/>
+            <a:pPr algn="l" indent="0" marL="0">
+              <a:lnSpc>
+                <a:spcPts val="1700"/>
+              </a:lnSpc>
+              <a:buNone/>
+            </a:pPr>
+            <a:r>
+              <a:rPr lang="ko-KR" altLang="en-US" sz="980" dirty="0">
+                <a:solidFill>
+                  <a:srgbClr val="43516A"/>
+                </a:solidFill>
+                <a:latin typeface="Noto Sans KR" pitchFamily="34" charset="0"/>
+                <a:ea typeface="Noto Sans KR" pitchFamily="34" charset="-122"/>
+                <a:cs typeface="Noto Sans KR" pitchFamily="34" charset="-120"/>
+              </a:rPr>
+              <a:t>배경지식의 영향은 지식의 정확성 · 글의 특성 등에 따라 달라집니다.</a:t>
+            </a:r>
+            <a:endParaRPr lang="en-US" sz="980" dirty="0"/>
+          </a:p>
+          <a:p>
+            <a:pPr algn="l" indent="0" marL="0">
+              <a:lnSpc>
+                <a:spcPts val="1700"/>
+              </a:lnSpc>
+              <a:buNone/>
+            </a:pPr>
+            <a:r>
+              <a:rPr lang="ko-KR" altLang="en-US" sz="980" dirty="0">
+                <a:solidFill>
+                  <a:srgbClr val="43516A"/>
+                </a:solidFill>
+                <a:latin typeface="Noto Sans KR" pitchFamily="34" charset="0"/>
+                <a:ea typeface="Noto Sans KR" pitchFamily="34" charset="-122"/>
+                <a:cs typeface="Noto Sans KR" pitchFamily="34" charset="-120"/>
+              </a:rPr>
+              <a:t>출처: Smith et al. (2021) · Hattan et al. (2024)</a:t>
+            </a:r>
+            <a:endParaRPr lang="en-US" sz="980" dirty="0"/>
           </a:p>
         </p:txBody>
       </p:sp>
       <p:sp>
         <p:nvSpPr>
-          <p:cNvPr id="69" name="txt-1-29"/>
+          <p:cNvPr id="45" name="txt-3-14"/>
           <p:cNvSpPr txBox="1"/>
           <p:nvPr/>
         </p:nvSpPr>
         <p:spPr>
           <a:xfrm>
-            <a:off x="756666" y="8758047"/>
-            <a:ext cx="1141476" cy="515112"/>
+            <a:off x="3504565" y="10362692"/>
+            <a:ext cx="424815" cy="214630"/>
           </a:xfrm>
           <a:prstGeom prst="rect">
             <a:avLst/>
@@ -3670,35 +7635,723 @@
           <a:p>
             <a:pPr algn="l" indent="0" marL="0">
               <a:lnSpc>
-                <a:spcPts val="3120"/>
-              </a:lnSpc>
-              <a:buNone/>
-            </a:pPr>
-            <a:r>
-              <a:rPr lang="ko-KR" altLang="en-US" sz="2400" dirty="0">
-                <a:solidFill>
-                  <a:srgbClr val="15543C"/>
-                </a:solidFill>
-                <a:latin typeface="Noto Sans KR" pitchFamily="34" charset="0"/>
-                <a:ea typeface="Noto Sans KR" pitchFamily="34" charset="-127"/>
-                <a:cs typeface="Noto Sans KR" pitchFamily="34" charset="-120"/>
-              </a:rPr>
-              <a:t>72학급</a:t>
-            </a:r>
-            <a:endParaRPr lang="en-US" sz="2400" dirty="0"/>
+                <a:spcPts val="1300"/>
+              </a:lnSpc>
+              <a:buNone/>
+            </a:pPr>
+            <a:r>
+              <a:rPr lang="ko-KR" altLang="en-US" sz="1000" dirty="0">
+                <a:solidFill>
+                  <a:srgbClr val="101D42"/>
+                </a:solidFill>
+                <a:latin typeface="Noto Sans KR" pitchFamily="34" charset="0"/>
+                <a:ea typeface="Noto Sans KR" pitchFamily="34" charset="-122"/>
+                <a:cs typeface="Noto Sans KR" pitchFamily="34" charset="-120"/>
+              </a:rPr>
+              <a:t>2 / 4</a:t>
+            </a:r>
+            <a:endParaRPr lang="en-US" sz="1000" dirty="0"/>
           </a:p>
         </p:txBody>
       </p:sp>
-      <p:sp>
-        <p:nvSpPr>
-          <p:cNvPr id="70" name="txt-1-30"/>
+    </p:spTree>
+  </p:cSld>
+  <p:clrMapOvr>
+    <a:masterClrMapping/>
+  </p:clrMapOvr>
+</p:sld>
+</file>
+
+<file path=ppt/slides/slide4.xml><?xml version="1.0" encoding="utf-8"?>
+<p:sld xmlns:a="http://schemas.openxmlformats.org/drawingml/2006/main" xmlns:r="http://schemas.openxmlformats.org/officeDocument/2006/relationships" xmlns:p="http://schemas.openxmlformats.org/presentationml/2006/main">
+  <p:cSld name="Slide 4">
+    <p:bg>
+      <p:bgPr>
+        <a:solidFill>
+          <a:srgbClr val="FFFFFF"/>
+        </a:solidFill>
+      </p:bgPr>
+    </p:bg>
+    <p:spTree>
+      <p:nvGrpSpPr>
+        <p:cNvPr id="1" name=""/>
+        <p:cNvGrpSpPr/>
+        <p:nvPr/>
+      </p:nvGrpSpPr>
+      <p:grpSpPr>
+        <a:xfrm>
+          <a:off x="0" y="0"/>
+          <a:ext cx="0" cy="0"/>
+          <a:chOff x="0" y="0"/>
+          <a:chExt cx="0" cy="0"/>
+        </a:xfrm>
+      </p:grpSpPr>
+      <p:sp>
+        <p:nvSpPr>
+          <p:cNvPr id="2" name="Shape 0"/>
+          <p:cNvSpPr/>
+          <p:nvPr/>
+        </p:nvSpPr>
+        <p:spPr>
+          <a:xfrm>
+            <a:off x="3875151" y="495300"/>
+            <a:ext cx="3303905" cy="0"/>
+          </a:xfrm>
+          <a:prstGeom prst="line">
+            <a:avLst/>
+          </a:prstGeom>
+          <a:noFill/>
+          <a:ln w="7620">
+            <a:solidFill>
+              <a:srgbClr val="D59B32"/>
+            </a:solidFill>
+            <a:prstDash val="solid"/>
+          </a:ln>
+        </p:spPr>
+      </p:sp>
+      <p:sp>
+        <p:nvSpPr>
+          <p:cNvPr id="3" name="Shape 1"/>
+          <p:cNvSpPr/>
+          <p:nvPr/>
+        </p:nvSpPr>
+        <p:spPr>
+          <a:xfrm>
+            <a:off x="407416" y="2578100"/>
+            <a:ext cx="277876" cy="304292"/>
+          </a:xfrm>
+          <a:custGeom>
+            <a:avLst/>
+            <a:gdLst/>
+            <a:ahLst/>
+            <a:cxnLst/>
+            <a:rect l="l" t="t" r="r" b="b"/>
+            <a:pathLst>
+              <a:path w="277876" h="304292">
+                <a:moveTo>
+                  <a:pt x="132296" y="304267"/>
+                </a:moveTo>
+                <a:lnTo>
+                  <a:pt x="132296" y="145517"/>
+                </a:lnTo>
+                <a:cubicBezTo>
+                  <a:pt x="66142" y="171983"/>
+                  <a:pt x="0" y="145517"/>
+                  <a:pt x="0" y="39688"/>
+                </a:cubicBezTo>
+                <a:cubicBezTo>
+                  <a:pt x="105829" y="26454"/>
+                  <a:pt x="132296" y="79375"/>
+                  <a:pt x="132296" y="145517"/>
+                </a:cubicBezTo>
+                <a:cubicBezTo>
+                  <a:pt x="132296" y="39688"/>
+                  <a:pt x="211671" y="0"/>
+                  <a:pt x="277813" y="13233"/>
+                </a:cubicBezTo>
+                <a:cubicBezTo>
+                  <a:pt x="277813" y="105829"/>
+                  <a:pt x="211671" y="158750"/>
+                  <a:pt x="132296" y="145517"/>
+                </a:cubicBezTo>
+              </a:path>
+            </a:pathLst>
+          </a:custGeom>
+          <a:solidFill>
+            <a:srgbClr val="D59B32"/>
+          </a:solidFill>
+          <a:ln/>
+        </p:spPr>
+      </p:sp>
+      <p:sp>
+        <p:nvSpPr>
+          <p:cNvPr id="4" name="Shape 2"/>
+          <p:cNvSpPr/>
+          <p:nvPr/>
+        </p:nvSpPr>
+        <p:spPr>
+          <a:xfrm>
+            <a:off x="6081014" y="2755900"/>
+            <a:ext cx="1098042" cy="0"/>
+          </a:xfrm>
+          <a:prstGeom prst="line">
+            <a:avLst/>
+          </a:prstGeom>
+          <a:noFill/>
+          <a:ln w="7620">
+            <a:solidFill>
+              <a:srgbClr val="D59B32"/>
+            </a:solidFill>
+            <a:prstDash val="solid"/>
+          </a:ln>
+        </p:spPr>
+      </p:sp>
+      <p:sp>
+        <p:nvSpPr>
+          <p:cNvPr id="5" name="Shape 3"/>
+          <p:cNvSpPr/>
+          <p:nvPr/>
+        </p:nvSpPr>
+        <p:spPr>
+          <a:xfrm>
+            <a:off x="433959" y="4343908"/>
+            <a:ext cx="211709" cy="211709"/>
+          </a:xfrm>
+          <a:custGeom>
+            <a:avLst/>
+            <a:gdLst/>
+            <a:ahLst/>
+            <a:cxnLst/>
+            <a:rect l="l" t="t" r="r" b="b"/>
+            <a:pathLst>
+              <a:path w="211709" h="211709">
+                <a:moveTo>
+                  <a:pt x="211671" y="105829"/>
+                </a:moveTo>
+                <a:cubicBezTo>
+                  <a:pt x="211671" y="47384"/>
+                  <a:pt x="164287" y="0"/>
+                  <a:pt x="105829" y="0"/>
+                </a:cubicBezTo>
+                <a:cubicBezTo>
+                  <a:pt x="47384" y="0"/>
+                  <a:pt x="0" y="47384"/>
+                  <a:pt x="0" y="105829"/>
+                </a:cubicBezTo>
+                <a:cubicBezTo>
+                  <a:pt x="0" y="164287"/>
+                  <a:pt x="47384" y="211671"/>
+                  <a:pt x="105829" y="211671"/>
+                </a:cubicBezTo>
+                <a:cubicBezTo>
+                  <a:pt x="164287" y="211671"/>
+                  <a:pt x="211671" y="164287"/>
+                  <a:pt x="211671" y="105829"/>
+                </a:cubicBezTo>
+              </a:path>
+            </a:pathLst>
+          </a:custGeom>
+          <a:ln w="21209">
+            <a:solidFill>
+              <a:srgbClr val="D59B32"/>
+            </a:solidFill>
+            <a:prstDash val="solid"/>
+          </a:ln>
+        </p:spPr>
+      </p:sp>
+      <p:sp>
+        <p:nvSpPr>
+          <p:cNvPr id="6" name="Shape 4"/>
+          <p:cNvSpPr/>
+          <p:nvPr/>
+        </p:nvSpPr>
+        <p:spPr>
+          <a:xfrm>
+            <a:off x="486791" y="4542409"/>
+            <a:ext cx="0" cy="52832"/>
+          </a:xfrm>
+          <a:prstGeom prst="line">
+            <a:avLst/>
+          </a:prstGeom>
+          <a:noFill/>
+          <a:ln w="21209">
+            <a:solidFill>
+              <a:srgbClr val="D59B32"/>
+            </a:solidFill>
+            <a:prstDash val="solid"/>
+          </a:ln>
+        </p:spPr>
+      </p:sp>
+      <p:sp>
+        <p:nvSpPr>
+          <p:cNvPr id="7" name="Shape 5"/>
+          <p:cNvSpPr/>
+          <p:nvPr/>
+        </p:nvSpPr>
+        <p:spPr>
+          <a:xfrm>
+            <a:off x="592709" y="4542409"/>
+            <a:ext cx="0" cy="52832"/>
+          </a:xfrm>
+          <a:prstGeom prst="line">
+            <a:avLst/>
+          </a:prstGeom>
+          <a:noFill/>
+          <a:ln w="21209">
+            <a:solidFill>
+              <a:srgbClr val="D59B32"/>
+            </a:solidFill>
+            <a:prstDash val="solid"/>
+          </a:ln>
+        </p:spPr>
+      </p:sp>
+      <p:sp>
+        <p:nvSpPr>
+          <p:cNvPr id="8" name="Shape 6"/>
+          <p:cNvSpPr/>
+          <p:nvPr/>
+        </p:nvSpPr>
+        <p:spPr>
+          <a:xfrm>
+            <a:off x="486791" y="4595241"/>
+            <a:ext cx="105918" cy="0"/>
+          </a:xfrm>
+          <a:prstGeom prst="line">
+            <a:avLst/>
+          </a:prstGeom>
+          <a:noFill/>
+          <a:ln w="21209">
+            <a:solidFill>
+              <a:srgbClr val="D59B32"/>
+            </a:solidFill>
+            <a:prstDash val="solid"/>
+          </a:ln>
+        </p:spPr>
+      </p:sp>
+      <p:sp>
+        <p:nvSpPr>
+          <p:cNvPr id="9" name="Shape 7"/>
+          <p:cNvSpPr/>
+          <p:nvPr/>
+        </p:nvSpPr>
+        <p:spPr>
+          <a:xfrm>
+            <a:off x="500126" y="4634992"/>
+            <a:ext cx="79375" cy="0"/>
+          </a:xfrm>
+          <a:prstGeom prst="line">
+            <a:avLst/>
+          </a:prstGeom>
+          <a:noFill/>
+          <a:ln w="21209">
+            <a:solidFill>
+              <a:srgbClr val="D59B32"/>
+            </a:solidFill>
+            <a:prstDash val="solid"/>
+          </a:ln>
+        </p:spPr>
+      </p:sp>
+      <p:sp>
+        <p:nvSpPr>
+          <p:cNvPr id="10" name="Shape 8"/>
+          <p:cNvSpPr/>
+          <p:nvPr/>
+        </p:nvSpPr>
+        <p:spPr>
+          <a:xfrm>
+            <a:off x="539750" y="4449699"/>
+            <a:ext cx="0" cy="132334"/>
+          </a:xfrm>
+          <a:prstGeom prst="line">
+            <a:avLst/>
+          </a:prstGeom>
+          <a:noFill/>
+          <a:ln w="21209">
+            <a:solidFill>
+              <a:srgbClr val="D59B32"/>
+            </a:solidFill>
+            <a:prstDash val="solid"/>
+          </a:ln>
+        </p:spPr>
+      </p:sp>
+      <p:sp>
+        <p:nvSpPr>
+          <p:cNvPr id="11" name="Shape 9"/>
+          <p:cNvSpPr/>
+          <p:nvPr/>
+        </p:nvSpPr>
+        <p:spPr>
+          <a:xfrm>
+            <a:off x="500126" y="4410075"/>
+            <a:ext cx="39624" cy="39624"/>
+          </a:xfrm>
+          <a:prstGeom prst="line">
+            <a:avLst/>
+          </a:prstGeom>
+          <a:noFill/>
+          <a:ln w="21209">
+            <a:solidFill>
+              <a:srgbClr val="D59B32"/>
+            </a:solidFill>
+            <a:prstDash val="solid"/>
+          </a:ln>
+        </p:spPr>
+      </p:sp>
+      <p:sp>
+        <p:nvSpPr>
+          <p:cNvPr id="12" name="Shape 10"/>
+          <p:cNvSpPr/>
+          <p:nvPr/>
+        </p:nvSpPr>
+        <p:spPr>
+          <a:xfrm>
+            <a:off x="539750" y="4410075"/>
+            <a:ext cx="39751" cy="39624"/>
+          </a:xfrm>
+          <a:prstGeom prst="line">
+            <a:avLst/>
+          </a:prstGeom>
+          <a:noFill/>
+          <a:ln w="21209">
+            <a:solidFill>
+              <a:srgbClr val="D59B32"/>
+            </a:solidFill>
+            <a:prstDash val="solid"/>
+          </a:ln>
+        </p:spPr>
+      </p:sp>
+      <p:sp>
+        <p:nvSpPr>
+          <p:cNvPr id="13" name="Shape 11"/>
+          <p:cNvSpPr/>
+          <p:nvPr/>
+        </p:nvSpPr>
+        <p:spPr>
+          <a:xfrm>
+            <a:off x="5786120" y="4508500"/>
+            <a:ext cx="1392936" cy="0"/>
+          </a:xfrm>
+          <a:prstGeom prst="line">
+            <a:avLst/>
+          </a:prstGeom>
+          <a:noFill/>
+          <a:ln w="7620">
+            <a:solidFill>
+              <a:srgbClr val="D59B32"/>
+            </a:solidFill>
+            <a:prstDash val="solid"/>
+          </a:ln>
+        </p:spPr>
+      </p:sp>
+      <p:sp>
+        <p:nvSpPr>
+          <p:cNvPr id="14" name="Shape 12"/>
+          <p:cNvSpPr/>
+          <p:nvPr/>
+        </p:nvSpPr>
+        <p:spPr>
+          <a:xfrm>
+            <a:off x="394208" y="7086092"/>
+            <a:ext cx="291084" cy="304292"/>
+          </a:xfrm>
+          <a:custGeom>
+            <a:avLst/>
+            <a:gdLst/>
+            <a:ahLst/>
+            <a:cxnLst/>
+            <a:rect l="l" t="t" r="r" b="b"/>
+            <a:pathLst>
+              <a:path w="291084" h="304292">
+                <a:moveTo>
+                  <a:pt x="145517" y="304267"/>
+                </a:moveTo>
+                <a:cubicBezTo>
+                  <a:pt x="105829" y="251358"/>
+                  <a:pt x="0" y="198438"/>
+                  <a:pt x="0" y="105829"/>
+                </a:cubicBezTo>
+                <a:cubicBezTo>
+                  <a:pt x="0" y="0"/>
+                  <a:pt x="119063" y="0"/>
+                  <a:pt x="145517" y="79375"/>
+                </a:cubicBezTo>
+                <a:cubicBezTo>
+                  <a:pt x="171983" y="0"/>
+                  <a:pt x="291046" y="0"/>
+                  <a:pt x="291046" y="105829"/>
+                </a:cubicBezTo>
+                <a:cubicBezTo>
+                  <a:pt x="291046" y="198438"/>
+                  <a:pt x="185204" y="251358"/>
+                  <a:pt x="145517" y="304267"/>
+                </a:cubicBezTo>
+              </a:path>
+            </a:pathLst>
+          </a:custGeom>
+          <a:solidFill>
+            <a:srgbClr val="D59B32"/>
+          </a:solidFill>
+          <a:ln/>
+        </p:spPr>
+      </p:sp>
+      <p:sp>
+        <p:nvSpPr>
+          <p:cNvPr id="15" name="Shape 13"/>
+          <p:cNvSpPr/>
+          <p:nvPr/>
+        </p:nvSpPr>
+        <p:spPr>
+          <a:xfrm>
+            <a:off x="6476365" y="7277100"/>
+            <a:ext cx="702691" cy="0"/>
+          </a:xfrm>
+          <a:prstGeom prst="line">
+            <a:avLst/>
+          </a:prstGeom>
+          <a:noFill/>
+          <a:ln w="7620">
+            <a:solidFill>
+              <a:srgbClr val="D59B32"/>
+            </a:solidFill>
+            <a:prstDash val="solid"/>
+          </a:ln>
+        </p:spPr>
+      </p:sp>
+      <p:sp>
+        <p:nvSpPr>
+          <p:cNvPr id="16" name="Shape 14"/>
+          <p:cNvSpPr/>
+          <p:nvPr/>
+        </p:nvSpPr>
+        <p:spPr>
+          <a:xfrm>
+            <a:off x="317500" y="8877300"/>
+            <a:ext cx="6925056" cy="927100"/>
+          </a:xfrm>
+          <a:prstGeom prst="roundRect">
+            <a:avLst>
+              <a:gd name="adj" fmla="val 10959"/>
+            </a:avLst>
+          </a:prstGeom>
+          <a:solidFill>
+            <a:srgbClr val="F0F5EF"/>
+          </a:solidFill>
+          <a:ln/>
+        </p:spPr>
+      </p:sp>
+      <p:sp>
+        <p:nvSpPr>
+          <p:cNvPr id="17" name="Shape 15"/>
+          <p:cNvSpPr/>
+          <p:nvPr/>
+        </p:nvSpPr>
+        <p:spPr>
+          <a:xfrm>
+            <a:off x="495300" y="8966200"/>
+            <a:ext cx="177800" cy="177800"/>
+          </a:xfrm>
+          <a:custGeom>
+            <a:avLst/>
+            <a:gdLst/>
+            <a:ahLst/>
+            <a:cxnLst/>
+            <a:rect l="l" t="t" r="r" b="b"/>
+            <a:pathLst>
+              <a:path w="177800" h="177800">
+                <a:moveTo>
+                  <a:pt x="177800" y="88900"/>
+                </a:moveTo>
+                <a:cubicBezTo>
+                  <a:pt x="177800" y="39802"/>
+                  <a:pt x="137998" y="0"/>
+                  <a:pt x="88900" y="0"/>
+                </a:cubicBezTo>
+                <a:cubicBezTo>
+                  <a:pt x="39802" y="0"/>
+                  <a:pt x="0" y="39802"/>
+                  <a:pt x="0" y="88900"/>
+                </a:cubicBezTo>
+                <a:cubicBezTo>
+                  <a:pt x="0" y="137998"/>
+                  <a:pt x="39802" y="177800"/>
+                  <a:pt x="88900" y="177800"/>
+                </a:cubicBezTo>
+                <a:cubicBezTo>
+                  <a:pt x="137998" y="177800"/>
+                  <a:pt x="177800" y="137998"/>
+                  <a:pt x="177800" y="88900"/>
+                </a:cubicBezTo>
+              </a:path>
+            </a:pathLst>
+          </a:custGeom>
+          <a:solidFill>
+            <a:srgbClr val="D59B32"/>
+          </a:solidFill>
+          <a:ln/>
+        </p:spPr>
+      </p:sp>
+      <p:sp>
+        <p:nvSpPr>
+          <p:cNvPr id="18" name="Shape 16"/>
+          <p:cNvSpPr/>
+          <p:nvPr/>
+        </p:nvSpPr>
+        <p:spPr>
+          <a:xfrm>
+            <a:off x="495300" y="9232900"/>
+            <a:ext cx="177800" cy="177800"/>
+          </a:xfrm>
+          <a:custGeom>
+            <a:avLst/>
+            <a:gdLst/>
+            <a:ahLst/>
+            <a:cxnLst/>
+            <a:rect l="l" t="t" r="r" b="b"/>
+            <a:pathLst>
+              <a:path w="177800" h="177800">
+                <a:moveTo>
+                  <a:pt x="177800" y="88900"/>
+                </a:moveTo>
+                <a:cubicBezTo>
+                  <a:pt x="177800" y="39802"/>
+                  <a:pt x="137998" y="0"/>
+                  <a:pt x="88900" y="0"/>
+                </a:cubicBezTo>
+                <a:cubicBezTo>
+                  <a:pt x="39802" y="0"/>
+                  <a:pt x="0" y="39802"/>
+                  <a:pt x="0" y="88900"/>
+                </a:cubicBezTo>
+                <a:cubicBezTo>
+                  <a:pt x="0" y="137998"/>
+                  <a:pt x="39802" y="177800"/>
+                  <a:pt x="88900" y="177800"/>
+                </a:cubicBezTo>
+                <a:cubicBezTo>
+                  <a:pt x="137998" y="177800"/>
+                  <a:pt x="177800" y="137998"/>
+                  <a:pt x="177800" y="88900"/>
+                </a:cubicBezTo>
+              </a:path>
+            </a:pathLst>
+          </a:custGeom>
+          <a:solidFill>
+            <a:srgbClr val="D59B32"/>
+          </a:solidFill>
+          <a:ln/>
+        </p:spPr>
+      </p:sp>
+      <p:sp>
+        <p:nvSpPr>
+          <p:cNvPr id="19" name="Shape 17"/>
+          <p:cNvSpPr/>
+          <p:nvPr/>
+        </p:nvSpPr>
+        <p:spPr>
+          <a:xfrm>
+            <a:off x="495300" y="9499600"/>
+            <a:ext cx="177800" cy="177800"/>
+          </a:xfrm>
+          <a:custGeom>
+            <a:avLst/>
+            <a:gdLst/>
+            <a:ahLst/>
+            <a:cxnLst/>
+            <a:rect l="l" t="t" r="r" b="b"/>
+            <a:pathLst>
+              <a:path w="177800" h="177800">
+                <a:moveTo>
+                  <a:pt x="177800" y="88900"/>
+                </a:moveTo>
+                <a:cubicBezTo>
+                  <a:pt x="177800" y="39802"/>
+                  <a:pt x="137998" y="0"/>
+                  <a:pt x="88900" y="0"/>
+                </a:cubicBezTo>
+                <a:cubicBezTo>
+                  <a:pt x="39802" y="0"/>
+                  <a:pt x="0" y="39802"/>
+                  <a:pt x="0" y="88900"/>
+                </a:cubicBezTo>
+                <a:cubicBezTo>
+                  <a:pt x="0" y="137998"/>
+                  <a:pt x="39802" y="177800"/>
+                  <a:pt x="88900" y="177800"/>
+                </a:cubicBezTo>
+                <a:cubicBezTo>
+                  <a:pt x="137998" y="177800"/>
+                  <a:pt x="177800" y="137998"/>
+                  <a:pt x="177800" y="88900"/>
+                </a:cubicBezTo>
+              </a:path>
+            </a:pathLst>
+          </a:custGeom>
+          <a:solidFill>
+            <a:srgbClr val="D59B32"/>
+          </a:solidFill>
+          <a:ln/>
+        </p:spPr>
+      </p:sp>
+      <p:sp>
+        <p:nvSpPr>
+          <p:cNvPr id="20" name="Shape 18"/>
+          <p:cNvSpPr/>
+          <p:nvPr/>
+        </p:nvSpPr>
+        <p:spPr>
+          <a:xfrm>
+            <a:off x="381000" y="10414000"/>
+            <a:ext cx="2755900" cy="0"/>
+          </a:xfrm>
+          <a:prstGeom prst="line">
+            <a:avLst/>
+          </a:prstGeom>
+          <a:noFill/>
+          <a:ln w="7620">
+            <a:solidFill>
+              <a:srgbClr val="D59B32"/>
+            </a:solidFill>
+            <a:prstDash val="solid"/>
+          </a:ln>
+        </p:spPr>
+      </p:sp>
+      <p:sp>
+        <p:nvSpPr>
+          <p:cNvPr id="21" name="Shape 19"/>
+          <p:cNvSpPr/>
+          <p:nvPr/>
+        </p:nvSpPr>
+        <p:spPr>
+          <a:xfrm>
+            <a:off x="4394200" y="10414000"/>
+            <a:ext cx="2784856" cy="0"/>
+          </a:xfrm>
+          <a:prstGeom prst="line">
+            <a:avLst/>
+          </a:prstGeom>
+          <a:noFill/>
+          <a:ln w="7620">
+            <a:solidFill>
+              <a:srgbClr val="D59B32"/>
+            </a:solidFill>
+            <a:prstDash val="solid"/>
+          </a:ln>
+        </p:spPr>
+      </p:sp>
+      <p:pic>
+        <p:nvPicPr>
+          <p:cNvPr id="22" name="Image 0" descr="부기 책을 함께 읽는 두 아이">    </p:cNvPr>
+          <p:cNvPicPr>
+            <a:picLocks noChangeAspect="1"/>
+          </p:cNvPicPr>
+          <p:nvPr/>
+        </p:nvPicPr>
+        <p:blipFill>
+          <a:blip r:embed="rId1"/>
+          <a:stretch>
+            <a:fillRect/>
+          </a:stretch>
+        </p:blipFill>
+        <p:spPr>
+          <a:xfrm>
+            <a:off x="5334000" y="1003300"/>
+            <a:ext cx="1841500" cy="1264920"/>
+          </a:xfrm>
+          <a:prstGeom prst="rect">
+            <a:avLst/>
+          </a:prstGeom>
+        </p:spPr>
+      </p:pic>
+      <p:sp>
+        <p:nvSpPr>
+          <p:cNvPr id="23" name="txt-4-0"/>
           <p:cNvSpPr txBox="1"/>
           <p:nvPr/>
         </p:nvSpPr>
         <p:spPr>
           <a:xfrm>
-            <a:off x="2399538" y="8758047"/>
-            <a:ext cx="1298448" cy="515112"/>
+            <a:off x="381000" y="296926"/>
+            <a:ext cx="3828288" cy="364871"/>
           </a:xfrm>
           <a:prstGeom prst="rect">
             <a:avLst/>
@@ -3712,35 +8365,35 @@
           <a:p>
             <a:pPr algn="l" indent="0" marL="0">
               <a:lnSpc>
-                <a:spcPts val="3120"/>
-              </a:lnSpc>
-              <a:buNone/>
-            </a:pPr>
-            <a:r>
-              <a:rPr lang="ko-KR" altLang="en-US" sz="2400" dirty="0">
-                <a:solidFill>
-                  <a:srgbClr val="15543C"/>
-                </a:solidFill>
-                <a:latin typeface="Noto Sans KR" pitchFamily="34" charset="0"/>
-                <a:ea typeface="Noto Sans KR" pitchFamily="34" charset="-127"/>
-                <a:cs typeface="Noto Sans KR" pitchFamily="34" charset="-120"/>
-              </a:rPr>
-              <a:t>1,196명</a:t>
-            </a:r>
-            <a:endParaRPr lang="en-US" sz="2400" dirty="0"/>
+                <a:spcPts val="2210"/>
+              </a:lnSpc>
+              <a:buNone/>
+            </a:pPr>
+            <a:r>
+              <a:rPr lang="ko-KR" altLang="en-US" sz="1700" dirty="0">
+                <a:solidFill>
+                  <a:srgbClr val="101D42"/>
+                </a:solidFill>
+                <a:latin typeface="Noto Serif KR Black" pitchFamily="34" charset="0"/>
+                <a:ea typeface="Noto Serif KR Black" pitchFamily="34" charset="-122"/>
+                <a:cs typeface="Noto Serif KR Black" pitchFamily="34" charset="-120"/>
+              </a:rPr>
+              <a:t>단편적인 정보에서 깊이 있는 이해로</a:t>
+            </a:r>
+            <a:endParaRPr lang="en-US" sz="1700" dirty="0"/>
           </a:p>
         </p:txBody>
       </p:sp>
       <p:sp>
         <p:nvSpPr>
-          <p:cNvPr id="71" name="txt-1-31"/>
+          <p:cNvPr id="24" name="txt-4-1"/>
           <p:cNvSpPr txBox="1"/>
           <p:nvPr/>
         </p:nvSpPr>
         <p:spPr>
           <a:xfrm>
-            <a:off x="4029202" y="8758047"/>
-            <a:ext cx="1484503" cy="515112"/>
+            <a:off x="381000" y="768858"/>
+            <a:ext cx="5289804" cy="794131"/>
           </a:xfrm>
           <a:prstGeom prst="rect">
             <a:avLst/>
@@ -3754,35 +8407,35 @@
           <a:p>
             <a:pPr algn="l" indent="0" marL="0">
               <a:lnSpc>
-                <a:spcPts val="3120"/>
-              </a:lnSpc>
-              <a:buNone/>
-            </a:pPr>
-            <a:r>
-              <a:rPr lang="ko-KR" altLang="en-US" sz="2400" dirty="0">
-                <a:solidFill>
-                  <a:srgbClr val="15543C"/>
-                </a:solidFill>
-                <a:latin typeface="Noto Sans KR" pitchFamily="34" charset="0"/>
-                <a:ea typeface="Noto Sans KR" pitchFamily="34" charset="-127"/>
-                <a:cs typeface="Noto Sans KR" pitchFamily="34" charset="-120"/>
-              </a:rPr>
-              <a:t>26,924건</a:t>
-            </a:r>
-            <a:endParaRPr lang="en-US" sz="2400" dirty="0"/>
+                <a:spcPts val="4810"/>
+              </a:lnSpc>
+              <a:buNone/>
+            </a:pPr>
+            <a:r>
+              <a:rPr lang="ko-KR" altLang="en-US" sz="3700" dirty="0">
+                <a:solidFill>
+                  <a:srgbClr val="101D42"/>
+                </a:solidFill>
+                <a:latin typeface="Noto Serif KR Black" pitchFamily="34" charset="0"/>
+                <a:ea typeface="Noto Serif KR Black" pitchFamily="34" charset="-122"/>
+                <a:cs typeface="Noto Serif KR Black" pitchFamily="34" charset="-120"/>
+              </a:rPr>
+              <a:t>‘본 적 있다’는 익숙함이</a:t>
+            </a:r>
+            <a:endParaRPr lang="en-US" sz="3700" dirty="0"/>
           </a:p>
         </p:txBody>
       </p:sp>
       <p:sp>
         <p:nvSpPr>
-          <p:cNvPr id="72" name="txt-1-32"/>
+          <p:cNvPr id="25" name="txt-4-2"/>
           <p:cNvSpPr txBox="1"/>
           <p:nvPr/>
         </p:nvSpPr>
         <p:spPr>
           <a:xfrm>
-            <a:off x="5827903" y="8758047"/>
-            <a:ext cx="1298448" cy="515112"/>
+            <a:off x="381000" y="1429512"/>
+            <a:ext cx="5586730" cy="759079"/>
           </a:xfrm>
           <a:prstGeom prst="rect">
             <a:avLst/>
@@ -3796,35 +8449,35 @@
           <a:p>
             <a:pPr algn="l" indent="0" marL="0">
               <a:lnSpc>
-                <a:spcPts val="3120"/>
-              </a:lnSpc>
-              <a:buNone/>
-            </a:pPr>
-            <a:r>
-              <a:rPr lang="ko-KR" altLang="en-US" sz="2400" dirty="0">
+                <a:spcPts val="4598"/>
+              </a:lnSpc>
+              <a:buNone/>
+            </a:pPr>
+            <a:r>
+              <a:rPr lang="ko-KR" altLang="en-US" sz="3537" dirty="0">
                 <a:solidFill>
                   <a:srgbClr val="15543C"/>
                 </a:solidFill>
-                <a:latin typeface="Noto Sans KR" pitchFamily="34" charset="0"/>
-                <a:ea typeface="Noto Sans KR" pitchFamily="34" charset="-127"/>
-                <a:cs typeface="Noto Sans KR" pitchFamily="34" charset="-120"/>
-              </a:rPr>
-              <a:t>1,816건</a:t>
-            </a:r>
-            <a:endParaRPr lang="en-US" sz="2400" dirty="0"/>
+                <a:latin typeface="Noto Serif KR Black" pitchFamily="34" charset="0"/>
+                <a:ea typeface="Noto Serif KR Black" pitchFamily="34" charset="-122"/>
+                <a:cs typeface="Noto Serif KR Black" pitchFamily="34" charset="-120"/>
+              </a:rPr>
+              <a:t>‘안다’는 이해는 아닙니다.</a:t>
+            </a:r>
+            <a:endParaRPr lang="en-US" sz="3537" dirty="0"/>
           </a:p>
         </p:txBody>
       </p:sp>
       <p:sp>
         <p:nvSpPr>
-          <p:cNvPr id="73" name="txt-1-33"/>
+          <p:cNvPr id="26" name="txt-4-3"/>
           <p:cNvSpPr txBox="1"/>
           <p:nvPr/>
         </p:nvSpPr>
         <p:spPr>
           <a:xfrm>
-            <a:off x="945896" y="9116314"/>
-            <a:ext cx="725043" cy="225425"/>
+            <a:off x="863346" y="2545207"/>
+            <a:ext cx="5751830" cy="418465"/>
           </a:xfrm>
           <a:prstGeom prst="rect">
             <a:avLst/>
@@ -3838,35 +8491,35 @@
           <a:p>
             <a:pPr algn="l" indent="0" marL="0">
               <a:lnSpc>
-                <a:spcPts val="1365"/>
-              </a:lnSpc>
-              <a:buNone/>
-            </a:pPr>
-            <a:r>
-              <a:rPr lang="ko-KR" altLang="en-US" sz="1050" dirty="0">
-                <a:solidFill>
-                  <a:srgbClr val="101D42"/>
-                </a:solidFill>
-                <a:latin typeface="Noto Sans KR" pitchFamily="34" charset="0"/>
-                <a:ea typeface="Noto Sans KR" pitchFamily="34" charset="-127"/>
-                <a:cs typeface="Noto Sans KR" pitchFamily="34" charset="-120"/>
-              </a:rPr>
-              <a:t>운영 학급</a:t>
-            </a:r>
-            <a:endParaRPr lang="en-US" sz="1050" dirty="0"/>
+                <a:spcPts val="2535"/>
+              </a:lnSpc>
+              <a:buNone/>
+            </a:pPr>
+            <a:r>
+              <a:rPr lang="ko-KR" altLang="en-US" sz="1950" dirty="0">
+                <a:solidFill>
+                  <a:srgbClr val="15543C"/>
+                </a:solidFill>
+                <a:latin typeface="Noto Serif KR Black" pitchFamily="34" charset="0"/>
+                <a:ea typeface="Noto Serif KR Black" pitchFamily="34" charset="-122"/>
+                <a:cs typeface="Noto Serif KR Black" pitchFamily="34" charset="-120"/>
+              </a:rPr>
+              <a:t>단편적인 정보가 생각의 전부가 될까 걱정됩니다</a:t>
+            </a:r>
+            <a:endParaRPr lang="en-US" sz="1950" dirty="0"/>
           </a:p>
         </p:txBody>
       </p:sp>
       <p:sp>
         <p:nvSpPr>
-          <p:cNvPr id="74" name="txt-1-34"/>
+          <p:cNvPr id="27" name="txt-4-4"/>
           <p:cNvSpPr txBox="1"/>
           <p:nvPr/>
         </p:nvSpPr>
         <p:spPr>
           <a:xfrm>
-            <a:off x="2522474" y="9116314"/>
-            <a:ext cx="1027811" cy="225425"/>
+            <a:off x="381000" y="3040253"/>
+            <a:ext cx="7140956" cy="1089660"/>
           </a:xfrm>
           <a:prstGeom prst="rect">
             <a:avLst/>
@@ -3880,35 +8533,75 @@
           <a:p>
             <a:pPr algn="l" indent="0" marL="0">
               <a:lnSpc>
-                <a:spcPts val="1365"/>
-              </a:lnSpc>
-              <a:buNone/>
-            </a:pPr>
-            <a:r>
-              <a:rPr lang="ko-KR" altLang="en-US" sz="1050" dirty="0">
-                <a:solidFill>
-                  <a:srgbClr val="101D42"/>
-                </a:solidFill>
-                <a:latin typeface="Noto Sans KR" pitchFamily="34" charset="0"/>
-                <a:ea typeface="Noto Sans KR" pitchFamily="34" charset="-127"/>
-                <a:cs typeface="Noto Sans KR" pitchFamily="34" charset="-120"/>
-              </a:rPr>
-              <a:t>실제 사용 학생</a:t>
-            </a:r>
-            <a:endParaRPr lang="en-US" sz="1050" dirty="0"/>
+                <a:spcPts val="2600"/>
+              </a:lnSpc>
+              <a:buNone/>
+            </a:pPr>
+            <a:r>
+              <a:rPr lang="ko-KR" altLang="en-US" sz="1800" dirty="0">
+                <a:solidFill>
+                  <a:srgbClr val="101D42"/>
+                </a:solidFill>
+                <a:latin typeface="Noto Sans KR" pitchFamily="34" charset="0"/>
+                <a:ea typeface="Noto Sans KR" pitchFamily="34" charset="-122"/>
+                <a:cs typeface="Noto Sans KR" pitchFamily="34" charset="-120"/>
+              </a:rPr>
+              <a:t>AI가 만든 답을 읽었다고 학습까지 끝나는 것은 아닙니다.</a:t>
+            </a:r>
+            <a:endParaRPr lang="en-US" sz="1800" dirty="0"/>
+          </a:p>
+          <a:p>
+            <a:pPr algn="l" indent="0" marL="0">
+              <a:lnSpc>
+                <a:spcPts val="2600"/>
+              </a:lnSpc>
+              <a:buNone/>
+            </a:pPr>
+            <a:r>
+              <a:rPr lang="ko-KR" altLang="en-US" sz="1800" dirty="0">
+                <a:solidFill>
+                  <a:srgbClr val="101D42"/>
+                </a:solidFill>
+                <a:latin typeface="Noto Sans KR" pitchFamily="34" charset="0"/>
+                <a:ea typeface="Noto Sans KR" pitchFamily="34" charset="-122"/>
+                <a:cs typeface="Noto Sans KR" pitchFamily="34" charset="-120"/>
+              </a:rPr>
+              <a:t>중등학생 읽기 실험에서는 LLM만 쓴 조건보다 직접 필기한 조건이</a:t>
+            </a:r>
+            <a:endParaRPr lang="en-US" sz="1800" dirty="0"/>
+          </a:p>
+          <a:p>
+            <a:pPr algn="l" indent="0" marL="0">
+              <a:lnSpc>
+                <a:spcPts val="2600"/>
+              </a:lnSpc>
+              <a:buNone/>
+            </a:pPr>
+            <a:r>
+              <a:rPr lang="ko-KR" altLang="en-US" sz="1800" dirty="0">
+                <a:solidFill>
+                  <a:srgbClr val="101D42"/>
+                </a:solidFill>
+                <a:latin typeface="Noto Sans KR" pitchFamily="34" charset="0"/>
+                <a:ea typeface="Noto Sans KR" pitchFamily="34" charset="-122"/>
+                <a:cs typeface="Noto Sans KR" pitchFamily="34" charset="-120"/>
+              </a:rPr>
+              <a:t>학습 3일 뒤 이해 평가에서 더 높은 점수를 받았습니다.</a:t>
+            </a:r>
+            <a:endParaRPr lang="en-US" sz="1800" dirty="0"/>
           </a:p>
         </p:txBody>
       </p:sp>
       <p:sp>
         <p:nvSpPr>
-          <p:cNvPr id="75" name="txt-1-35"/>
+          <p:cNvPr id="28" name="txt-4-5"/>
           <p:cNvSpPr txBox="1"/>
           <p:nvPr/>
         </p:nvSpPr>
         <p:spPr>
           <a:xfrm>
-            <a:off x="4374261" y="9116314"/>
-            <a:ext cx="725043" cy="225425"/>
+            <a:off x="863346" y="4292346"/>
+            <a:ext cx="5427472" cy="429260"/>
           </a:xfrm>
           <a:prstGeom prst="rect">
             <a:avLst/>
@@ -3922,35 +8615,35 @@
           <a:p>
             <a:pPr algn="l" indent="0" marL="0">
               <a:lnSpc>
-                <a:spcPts val="1365"/>
-              </a:lnSpc>
-              <a:buNone/>
-            </a:pPr>
-            <a:r>
-              <a:rPr lang="ko-KR" altLang="en-US" sz="1050" dirty="0">
-                <a:solidFill>
-                  <a:srgbClr val="101D42"/>
-                </a:solidFill>
-                <a:latin typeface="Noto Sans KR" pitchFamily="34" charset="0"/>
-                <a:ea typeface="Noto Sans KR" pitchFamily="34" charset="-127"/>
-                <a:cs typeface="Noto Sans KR" pitchFamily="34" charset="-120"/>
-              </a:rPr>
-              <a:t>완독 기록</a:t>
-            </a:r>
-            <a:endParaRPr lang="en-US" sz="1050" dirty="0"/>
+                <a:spcPts val="2600"/>
+              </a:lnSpc>
+              <a:buNone/>
+            </a:pPr>
+            <a:r>
+              <a:rPr lang="ko-KR" altLang="en-US" sz="2000" dirty="0">
+                <a:solidFill>
+                  <a:srgbClr val="15543C"/>
+                </a:solidFill>
+                <a:latin typeface="Noto Serif KR Black" pitchFamily="34" charset="0"/>
+                <a:ea typeface="Noto Serif KR Black" pitchFamily="34" charset="-122"/>
+                <a:cs typeface="Noto Serif KR Black" pitchFamily="34" charset="-120"/>
+              </a:rPr>
+              <a:t>‘안다는 착각’을 넘어서는 연습이 필요합니다</a:t>
+            </a:r>
+            <a:endParaRPr lang="en-US" sz="2000" dirty="0"/>
           </a:p>
         </p:txBody>
       </p:sp>
       <p:sp>
         <p:nvSpPr>
-          <p:cNvPr id="76" name="txt-1-36"/>
+          <p:cNvPr id="29" name="txt-4-6"/>
           <p:cNvSpPr txBox="1"/>
           <p:nvPr/>
         </p:nvSpPr>
         <p:spPr>
           <a:xfrm>
-            <a:off x="5965952" y="9116314"/>
-            <a:ext cx="994918" cy="225425"/>
+            <a:off x="381000" y="4780026"/>
+            <a:ext cx="7140956" cy="759460"/>
           </a:xfrm>
           <a:prstGeom prst="rect">
             <a:avLst/>
@@ -3964,35 +8657,55 @@
           <a:p>
             <a:pPr algn="l" indent="0" marL="0">
               <a:lnSpc>
-                <a:spcPts val="1365"/>
-              </a:lnSpc>
-              <a:buNone/>
-            </a:pPr>
-            <a:r>
-              <a:rPr lang="ko-KR" altLang="en-US" sz="1050" dirty="0">
-                <a:solidFill>
-                  <a:srgbClr val="101D42"/>
-                </a:solidFill>
-                <a:latin typeface="Noto Sans KR" pitchFamily="34" charset="0"/>
-                <a:ea typeface="Noto Sans KR" pitchFamily="34" charset="-127"/>
-                <a:cs typeface="Noto Sans KR" pitchFamily="34" charset="-120"/>
-              </a:rPr>
-              <a:t>독후활동 제출</a:t>
-            </a:r>
-            <a:endParaRPr lang="en-US" sz="1050" dirty="0"/>
+                <a:spcPts val="2600"/>
+              </a:lnSpc>
+              <a:buNone/>
+            </a:pPr>
+            <a:r>
+              <a:rPr lang="ko-KR" altLang="en-US" sz="1800" dirty="0">
+                <a:solidFill>
+                  <a:srgbClr val="101D42"/>
+                </a:solidFill>
+                <a:latin typeface="Noto Sans KR" pitchFamily="34" charset="0"/>
+                <a:ea typeface="Noto Sans KR" pitchFamily="34" charset="-122"/>
+                <a:cs typeface="Noto Sans KR" pitchFamily="34" charset="-120"/>
+              </a:rPr>
+              <a:t>12점 만점의 이해 점수는 LLM 조건 4.00점, 필기 조건 4.89점이었습니다.</a:t>
+            </a:r>
+            <a:endParaRPr lang="en-US" sz="1800" dirty="0"/>
+          </a:p>
+          <a:p>
+            <a:pPr algn="l" indent="0" marL="0">
+              <a:lnSpc>
+                <a:spcPts val="2600"/>
+              </a:lnSpc>
+              <a:buNone/>
+            </a:pPr>
+            <a:r>
+              <a:rPr lang="ko-KR" altLang="en-US" sz="1800" dirty="0">
+                <a:solidFill>
+                  <a:srgbClr val="101D42"/>
+                </a:solidFill>
+                <a:latin typeface="Noto Sans KR" pitchFamily="34" charset="0"/>
+                <a:ea typeface="Noto Sans KR" pitchFamily="34" charset="-122"/>
+                <a:cs typeface="Noto Sans KR" pitchFamily="34" charset="-120"/>
+              </a:rPr>
+              <a:t>학생이 직접 읽고 정리하는 과정을 남기는 데 주목했습니다.</a:t>
+            </a:r>
+            <a:endParaRPr lang="en-US" sz="1800" dirty="0"/>
           </a:p>
         </p:txBody>
       </p:sp>
       <p:sp>
         <p:nvSpPr>
-          <p:cNvPr id="77" name="txt-1-37"/>
+          <p:cNvPr id="30" name="txt-4-7"/>
           <p:cNvSpPr txBox="1"/>
           <p:nvPr/>
         </p:nvSpPr>
         <p:spPr>
           <a:xfrm>
-            <a:off x="2012823" y="9514586"/>
-            <a:ext cx="3532124" cy="214630"/>
+            <a:off x="381000" y="5567426"/>
+            <a:ext cx="7140956" cy="759460"/>
           </a:xfrm>
           <a:prstGeom prst="rect">
             <a:avLst/>
@@ -4004,37 +8717,168 @@
           <a:bodyPr wrap="square" lIns="0" tIns="0" rIns="0" bIns="0" rtlCol="0" anchor="t"/>
           <a:lstStyle/>
           <a:p>
-            <a:pPr algn="ctr" indent="0" marL="0">
-              <a:lnSpc>
-                <a:spcPts val="1300"/>
-              </a:lnSpc>
-              <a:buNone/>
-            </a:pPr>
-            <a:r>
-              <a:rPr lang="ko-KR" altLang="en-US" sz="1000" dirty="0">
-                <a:solidFill>
-                  <a:srgbClr val="101D42"/>
-                </a:solidFill>
-                <a:latin typeface="Noto Sans KR" pitchFamily="34" charset="0"/>
-                <a:ea typeface="Noto Sans KR" pitchFamily="34" charset="-127"/>
-                <a:cs typeface="Noto Sans KR" pitchFamily="34" charset="-120"/>
-              </a:rPr>
-              <a:t>2026년 9월 20일부터 10월 21일까지 한 달 시범 사용 결과</a:t>
-            </a:r>
-            <a:endParaRPr lang="en-US" sz="1000" dirty="0"/>
+            <a:pPr algn="l" indent="0" marL="0">
+              <a:lnSpc>
+                <a:spcPts val="2600"/>
+              </a:lnSpc>
+              <a:buNone/>
+            </a:pPr>
+            <a:r>
+              <a:rPr lang="ko-KR" altLang="en-US" sz="1800" dirty="0">
+                <a:solidFill>
+                  <a:srgbClr val="101D42"/>
+                </a:solidFill>
+                <a:latin typeface="Noto Sans KR" pitchFamily="34" charset="0"/>
+                <a:ea typeface="Noto Sans KR" pitchFamily="34" charset="-122"/>
+                <a:cs typeface="Noto Sans KR" pitchFamily="34" charset="-120"/>
+              </a:rPr>
+              <a:t>학생이 </a:t>
+            </a:r>
+            <a:pPr algn="l" indent="0" marL="0">
+              <a:lnSpc>
+                <a:spcPts val="2600"/>
+              </a:lnSpc>
+              <a:buNone/>
+            </a:pPr>
+            <a:r>
+              <a:rPr lang="ko-KR" altLang="en-US" sz="1800" b="1" dirty="0">
+                <a:solidFill>
+                  <a:srgbClr val="101D42"/>
+                </a:solidFill>
+                <a:highlight>
+                  <a:srgbClr val="FFF0AD"/>
+                </a:highlight>
+                <a:latin typeface="Noto Sans KR" pitchFamily="34" charset="0"/>
+                <a:ea typeface="Noto Sans KR" pitchFamily="34" charset="-122"/>
+                <a:cs typeface="Noto Sans KR" pitchFamily="34" charset="-120"/>
+              </a:rPr>
+              <a:t>자기 말로 설명</a:t>
+            </a:r>
+            <a:pPr algn="l" indent="0" marL="0">
+              <a:lnSpc>
+                <a:spcPts val="2600"/>
+              </a:lnSpc>
+              <a:buNone/>
+            </a:pPr>
+            <a:r>
+              <a:rPr lang="ko-KR" altLang="en-US" sz="1800" dirty="0">
+                <a:solidFill>
+                  <a:srgbClr val="101D42"/>
+                </a:solidFill>
+                <a:latin typeface="Noto Sans KR" pitchFamily="34" charset="0"/>
+                <a:ea typeface="Noto Sans KR" pitchFamily="34" charset="-122"/>
+                <a:cs typeface="Noto Sans KR" pitchFamily="34" charset="-120"/>
+              </a:rPr>
+              <a:t>하고, </a:t>
+            </a:r>
+            <a:pPr algn="l" indent="0" marL="0">
+              <a:lnSpc>
+                <a:spcPts val="2600"/>
+              </a:lnSpc>
+              <a:buNone/>
+            </a:pPr>
+            <a:r>
+              <a:rPr lang="ko-KR" altLang="en-US" sz="1800" b="1" dirty="0">
+                <a:solidFill>
+                  <a:srgbClr val="101D42"/>
+                </a:solidFill>
+                <a:highlight>
+                  <a:srgbClr val="FFF0AD"/>
+                </a:highlight>
+                <a:latin typeface="Noto Sans KR" pitchFamily="34" charset="0"/>
+                <a:ea typeface="Noto Sans KR" pitchFamily="34" charset="-122"/>
+                <a:cs typeface="Noto Sans KR" pitchFamily="34" charset="-120"/>
+              </a:rPr>
+              <a:t>책에서 근거를 찾고</a:t>
+            </a:r>
+            <a:pPr algn="l" indent="0" marL="0">
+              <a:lnSpc>
+                <a:spcPts val="2600"/>
+              </a:lnSpc>
+              <a:buNone/>
+            </a:pPr>
+            <a:r>
+              <a:rPr lang="ko-KR" altLang="en-US" sz="1800" dirty="0">
+                <a:solidFill>
+                  <a:srgbClr val="101D42"/>
+                </a:solidFill>
+                <a:latin typeface="Noto Sans KR" pitchFamily="34" charset="0"/>
+                <a:ea typeface="Noto Sans KR" pitchFamily="34" charset="-122"/>
+                <a:cs typeface="Noto Sans KR" pitchFamily="34" charset="-120"/>
+              </a:rPr>
+              <a:t>, </a:t>
+            </a:r>
+            <a:pPr algn="l" indent="0" marL="0">
+              <a:lnSpc>
+                <a:spcPts val="2600"/>
+              </a:lnSpc>
+              <a:buNone/>
+            </a:pPr>
+            <a:r>
+              <a:rPr lang="ko-KR" altLang="en-US" sz="1800" b="1" dirty="0">
+                <a:solidFill>
+                  <a:srgbClr val="101D42"/>
+                </a:solidFill>
+                <a:highlight>
+                  <a:srgbClr val="FFF0AD"/>
+                </a:highlight>
+                <a:latin typeface="Noto Sans KR" pitchFamily="34" charset="0"/>
+                <a:ea typeface="Noto Sans KR" pitchFamily="34" charset="-122"/>
+                <a:cs typeface="Noto Sans KR" pitchFamily="34" charset="-120"/>
+              </a:rPr>
+              <a:t>다른 상황에 적용</a:t>
+            </a:r>
+            <a:pPr algn="l" indent="0" marL="0">
+              <a:lnSpc>
+                <a:spcPts val="2600"/>
+              </a:lnSpc>
+              <a:buNone/>
+            </a:pPr>
+            <a:r>
+              <a:rPr lang="ko-KR" altLang="en-US" sz="1800" dirty="0">
+                <a:solidFill>
+                  <a:srgbClr val="101D42"/>
+                </a:solidFill>
+                <a:latin typeface="Noto Sans KR" pitchFamily="34" charset="0"/>
+                <a:ea typeface="Noto Sans KR" pitchFamily="34" charset="-122"/>
+                <a:cs typeface="Noto Sans KR" pitchFamily="34" charset="-120"/>
+              </a:rPr>
+              <a:t>해 보는</a:t>
+            </a:r>
+            <a:endParaRPr lang="en-US" sz="1800" dirty="0"/>
+          </a:p>
+          <a:p>
+            <a:pPr algn="l" indent="0" marL="0">
+              <a:lnSpc>
+                <a:spcPts val="2600"/>
+              </a:lnSpc>
+              <a:buNone/>
+            </a:pPr>
+            <a:r>
+              <a:rPr lang="ko-KR" altLang="en-US" sz="1800" dirty="0">
+                <a:solidFill>
+                  <a:srgbClr val="101D42"/>
+                </a:solidFill>
+                <a:latin typeface="Noto Sans KR" pitchFamily="34" charset="0"/>
+                <a:ea typeface="Noto Sans KR" pitchFamily="34" charset="-122"/>
+                <a:cs typeface="Noto Sans KR" pitchFamily="34" charset="-120"/>
+              </a:rPr>
+              <a:t>활동이 필요합니다.</a:t>
+            </a:r>
+            <a:endParaRPr lang="en-US" sz="1800" dirty="0"/>
           </a:p>
         </p:txBody>
       </p:sp>
       <p:sp>
         <p:nvSpPr>
-          <p:cNvPr id="78" name="txt-1-38"/>
+          <p:cNvPr id="31" name="txt-4-8"/>
           <p:cNvSpPr txBox="1"/>
           <p:nvPr/>
         </p:nvSpPr>
         <p:spPr>
           <a:xfrm>
-            <a:off x="1502410" y="9843897"/>
-            <a:ext cx="4554855" cy="572516"/>
+            <a:off x="863346" y="7060057"/>
+            <a:ext cx="6186678" cy="407797"/>
           </a:xfrm>
           <a:prstGeom prst="rect">
             <a:avLst/>
@@ -4046,57 +8890,37 @@
           <a:bodyPr wrap="square" lIns="0" tIns="0" rIns="0" bIns="0" rtlCol="0" anchor="t"/>
           <a:lstStyle/>
           <a:p>
-            <a:pPr algn="ctr" indent="0" marL="0">
-              <a:lnSpc>
-                <a:spcPts val="1960"/>
-              </a:lnSpc>
-              <a:buNone/>
-            </a:pPr>
-            <a:r>
-              <a:rPr lang="ko-KR" altLang="en-US" sz="1400" dirty="0">
-                <a:solidFill>
-                  <a:srgbClr val="101D42"/>
+            <a:pPr algn="l" indent="0" marL="0">
+              <a:lnSpc>
+                <a:spcPts val="2470"/>
+              </a:lnSpc>
+              <a:buNone/>
+            </a:pPr>
+            <a:r>
+              <a:rPr lang="ko-KR" altLang="en-US" sz="1900" dirty="0">
+                <a:solidFill>
+                  <a:srgbClr val="15543C"/>
                 </a:solidFill>
                 <a:latin typeface="Noto Serif KR Black" pitchFamily="34" charset="0"/>
-                <a:ea typeface="Noto Serif KR Black" pitchFamily="34" charset="-127"/>
+                <a:ea typeface="Noto Serif KR Black" pitchFamily="34" charset="-122"/>
                 <a:cs typeface="Noto Serif KR Black" pitchFamily="34" charset="-120"/>
               </a:rPr>
-              <a:t>경남의 모든 학생이 읽고 생각하는 기본을 갖추도록,</a:t>
-            </a:r>
-            <a:endParaRPr lang="en-US" sz="1400" dirty="0"/>
-          </a:p>
-          <a:p>
-            <a:pPr algn="ctr" indent="0" marL="0">
-              <a:lnSpc>
-                <a:spcPts val="1960"/>
-              </a:lnSpc>
-              <a:buNone/>
-            </a:pPr>
-            <a:r>
-              <a:rPr lang="ko-KR" altLang="en-US" sz="1400" dirty="0">
-                <a:solidFill>
-                  <a:srgbClr val="15543C"/>
-                </a:solidFill>
-                <a:latin typeface="Noto Serif KR Black" pitchFamily="34" charset="0"/>
-                <a:ea typeface="Noto Serif KR Black" pitchFamily="34" charset="-127"/>
-                <a:cs typeface="Noto Serif KR Black" pitchFamily="34" charset="-120"/>
-              </a:rPr>
-              <a:t>학교 독서교육의 지속적인 운영을 지원해 주십시오.</a:t>
-            </a:r>
-            <a:endParaRPr lang="en-US" sz="1400" dirty="0"/>
+              <a:t>디지털 교육의 중심에도 학생의 사고가 있어야 합니다</a:t>
+            </a:r>
+            <a:endParaRPr lang="en-US" sz="1900" dirty="0"/>
           </a:p>
         </p:txBody>
       </p:sp>
       <p:sp>
         <p:nvSpPr>
-          <p:cNvPr id="79" name="txt-1-39"/>
+          <p:cNvPr id="32" name="txt-4-9"/>
           <p:cNvSpPr txBox="1"/>
           <p:nvPr/>
         </p:nvSpPr>
         <p:spPr>
           <a:xfrm>
-            <a:off x="304800" y="10510393"/>
-            <a:ext cx="2592451" cy="139446"/>
+            <a:off x="381000" y="7565136"/>
+            <a:ext cx="7140956" cy="1047750"/>
           </a:xfrm>
           <a:prstGeom prst="rect">
             <a:avLst/>
@@ -4110,22 +8934,2560 @@
           <a:p>
             <a:pPr algn="l" indent="0" marL="0">
               <a:lnSpc>
-                <a:spcPts val="845"/>
-              </a:lnSpc>
-              <a:buNone/>
-            </a:pPr>
-            <a:r>
-              <a:rPr lang="ko-KR" altLang="en-US" sz="650" dirty="0">
+                <a:spcPts val="2500"/>
+              </a:lnSpc>
+              <a:buNone/>
+            </a:pPr>
+            <a:r>
+              <a:rPr lang="ko-KR" altLang="en-US" sz="1750" dirty="0">
+                <a:solidFill>
+                  <a:srgbClr val="101D42"/>
+                </a:solidFill>
+                <a:latin typeface="Noto Sans KR" pitchFamily="34" charset="0"/>
+                <a:ea typeface="Noto Sans KR" pitchFamily="34" charset="-122"/>
+                <a:cs typeface="Noto Sans KR" pitchFamily="34" charset="-120"/>
+              </a:rPr>
+              <a:t>AI가 빠르게 답을 제시해도, 그 </a:t>
+            </a:r>
+            <a:pPr algn="l" indent="0" marL="0">
+              <a:lnSpc>
+                <a:spcPts val="2500"/>
+              </a:lnSpc>
+              <a:buNone/>
+            </a:pPr>
+            <a:r>
+              <a:rPr lang="ko-KR" altLang="en-US" sz="1750" b="1" dirty="0">
+                <a:solidFill>
+                  <a:srgbClr val="101D42"/>
+                </a:solidFill>
+                <a:highlight>
+                  <a:srgbClr val="FFF0AD"/>
+                </a:highlight>
+                <a:latin typeface="Noto Sans KR" pitchFamily="34" charset="0"/>
+                <a:ea typeface="Noto Sans KR" pitchFamily="34" charset="-122"/>
+                <a:cs typeface="Noto Sans KR" pitchFamily="34" charset="-120"/>
+              </a:rPr>
+              <a:t>뜻과 근거를 판단하는 힘</a:t>
+            </a:r>
+            <a:pPr algn="l" indent="0" marL="0">
+              <a:lnSpc>
+                <a:spcPts val="2500"/>
+              </a:lnSpc>
+              <a:buNone/>
+            </a:pPr>
+            <a:r>
+              <a:rPr lang="ko-KR" altLang="en-US" sz="1750" dirty="0">
+                <a:solidFill>
+                  <a:srgbClr val="101D42"/>
+                </a:solidFill>
+                <a:latin typeface="Noto Sans KR" pitchFamily="34" charset="0"/>
+                <a:ea typeface="Noto Sans KR" pitchFamily="34" charset="-122"/>
+                <a:cs typeface="Noto Sans KR" pitchFamily="34" charset="-120"/>
+              </a:rPr>
+              <a:t>은 학생 안에 있어야</a:t>
+            </a:r>
+            <a:endParaRPr lang="en-US" sz="1750" dirty="0"/>
+          </a:p>
+          <a:p>
+            <a:pPr algn="l" indent="0" marL="0">
+              <a:lnSpc>
+                <a:spcPts val="2500"/>
+              </a:lnSpc>
+              <a:buNone/>
+            </a:pPr>
+            <a:r>
+              <a:rPr lang="ko-KR" altLang="en-US" sz="1750" dirty="0">
+                <a:solidFill>
+                  <a:srgbClr val="101D42"/>
+                </a:solidFill>
+                <a:latin typeface="Noto Sans KR" pitchFamily="34" charset="0"/>
+                <a:ea typeface="Noto Sans KR" pitchFamily="34" charset="-122"/>
+                <a:cs typeface="Noto Sans KR" pitchFamily="34" charset="-120"/>
+              </a:rPr>
+              <a:t>합니다. 기술은 읽기와 표현을 돕고, 학생에게 </a:t>
+            </a:r>
+            <a:pPr algn="l" indent="0" marL="0">
+              <a:lnSpc>
+                <a:spcPts val="2500"/>
+              </a:lnSpc>
+              <a:buNone/>
+            </a:pPr>
+            <a:r>
+              <a:rPr lang="ko-KR" altLang="en-US" sz="1750" b="1" dirty="0">
+                <a:solidFill>
+                  <a:srgbClr val="101D42"/>
+                </a:solidFill>
+                <a:highlight>
+                  <a:srgbClr val="FFF0AD"/>
+                </a:highlight>
+                <a:latin typeface="Noto Sans KR" pitchFamily="34" charset="0"/>
+                <a:ea typeface="Noto Sans KR" pitchFamily="34" charset="-122"/>
+                <a:cs typeface="Noto Sans KR" pitchFamily="34" charset="-120"/>
+              </a:rPr>
+              <a:t>충분히 생각할 시간</a:t>
+            </a:r>
+            <a:pPr algn="l" indent="0" marL="0">
+              <a:lnSpc>
+                <a:spcPts val="2500"/>
+              </a:lnSpc>
+              <a:buNone/>
+            </a:pPr>
+            <a:r>
+              <a:rPr lang="ko-KR" altLang="en-US" sz="1750" dirty="0">
+                <a:solidFill>
+                  <a:srgbClr val="101D42"/>
+                </a:solidFill>
+                <a:latin typeface="Noto Sans KR" pitchFamily="34" charset="0"/>
+                <a:ea typeface="Noto Sans KR" pitchFamily="34" charset="-122"/>
+                <a:cs typeface="Noto Sans KR" pitchFamily="34" charset="-120"/>
+              </a:rPr>
+              <a:t>을 주는</a:t>
+            </a:r>
+            <a:endParaRPr lang="en-US" sz="1750" dirty="0"/>
+          </a:p>
+          <a:p>
+            <a:pPr algn="l" indent="0" marL="0">
+              <a:lnSpc>
+                <a:spcPts val="2500"/>
+              </a:lnSpc>
+              <a:buNone/>
+            </a:pPr>
+            <a:r>
+              <a:rPr lang="ko-KR" altLang="en-US" sz="1750" dirty="0">
+                <a:solidFill>
+                  <a:srgbClr val="101D42"/>
+                </a:solidFill>
+                <a:latin typeface="Noto Sans KR" pitchFamily="34" charset="0"/>
+                <a:ea typeface="Noto Sans KR" pitchFamily="34" charset="-122"/>
+                <a:cs typeface="Noto Sans KR" pitchFamily="34" charset="-120"/>
+              </a:rPr>
+              <a:t>방향으로 써야 합니다.</a:t>
+            </a:r>
+            <a:endParaRPr lang="en-US" sz="1750" dirty="0"/>
+          </a:p>
+        </p:txBody>
+      </p:sp>
+      <p:sp>
+        <p:nvSpPr>
+          <p:cNvPr id="33" name="txt-4-10"/>
+          <p:cNvSpPr txBox="1"/>
+          <p:nvPr/>
+        </p:nvSpPr>
+        <p:spPr>
+          <a:xfrm>
+            <a:off x="545973" y="8965946"/>
+            <a:ext cx="224155" cy="214630"/>
+          </a:xfrm>
+          <a:prstGeom prst="rect">
+            <a:avLst/>
+          </a:prstGeom>
+          <a:noFill/>
+          <a:ln/>
+        </p:spPr>
+        <p:txBody>
+          <a:bodyPr wrap="square" lIns="0" tIns="0" rIns="0" bIns="0" rtlCol="0" anchor="t"/>
+          <a:lstStyle/>
+          <a:p>
+            <a:pPr algn="l" indent="0" marL="0">
+              <a:lnSpc>
+                <a:spcPts val="1300"/>
+              </a:lnSpc>
+              <a:buNone/>
+            </a:pPr>
+            <a:r>
+              <a:rPr lang="ko-KR" altLang="en-US" sz="1000" b="1" dirty="0">
+                <a:solidFill>
+                  <a:srgbClr val="FFFFFF"/>
+                </a:solidFill>
+                <a:latin typeface="Noto Sans KR" pitchFamily="34" charset="0"/>
+                <a:ea typeface="Noto Sans KR" pitchFamily="34" charset="-122"/>
+                <a:cs typeface="Noto Sans KR" pitchFamily="34" charset="-120"/>
+              </a:rPr>
+              <a:t>?</a:t>
+            </a:r>
+            <a:endParaRPr lang="en-US" sz="1000" dirty="0"/>
+          </a:p>
+        </p:txBody>
+      </p:sp>
+      <p:sp>
+        <p:nvSpPr>
+          <p:cNvPr id="34" name="txt-4-11"/>
+          <p:cNvSpPr txBox="1"/>
+          <p:nvPr/>
+        </p:nvSpPr>
+        <p:spPr>
+          <a:xfrm>
+            <a:off x="812673" y="8910447"/>
+            <a:ext cx="2582672" cy="880110"/>
+          </a:xfrm>
+          <a:prstGeom prst="rect">
+            <a:avLst/>
+          </a:prstGeom>
+          <a:noFill/>
+          <a:ln/>
+        </p:spPr>
+        <p:txBody>
+          <a:bodyPr wrap="square" lIns="0" tIns="0" rIns="0" bIns="0" rtlCol="0" anchor="t"/>
+          <a:lstStyle/>
+          <a:p>
+            <a:pPr algn="l" indent="0" marL="0">
+              <a:lnSpc>
+                <a:spcPts val="2100"/>
+              </a:lnSpc>
+              <a:buNone/>
+            </a:pPr>
+            <a:r>
+              <a:rPr lang="ko-KR" altLang="en-US" sz="1300" b="1" dirty="0">
+                <a:solidFill>
+                  <a:srgbClr val="15543C"/>
+                </a:solidFill>
+                <a:latin typeface="Noto Sans KR" pitchFamily="34" charset="0"/>
+                <a:ea typeface="Noto Sans KR" pitchFamily="34" charset="-122"/>
+                <a:cs typeface="Noto Sans KR" pitchFamily="34" charset="-120"/>
+              </a:rPr>
+              <a:t>내 말로 설명할 수 있는가?</a:t>
+            </a:r>
+            <a:endParaRPr lang="en-US" sz="1300" dirty="0"/>
+          </a:p>
+          <a:p>
+            <a:pPr algn="l" indent="0" marL="0">
+              <a:lnSpc>
+                <a:spcPts val="2100"/>
+              </a:lnSpc>
+              <a:buNone/>
+            </a:pPr>
+            <a:r>
+              <a:rPr lang="ko-KR" altLang="en-US" sz="1300" b="1" dirty="0">
+                <a:solidFill>
+                  <a:srgbClr val="15543C"/>
+                </a:solidFill>
+                <a:latin typeface="Noto Sans KR" pitchFamily="34" charset="0"/>
+                <a:ea typeface="Noto Sans KR" pitchFamily="34" charset="-122"/>
+                <a:cs typeface="Noto Sans KR" pitchFamily="34" charset="-120"/>
+              </a:rPr>
+              <a:t>그렇게 생각한 근거는 무엇인가?</a:t>
+            </a:r>
+            <a:endParaRPr lang="en-US" sz="1300" dirty="0"/>
+          </a:p>
+          <a:p>
+            <a:pPr algn="l" indent="0" marL="0">
+              <a:lnSpc>
+                <a:spcPts val="2100"/>
+              </a:lnSpc>
+              <a:buNone/>
+            </a:pPr>
+            <a:r>
+              <a:rPr lang="ko-KR" altLang="en-US" sz="1300" b="1" dirty="0">
+                <a:solidFill>
+                  <a:srgbClr val="15543C"/>
+                </a:solidFill>
+                <a:latin typeface="Noto Sans KR" pitchFamily="34" charset="0"/>
+                <a:ea typeface="Noto Sans KR" pitchFamily="34" charset="-122"/>
+                <a:cs typeface="Noto Sans KR" pitchFamily="34" charset="-120"/>
+              </a:rPr>
+              <a:t>다른 상황에도 적용할 수 있는가?</a:t>
+            </a:r>
+            <a:endParaRPr lang="en-US" sz="1300" dirty="0"/>
+          </a:p>
+        </p:txBody>
+      </p:sp>
+      <p:sp>
+        <p:nvSpPr>
+          <p:cNvPr id="35" name="txt-4-12"/>
+          <p:cNvSpPr txBox="1"/>
+          <p:nvPr/>
+        </p:nvSpPr>
+        <p:spPr>
+          <a:xfrm>
+            <a:off x="545973" y="9232646"/>
+            <a:ext cx="224155" cy="214630"/>
+          </a:xfrm>
+          <a:prstGeom prst="rect">
+            <a:avLst/>
+          </a:prstGeom>
+          <a:noFill/>
+          <a:ln/>
+        </p:spPr>
+        <p:txBody>
+          <a:bodyPr wrap="square" lIns="0" tIns="0" rIns="0" bIns="0" rtlCol="0" anchor="t"/>
+          <a:lstStyle/>
+          <a:p>
+            <a:pPr algn="l" indent="0" marL="0">
+              <a:lnSpc>
+                <a:spcPts val="1300"/>
+              </a:lnSpc>
+              <a:buNone/>
+            </a:pPr>
+            <a:r>
+              <a:rPr lang="ko-KR" altLang="en-US" sz="1000" b="1" dirty="0">
+                <a:solidFill>
+                  <a:srgbClr val="FFFFFF"/>
+                </a:solidFill>
+                <a:latin typeface="Noto Sans KR" pitchFamily="34" charset="0"/>
+                <a:ea typeface="Noto Sans KR" pitchFamily="34" charset="-122"/>
+                <a:cs typeface="Noto Sans KR" pitchFamily="34" charset="-120"/>
+              </a:rPr>
+              <a:t>?</a:t>
+            </a:r>
+            <a:endParaRPr lang="en-US" sz="1000" dirty="0"/>
+          </a:p>
+        </p:txBody>
+      </p:sp>
+      <p:sp>
+        <p:nvSpPr>
+          <p:cNvPr id="36" name="txt-4-13"/>
+          <p:cNvSpPr txBox="1"/>
+          <p:nvPr/>
+        </p:nvSpPr>
+        <p:spPr>
+          <a:xfrm>
+            <a:off x="545973" y="9499346"/>
+            <a:ext cx="224155" cy="214630"/>
+          </a:xfrm>
+          <a:prstGeom prst="rect">
+            <a:avLst/>
+          </a:prstGeom>
+          <a:noFill/>
+          <a:ln/>
+        </p:spPr>
+        <p:txBody>
+          <a:bodyPr wrap="square" lIns="0" tIns="0" rIns="0" bIns="0" rtlCol="0" anchor="t"/>
+          <a:lstStyle/>
+          <a:p>
+            <a:pPr algn="l" indent="0" marL="0">
+              <a:lnSpc>
+                <a:spcPts val="1300"/>
+              </a:lnSpc>
+              <a:buNone/>
+            </a:pPr>
+            <a:r>
+              <a:rPr lang="ko-KR" altLang="en-US" sz="1000" b="1" dirty="0">
+                <a:solidFill>
+                  <a:srgbClr val="FFFFFF"/>
+                </a:solidFill>
+                <a:latin typeface="Noto Sans KR" pitchFamily="34" charset="0"/>
+                <a:ea typeface="Noto Sans KR" pitchFamily="34" charset="-122"/>
+                <a:cs typeface="Noto Sans KR" pitchFamily="34" charset="-120"/>
+              </a:rPr>
+              <a:t>?</a:t>
+            </a:r>
+            <a:endParaRPr lang="en-US" sz="1000" dirty="0"/>
+          </a:p>
+        </p:txBody>
+      </p:sp>
+      <p:sp>
+        <p:nvSpPr>
+          <p:cNvPr id="37" name="txt-4-14"/>
+          <p:cNvSpPr txBox="1"/>
+          <p:nvPr/>
+        </p:nvSpPr>
+        <p:spPr>
+          <a:xfrm>
+            <a:off x="381000" y="9901301"/>
+            <a:ext cx="6350000" cy="408940"/>
+          </a:xfrm>
+          <a:prstGeom prst="rect">
+            <a:avLst/>
+          </a:prstGeom>
+          <a:noFill/>
+          <a:ln/>
+        </p:spPr>
+        <p:txBody>
+          <a:bodyPr wrap="square" lIns="0" tIns="0" rIns="0" bIns="0" rtlCol="0" anchor="t"/>
+          <a:lstStyle/>
+          <a:p>
+            <a:pPr algn="l" indent="0" marL="0">
+              <a:lnSpc>
+                <a:spcPts val="1400"/>
+              </a:lnSpc>
+              <a:buNone/>
+            </a:pPr>
+            <a:r>
+              <a:rPr lang="ko-KR" altLang="en-US" sz="830" dirty="0">
                 <a:solidFill>
                   <a:srgbClr val="43516A"/>
                 </a:solidFill>
                 <a:latin typeface="Noto Sans KR" pitchFamily="34" charset="0"/>
-                <a:ea typeface="Noto Sans KR" pitchFamily="34" charset="-127"/>
-                <a:cs typeface="Noto Sans KR" pitchFamily="34" charset="-120"/>
-              </a:rPr>
-              <a:t>* 출처: Yarkoni et al. (2008). NeuroImage, 41(4), 1408-1425.</a:t>
-            </a:r>
-            <a:endParaRPr lang="en-US" sz="650" dirty="0"/>
+                <a:ea typeface="Noto Sans KR" pitchFamily="34" charset="-122"/>
+                <a:cs typeface="Noto Sans KR" pitchFamily="34" charset="-120"/>
+              </a:rPr>
+              <a:t>Kreijkes 외(2026), Computers &amp; Education 243, 105514.</a:t>
+            </a:r>
+            <a:endParaRPr lang="en-US" sz="830" dirty="0"/>
+          </a:p>
+          <a:p>
+            <a:pPr algn="l" indent="0" marL="0">
+              <a:lnSpc>
+                <a:spcPts val="1400"/>
+              </a:lnSpc>
+              <a:buNone/>
+            </a:pPr>
+            <a:r>
+              <a:rPr lang="ko-KR" altLang="en-US" sz="830" dirty="0">
+                <a:solidFill>
+                  <a:srgbClr val="43516A"/>
+                </a:solidFill>
+                <a:latin typeface="Noto Sans KR" pitchFamily="34" charset="0"/>
+                <a:ea typeface="Noto Sans KR" pitchFamily="34" charset="-122"/>
+                <a:cs typeface="Noto Sans KR" pitchFamily="34" charset="-120"/>
+              </a:rPr>
+              <a:t>14~15세 중등학생 연구이며, 초등학생이나 부기의 효과를 직접 검증한 결과는 아닙니다.</a:t>
+            </a:r>
+            <a:endParaRPr lang="en-US" sz="830" dirty="0"/>
+          </a:p>
+        </p:txBody>
+      </p:sp>
+      <p:sp>
+        <p:nvSpPr>
+          <p:cNvPr id="38" name="txt-4-15"/>
+          <p:cNvSpPr txBox="1"/>
+          <p:nvPr/>
+        </p:nvSpPr>
+        <p:spPr>
+          <a:xfrm>
+            <a:off x="3504565" y="10362692"/>
+            <a:ext cx="424815" cy="214630"/>
+          </a:xfrm>
+          <a:prstGeom prst="rect">
+            <a:avLst/>
+          </a:prstGeom>
+          <a:noFill/>
+          <a:ln/>
+        </p:spPr>
+        <p:txBody>
+          <a:bodyPr wrap="square" lIns="0" tIns="0" rIns="0" bIns="0" rtlCol="0" anchor="t"/>
+          <a:lstStyle/>
+          <a:p>
+            <a:pPr algn="l" indent="0" marL="0">
+              <a:lnSpc>
+                <a:spcPts val="1300"/>
+              </a:lnSpc>
+              <a:buNone/>
+            </a:pPr>
+            <a:r>
+              <a:rPr lang="ko-KR" altLang="en-US" sz="1000" dirty="0">
+                <a:solidFill>
+                  <a:srgbClr val="101D42"/>
+                </a:solidFill>
+                <a:latin typeface="Noto Sans KR" pitchFamily="34" charset="0"/>
+                <a:ea typeface="Noto Sans KR" pitchFamily="34" charset="-122"/>
+                <a:cs typeface="Noto Sans KR" pitchFamily="34" charset="-120"/>
+              </a:rPr>
+              <a:t>3 / 4</a:t>
+            </a:r>
+            <a:endParaRPr lang="en-US" sz="1000" dirty="0"/>
+          </a:p>
+        </p:txBody>
+      </p:sp>
+    </p:spTree>
+  </p:cSld>
+  <p:clrMapOvr>
+    <a:masterClrMapping/>
+  </p:clrMapOvr>
+</p:sld>
+</file>
+
+<file path=ppt/slides/slide5.xml><?xml version="1.0" encoding="utf-8"?>
+<p:sld xmlns:a="http://schemas.openxmlformats.org/drawingml/2006/main" xmlns:r="http://schemas.openxmlformats.org/officeDocument/2006/relationships" xmlns:p="http://schemas.openxmlformats.org/presentationml/2006/main">
+  <p:cSld name="Slide 5">
+    <p:bg>
+      <p:bgPr>
+        <a:solidFill>
+          <a:srgbClr val="FFFFFF"/>
+        </a:solidFill>
+      </p:bgPr>
+    </p:bg>
+    <p:spTree>
+      <p:nvGrpSpPr>
+        <p:cNvPr id="1" name=""/>
+        <p:cNvGrpSpPr/>
+        <p:nvPr/>
+      </p:nvGrpSpPr>
+      <p:grpSpPr>
+        <a:xfrm>
+          <a:off x="0" y="0"/>
+          <a:ext cx="0" cy="0"/>
+          <a:chOff x="0" y="0"/>
+          <a:chExt cx="0" cy="0"/>
+        </a:xfrm>
+      </p:grpSpPr>
+      <p:sp>
+        <p:nvSpPr>
+          <p:cNvPr id="2" name="Shape 0"/>
+          <p:cNvSpPr/>
+          <p:nvPr/>
+        </p:nvSpPr>
+        <p:spPr>
+          <a:xfrm>
+            <a:off x="3196082" y="495300"/>
+            <a:ext cx="3982974" cy="0"/>
+          </a:xfrm>
+          <a:prstGeom prst="line">
+            <a:avLst/>
+          </a:prstGeom>
+          <a:noFill/>
+          <a:ln w="7620">
+            <a:solidFill>
+              <a:srgbClr val="D59B32"/>
+            </a:solidFill>
+            <a:prstDash val="solid"/>
+          </a:ln>
+        </p:spPr>
+      </p:sp>
+      <p:sp>
+        <p:nvSpPr>
+          <p:cNvPr id="3" name="Shape 1"/>
+          <p:cNvSpPr/>
+          <p:nvPr/>
+        </p:nvSpPr>
+        <p:spPr>
+          <a:xfrm>
+            <a:off x="407416" y="2540000"/>
+            <a:ext cx="277876" cy="304292"/>
+          </a:xfrm>
+          <a:custGeom>
+            <a:avLst/>
+            <a:gdLst/>
+            <a:ahLst/>
+            <a:cxnLst/>
+            <a:rect l="l" t="t" r="r" b="b"/>
+            <a:pathLst>
+              <a:path w="277876" h="304292">
+                <a:moveTo>
+                  <a:pt x="132296" y="304267"/>
+                </a:moveTo>
+                <a:lnTo>
+                  <a:pt x="132296" y="145517"/>
+                </a:lnTo>
+                <a:cubicBezTo>
+                  <a:pt x="66142" y="171983"/>
+                  <a:pt x="0" y="145517"/>
+                  <a:pt x="0" y="39688"/>
+                </a:cubicBezTo>
+                <a:cubicBezTo>
+                  <a:pt x="105829" y="26454"/>
+                  <a:pt x="132296" y="79375"/>
+                  <a:pt x="132296" y="145517"/>
+                </a:cubicBezTo>
+                <a:cubicBezTo>
+                  <a:pt x="132296" y="39688"/>
+                  <a:pt x="211671" y="0"/>
+                  <a:pt x="277813" y="13233"/>
+                </a:cubicBezTo>
+                <a:cubicBezTo>
+                  <a:pt x="277813" y="105829"/>
+                  <a:pt x="211671" y="158750"/>
+                  <a:pt x="132296" y="145517"/>
+                </a:cubicBezTo>
+              </a:path>
+            </a:pathLst>
+          </a:custGeom>
+          <a:solidFill>
+            <a:srgbClr val="D59B32"/>
+          </a:solidFill>
+          <a:ln/>
+        </p:spPr>
+      </p:sp>
+      <p:sp>
+        <p:nvSpPr>
+          <p:cNvPr id="4" name="Shape 2"/>
+          <p:cNvSpPr/>
+          <p:nvPr/>
+        </p:nvSpPr>
+        <p:spPr>
+          <a:xfrm>
+            <a:off x="5052695" y="2717800"/>
+            <a:ext cx="2126361" cy="0"/>
+          </a:xfrm>
+          <a:prstGeom prst="line">
+            <a:avLst/>
+          </a:prstGeom>
+          <a:noFill/>
+          <a:ln w="7620">
+            <a:solidFill>
+              <a:srgbClr val="D59B32"/>
+            </a:solidFill>
+            <a:prstDash val="solid"/>
+          </a:ln>
+        </p:spPr>
+      </p:sp>
+      <p:sp>
+        <p:nvSpPr>
+          <p:cNvPr id="5" name="Shape 3"/>
+          <p:cNvSpPr/>
+          <p:nvPr/>
+        </p:nvSpPr>
+        <p:spPr>
+          <a:xfrm>
+            <a:off x="433959" y="4470908"/>
+            <a:ext cx="211709" cy="211709"/>
+          </a:xfrm>
+          <a:custGeom>
+            <a:avLst/>
+            <a:gdLst/>
+            <a:ahLst/>
+            <a:cxnLst/>
+            <a:rect l="l" t="t" r="r" b="b"/>
+            <a:pathLst>
+              <a:path w="211709" h="211709">
+                <a:moveTo>
+                  <a:pt x="211671" y="105829"/>
+                </a:moveTo>
+                <a:cubicBezTo>
+                  <a:pt x="211671" y="47384"/>
+                  <a:pt x="164287" y="0"/>
+                  <a:pt x="105829" y="0"/>
+                </a:cubicBezTo>
+                <a:cubicBezTo>
+                  <a:pt x="47384" y="0"/>
+                  <a:pt x="0" y="47384"/>
+                  <a:pt x="0" y="105829"/>
+                </a:cubicBezTo>
+                <a:cubicBezTo>
+                  <a:pt x="0" y="164287"/>
+                  <a:pt x="47384" y="211671"/>
+                  <a:pt x="105829" y="211671"/>
+                </a:cubicBezTo>
+                <a:cubicBezTo>
+                  <a:pt x="164287" y="211671"/>
+                  <a:pt x="211671" y="164287"/>
+                  <a:pt x="211671" y="105829"/>
+                </a:cubicBezTo>
+              </a:path>
+            </a:pathLst>
+          </a:custGeom>
+          <a:ln w="21209">
+            <a:solidFill>
+              <a:srgbClr val="D59B32"/>
+            </a:solidFill>
+            <a:prstDash val="solid"/>
+          </a:ln>
+        </p:spPr>
+      </p:sp>
+      <p:sp>
+        <p:nvSpPr>
+          <p:cNvPr id="6" name="Shape 4"/>
+          <p:cNvSpPr/>
+          <p:nvPr/>
+        </p:nvSpPr>
+        <p:spPr>
+          <a:xfrm>
+            <a:off x="486791" y="4669409"/>
+            <a:ext cx="0" cy="52832"/>
+          </a:xfrm>
+          <a:prstGeom prst="line">
+            <a:avLst/>
+          </a:prstGeom>
+          <a:noFill/>
+          <a:ln w="21209">
+            <a:solidFill>
+              <a:srgbClr val="D59B32"/>
+            </a:solidFill>
+            <a:prstDash val="solid"/>
+          </a:ln>
+        </p:spPr>
+      </p:sp>
+      <p:sp>
+        <p:nvSpPr>
+          <p:cNvPr id="7" name="Shape 5"/>
+          <p:cNvSpPr/>
+          <p:nvPr/>
+        </p:nvSpPr>
+        <p:spPr>
+          <a:xfrm>
+            <a:off x="592709" y="4669409"/>
+            <a:ext cx="0" cy="52832"/>
+          </a:xfrm>
+          <a:prstGeom prst="line">
+            <a:avLst/>
+          </a:prstGeom>
+          <a:noFill/>
+          <a:ln w="21209">
+            <a:solidFill>
+              <a:srgbClr val="D59B32"/>
+            </a:solidFill>
+            <a:prstDash val="solid"/>
+          </a:ln>
+        </p:spPr>
+      </p:sp>
+      <p:sp>
+        <p:nvSpPr>
+          <p:cNvPr id="8" name="Shape 6"/>
+          <p:cNvSpPr/>
+          <p:nvPr/>
+        </p:nvSpPr>
+        <p:spPr>
+          <a:xfrm>
+            <a:off x="486791" y="4722241"/>
+            <a:ext cx="105918" cy="0"/>
+          </a:xfrm>
+          <a:prstGeom prst="line">
+            <a:avLst/>
+          </a:prstGeom>
+          <a:noFill/>
+          <a:ln w="21209">
+            <a:solidFill>
+              <a:srgbClr val="D59B32"/>
+            </a:solidFill>
+            <a:prstDash val="solid"/>
+          </a:ln>
+        </p:spPr>
+      </p:sp>
+      <p:sp>
+        <p:nvSpPr>
+          <p:cNvPr id="9" name="Shape 7"/>
+          <p:cNvSpPr/>
+          <p:nvPr/>
+        </p:nvSpPr>
+        <p:spPr>
+          <a:xfrm>
+            <a:off x="500126" y="4761992"/>
+            <a:ext cx="79375" cy="0"/>
+          </a:xfrm>
+          <a:prstGeom prst="line">
+            <a:avLst/>
+          </a:prstGeom>
+          <a:noFill/>
+          <a:ln w="21209">
+            <a:solidFill>
+              <a:srgbClr val="D59B32"/>
+            </a:solidFill>
+            <a:prstDash val="solid"/>
+          </a:ln>
+        </p:spPr>
+      </p:sp>
+      <p:sp>
+        <p:nvSpPr>
+          <p:cNvPr id="10" name="Shape 8"/>
+          <p:cNvSpPr/>
+          <p:nvPr/>
+        </p:nvSpPr>
+        <p:spPr>
+          <a:xfrm>
+            <a:off x="539750" y="4576699"/>
+            <a:ext cx="0" cy="132334"/>
+          </a:xfrm>
+          <a:prstGeom prst="line">
+            <a:avLst/>
+          </a:prstGeom>
+          <a:noFill/>
+          <a:ln w="21209">
+            <a:solidFill>
+              <a:srgbClr val="D59B32"/>
+            </a:solidFill>
+            <a:prstDash val="solid"/>
+          </a:ln>
+        </p:spPr>
+      </p:sp>
+      <p:sp>
+        <p:nvSpPr>
+          <p:cNvPr id="11" name="Shape 9"/>
+          <p:cNvSpPr/>
+          <p:nvPr/>
+        </p:nvSpPr>
+        <p:spPr>
+          <a:xfrm>
+            <a:off x="500126" y="4537075"/>
+            <a:ext cx="39624" cy="39624"/>
+          </a:xfrm>
+          <a:prstGeom prst="line">
+            <a:avLst/>
+          </a:prstGeom>
+          <a:noFill/>
+          <a:ln w="21209">
+            <a:solidFill>
+              <a:srgbClr val="D59B32"/>
+            </a:solidFill>
+            <a:prstDash val="solid"/>
+          </a:ln>
+        </p:spPr>
+      </p:sp>
+      <p:sp>
+        <p:nvSpPr>
+          <p:cNvPr id="12" name="Shape 10"/>
+          <p:cNvSpPr/>
+          <p:nvPr/>
+        </p:nvSpPr>
+        <p:spPr>
+          <a:xfrm>
+            <a:off x="539750" y="4537075"/>
+            <a:ext cx="39751" cy="39624"/>
+          </a:xfrm>
+          <a:prstGeom prst="line">
+            <a:avLst/>
+          </a:prstGeom>
+          <a:noFill/>
+          <a:ln w="21209">
+            <a:solidFill>
+              <a:srgbClr val="D59B32"/>
+            </a:solidFill>
+            <a:prstDash val="solid"/>
+          </a:ln>
+        </p:spPr>
+      </p:sp>
+      <p:sp>
+        <p:nvSpPr>
+          <p:cNvPr id="13" name="Shape 11"/>
+          <p:cNvSpPr/>
+          <p:nvPr/>
+        </p:nvSpPr>
+        <p:spPr>
+          <a:xfrm>
+            <a:off x="5310378" y="4635500"/>
+            <a:ext cx="1868678" cy="0"/>
+          </a:xfrm>
+          <a:prstGeom prst="line">
+            <a:avLst/>
+          </a:prstGeom>
+          <a:noFill/>
+          <a:ln w="7620">
+            <a:solidFill>
+              <a:srgbClr val="D59B32"/>
+            </a:solidFill>
+            <a:prstDash val="solid"/>
+          </a:ln>
+        </p:spPr>
+      </p:sp>
+      <p:sp>
+        <p:nvSpPr>
+          <p:cNvPr id="14" name="Shape 12"/>
+          <p:cNvSpPr/>
+          <p:nvPr/>
+        </p:nvSpPr>
+        <p:spPr>
+          <a:xfrm>
+            <a:off x="317500" y="6235700"/>
+            <a:ext cx="6925056" cy="431800"/>
+          </a:xfrm>
+          <a:prstGeom prst="roundRect">
+            <a:avLst>
+              <a:gd name="adj" fmla="val 23529"/>
+            </a:avLst>
+          </a:prstGeom>
+          <a:solidFill>
+            <a:srgbClr val="F0F5EF"/>
+          </a:solidFill>
+          <a:ln/>
+        </p:spPr>
+      </p:sp>
+      <p:sp>
+        <p:nvSpPr>
+          <p:cNvPr id="15" name="Shape 13"/>
+          <p:cNvSpPr/>
+          <p:nvPr/>
+        </p:nvSpPr>
+        <p:spPr>
+          <a:xfrm>
+            <a:off x="456184" y="6323584"/>
+            <a:ext cx="256159" cy="244475"/>
+          </a:xfrm>
+          <a:custGeom>
+            <a:avLst/>
+            <a:gdLst/>
+            <a:ahLst/>
+            <a:cxnLst/>
+            <a:rect l="l" t="t" r="r" b="b"/>
+            <a:pathLst>
+              <a:path w="256159" h="244475">
+                <a:moveTo>
+                  <a:pt x="128054" y="244475"/>
+                </a:moveTo>
+                <a:lnTo>
+                  <a:pt x="128054" y="34925"/>
+                </a:lnTo>
+                <a:cubicBezTo>
+                  <a:pt x="81496" y="0"/>
+                  <a:pt x="34925" y="0"/>
+                  <a:pt x="0" y="23279"/>
+                </a:cubicBezTo>
+                <a:lnTo>
+                  <a:pt x="0" y="232829"/>
+                </a:lnTo>
+                <a:cubicBezTo>
+                  <a:pt x="34925" y="209550"/>
+                  <a:pt x="81496" y="209550"/>
+                  <a:pt x="128054" y="244475"/>
+                </a:cubicBezTo>
+                <a:cubicBezTo>
+                  <a:pt x="174625" y="209550"/>
+                  <a:pt x="221196" y="209550"/>
+                  <a:pt x="256121" y="232829"/>
+                </a:cubicBezTo>
+                <a:lnTo>
+                  <a:pt x="256121" y="23279"/>
+                </a:lnTo>
+                <a:cubicBezTo>
+                  <a:pt x="221196" y="0"/>
+                  <a:pt x="174625" y="0"/>
+                  <a:pt x="128054" y="34925"/>
+                </a:cubicBezTo>
+              </a:path>
+            </a:pathLst>
+          </a:custGeom>
+          <a:ln w="18669">
+            <a:solidFill>
+              <a:srgbClr val="D59B32"/>
+            </a:solidFill>
+            <a:prstDash val="solid"/>
+          </a:ln>
+        </p:spPr>
+      </p:sp>
+      <p:sp>
+        <p:nvSpPr>
+          <p:cNvPr id="16" name="Shape 14"/>
+          <p:cNvSpPr/>
+          <p:nvPr/>
+        </p:nvSpPr>
+        <p:spPr>
+          <a:xfrm>
+            <a:off x="2590800" y="6324600"/>
+            <a:ext cx="0" cy="254000"/>
+          </a:xfrm>
+          <a:prstGeom prst="line">
+            <a:avLst/>
+          </a:prstGeom>
+          <a:noFill/>
+          <a:ln w="7620">
+            <a:solidFill>
+              <a:srgbClr val="D59B32"/>
+            </a:solidFill>
+            <a:prstDash val="solid"/>
+          </a:ln>
+        </p:spPr>
+      </p:sp>
+      <p:sp>
+        <p:nvSpPr>
+          <p:cNvPr id="17" name="Shape 15"/>
+          <p:cNvSpPr/>
+          <p:nvPr/>
+        </p:nvSpPr>
+        <p:spPr>
+          <a:xfrm>
+            <a:off x="317500" y="6731000"/>
+            <a:ext cx="6925056" cy="431800"/>
+          </a:xfrm>
+          <a:prstGeom prst="roundRect">
+            <a:avLst>
+              <a:gd name="adj" fmla="val 23529"/>
+            </a:avLst>
+          </a:prstGeom>
+          <a:solidFill>
+            <a:srgbClr val="F0F5EF"/>
+          </a:solidFill>
+          <a:ln/>
+        </p:spPr>
+      </p:sp>
+      <p:sp>
+        <p:nvSpPr>
+          <p:cNvPr id="18" name="Shape 16"/>
+          <p:cNvSpPr/>
+          <p:nvPr/>
+        </p:nvSpPr>
+        <p:spPr>
+          <a:xfrm>
+            <a:off x="456184" y="6830441"/>
+            <a:ext cx="256159" cy="186309"/>
+          </a:xfrm>
+          <a:custGeom>
+            <a:avLst/>
+            <a:gdLst/>
+            <a:ahLst/>
+            <a:cxnLst/>
+            <a:rect l="l" t="t" r="r" b="b"/>
+            <a:pathLst>
+              <a:path w="256159" h="186309">
+                <a:moveTo>
+                  <a:pt x="58204" y="186271"/>
+                </a:moveTo>
+                <a:lnTo>
+                  <a:pt x="197904" y="186271"/>
+                </a:lnTo>
+                <a:cubicBezTo>
+                  <a:pt x="230086" y="186271"/>
+                  <a:pt x="256121" y="160236"/>
+                  <a:pt x="256121" y="128054"/>
+                </a:cubicBezTo>
+                <a:lnTo>
+                  <a:pt x="256121" y="58204"/>
+                </a:lnTo>
+                <a:cubicBezTo>
+                  <a:pt x="256121" y="26035"/>
+                  <a:pt x="230086" y="0"/>
+                  <a:pt x="197904" y="0"/>
+                </a:cubicBezTo>
+                <a:lnTo>
+                  <a:pt x="58204" y="0"/>
+                </a:lnTo>
+                <a:cubicBezTo>
+                  <a:pt x="26035" y="0"/>
+                  <a:pt x="0" y="26035"/>
+                  <a:pt x="0" y="58204"/>
+                </a:cubicBezTo>
+                <a:lnTo>
+                  <a:pt x="0" y="128054"/>
+                </a:lnTo>
+                <a:cubicBezTo>
+                  <a:pt x="0" y="160236"/>
+                  <a:pt x="26035" y="186271"/>
+                  <a:pt x="58204" y="186271"/>
+                </a:cubicBezTo>
+              </a:path>
+            </a:pathLst>
+          </a:custGeom>
+          <a:ln w="18669">
+            <a:solidFill>
+              <a:srgbClr val="D59B32"/>
+            </a:solidFill>
+            <a:prstDash val="solid"/>
+          </a:ln>
+        </p:spPr>
+      </p:sp>
+      <p:sp>
+        <p:nvSpPr>
+          <p:cNvPr id="19" name="Shape 17"/>
+          <p:cNvSpPr/>
+          <p:nvPr/>
+        </p:nvSpPr>
+        <p:spPr>
+          <a:xfrm>
+            <a:off x="491109" y="7016750"/>
+            <a:ext cx="23241" cy="58166"/>
+          </a:xfrm>
+          <a:prstGeom prst="line">
+            <a:avLst/>
+          </a:prstGeom>
+          <a:noFill/>
+          <a:ln w="18669">
+            <a:solidFill>
+              <a:srgbClr val="D59B32"/>
+            </a:solidFill>
+            <a:prstDash val="solid"/>
+          </a:ln>
+        </p:spPr>
+      </p:sp>
+      <p:sp>
+        <p:nvSpPr>
+          <p:cNvPr id="20" name="Shape 18"/>
+          <p:cNvSpPr/>
+          <p:nvPr/>
+        </p:nvSpPr>
+        <p:spPr>
+          <a:xfrm>
+            <a:off x="491109" y="7016750"/>
+            <a:ext cx="93091" cy="58166"/>
+          </a:xfrm>
+          <a:prstGeom prst="line">
+            <a:avLst/>
+          </a:prstGeom>
+          <a:noFill/>
+          <a:ln w="18669">
+            <a:solidFill>
+              <a:srgbClr val="D59B32"/>
+            </a:solidFill>
+            <a:prstDash val="solid"/>
+          </a:ln>
+        </p:spPr>
+      </p:sp>
+      <p:sp>
+        <p:nvSpPr>
+          <p:cNvPr id="21" name="Shape 19"/>
+          <p:cNvSpPr/>
+          <p:nvPr/>
+        </p:nvSpPr>
+        <p:spPr>
+          <a:xfrm>
+            <a:off x="516636" y="6914261"/>
+            <a:ext cx="18669" cy="18669"/>
+          </a:xfrm>
+          <a:custGeom>
+            <a:avLst/>
+            <a:gdLst/>
+            <a:ahLst/>
+            <a:cxnLst/>
+            <a:rect l="l" t="t" r="r" b="b"/>
+            <a:pathLst>
+              <a:path w="18669" h="18669">
+                <a:moveTo>
+                  <a:pt x="18631" y="9309"/>
+                </a:moveTo>
+                <a:cubicBezTo>
+                  <a:pt x="18631" y="4166"/>
+                  <a:pt x="14453" y="0"/>
+                  <a:pt x="9309" y="0"/>
+                </a:cubicBezTo>
+                <a:cubicBezTo>
+                  <a:pt x="4166" y="0"/>
+                  <a:pt x="0" y="4166"/>
+                  <a:pt x="0" y="9309"/>
+                </a:cubicBezTo>
+                <a:cubicBezTo>
+                  <a:pt x="0" y="14453"/>
+                  <a:pt x="4166" y="18631"/>
+                  <a:pt x="9309" y="18631"/>
+                </a:cubicBezTo>
+                <a:cubicBezTo>
+                  <a:pt x="14453" y="18631"/>
+                  <a:pt x="18631" y="14453"/>
+                  <a:pt x="18631" y="9309"/>
+                </a:cubicBezTo>
+              </a:path>
+            </a:pathLst>
+          </a:custGeom>
+          <a:solidFill>
+            <a:srgbClr val="D59B32"/>
+          </a:solidFill>
+          <a:ln/>
+        </p:spPr>
+      </p:sp>
+      <p:sp>
+        <p:nvSpPr>
+          <p:cNvPr id="22" name="Shape 20"/>
+          <p:cNvSpPr/>
+          <p:nvPr/>
+        </p:nvSpPr>
+        <p:spPr>
+          <a:xfrm>
+            <a:off x="574929" y="6914261"/>
+            <a:ext cx="18669" cy="18669"/>
+          </a:xfrm>
+          <a:custGeom>
+            <a:avLst/>
+            <a:gdLst/>
+            <a:ahLst/>
+            <a:cxnLst/>
+            <a:rect l="l" t="t" r="r" b="b"/>
+            <a:pathLst>
+              <a:path w="18669" h="18669">
+                <a:moveTo>
+                  <a:pt x="18631" y="9309"/>
+                </a:moveTo>
+                <a:cubicBezTo>
+                  <a:pt x="18631" y="4166"/>
+                  <a:pt x="14453" y="0"/>
+                  <a:pt x="9309" y="0"/>
+                </a:cubicBezTo>
+                <a:cubicBezTo>
+                  <a:pt x="4166" y="0"/>
+                  <a:pt x="0" y="4166"/>
+                  <a:pt x="0" y="9309"/>
+                </a:cubicBezTo>
+                <a:cubicBezTo>
+                  <a:pt x="0" y="14453"/>
+                  <a:pt x="4166" y="18631"/>
+                  <a:pt x="9309" y="18631"/>
+                </a:cubicBezTo>
+                <a:cubicBezTo>
+                  <a:pt x="14453" y="18631"/>
+                  <a:pt x="18631" y="14453"/>
+                  <a:pt x="18631" y="9309"/>
+                </a:cubicBezTo>
+              </a:path>
+            </a:pathLst>
+          </a:custGeom>
+          <a:solidFill>
+            <a:srgbClr val="D59B32"/>
+          </a:solidFill>
+          <a:ln/>
+        </p:spPr>
+      </p:sp>
+      <p:sp>
+        <p:nvSpPr>
+          <p:cNvPr id="23" name="Shape 21"/>
+          <p:cNvSpPr/>
+          <p:nvPr/>
+        </p:nvSpPr>
+        <p:spPr>
+          <a:xfrm>
+            <a:off x="633095" y="6914261"/>
+            <a:ext cx="18669" cy="18669"/>
+          </a:xfrm>
+          <a:custGeom>
+            <a:avLst/>
+            <a:gdLst/>
+            <a:ahLst/>
+            <a:cxnLst/>
+            <a:rect l="l" t="t" r="r" b="b"/>
+            <a:pathLst>
+              <a:path w="18669" h="18669">
+                <a:moveTo>
+                  <a:pt x="18631" y="9309"/>
+                </a:moveTo>
+                <a:cubicBezTo>
+                  <a:pt x="18631" y="4166"/>
+                  <a:pt x="14453" y="0"/>
+                  <a:pt x="9309" y="0"/>
+                </a:cubicBezTo>
+                <a:cubicBezTo>
+                  <a:pt x="4166" y="0"/>
+                  <a:pt x="0" y="4166"/>
+                  <a:pt x="0" y="9309"/>
+                </a:cubicBezTo>
+                <a:cubicBezTo>
+                  <a:pt x="0" y="14453"/>
+                  <a:pt x="4166" y="18631"/>
+                  <a:pt x="9309" y="18631"/>
+                </a:cubicBezTo>
+                <a:cubicBezTo>
+                  <a:pt x="14453" y="18631"/>
+                  <a:pt x="18631" y="14453"/>
+                  <a:pt x="18631" y="9309"/>
+                </a:cubicBezTo>
+              </a:path>
+            </a:pathLst>
+          </a:custGeom>
+          <a:solidFill>
+            <a:srgbClr val="D59B32"/>
+          </a:solidFill>
+          <a:ln/>
+        </p:spPr>
+      </p:sp>
+      <p:sp>
+        <p:nvSpPr>
+          <p:cNvPr id="24" name="Shape 22"/>
+          <p:cNvSpPr/>
+          <p:nvPr/>
+        </p:nvSpPr>
+        <p:spPr>
+          <a:xfrm>
+            <a:off x="2590800" y="6819900"/>
+            <a:ext cx="0" cy="254000"/>
+          </a:xfrm>
+          <a:prstGeom prst="line">
+            <a:avLst/>
+          </a:prstGeom>
+          <a:noFill/>
+          <a:ln w="7620">
+            <a:solidFill>
+              <a:srgbClr val="D59B32"/>
+            </a:solidFill>
+            <a:prstDash val="solid"/>
+          </a:ln>
+        </p:spPr>
+      </p:sp>
+      <p:sp>
+        <p:nvSpPr>
+          <p:cNvPr id="25" name="Shape 23"/>
+          <p:cNvSpPr/>
+          <p:nvPr/>
+        </p:nvSpPr>
+        <p:spPr>
+          <a:xfrm>
+            <a:off x="317500" y="7226300"/>
+            <a:ext cx="6925056" cy="431800"/>
+          </a:xfrm>
+          <a:prstGeom prst="roundRect">
+            <a:avLst>
+              <a:gd name="adj" fmla="val 23529"/>
+            </a:avLst>
+          </a:prstGeom>
+          <a:solidFill>
+            <a:srgbClr val="F0F5EF"/>
+          </a:solidFill>
+          <a:ln/>
+        </p:spPr>
+      </p:sp>
+      <p:sp>
+        <p:nvSpPr>
+          <p:cNvPr id="26" name="Shape 24"/>
+          <p:cNvSpPr/>
+          <p:nvPr/>
+        </p:nvSpPr>
+        <p:spPr>
+          <a:xfrm>
+            <a:off x="479425" y="7325741"/>
+            <a:ext cx="232791" cy="232791"/>
+          </a:xfrm>
+          <a:custGeom>
+            <a:avLst/>
+            <a:gdLst/>
+            <a:ahLst/>
+            <a:cxnLst/>
+            <a:rect l="l" t="t" r="r" b="b"/>
+            <a:pathLst>
+              <a:path w="232791" h="232791">
+                <a:moveTo>
+                  <a:pt x="0" y="232829"/>
+                </a:moveTo>
+                <a:lnTo>
+                  <a:pt x="23279" y="151346"/>
+                </a:lnTo>
+                <a:lnTo>
+                  <a:pt x="174625" y="0"/>
+                </a:lnTo>
+                <a:lnTo>
+                  <a:pt x="232829" y="58204"/>
+                </a:lnTo>
+                <a:lnTo>
+                  <a:pt x="81496" y="209550"/>
+                </a:lnTo>
+                <a:lnTo>
+                  <a:pt x="0" y="232829"/>
+                </a:lnTo>
+              </a:path>
+            </a:pathLst>
+          </a:custGeom>
+          <a:ln w="18669">
+            <a:solidFill>
+              <a:srgbClr val="D59B32"/>
+            </a:solidFill>
+            <a:prstDash val="solid"/>
+          </a:ln>
+        </p:spPr>
+      </p:sp>
+      <p:sp>
+        <p:nvSpPr>
+          <p:cNvPr id="27" name="Shape 25"/>
+          <p:cNvSpPr/>
+          <p:nvPr/>
+        </p:nvSpPr>
+        <p:spPr>
+          <a:xfrm>
+            <a:off x="502666" y="7477125"/>
+            <a:ext cx="58293" cy="58166"/>
+          </a:xfrm>
+          <a:prstGeom prst="line">
+            <a:avLst/>
+          </a:prstGeom>
+          <a:noFill/>
+          <a:ln w="18669">
+            <a:solidFill>
+              <a:srgbClr val="D59B32"/>
+            </a:solidFill>
+            <a:prstDash val="solid"/>
+          </a:ln>
+        </p:spPr>
+      </p:sp>
+      <p:sp>
+        <p:nvSpPr>
+          <p:cNvPr id="28" name="Shape 26"/>
+          <p:cNvSpPr/>
+          <p:nvPr/>
+        </p:nvSpPr>
+        <p:spPr>
+          <a:xfrm>
+            <a:off x="619125" y="7360666"/>
+            <a:ext cx="58166" cy="58293"/>
+          </a:xfrm>
+          <a:prstGeom prst="line">
+            <a:avLst/>
+          </a:prstGeom>
+          <a:noFill/>
+          <a:ln w="18669">
+            <a:solidFill>
+              <a:srgbClr val="D59B32"/>
+            </a:solidFill>
+            <a:prstDash val="solid"/>
+          </a:ln>
+        </p:spPr>
+      </p:sp>
+      <p:sp>
+        <p:nvSpPr>
+          <p:cNvPr id="29" name="Shape 27"/>
+          <p:cNvSpPr/>
+          <p:nvPr/>
+        </p:nvSpPr>
+        <p:spPr>
+          <a:xfrm>
+            <a:off x="2590800" y="7315200"/>
+            <a:ext cx="0" cy="254000"/>
+          </a:xfrm>
+          <a:prstGeom prst="line">
+            <a:avLst/>
+          </a:prstGeom>
+          <a:noFill/>
+          <a:ln w="7620">
+            <a:solidFill>
+              <a:srgbClr val="D59B32"/>
+            </a:solidFill>
+            <a:prstDash val="solid"/>
+          </a:ln>
+        </p:spPr>
+      </p:sp>
+      <p:sp>
+        <p:nvSpPr>
+          <p:cNvPr id="30" name="Shape 28"/>
+          <p:cNvSpPr/>
+          <p:nvPr/>
+        </p:nvSpPr>
+        <p:spPr>
+          <a:xfrm>
+            <a:off x="394208" y="7949692"/>
+            <a:ext cx="291084" cy="304292"/>
+          </a:xfrm>
+          <a:custGeom>
+            <a:avLst/>
+            <a:gdLst/>
+            <a:ahLst/>
+            <a:cxnLst/>
+            <a:rect l="l" t="t" r="r" b="b"/>
+            <a:pathLst>
+              <a:path w="291084" h="304292">
+                <a:moveTo>
+                  <a:pt x="145517" y="304267"/>
+                </a:moveTo>
+                <a:cubicBezTo>
+                  <a:pt x="105829" y="251358"/>
+                  <a:pt x="0" y="198438"/>
+                  <a:pt x="0" y="105829"/>
+                </a:cubicBezTo>
+                <a:cubicBezTo>
+                  <a:pt x="0" y="0"/>
+                  <a:pt x="119063" y="0"/>
+                  <a:pt x="145517" y="79375"/>
+                </a:cubicBezTo>
+                <a:cubicBezTo>
+                  <a:pt x="171983" y="0"/>
+                  <a:pt x="291046" y="0"/>
+                  <a:pt x="291046" y="105829"/>
+                </a:cubicBezTo>
+                <a:cubicBezTo>
+                  <a:pt x="291046" y="198438"/>
+                  <a:pt x="185204" y="251358"/>
+                  <a:pt x="145517" y="304267"/>
+                </a:cubicBezTo>
+              </a:path>
+            </a:pathLst>
+          </a:custGeom>
+          <a:solidFill>
+            <a:srgbClr val="D59B32"/>
+          </a:solidFill>
+          <a:ln/>
+        </p:spPr>
+      </p:sp>
+      <p:sp>
+        <p:nvSpPr>
+          <p:cNvPr id="31" name="Shape 29"/>
+          <p:cNvSpPr/>
+          <p:nvPr/>
+        </p:nvSpPr>
+        <p:spPr>
+          <a:xfrm>
+            <a:off x="5148961" y="8140700"/>
+            <a:ext cx="2030095" cy="0"/>
+          </a:xfrm>
+          <a:prstGeom prst="line">
+            <a:avLst/>
+          </a:prstGeom>
+          <a:noFill/>
+          <a:ln w="7620">
+            <a:solidFill>
+              <a:srgbClr val="D59B32"/>
+            </a:solidFill>
+            <a:prstDash val="solid"/>
+          </a:ln>
+        </p:spPr>
+      </p:sp>
+      <p:sp>
+        <p:nvSpPr>
+          <p:cNvPr id="32" name="Shape 30"/>
+          <p:cNvSpPr/>
+          <p:nvPr/>
+        </p:nvSpPr>
+        <p:spPr>
+          <a:xfrm>
+            <a:off x="317500" y="9842500"/>
+            <a:ext cx="6925056" cy="495300"/>
+          </a:xfrm>
+          <a:prstGeom prst="roundRect">
+            <a:avLst>
+              <a:gd name="adj" fmla="val 20513"/>
+            </a:avLst>
+          </a:prstGeom>
+          <a:solidFill>
+            <a:srgbClr val="F0F5EF"/>
+          </a:solidFill>
+          <a:ln/>
+        </p:spPr>
+      </p:sp>
+      <p:sp>
+        <p:nvSpPr>
+          <p:cNvPr id="33" name="Shape 31"/>
+          <p:cNvSpPr/>
+          <p:nvPr/>
+        </p:nvSpPr>
+        <p:spPr>
+          <a:xfrm>
+            <a:off x="381000" y="10414000"/>
+            <a:ext cx="2755900" cy="0"/>
+          </a:xfrm>
+          <a:prstGeom prst="line">
+            <a:avLst/>
+          </a:prstGeom>
+          <a:noFill/>
+          <a:ln w="7620">
+            <a:solidFill>
+              <a:srgbClr val="D59B32"/>
+            </a:solidFill>
+            <a:prstDash val="solid"/>
+          </a:ln>
+        </p:spPr>
+      </p:sp>
+      <p:sp>
+        <p:nvSpPr>
+          <p:cNvPr id="34" name="Shape 32"/>
+          <p:cNvSpPr/>
+          <p:nvPr/>
+        </p:nvSpPr>
+        <p:spPr>
+          <a:xfrm>
+            <a:off x="4394200" y="10414000"/>
+            <a:ext cx="2784856" cy="0"/>
+          </a:xfrm>
+          <a:prstGeom prst="line">
+            <a:avLst/>
+          </a:prstGeom>
+          <a:noFill/>
+          <a:ln w="7620">
+            <a:solidFill>
+              <a:srgbClr val="D59B32"/>
+            </a:solidFill>
+            <a:prstDash val="solid"/>
+          </a:ln>
+        </p:spPr>
+      </p:sp>
+      <p:pic>
+        <p:nvPicPr>
+          <p:cNvPr id="35" name="Image 0" descr="부기 책을 함께 읽는 두 아이">    </p:cNvPr>
+          <p:cNvPicPr>
+            <a:picLocks noChangeAspect="1"/>
+          </p:cNvPicPr>
+          <p:nvPr/>
+        </p:nvPicPr>
+        <p:blipFill>
+          <a:blip r:embed="rId1"/>
+          <a:stretch>
+            <a:fillRect/>
+          </a:stretch>
+        </p:blipFill>
+        <p:spPr>
+          <a:xfrm>
+            <a:off x="5334000" y="1003300"/>
+            <a:ext cx="1841500" cy="1264920"/>
+          </a:xfrm>
+          <a:prstGeom prst="rect">
+            <a:avLst/>
+          </a:prstGeom>
+        </p:spPr>
+      </p:pic>
+      <p:sp>
+        <p:nvSpPr>
+          <p:cNvPr id="36" name="txt-5-0"/>
+          <p:cNvSpPr txBox="1"/>
+          <p:nvPr/>
+        </p:nvSpPr>
+        <p:spPr>
+          <a:xfrm>
+            <a:off x="381000" y="296926"/>
+            <a:ext cx="3081401" cy="364871"/>
+          </a:xfrm>
+          <a:prstGeom prst="rect">
+            <a:avLst/>
+          </a:prstGeom>
+          <a:noFill/>
+          <a:ln/>
+        </p:spPr>
+        <p:txBody>
+          <a:bodyPr wrap="square" lIns="0" tIns="0" rIns="0" bIns="0" rtlCol="0" anchor="t"/>
+          <a:lstStyle/>
+          <a:p>
+            <a:pPr algn="l" indent="0" marL="0">
+              <a:lnSpc>
+                <a:spcPts val="2210"/>
+              </a:lnSpc>
+              <a:buNone/>
+            </a:pPr>
+            <a:r>
+              <a:rPr lang="ko-KR" altLang="en-US" sz="1700" dirty="0">
+                <a:solidFill>
+                  <a:srgbClr val="101D42"/>
+                </a:solidFill>
+                <a:latin typeface="Noto Serif KR Black" pitchFamily="34" charset="0"/>
+                <a:ea typeface="Noto Serif KR Black" pitchFamily="34" charset="-122"/>
+                <a:cs typeface="Noto Serif KR Black" pitchFamily="34" charset="-120"/>
+              </a:rPr>
+              <a:t>교실의 문제에서 출발한 부기</a:t>
+            </a:r>
+            <a:endParaRPr lang="en-US" sz="1700" dirty="0"/>
+          </a:p>
+        </p:txBody>
+      </p:sp>
+      <p:sp>
+        <p:nvSpPr>
+          <p:cNvPr id="37" name="txt-5-1"/>
+          <p:cNvSpPr txBox="1"/>
+          <p:nvPr/>
+        </p:nvSpPr>
+        <p:spPr>
+          <a:xfrm>
+            <a:off x="381000" y="730758"/>
+            <a:ext cx="4450334" cy="1518920"/>
+          </a:xfrm>
+          <a:prstGeom prst="rect">
+            <a:avLst/>
+          </a:prstGeom>
+          <a:noFill/>
+          <a:ln/>
+        </p:spPr>
+        <p:txBody>
+          <a:bodyPr wrap="square" lIns="0" tIns="0" rIns="0" bIns="0" rtlCol="0" anchor="t"/>
+          <a:lstStyle/>
+          <a:p>
+            <a:pPr algn="l" indent="0" marL="0">
+              <a:lnSpc>
+                <a:spcPts val="5200"/>
+              </a:lnSpc>
+              <a:buNone/>
+            </a:pPr>
+            <a:r>
+              <a:rPr lang="ko-KR" altLang="en-US" sz="3700" dirty="0">
+                <a:solidFill>
+                  <a:srgbClr val="101D42"/>
+                </a:solidFill>
+                <a:latin typeface="Noto Serif KR Black" pitchFamily="34" charset="0"/>
+                <a:ea typeface="Noto Serif KR Black" pitchFamily="34" charset="-122"/>
+                <a:cs typeface="Noto Serif KR Black" pitchFamily="34" charset="-120"/>
+              </a:rPr>
+              <a:t>지금 학교 현장에는</a:t>
+            </a:r>
+            <a:endParaRPr lang="en-US" sz="3700" dirty="0"/>
+          </a:p>
+          <a:p>
+            <a:pPr algn="l" indent="0" marL="0">
+              <a:lnSpc>
+                <a:spcPts val="5200"/>
+              </a:lnSpc>
+              <a:buNone/>
+            </a:pPr>
+            <a:r>
+              <a:rPr lang="ko-KR" altLang="en-US" sz="3700" dirty="0">
+                <a:solidFill>
+                  <a:srgbClr val="15543C"/>
+                </a:solidFill>
+                <a:latin typeface="Noto Serif KR Black" pitchFamily="34" charset="0"/>
+                <a:ea typeface="Noto Serif KR Black" pitchFamily="34" charset="-122"/>
+                <a:cs typeface="Noto Serif KR Black" pitchFamily="34" charset="-120"/>
+              </a:rPr>
+              <a:t>독서가 절실합니다.</a:t>
+            </a:r>
+            <a:endParaRPr lang="en-US" sz="3700" dirty="0"/>
+          </a:p>
+        </p:txBody>
+      </p:sp>
+      <p:sp>
+        <p:nvSpPr>
+          <p:cNvPr id="38" name="txt-5-2"/>
+          <p:cNvSpPr txBox="1"/>
+          <p:nvPr/>
+        </p:nvSpPr>
+        <p:spPr>
+          <a:xfrm>
+            <a:off x="863346" y="2504059"/>
+            <a:ext cx="4620768" cy="450723"/>
+          </a:xfrm>
+          <a:prstGeom prst="rect">
+            <a:avLst/>
+          </a:prstGeom>
+          <a:noFill/>
+          <a:ln/>
+        </p:spPr>
+        <p:txBody>
+          <a:bodyPr wrap="square" lIns="0" tIns="0" rIns="0" bIns="0" rtlCol="0" anchor="t"/>
+          <a:lstStyle/>
+          <a:p>
+            <a:pPr algn="l" indent="0" marL="0">
+              <a:lnSpc>
+                <a:spcPts val="2730"/>
+              </a:lnSpc>
+              <a:buNone/>
+            </a:pPr>
+            <a:r>
+              <a:rPr lang="ko-KR" altLang="en-US" sz="2100" dirty="0">
+                <a:solidFill>
+                  <a:srgbClr val="15543C"/>
+                </a:solidFill>
+                <a:latin typeface="Noto Serif KR Black" pitchFamily="34" charset="0"/>
+                <a:ea typeface="Noto Serif KR Black" pitchFamily="34" charset="-122"/>
+                <a:cs typeface="Noto Serif KR Black" pitchFamily="34" charset="-120"/>
+              </a:rPr>
+              <a:t>고전의 지혜에서 시작하고자 합니다</a:t>
+            </a:r>
+            <a:endParaRPr lang="en-US" sz="2100" dirty="0"/>
+          </a:p>
+        </p:txBody>
+      </p:sp>
+      <p:sp>
+        <p:nvSpPr>
+          <p:cNvPr id="39" name="txt-5-3"/>
+          <p:cNvSpPr txBox="1"/>
+          <p:nvPr/>
+        </p:nvSpPr>
+        <p:spPr>
+          <a:xfrm>
+            <a:off x="381000" y="2990342"/>
+            <a:ext cx="7140956" cy="1005840"/>
+          </a:xfrm>
+          <a:prstGeom prst="rect">
+            <a:avLst/>
+          </a:prstGeom>
+          <a:noFill/>
+          <a:ln/>
+        </p:spPr>
+        <p:txBody>
+          <a:bodyPr wrap="square" lIns="0" tIns="0" rIns="0" bIns="0" rtlCol="0" anchor="t"/>
+          <a:lstStyle/>
+          <a:p>
+            <a:pPr algn="l" indent="0" marL="0">
+              <a:lnSpc>
+                <a:spcPts val="2400"/>
+              </a:lnSpc>
+              <a:buNone/>
+            </a:pPr>
+            <a:r>
+              <a:rPr lang="ko-KR" altLang="en-US" sz="1650" dirty="0">
+                <a:solidFill>
+                  <a:srgbClr val="101D42"/>
+                </a:solidFill>
+                <a:latin typeface="Noto Sans KR" pitchFamily="34" charset="0"/>
+                <a:ea typeface="Noto Sans KR" pitchFamily="34" charset="-122"/>
+                <a:cs typeface="Noto Sans KR" pitchFamily="34" charset="-120"/>
+              </a:rPr>
+              <a:t>사람과 세상을 이해하고 </a:t>
+            </a:r>
+            <a:pPr algn="l" indent="0" marL="0">
+              <a:lnSpc>
+                <a:spcPts val="2400"/>
+              </a:lnSpc>
+              <a:buNone/>
+            </a:pPr>
+            <a:r>
+              <a:rPr lang="ko-KR" altLang="en-US" sz="1650" b="1" dirty="0">
+                <a:solidFill>
+                  <a:srgbClr val="101D42"/>
+                </a:solidFill>
+                <a:highlight>
+                  <a:srgbClr val="FFF0AD"/>
+                </a:highlight>
+                <a:latin typeface="Noto Sans KR" pitchFamily="34" charset="0"/>
+                <a:ea typeface="Noto Sans KR" pitchFamily="34" charset="-122"/>
+                <a:cs typeface="Noto Sans KR" pitchFamily="34" charset="-120"/>
+              </a:rPr>
+              <a:t>스스로 생각할 힘</a:t>
+            </a:r>
+            <a:pPr algn="l" indent="0" marL="0">
+              <a:lnSpc>
+                <a:spcPts val="2400"/>
+              </a:lnSpc>
+              <a:buNone/>
+            </a:pPr>
+            <a:r>
+              <a:rPr lang="ko-KR" altLang="en-US" sz="1650" dirty="0">
+                <a:solidFill>
+                  <a:srgbClr val="101D42"/>
+                </a:solidFill>
+                <a:latin typeface="Noto Sans KR" pitchFamily="34" charset="0"/>
+                <a:ea typeface="Noto Sans KR" pitchFamily="34" charset="-122"/>
+                <a:cs typeface="Noto Sans KR" pitchFamily="34" charset="-120"/>
+              </a:rPr>
+              <a:t>을 기르기 위해, </a:t>
+            </a:r>
+            <a:pPr algn="l" indent="0" marL="0">
+              <a:lnSpc>
+                <a:spcPts val="2400"/>
+              </a:lnSpc>
+              <a:buNone/>
+            </a:pPr>
+            <a:r>
+              <a:rPr lang="ko-KR" altLang="en-US" sz="1650" b="1" dirty="0">
+                <a:solidFill>
+                  <a:srgbClr val="101D42"/>
+                </a:solidFill>
+                <a:highlight>
+                  <a:srgbClr val="FFF0AD"/>
+                </a:highlight>
+                <a:latin typeface="Noto Sans KR" pitchFamily="34" charset="0"/>
+                <a:ea typeface="Noto Sans KR" pitchFamily="34" charset="-122"/>
+                <a:cs typeface="Noto Sans KR" pitchFamily="34" charset="-120"/>
+              </a:rPr>
+              <a:t>고전의 지혜</a:t>
+            </a:r>
+            <a:pPr algn="l" indent="0" marL="0">
+              <a:lnSpc>
+                <a:spcPts val="2400"/>
+              </a:lnSpc>
+              <a:buNone/>
+            </a:pPr>
+            <a:r>
+              <a:rPr lang="ko-KR" altLang="en-US" sz="1650" dirty="0">
+                <a:solidFill>
+                  <a:srgbClr val="101D42"/>
+                </a:solidFill>
+                <a:latin typeface="Noto Sans KR" pitchFamily="34" charset="0"/>
+                <a:ea typeface="Noto Sans KR" pitchFamily="34" charset="-122"/>
+                <a:cs typeface="Noto Sans KR" pitchFamily="34" charset="-120"/>
+              </a:rPr>
+              <a:t>를</a:t>
+            </a:r>
+            <a:endParaRPr lang="en-US" sz="1650" dirty="0"/>
+          </a:p>
+          <a:p>
+            <a:pPr algn="l" indent="0" marL="0">
+              <a:lnSpc>
+                <a:spcPts val="2400"/>
+              </a:lnSpc>
+              <a:buNone/>
+            </a:pPr>
+            <a:r>
+              <a:rPr lang="ko-KR" altLang="en-US" sz="1650" dirty="0">
+                <a:solidFill>
+                  <a:srgbClr val="101D42"/>
+                </a:solidFill>
+                <a:latin typeface="Noto Sans KR" pitchFamily="34" charset="0"/>
+                <a:ea typeface="Noto Sans KR" pitchFamily="34" charset="-122"/>
+                <a:cs typeface="Noto Sans KR" pitchFamily="34" charset="-120"/>
+              </a:rPr>
+              <a:t>빌리고자 했습니다. </a:t>
+            </a:r>
+            <a:pPr algn="l" indent="0" marL="0">
+              <a:lnSpc>
+                <a:spcPts val="2400"/>
+              </a:lnSpc>
+              <a:buNone/>
+            </a:pPr>
+            <a:r>
+              <a:rPr lang="ko-KR" altLang="en-US" sz="1650" b="1" dirty="0">
+                <a:solidFill>
+                  <a:srgbClr val="101D42"/>
+                </a:solidFill>
+                <a:highlight>
+                  <a:srgbClr val="FFF0AD"/>
+                </a:highlight>
+                <a:latin typeface="Noto Sans KR" pitchFamily="34" charset="0"/>
+                <a:ea typeface="Noto Sans KR" pitchFamily="34" charset="-122"/>
+                <a:cs typeface="Noto Sans KR" pitchFamily="34" charset="-120"/>
+              </a:rPr>
+              <a:t>우정과 책임</a:t>
+            </a:r>
+            <a:pPr algn="l" indent="0" marL="0">
+              <a:lnSpc>
+                <a:spcPts val="2400"/>
+              </a:lnSpc>
+              <a:buNone/>
+            </a:pPr>
+            <a:r>
+              <a:rPr lang="ko-KR" altLang="en-US" sz="1650" dirty="0">
+                <a:solidFill>
+                  <a:srgbClr val="101D42"/>
+                </a:solidFill>
+                <a:latin typeface="Noto Sans KR" pitchFamily="34" charset="0"/>
+                <a:ea typeface="Noto Sans KR" pitchFamily="34" charset="-122"/>
+                <a:cs typeface="Noto Sans KR" pitchFamily="34" charset="-120"/>
+              </a:rPr>
+              <a:t>, </a:t>
+            </a:r>
+            <a:pPr algn="l" indent="0" marL="0">
+              <a:lnSpc>
+                <a:spcPts val="2400"/>
+              </a:lnSpc>
+              <a:buNone/>
+            </a:pPr>
+            <a:r>
+              <a:rPr lang="ko-KR" altLang="en-US" sz="1650" b="1" dirty="0">
+                <a:solidFill>
+                  <a:srgbClr val="101D42"/>
+                </a:solidFill>
+                <a:highlight>
+                  <a:srgbClr val="FFF0AD"/>
+                </a:highlight>
+                <a:latin typeface="Noto Sans KR" pitchFamily="34" charset="0"/>
+                <a:ea typeface="Noto Sans KR" pitchFamily="34" charset="-122"/>
+                <a:cs typeface="Noto Sans KR" pitchFamily="34" charset="-120"/>
+              </a:rPr>
+              <a:t>공정과 나눔</a:t>
+            </a:r>
+            <a:pPr algn="l" indent="0" marL="0">
+              <a:lnSpc>
+                <a:spcPts val="2400"/>
+              </a:lnSpc>
+              <a:buNone/>
+            </a:pPr>
+            <a:r>
+              <a:rPr lang="ko-KR" altLang="en-US" sz="1650" dirty="0">
+                <a:solidFill>
+                  <a:srgbClr val="101D42"/>
+                </a:solidFill>
+                <a:latin typeface="Noto Sans KR" pitchFamily="34" charset="0"/>
+                <a:ea typeface="Noto Sans KR" pitchFamily="34" charset="-122"/>
+                <a:cs typeface="Noto Sans KR" pitchFamily="34" charset="-120"/>
+              </a:rPr>
+              <a:t>을 읽으며 ‘왜 그런 선택을 했을까’,</a:t>
+            </a:r>
+            <a:endParaRPr lang="en-US" sz="1650" dirty="0"/>
+          </a:p>
+          <a:p>
+            <a:pPr algn="l" indent="0" marL="0">
+              <a:lnSpc>
+                <a:spcPts val="2400"/>
+              </a:lnSpc>
+              <a:buNone/>
+            </a:pPr>
+            <a:r>
+              <a:rPr lang="ko-KR" altLang="en-US" sz="1650" dirty="0">
+                <a:solidFill>
+                  <a:srgbClr val="101D42"/>
+                </a:solidFill>
+                <a:latin typeface="Noto Sans KR" pitchFamily="34" charset="0"/>
+                <a:ea typeface="Noto Sans KR" pitchFamily="34" charset="-122"/>
+                <a:cs typeface="Noto Sans KR" pitchFamily="34" charset="-120"/>
+              </a:rPr>
+              <a:t>‘나라면 어떻게 했을까’를 함께 묻습니다.</a:t>
+            </a:r>
+            <a:endParaRPr lang="en-US" sz="1650" dirty="0"/>
+          </a:p>
+        </p:txBody>
+      </p:sp>
+      <p:sp>
+        <p:nvSpPr>
+          <p:cNvPr id="40" name="txt-5-4"/>
+          <p:cNvSpPr txBox="1"/>
+          <p:nvPr/>
+        </p:nvSpPr>
+        <p:spPr>
+          <a:xfrm>
+            <a:off x="863346" y="4421378"/>
+            <a:ext cx="4904105" cy="450723"/>
+          </a:xfrm>
+          <a:prstGeom prst="rect">
+            <a:avLst/>
+          </a:prstGeom>
+          <a:noFill/>
+          <a:ln/>
+        </p:spPr>
+        <p:txBody>
+          <a:bodyPr wrap="square" lIns="0" tIns="0" rIns="0" bIns="0" rtlCol="0" anchor="t"/>
+          <a:lstStyle/>
+          <a:p>
+            <a:pPr algn="l" indent="0" marL="0">
+              <a:lnSpc>
+                <a:spcPts val="2730"/>
+              </a:lnSpc>
+              <a:buNone/>
+            </a:pPr>
+            <a:r>
+              <a:rPr lang="ko-KR" altLang="en-US" sz="2100" dirty="0">
+                <a:solidFill>
+                  <a:srgbClr val="15543C"/>
+                </a:solidFill>
+                <a:latin typeface="Noto Serif KR Black" pitchFamily="34" charset="0"/>
+                <a:ea typeface="Noto Serif KR Black" pitchFamily="34" charset="-122"/>
+                <a:cs typeface="Noto Serif KR Black" pitchFamily="34" charset="-120"/>
+              </a:rPr>
+              <a:t>초등교사들이 뜻을 모아 만들었습니다</a:t>
+            </a:r>
+            <a:endParaRPr lang="en-US" sz="2100" dirty="0"/>
+          </a:p>
+        </p:txBody>
+      </p:sp>
+      <p:sp>
+        <p:nvSpPr>
+          <p:cNvPr id="41" name="txt-5-5"/>
+          <p:cNvSpPr txBox="1"/>
+          <p:nvPr/>
+        </p:nvSpPr>
+        <p:spPr>
+          <a:xfrm>
+            <a:off x="381000" y="4933188"/>
+            <a:ext cx="7140956" cy="1005840"/>
+          </a:xfrm>
+          <a:prstGeom prst="rect">
+            <a:avLst/>
+          </a:prstGeom>
+          <a:noFill/>
+          <a:ln/>
+        </p:spPr>
+        <p:txBody>
+          <a:bodyPr wrap="square" lIns="0" tIns="0" rIns="0" bIns="0" rtlCol="0" anchor="t"/>
+          <a:lstStyle/>
+          <a:p>
+            <a:pPr algn="l" indent="0" marL="0">
+              <a:lnSpc>
+                <a:spcPts val="2400"/>
+              </a:lnSpc>
+              <a:buNone/>
+            </a:pPr>
+            <a:r>
+              <a:rPr lang="ko-KR" altLang="en-US" sz="1650" dirty="0">
+                <a:solidFill>
+                  <a:srgbClr val="101D42"/>
+                </a:solidFill>
+                <a:latin typeface="Noto Sans KR" pitchFamily="34" charset="0"/>
+                <a:ea typeface="Noto Sans KR" pitchFamily="34" charset="-122"/>
+                <a:cs typeface="Noto Sans KR" pitchFamily="34" charset="-120"/>
+              </a:rPr>
+              <a:t>책을 제공해도 모르는 낱말에서 멈추면 읽기의 재미를 느끼기 어렵습니다.</a:t>
+            </a:r>
+            <a:endParaRPr lang="en-US" sz="1650" dirty="0"/>
+          </a:p>
+          <a:p>
+            <a:pPr algn="l" indent="0" marL="0">
+              <a:lnSpc>
+                <a:spcPts val="2400"/>
+              </a:lnSpc>
+              <a:buNone/>
+            </a:pPr>
+            <a:r>
+              <a:rPr lang="ko-KR" altLang="en-US" sz="1650" dirty="0">
+                <a:solidFill>
+                  <a:srgbClr val="101D42"/>
+                </a:solidFill>
+                <a:latin typeface="Noto Sans KR" pitchFamily="34" charset="0"/>
+                <a:ea typeface="Noto Sans KR" pitchFamily="34" charset="-122"/>
+                <a:cs typeface="Noto Sans KR" pitchFamily="34" charset="-120"/>
+              </a:rPr>
+              <a:t>읽던 자리의 뜻풀이와 교사의 질문을 연결해 이해를 돕고,</a:t>
+            </a:r>
+            <a:endParaRPr lang="en-US" sz="1650" dirty="0"/>
+          </a:p>
+          <a:p>
+            <a:pPr algn="l" indent="0" marL="0">
+              <a:lnSpc>
+                <a:spcPts val="2400"/>
+              </a:lnSpc>
+              <a:buNone/>
+            </a:pPr>
+            <a:r>
+              <a:rPr lang="ko-KR" altLang="en-US" sz="1650" dirty="0">
+                <a:solidFill>
+                  <a:srgbClr val="101D42"/>
+                </a:solidFill>
+                <a:latin typeface="Noto Sans KR" pitchFamily="34" charset="0"/>
+                <a:ea typeface="Noto Sans KR" pitchFamily="34" charset="-122"/>
+                <a:cs typeface="Noto Sans KR" pitchFamily="34" charset="-120"/>
+              </a:rPr>
+              <a:t>한 권을 읽은 경험이 다음 책으로 이어지도록 구성했습니다.</a:t>
+            </a:r>
+            <a:endParaRPr lang="en-US" sz="1650" dirty="0"/>
+          </a:p>
+        </p:txBody>
+      </p:sp>
+      <p:sp>
+        <p:nvSpPr>
+          <p:cNvPr id="42" name="txt-5-6"/>
+          <p:cNvSpPr txBox="1"/>
+          <p:nvPr/>
+        </p:nvSpPr>
+        <p:spPr>
+          <a:xfrm>
+            <a:off x="2742565" y="6342634"/>
+            <a:ext cx="3071114" cy="268224"/>
+          </a:xfrm>
+          <a:prstGeom prst="rect">
+            <a:avLst/>
+          </a:prstGeom>
+          <a:noFill/>
+          <a:ln/>
+        </p:spPr>
+        <p:txBody>
+          <a:bodyPr wrap="square" lIns="0" tIns="0" rIns="0" bIns="0" rtlCol="0" anchor="t"/>
+          <a:lstStyle/>
+          <a:p>
+            <a:pPr algn="l" indent="0" marL="0">
+              <a:lnSpc>
+                <a:spcPts val="1625"/>
+              </a:lnSpc>
+              <a:buNone/>
+            </a:pPr>
+            <a:r>
+              <a:rPr lang="ko-KR" altLang="en-US" sz="1250" dirty="0">
+                <a:solidFill>
+                  <a:srgbClr val="101D42"/>
+                </a:solidFill>
+                <a:latin typeface="Noto Sans KR" pitchFamily="34" charset="0"/>
+                <a:ea typeface="Noto Sans KR" pitchFamily="34" charset="-122"/>
+                <a:cs typeface="Noto Sans KR" pitchFamily="34" charset="-120"/>
+              </a:rPr>
+              <a:t>낱말 뜻 · 능동적 그림 읽기 · 다국어 지원</a:t>
+            </a:r>
+            <a:endParaRPr lang="en-US" sz="1250" dirty="0"/>
+          </a:p>
+        </p:txBody>
+      </p:sp>
+      <p:sp>
+        <p:nvSpPr>
+          <p:cNvPr id="43" name="txt-5-7"/>
+          <p:cNvSpPr txBox="1"/>
+          <p:nvPr/>
+        </p:nvSpPr>
+        <p:spPr>
+          <a:xfrm>
+            <a:off x="863346" y="6303010"/>
+            <a:ext cx="1071245" cy="343408"/>
+          </a:xfrm>
+          <a:prstGeom prst="rect">
+            <a:avLst/>
+          </a:prstGeom>
+          <a:noFill/>
+          <a:ln/>
+        </p:spPr>
+        <p:txBody>
+          <a:bodyPr wrap="square" lIns="0" tIns="0" rIns="0" bIns="0" rtlCol="0" anchor="t"/>
+          <a:lstStyle/>
+          <a:p>
+            <a:pPr algn="l" indent="0" marL="0">
+              <a:lnSpc>
+                <a:spcPts val="2080"/>
+              </a:lnSpc>
+              <a:buNone/>
+            </a:pPr>
+            <a:r>
+              <a:rPr lang="ko-KR" altLang="en-US" sz="1600" dirty="0">
+                <a:solidFill>
+                  <a:srgbClr val="15543C"/>
+                </a:solidFill>
+                <a:latin typeface="Noto Serif KR Black" pitchFamily="34" charset="0"/>
+                <a:ea typeface="Noto Serif KR Black" pitchFamily="34" charset="-122"/>
+                <a:cs typeface="Noto Serif KR Black" pitchFamily="34" charset="-120"/>
+              </a:rPr>
+              <a:t>읽기 지원</a:t>
+            </a:r>
+            <a:endParaRPr lang="en-US" sz="1600" dirty="0"/>
+          </a:p>
+        </p:txBody>
+      </p:sp>
+      <p:sp>
+        <p:nvSpPr>
+          <p:cNvPr id="44" name="txt-5-8"/>
+          <p:cNvSpPr txBox="1"/>
+          <p:nvPr/>
+        </p:nvSpPr>
+        <p:spPr>
+          <a:xfrm>
+            <a:off x="2742565" y="6837934"/>
+            <a:ext cx="2655951" cy="268224"/>
+          </a:xfrm>
+          <a:prstGeom prst="rect">
+            <a:avLst/>
+          </a:prstGeom>
+          <a:noFill/>
+          <a:ln/>
+        </p:spPr>
+        <p:txBody>
+          <a:bodyPr wrap="square" lIns="0" tIns="0" rIns="0" bIns="0" rtlCol="0" anchor="t"/>
+          <a:lstStyle/>
+          <a:p>
+            <a:pPr algn="l" indent="0" marL="0">
+              <a:lnSpc>
+                <a:spcPts val="1625"/>
+              </a:lnSpc>
+              <a:buNone/>
+            </a:pPr>
+            <a:r>
+              <a:rPr lang="ko-KR" altLang="en-US" sz="1250" dirty="0">
+                <a:solidFill>
+                  <a:srgbClr val="101D42"/>
+                </a:solidFill>
+                <a:latin typeface="Noto Sans KR" pitchFamily="34" charset="0"/>
+                <a:ea typeface="Noto Sans KR" pitchFamily="34" charset="-122"/>
+                <a:cs typeface="Noto Sans KR" pitchFamily="34" charset="-120"/>
+              </a:rPr>
+              <a:t>캐릭터와의 대화 · 다양한 독후활동</a:t>
+            </a:r>
+            <a:endParaRPr lang="en-US" sz="1250" dirty="0"/>
+          </a:p>
+        </p:txBody>
+      </p:sp>
+      <p:sp>
+        <p:nvSpPr>
+          <p:cNvPr id="45" name="txt-5-9"/>
+          <p:cNvSpPr txBox="1"/>
+          <p:nvPr/>
+        </p:nvSpPr>
+        <p:spPr>
+          <a:xfrm>
+            <a:off x="863346" y="6797929"/>
+            <a:ext cx="1287272" cy="343408"/>
+          </a:xfrm>
+          <a:prstGeom prst="rect">
+            <a:avLst/>
+          </a:prstGeom>
+          <a:noFill/>
+          <a:ln/>
+        </p:spPr>
+        <p:txBody>
+          <a:bodyPr wrap="square" lIns="0" tIns="0" rIns="0" bIns="0" rtlCol="0" anchor="t"/>
+          <a:lstStyle/>
+          <a:p>
+            <a:pPr algn="l" indent="0" marL="0">
+              <a:lnSpc>
+                <a:spcPts val="2080"/>
+              </a:lnSpc>
+              <a:buNone/>
+            </a:pPr>
+            <a:r>
+              <a:rPr lang="ko-KR" altLang="en-US" sz="1600" dirty="0">
+                <a:solidFill>
+                  <a:srgbClr val="15543C"/>
+                </a:solidFill>
+                <a:latin typeface="Noto Serif KR Black" pitchFamily="34" charset="0"/>
+                <a:ea typeface="Noto Serif KR Black" pitchFamily="34" charset="-122"/>
+                <a:cs typeface="Noto Serif KR Black" pitchFamily="34" charset="-120"/>
+              </a:rPr>
+              <a:t>생각과 표현</a:t>
+            </a:r>
+            <a:endParaRPr lang="en-US" sz="1600" dirty="0"/>
+          </a:p>
+        </p:txBody>
+      </p:sp>
+      <p:sp>
+        <p:nvSpPr>
+          <p:cNvPr id="46" name="txt-5-10"/>
+          <p:cNvSpPr txBox="1"/>
+          <p:nvPr/>
+        </p:nvSpPr>
+        <p:spPr>
+          <a:xfrm>
+            <a:off x="2742565" y="7333234"/>
+            <a:ext cx="2910459" cy="268224"/>
+          </a:xfrm>
+          <a:prstGeom prst="rect">
+            <a:avLst/>
+          </a:prstGeom>
+          <a:noFill/>
+          <a:ln/>
+        </p:spPr>
+        <p:txBody>
+          <a:bodyPr wrap="square" lIns="0" tIns="0" rIns="0" bIns="0" rtlCol="0" anchor="t"/>
+          <a:lstStyle/>
+          <a:p>
+            <a:pPr algn="l" indent="0" marL="0">
+              <a:lnSpc>
+                <a:spcPts val="1625"/>
+              </a:lnSpc>
+              <a:buNone/>
+            </a:pPr>
+            <a:r>
+              <a:rPr lang="ko-KR" altLang="en-US" sz="1250" dirty="0">
+                <a:solidFill>
+                  <a:srgbClr val="101D42"/>
+                </a:solidFill>
+                <a:latin typeface="Noto Sans KR" pitchFamily="34" charset="0"/>
+                <a:ea typeface="Noto Sans KR" pitchFamily="34" charset="-122"/>
+                <a:cs typeface="Noto Sans KR" pitchFamily="34" charset="-120"/>
+              </a:rPr>
+              <a:t>독서 기록 자산 · 수업 자료 · 학생 기록</a:t>
+            </a:r>
+            <a:endParaRPr lang="en-US" sz="1250" dirty="0"/>
+          </a:p>
+        </p:txBody>
+      </p:sp>
+      <p:sp>
+        <p:nvSpPr>
+          <p:cNvPr id="47" name="txt-5-11"/>
+          <p:cNvSpPr txBox="1"/>
+          <p:nvPr/>
+        </p:nvSpPr>
+        <p:spPr>
+          <a:xfrm>
+            <a:off x="863346" y="7293229"/>
+            <a:ext cx="1287272" cy="343408"/>
+          </a:xfrm>
+          <a:prstGeom prst="rect">
+            <a:avLst/>
+          </a:prstGeom>
+          <a:noFill/>
+          <a:ln/>
+        </p:spPr>
+        <p:txBody>
+          <a:bodyPr wrap="square" lIns="0" tIns="0" rIns="0" bIns="0" rtlCol="0" anchor="t"/>
+          <a:lstStyle/>
+          <a:p>
+            <a:pPr algn="l" indent="0" marL="0">
+              <a:lnSpc>
+                <a:spcPts val="2080"/>
+              </a:lnSpc>
+              <a:buNone/>
+            </a:pPr>
+            <a:r>
+              <a:rPr lang="ko-KR" altLang="en-US" sz="1600" dirty="0">
+                <a:solidFill>
+                  <a:srgbClr val="15543C"/>
+                </a:solidFill>
+                <a:latin typeface="Noto Serif KR Black" pitchFamily="34" charset="0"/>
+                <a:ea typeface="Noto Serif KR Black" pitchFamily="34" charset="-122"/>
+                <a:cs typeface="Noto Serif KR Black" pitchFamily="34" charset="-120"/>
+              </a:rPr>
+              <a:t>기록과 지도</a:t>
+            </a:r>
+            <a:endParaRPr lang="en-US" sz="1600" dirty="0"/>
+          </a:p>
+        </p:txBody>
+      </p:sp>
+      <p:sp>
+        <p:nvSpPr>
+          <p:cNvPr id="48" name="txt-5-12"/>
+          <p:cNvSpPr txBox="1"/>
+          <p:nvPr/>
+        </p:nvSpPr>
+        <p:spPr>
+          <a:xfrm>
+            <a:off x="863346" y="7920482"/>
+            <a:ext cx="4726559" cy="439928"/>
+          </a:xfrm>
+          <a:prstGeom prst="rect">
+            <a:avLst/>
+          </a:prstGeom>
+          <a:noFill/>
+          <a:ln/>
+        </p:spPr>
+        <p:txBody>
+          <a:bodyPr wrap="square" lIns="0" tIns="0" rIns="0" bIns="0" rtlCol="0" anchor="t"/>
+          <a:lstStyle/>
+          <a:p>
+            <a:pPr algn="l" indent="0" marL="0">
+              <a:lnSpc>
+                <a:spcPts val="2665"/>
+              </a:lnSpc>
+              <a:buNone/>
+            </a:pPr>
+            <a:r>
+              <a:rPr lang="ko-KR" altLang="en-US" sz="2050" dirty="0">
+                <a:solidFill>
+                  <a:srgbClr val="15543C"/>
+                </a:solidFill>
+                <a:latin typeface="Noto Serif KR Black" pitchFamily="34" charset="0"/>
+                <a:ea typeface="Noto Serif KR Black" pitchFamily="34" charset="-122"/>
+                <a:cs typeface="Noto Serif KR Black" pitchFamily="34" charset="-120"/>
+              </a:rPr>
+              <a:t>온라인과 오프라인에서 같은 수업을</a:t>
+            </a:r>
+            <a:endParaRPr lang="en-US" sz="2050" dirty="0"/>
+          </a:p>
+        </p:txBody>
+      </p:sp>
+      <p:sp>
+        <p:nvSpPr>
+          <p:cNvPr id="49" name="txt-5-13"/>
+          <p:cNvSpPr txBox="1"/>
+          <p:nvPr/>
+        </p:nvSpPr>
+        <p:spPr>
+          <a:xfrm>
+            <a:off x="381000" y="8435213"/>
+            <a:ext cx="7140956" cy="613410"/>
+          </a:xfrm>
+          <a:prstGeom prst="rect">
+            <a:avLst/>
+          </a:prstGeom>
+          <a:noFill/>
+          <a:ln/>
+        </p:spPr>
+        <p:txBody>
+          <a:bodyPr wrap="square" lIns="0" tIns="0" rIns="0" bIns="0" rtlCol="0" anchor="t"/>
+          <a:lstStyle/>
+          <a:p>
+            <a:pPr algn="l" indent="0" marL="0">
+              <a:lnSpc>
+                <a:spcPts val="2100"/>
+              </a:lnSpc>
+              <a:buNone/>
+            </a:pPr>
+            <a:r>
+              <a:rPr lang="ko-KR" altLang="en-US" sz="1500" dirty="0">
+                <a:solidFill>
+                  <a:srgbClr val="101D42"/>
+                </a:solidFill>
+                <a:latin typeface="Noto Sans KR" pitchFamily="34" charset="0"/>
+                <a:ea typeface="Noto Sans KR" pitchFamily="34" charset="-122"/>
+                <a:cs typeface="Noto Sans KR" pitchFamily="34" charset="-120"/>
+              </a:rPr>
+              <a:t>온라인에서는 화면에 답하고 포트폴리오에 기록합니다. 오프라인에서는 같은</a:t>
+            </a:r>
+            <a:endParaRPr lang="en-US" sz="1500" dirty="0"/>
+          </a:p>
+          <a:p>
+            <a:pPr algn="l" indent="0" marL="0">
+              <a:lnSpc>
+                <a:spcPts val="2100"/>
+              </a:lnSpc>
+              <a:buNone/>
+            </a:pPr>
+            <a:r>
+              <a:rPr lang="ko-KR" altLang="en-US" sz="1500" dirty="0">
+                <a:solidFill>
+                  <a:srgbClr val="101D42"/>
+                </a:solidFill>
+                <a:latin typeface="Noto Sans KR" pitchFamily="34" charset="0"/>
+                <a:ea typeface="Noto Sans KR" pitchFamily="34" charset="-122"/>
+                <a:cs typeface="Noto Sans KR" pitchFamily="34" charset="-120"/>
+              </a:rPr>
+              <a:t>활동지를 인쇄해 손글씨, 그림, 역할극으로 읽은 내용을 표현합니다.</a:t>
+            </a:r>
+            <a:endParaRPr lang="en-US" sz="1500" dirty="0"/>
+          </a:p>
+        </p:txBody>
+      </p:sp>
+      <p:sp>
+        <p:nvSpPr>
+          <p:cNvPr id="50" name="txt-5-14"/>
+          <p:cNvSpPr txBox="1"/>
+          <p:nvPr/>
+        </p:nvSpPr>
+        <p:spPr>
+          <a:xfrm>
+            <a:off x="381000" y="9057386"/>
+            <a:ext cx="7045706" cy="613410"/>
+          </a:xfrm>
+          <a:prstGeom prst="rect">
+            <a:avLst/>
+          </a:prstGeom>
+          <a:noFill/>
+          <a:ln/>
+        </p:spPr>
+        <p:txBody>
+          <a:bodyPr wrap="square" lIns="0" tIns="0" rIns="0" bIns="0" rtlCol="0" anchor="t"/>
+          <a:lstStyle/>
+          <a:p>
+            <a:pPr algn="l" indent="0" marL="0">
+              <a:lnSpc>
+                <a:spcPts val="2100"/>
+              </a:lnSpc>
+              <a:buNone/>
+            </a:pPr>
+            <a:r>
+              <a:rPr lang="ko-KR" altLang="en-US" sz="1500" dirty="0">
+                <a:solidFill>
+                  <a:srgbClr val="101D42"/>
+                </a:solidFill>
+                <a:latin typeface="Noto Sans KR" pitchFamily="34" charset="0"/>
+                <a:ea typeface="Noto Sans KR" pitchFamily="34" charset="-122"/>
+                <a:cs typeface="Noto Sans KR" pitchFamily="34" charset="-120"/>
+              </a:rPr>
+              <a:t>교사는 우리 반의 고민에 맞는 책과 질문을 고르고, 학생의 답을 보며</a:t>
+            </a:r>
+            <a:endParaRPr lang="en-US" sz="1500" dirty="0"/>
+          </a:p>
+          <a:p>
+            <a:pPr algn="l" indent="0" marL="0">
+              <a:lnSpc>
+                <a:spcPts val="2100"/>
+              </a:lnSpc>
+              <a:buNone/>
+            </a:pPr>
+            <a:r>
+              <a:rPr lang="ko-KR" altLang="en-US" sz="1500" dirty="0">
+                <a:solidFill>
+                  <a:srgbClr val="101D42"/>
+                </a:solidFill>
+                <a:latin typeface="Noto Sans KR" pitchFamily="34" charset="0"/>
+                <a:ea typeface="Noto Sans KR" pitchFamily="34" charset="-122"/>
+                <a:cs typeface="Noto Sans KR" pitchFamily="34" charset="-120"/>
+              </a:rPr>
+              <a:t>다음 질문과 피드백을 정합니다. 읽기와 학급 생활을 함께 잇는 수업입니다.</a:t>
+            </a:r>
+            <a:endParaRPr lang="en-US" sz="1500" dirty="0"/>
+          </a:p>
+        </p:txBody>
+      </p:sp>
+      <p:sp>
+        <p:nvSpPr>
+          <p:cNvPr id="51" name="txt-5-15"/>
+          <p:cNvSpPr txBox="1"/>
+          <p:nvPr/>
+        </p:nvSpPr>
+        <p:spPr>
+          <a:xfrm>
+            <a:off x="1251204" y="9831959"/>
+            <a:ext cx="5056886" cy="523494"/>
+          </a:xfrm>
+          <a:prstGeom prst="rect">
+            <a:avLst/>
+          </a:prstGeom>
+          <a:noFill/>
+          <a:ln/>
+        </p:spPr>
+        <p:txBody>
+          <a:bodyPr wrap="square" lIns="0" tIns="0" rIns="0" bIns="0" rtlCol="0" anchor="t"/>
+          <a:lstStyle/>
+          <a:p>
+            <a:pPr algn="ctr" indent="0" marL="0">
+              <a:lnSpc>
+                <a:spcPts val="1792"/>
+              </a:lnSpc>
+              <a:buNone/>
+            </a:pPr>
+            <a:r>
+              <a:rPr lang="ko-KR" altLang="en-US" sz="1280" dirty="0">
+                <a:solidFill>
+                  <a:srgbClr val="101D42"/>
+                </a:solidFill>
+                <a:latin typeface="Noto Serif KR Black" pitchFamily="34" charset="0"/>
+                <a:ea typeface="Noto Serif KR Black" pitchFamily="34" charset="-122"/>
+                <a:cs typeface="Noto Serif KR Black" pitchFamily="34" charset="-120"/>
+              </a:rPr>
+              <a:t>경남의 아이들이 스스로 이해하고 판단하는 사람으로 자라도록,</a:t>
+            </a:r>
+            <a:endParaRPr lang="en-US" sz="1280" dirty="0"/>
+          </a:p>
+          <a:p>
+            <a:pPr algn="ctr" indent="0" marL="0">
+              <a:lnSpc>
+                <a:spcPts val="1792"/>
+              </a:lnSpc>
+              <a:buNone/>
+            </a:pPr>
+            <a:r>
+              <a:rPr lang="ko-KR" altLang="en-US" sz="1280" dirty="0">
+                <a:solidFill>
+                  <a:srgbClr val="15543C"/>
+                </a:solidFill>
+                <a:latin typeface="Noto Serif KR Black" pitchFamily="34" charset="0"/>
+                <a:ea typeface="Noto Serif KR Black" pitchFamily="34" charset="-122"/>
+                <a:cs typeface="Noto Serif KR Black" pitchFamily="34" charset="-120"/>
+              </a:rPr>
+              <a:t>기본 독서교육을 함께 지켜 주십시오.</a:t>
+            </a:r>
+            <a:endParaRPr lang="en-US" sz="1280" dirty="0"/>
+          </a:p>
+        </p:txBody>
+      </p:sp>
+      <p:sp>
+        <p:nvSpPr>
+          <p:cNvPr id="52" name="txt-5-16"/>
+          <p:cNvSpPr txBox="1"/>
+          <p:nvPr/>
+        </p:nvSpPr>
+        <p:spPr>
+          <a:xfrm>
+            <a:off x="3504565" y="10362692"/>
+            <a:ext cx="424815" cy="214630"/>
+          </a:xfrm>
+          <a:prstGeom prst="rect">
+            <a:avLst/>
+          </a:prstGeom>
+          <a:noFill/>
+          <a:ln/>
+        </p:spPr>
+        <p:txBody>
+          <a:bodyPr wrap="square" lIns="0" tIns="0" rIns="0" bIns="0" rtlCol="0" anchor="t"/>
+          <a:lstStyle/>
+          <a:p>
+            <a:pPr algn="l" indent="0" marL="0">
+              <a:lnSpc>
+                <a:spcPts val="1300"/>
+              </a:lnSpc>
+              <a:buNone/>
+            </a:pPr>
+            <a:r>
+              <a:rPr lang="ko-KR" altLang="en-US" sz="1000" dirty="0">
+                <a:solidFill>
+                  <a:srgbClr val="101D42"/>
+                </a:solidFill>
+                <a:latin typeface="Noto Sans KR" pitchFamily="34" charset="0"/>
+                <a:ea typeface="Noto Sans KR" pitchFamily="34" charset="-122"/>
+                <a:cs typeface="Noto Sans KR" pitchFamily="34" charset="-120"/>
+              </a:rPr>
+              <a:t>4 / 4</a:t>
+            </a:r>
+            <a:endParaRPr lang="en-US" sz="1000" dirty="0"/>
           </a:p>
         </p:txBody>
       </p:sp>

--- a/promo/dl/brochure/bookie-summary-1p-edit.pptx
+++ b/promo/dl/brochure/bookie-summary-1p-edit.pptx
@@ -3971,7 +3971,7 @@
                 <a:ea typeface="Noto Sans KR" pitchFamily="34" charset="-122"/>
                 <a:cs typeface="Noto Sans KR" pitchFamily="34" charset="-120"/>
               </a:rPr>
-              <a:t>26,924건</a:t>
+              <a:t>26,924권</a:t>
             </a:r>
             <a:endParaRPr lang="en-US" sz="2400" dirty="0"/>
           </a:p>
@@ -4327,7 +4327,7 @@
                 <a:ea typeface="Noto Sans KR" pitchFamily="34" charset="-122"/>
                 <a:cs typeface="Noto Sans KR" pitchFamily="34" charset="-120"/>
               </a:rPr>
-              <a:t>* Kreijkes 외(2026), Computers &amp; Education 243, 105514. 중등학생 연구.</a:t>
+              <a:t>* Kreijkes 외(2026), Computers &amp; Education 243, 105514.</a:t>
             </a:r>
             <a:endParaRPr lang="en-US" sz="650" dirty="0"/>
           </a:p>
@@ -5050,7 +5050,7 @@
                 <a:ea typeface="Noto Sans KR" pitchFamily="34" charset="-122"/>
                 <a:cs typeface="Noto Sans KR" pitchFamily="34" charset="-120"/>
               </a:rPr>
-              <a:t>GPT가 요약과 답안을 대신 만드는 동안 학생은 무엇을 직접 읽고 생각할까요.</a:t>
+              <a:t>AI가 요약과 답안을 대신 만드는 동안 학생은 무엇을 직접 읽고 생각할까요.</a:t>
             </a:r>
             <a:endParaRPr lang="en-US" sz="1800" dirty="0"/>
           </a:p>
@@ -9331,7 +9331,7 @@
                 <a:ea typeface="Noto Sans KR" pitchFamily="34" charset="-122"/>
                 <a:cs typeface="Noto Sans KR" pitchFamily="34" charset="-120"/>
               </a:rPr>
-              <a:t>14~15세 중등학생 연구이며, 초등학생이나 부기의 효과를 직접 검증한 결과는 아닙니다.</a:t>
+              <a:t/>
             </a:r>
             <a:endParaRPr lang="en-US" sz="830" dirty="0"/>
           </a:p>

--- a/promo/dl/brochure/bookie-summary-1p-edit.pptx
+++ b/promo/dl/brochure/bookie-summary-1p-edit.pptx
@@ -3187,7 +3187,7 @@
                 <a:ea typeface="Noto Sans KR" pitchFamily="34" charset="-127"/>
                 <a:cs typeface="Noto Sans KR" pitchFamily="34" charset="-120"/>
               </a:rPr>
-              <a:t>학년별 50권, 낱말 뜻과 읽어주기</a:t>
+              <a:t>교실용으로 다시 만든 학년별 50권</a:t>
             </a:r>
             <a:endParaRPr lang="en-US" sz="920" dirty="0"/>
           </a:p>
@@ -3355,7 +3355,7 @@
                 <a:ea typeface="Noto Sans KR" pitchFamily="34" charset="-127"/>
                 <a:cs typeface="Noto Sans KR" pitchFamily="34" charset="-120"/>
               </a:rPr>
-              <a:t>활동 카드 9가지, 수업 활동 20가지</a:t>
+              <a:t>읽기 단계별 활동 카드 9가지</a:t>
             </a:r>
             <a:endParaRPr lang="en-US" sz="920" dirty="0"/>
           </a:p>
@@ -3523,7 +3523,7 @@
                 <a:ea typeface="Noto Sans KR" pitchFamily="34" charset="-127"/>
                 <a:cs typeface="Noto Sans KR" pitchFamily="34" charset="-120"/>
               </a:rPr>
-              <a:t>학급 고민에 맞는 책, 질문, 차시 자료</a:t>
+              <a:t>수업 만들기 두 길: 책 고르기, 고민 적기</a:t>
             </a:r>
             <a:endParaRPr lang="en-US" sz="920" dirty="0"/>
           </a:p>
